--- a/slides_pptx/2023.05.03_Slides.pptx
+++ b/slides_pptx/2023.05.03_Slides.pptx
@@ -2353,7 +2353,7 @@
           <a:spcPct val="0"/>
         </a:spcBef>
         <a:buNone/>
-        <a:defRPr sz="2600" b="0" i="0" kern="1200">
+        <a:defRPr sz="3000" b="0" i="0" kern="1200">
           <a:solidFill>
             <a:schemeClr val="tx1"/>
           </a:solidFill>
@@ -3018,7 +3018,7 @@
           <a:spcPct val="0"/>
         </a:spcBef>
         <a:buNone/>
-        <a:defRPr sz="2600" b="0" i="0" kern="1200">
+        <a:defRPr sz="3000" b="0" i="0" kern="1200">
           <a:solidFill>
             <a:schemeClr val="bg1"/>
           </a:solidFill>

--- a/slides_pptx/2023.05.03_Slides.pptx
+++ b/slides_pptx/2023.05.03_Slides.pptx
@@ -2036,7 +2036,7 @@
         </p:nvSpPr>
         <p:spPr>
           <a:xfrm>
-            <a:off x="156000" y="121380"/>
+            <a:off x="156000" y="129472"/>
             <a:ext cx="11880000" cy="396510"/>
           </a:xfrm>
           <a:prstGeom prst="rect">
@@ -2357,7 +2357,7 @@
           <a:solidFill>
             <a:schemeClr val="tx1"/>
           </a:solidFill>
-          <a:latin typeface="Helvetica Light" panose="020B0403020202020204" pitchFamily="34" charset="0"/>
+          <a:latin typeface="Helvetica" pitchFamily="2" charset="0"/>
           <a:ea typeface="+mj-ea"/>
           <a:cs typeface="Arial" panose="020B0604020202020204" pitchFamily="34" charset="0"/>
         </a:defRPr>
@@ -2701,7 +2701,7 @@
         </p:nvSpPr>
         <p:spPr>
           <a:xfrm>
-            <a:off x="156000" y="121380"/>
+            <a:off x="156000" y="129472"/>
             <a:ext cx="11880000" cy="396510"/>
           </a:xfrm>
           <a:prstGeom prst="rect">
@@ -3022,7 +3022,7 @@
           <a:solidFill>
             <a:schemeClr val="bg1"/>
           </a:solidFill>
-          <a:latin typeface="Helvetica Light" panose="020B0403020202020204" pitchFamily="34" charset="0"/>
+          <a:latin typeface="Helvetica" pitchFamily="2" charset="0"/>
           <a:ea typeface="+mj-ea"/>
           <a:cs typeface="Arial" panose="020B0604020202020204" pitchFamily="34" charset="0"/>
         </a:defRPr>
@@ -3329,7 +3329,7 @@
           <a:bodyPr/>
           <a:lstStyle/>
           <a:p>
-            <a:endParaRPr lang="en-DE"/>
+            <a:endParaRPr lang="en-DE" dirty="0"/>
           </a:p>
         </p:txBody>
       </p:sp>
@@ -3464,7 +3464,7 @@
           <a:bodyPr/>
           <a:lstStyle/>
           <a:p>
-            <a:endParaRPr lang="en-DE"/>
+            <a:endParaRPr lang="en-DE" dirty="0"/>
           </a:p>
         </p:txBody>
       </p:sp>
@@ -3489,7 +3489,7 @@
           <a:bodyPr/>
           <a:lstStyle/>
           <a:p>
-            <a:endParaRPr lang="en-DE"/>
+            <a:endParaRPr lang="en-DE" dirty="0"/>
           </a:p>
         </p:txBody>
       </p:sp>
@@ -3544,7 +3544,7 @@
           <a:bodyPr/>
           <a:lstStyle/>
           <a:p>
-            <a:endParaRPr lang="en-DE"/>
+            <a:endParaRPr lang="en-DE" dirty="0"/>
           </a:p>
         </p:txBody>
       </p:sp>
@@ -3569,7 +3569,7 @@
           <a:bodyPr/>
           <a:lstStyle/>
           <a:p>
-            <a:endParaRPr lang="en-DE"/>
+            <a:endParaRPr lang="en-DE" dirty="0"/>
           </a:p>
         </p:txBody>
       </p:sp>
@@ -3864,7 +3864,7 @@
           <a:bodyPr/>
           <a:lstStyle/>
           <a:p>
-            <a:endParaRPr lang="en-DE"/>
+            <a:endParaRPr lang="en-DE" dirty="0"/>
           </a:p>
         </p:txBody>
       </p:sp>
@@ -4044,7 +4044,7 @@
 <file path=ppt/theme/theme1.xml><?xml version="1.0" encoding="utf-8"?>
 <a:theme xmlns:a="http://schemas.openxmlformats.org/drawingml/2006/main" name="Slide template (Variant 1)">
   <a:themeElements>
-    <a:clrScheme name="Office">
+    <a:clrScheme name="Median">
       <a:dk1>
         <a:sysClr val="windowText" lastClr="000000"/>
       </a:dk1>
@@ -4052,34 +4052,34 @@
         <a:sysClr val="window" lastClr="FFFFFF"/>
       </a:lt1>
       <a:dk2>
-        <a:srgbClr val="44546A"/>
+        <a:srgbClr val="775F55"/>
       </a:dk2>
       <a:lt2>
-        <a:srgbClr val="E7E6E6"/>
+        <a:srgbClr val="EBDDC3"/>
       </a:lt2>
       <a:accent1>
-        <a:srgbClr val="4472C4"/>
+        <a:srgbClr val="94B6D2"/>
       </a:accent1>
       <a:accent2>
-        <a:srgbClr val="ED7D31"/>
+        <a:srgbClr val="DD8047"/>
       </a:accent2>
       <a:accent3>
-        <a:srgbClr val="A5A5A5"/>
+        <a:srgbClr val="A5AB81"/>
       </a:accent3>
       <a:accent4>
-        <a:srgbClr val="FFC000"/>
+        <a:srgbClr val="D8B25C"/>
       </a:accent4>
       <a:accent5>
-        <a:srgbClr val="5B9BD5"/>
+        <a:srgbClr val="7BA79D"/>
       </a:accent5>
       <a:accent6>
-        <a:srgbClr val="70AD47"/>
+        <a:srgbClr val="968C8C"/>
       </a:accent6>
       <a:hlink>
-        <a:srgbClr val="0563C1"/>
+        <a:srgbClr val="F7B615"/>
       </a:hlink>
       <a:folHlink>
-        <a:srgbClr val="954F72"/>
+        <a:srgbClr val="704404"/>
       </a:folHlink>
     </a:clrScheme>
     <a:fontScheme name="Office">

--- a/slides_pptx/2023.05.03_Slides.pptx
+++ b/slides_pptx/2023.05.03_Slides.pptx
@@ -6,23 +6,11 @@
     <p:sldMasterId id="2147483937" r:id="rId2"/>
   </p:sldMasterIdLst>
   <p:notesMasterIdLst>
-    <p:notesMasterId r:id="rId13"/>
+    <p:notesMasterId r:id="rId3"/>
   </p:notesMasterIdLst>
   <p:handoutMasterIdLst>
-    <p:handoutMasterId r:id="rId14"/>
+    <p:handoutMasterId r:id="rId4"/>
   </p:handoutMasterIdLst>
-  <p:sldIdLst>
-    <p:sldId id="256" r:id="rId3"/>
-    <p:sldId id="257" r:id="rId4"/>
-    <p:sldId id="258" r:id="rId5"/>
-    <p:sldId id="259" r:id="rId6"/>
-    <p:sldId id="260" r:id="rId7"/>
-    <p:sldId id="261" r:id="rId8"/>
-    <p:sldId id="262" r:id="rId9"/>
-    <p:sldId id="263" r:id="rId10"/>
-    <p:sldId id="264" r:id="rId11"/>
-    <p:sldId id="265" r:id="rId12"/>
-  </p:sldIdLst>
   <p:sldSz cx="12192000" cy="6858000"/>
   <p:notesSz cx="6858000" cy="9144000"/>
   <p:defaultTextStyle>
@@ -124,22 +112,10 @@
     <p:ext uri="{521415D9-36F7-43E2-AB2F-B90AF26B5E84}">
       <p14:sectionLst xmlns:p14="http://schemas.microsoft.com/office/powerpoint/2010/main">
         <p14:section name="Variant 1" id="{26E731A6-90F2-AA46-B9F0-278C949BD4FA}">
-          <p14:sldIdLst>
-            <p14:sldId id="256"/>
-            <p14:sldId id="257"/>
-            <p14:sldId id="258"/>
-            <p14:sldId id="259"/>
-            <p14:sldId id="260"/>
-          </p14:sldIdLst>
+          <p14:sldIdLst/>
         </p14:section>
         <p14:section name="Variant 2" id="{DD0467AF-370A-D345-9219-89A4FF521124}">
-          <p14:sldIdLst>
-            <p14:sldId id="261"/>
-            <p14:sldId id="262"/>
-            <p14:sldId id="263"/>
-            <p14:sldId id="264"/>
-            <p14:sldId id="265"/>
-          </p14:sldIdLst>
+          <p14:sldIdLst/>
         </p14:section>
       </p14:sectionLst>
     </p:ext>
@@ -247,7 +223,7 @@
               <a:rPr lang="en-US" smtClean="0">
                 <a:latin typeface="TUM Neue Helvetica 55 Regular" panose="020B0604020202020204" pitchFamily="34" charset="77"/>
               </a:rPr>
-              <a:t>5/3/23</a:t>
+              <a:t>5/4/23</a:t>
             </a:fld>
             <a:endParaRPr lang="en-US" dirty="0">
               <a:latin typeface="TUM Neue Helvetica 55 Regular" panose="020B0604020202020204" pitchFamily="34" charset="77"/>
@@ -425,7 +401,7 @@
             <a:fld id="{0DF9DF7B-F6DF-4040-BF00-4447D75AE71E}" type="datetimeFigureOut">
               <a:rPr lang="en-US" smtClean="0"/>
               <a:pPr/>
-              <a:t>5/3/23</a:t>
+              <a:t>5/4/23</a:t>
             </a:fld>
             <a:endParaRPr lang="en-US" dirty="0"/>
           </a:p>
@@ -698,6 +674,2731 @@
 </file>
 
 <file path=ppt/slideLayouts/slideLayout1.xml><?xml version="1.0" encoding="utf-8"?>
+<p:sldLayout xmlns:a="http://schemas.openxmlformats.org/drawingml/2006/main" xmlns:r="http://schemas.openxmlformats.org/officeDocument/2006/relationships" xmlns:p="http://schemas.openxmlformats.org/presentationml/2006/main" showMasterSp="0" matchingName="Dark Title (side)" preserve="1" userDrawn="1">
+  <p:cSld name="fewiknfewkfw">
+    <p:bg>
+      <p:bgPr>
+        <a:solidFill>
+          <a:srgbClr val="FFFFFF"/>
+        </a:solidFill>
+        <a:effectLst/>
+      </p:bgPr>
+    </p:bg>
+    <p:spTree>
+      <p:nvGrpSpPr>
+        <p:cNvPr id="1" name="Shape 21"/>
+        <p:cNvGrpSpPr/>
+        <p:nvPr/>
+      </p:nvGrpSpPr>
+      <p:grpSpPr>
+        <a:xfrm>
+          <a:off x="0" y="0"/>
+          <a:ext cx="0" cy="0"/>
+          <a:chOff x="0" y="0"/>
+          <a:chExt cx="0" cy="0"/>
+        </a:xfrm>
+      </p:grpSpPr>
+      <p:pic>
+        <p:nvPicPr>
+          <p:cNvPr id="9" name="Picture 8">
+            <a:extLst>
+              <a:ext uri="{FF2B5EF4-FFF2-40B4-BE49-F238E27FC236}">
+                <a16:creationId xmlns:a16="http://schemas.microsoft.com/office/drawing/2014/main" id="{36419E6D-792C-A294-2683-62B5DDD1906D}"/>
+              </a:ext>
+            </a:extLst>
+          </p:cNvPr>
+          <p:cNvPicPr>
+            <a:picLocks noChangeAspect="1"/>
+          </p:cNvPicPr>
+          <p:nvPr userDrawn="1"/>
+        </p:nvPicPr>
+        <p:blipFill>
+          <a:blip r:embed="rId2">
+            <a:extLst>
+              <a:ext uri="{28A0092B-C50C-407E-A947-70E740481C1C}">
+                <a14:useLocalDpi xmlns:a14="http://schemas.microsoft.com/office/drawing/2010/main" val="0"/>
+              </a:ext>
+            </a:extLst>
+          </a:blip>
+          <a:stretch>
+            <a:fillRect/>
+          </a:stretch>
+        </p:blipFill>
+        <p:spPr>
+          <a:xfrm>
+            <a:off x="0" y="0"/>
+            <a:ext cx="12192000" cy="6858000"/>
+          </a:xfrm>
+          <a:prstGeom prst="rect">
+            <a:avLst/>
+          </a:prstGeom>
+        </p:spPr>
+      </p:pic>
+      <p:cxnSp>
+        <p:nvCxnSpPr>
+          <p:cNvPr id="24" name="Google Shape;24;p4"/>
+          <p:cNvCxnSpPr>
+            <a:cxnSpLocks/>
+          </p:cNvCxnSpPr>
+          <p:nvPr/>
+        </p:nvCxnSpPr>
+        <p:spPr>
+          <a:xfrm>
+            <a:off x="3932481" y="1505165"/>
+            <a:ext cx="0" cy="3703899"/>
+          </a:xfrm>
+          <a:prstGeom prst="straightConnector1">
+            <a:avLst/>
+          </a:prstGeom>
+          <a:noFill/>
+          <a:ln w="38100" cap="flat" cmpd="sng">
+            <a:solidFill>
+              <a:schemeClr val="bg1"/>
+            </a:solidFill>
+            <a:prstDash val="solid"/>
+            <a:miter lim="800000"/>
+            <a:headEnd type="none" w="sm" len="sm"/>
+            <a:tailEnd type="none" w="sm" len="sm"/>
+          </a:ln>
+        </p:spPr>
+      </p:cxnSp>
+      <p:pic>
+        <p:nvPicPr>
+          <p:cNvPr id="13" name="Picture Placeholder 38">
+            <a:extLst>
+              <a:ext uri="{FF2B5EF4-FFF2-40B4-BE49-F238E27FC236}">
+                <a16:creationId xmlns:a16="http://schemas.microsoft.com/office/drawing/2014/main" id="{79C63365-FF4F-9CE1-4D8D-35CF8A436F98}"/>
+              </a:ext>
+            </a:extLst>
+          </p:cNvPr>
+          <p:cNvPicPr>
+            <a:picLocks noChangeAspect="1"/>
+          </p:cNvPicPr>
+          <p:nvPr userDrawn="1"/>
+        </p:nvPicPr>
+        <p:blipFill rotWithShape="1">
+          <a:blip r:embed="rId3" cstate="print">
+            <a:extLst>
+              <a:ext uri="{28A0092B-C50C-407E-A947-70E740481C1C}">
+                <a14:useLocalDpi xmlns:a14="http://schemas.microsoft.com/office/drawing/2010/main" val="0"/>
+              </a:ext>
+            </a:extLst>
+          </a:blip>
+          <a:srcRect l="21021" r="-224"/>
+          <a:stretch/>
+        </p:blipFill>
+        <p:spPr>
+          <a:xfrm>
+            <a:off x="287847" y="4311065"/>
+            <a:ext cx="3428575" cy="862663"/>
+          </a:xfrm>
+          <a:prstGeom prst="rect">
+            <a:avLst/>
+          </a:prstGeom>
+        </p:spPr>
+      </p:pic>
+      <p:sp>
+        <p:nvSpPr>
+          <p:cNvPr id="3" name="Subtitle 2">
+            <a:extLst>
+              <a:ext uri="{FF2B5EF4-FFF2-40B4-BE49-F238E27FC236}">
+                <a16:creationId xmlns:a16="http://schemas.microsoft.com/office/drawing/2014/main" id="{1F06C64B-0747-1E3C-2F6F-023166FCC9D7}"/>
+              </a:ext>
+            </a:extLst>
+          </p:cNvPr>
+          <p:cNvSpPr>
+            <a:spLocks noGrp="1"/>
+          </p:cNvSpPr>
+          <p:nvPr>
+            <p:ph type="subTitle" idx="1" hasCustomPrompt="1"/>
+          </p:nvPr>
+        </p:nvSpPr>
+        <p:spPr>
+          <a:xfrm>
+            <a:off x="4003842" y="2772613"/>
+            <a:ext cx="8031731" cy="1374157"/>
+          </a:xfrm>
+        </p:spPr>
+        <p:txBody>
+          <a:bodyPr/>
+          <a:lstStyle>
+            <a:lvl1pPr marL="0" indent="0" algn="l">
+              <a:buNone/>
+              <a:defRPr sz="2400">
+                <a:solidFill>
+                  <a:srgbClr val="0E2D38"/>
+                </a:solidFill>
+              </a:defRPr>
+            </a:lvl1pPr>
+            <a:lvl2pPr marL="457200" indent="0" algn="ctr">
+              <a:buNone/>
+              <a:defRPr sz="2000"/>
+            </a:lvl2pPr>
+            <a:lvl3pPr marL="914400" indent="0" algn="ctr">
+              <a:buNone/>
+              <a:defRPr sz="1800"/>
+            </a:lvl3pPr>
+            <a:lvl4pPr marL="1371600" indent="0" algn="ctr">
+              <a:buNone/>
+              <a:defRPr sz="1600"/>
+            </a:lvl4pPr>
+            <a:lvl5pPr marL="1828800" indent="0" algn="ctr">
+              <a:buNone/>
+              <a:defRPr sz="1600"/>
+            </a:lvl5pPr>
+            <a:lvl6pPr marL="2286000" indent="0" algn="ctr">
+              <a:buNone/>
+              <a:defRPr sz="1600"/>
+            </a:lvl6pPr>
+            <a:lvl7pPr marL="2743200" indent="0" algn="ctr">
+              <a:buNone/>
+              <a:defRPr sz="1600"/>
+            </a:lvl7pPr>
+            <a:lvl8pPr marL="3200400" indent="0" algn="ctr">
+              <a:buNone/>
+              <a:defRPr sz="1600"/>
+            </a:lvl8pPr>
+            <a:lvl9pPr marL="3657600" indent="0" algn="ctr">
+              <a:buNone/>
+              <a:defRPr sz="1600"/>
+            </a:lvl9pPr>
+          </a:lstStyle>
+          <a:p>
+            <a:r>
+              <a:rPr lang="en-GB" dirty="0"/>
+              <a:t>[Full name, including title and/or post-name letters] [Full author list, if required] [Institution(s)]</a:t>
+            </a:r>
+          </a:p>
+          <a:p>
+            <a:endParaRPr lang="en-GB" dirty="0"/>
+          </a:p>
+        </p:txBody>
+      </p:sp>
+      <p:sp>
+        <p:nvSpPr>
+          <p:cNvPr id="5" name="Title 11">
+            <a:extLst>
+              <a:ext uri="{FF2B5EF4-FFF2-40B4-BE49-F238E27FC236}">
+                <a16:creationId xmlns:a16="http://schemas.microsoft.com/office/drawing/2014/main" id="{C1C11967-B9EF-8DFC-1D07-D3C98B4BC9A6}"/>
+              </a:ext>
+            </a:extLst>
+          </p:cNvPr>
+          <p:cNvSpPr>
+            <a:spLocks noGrp="1"/>
+          </p:cNvSpPr>
+          <p:nvPr>
+            <p:ph type="title"/>
+          </p:nvPr>
+        </p:nvSpPr>
+        <p:spPr>
+          <a:xfrm>
+            <a:off x="4004268" y="1519073"/>
+            <a:ext cx="8031731" cy="1108624"/>
+          </a:xfrm>
+        </p:spPr>
+        <p:txBody>
+          <a:bodyPr anchor="b">
+            <a:normAutofit/>
+          </a:bodyPr>
+          <a:lstStyle>
+            <a:lvl1pPr>
+              <a:defRPr sz="3600">
+                <a:solidFill>
+                  <a:srgbClr val="FFFFFF"/>
+                </a:solidFill>
+              </a:defRPr>
+            </a:lvl1pPr>
+          </a:lstStyle>
+          <a:p>
+            <a:r>
+              <a:rPr lang="en-GB" dirty="0"/>
+              <a:t>Click to edit Master title style</a:t>
+            </a:r>
+            <a:endParaRPr lang="en-DE" dirty="0"/>
+          </a:p>
+        </p:txBody>
+      </p:sp>
+      <p:sp>
+        <p:nvSpPr>
+          <p:cNvPr id="7" name="Content Placeholder 3">
+            <a:extLst>
+              <a:ext uri="{FF2B5EF4-FFF2-40B4-BE49-F238E27FC236}">
+                <a16:creationId xmlns:a16="http://schemas.microsoft.com/office/drawing/2014/main" id="{87A97C8E-5DDF-1A84-41CE-EAEE753B7FF2}"/>
+              </a:ext>
+            </a:extLst>
+          </p:cNvPr>
+          <p:cNvSpPr>
+            <a:spLocks noGrp="1"/>
+          </p:cNvSpPr>
+          <p:nvPr>
+            <p:ph sz="quarter" idx="10" hasCustomPrompt="1"/>
+          </p:nvPr>
+        </p:nvSpPr>
+        <p:spPr>
+          <a:xfrm>
+            <a:off x="4003843" y="4455981"/>
+            <a:ext cx="8031730" cy="753083"/>
+          </a:xfrm>
+        </p:spPr>
+        <p:txBody>
+          <a:bodyPr>
+            <a:normAutofit/>
+          </a:bodyPr>
+          <a:lstStyle>
+            <a:lvl1pPr marL="0" indent="0">
+              <a:buNone/>
+              <a:defRPr sz="1800">
+                <a:solidFill>
+                  <a:schemeClr val="tx1">
+                    <a:lumMod val="65000"/>
+                    <a:lumOff val="35000"/>
+                  </a:schemeClr>
+                </a:solidFill>
+              </a:defRPr>
+            </a:lvl1pPr>
+          </a:lstStyle>
+          <a:p>
+            <a:pPr lvl="0"/>
+            <a:r>
+              <a:rPr lang="en-DE" dirty="0"/>
+              <a:t>[Event date], [Event name]</a:t>
+            </a:r>
+          </a:p>
+        </p:txBody>
+      </p:sp>
+      <p:pic>
+        <p:nvPicPr>
+          <p:cNvPr id="11" name="Picture 10">
+            <a:extLst>
+              <a:ext uri="{FF2B5EF4-FFF2-40B4-BE49-F238E27FC236}">
+                <a16:creationId xmlns:a16="http://schemas.microsoft.com/office/drawing/2014/main" id="{283C8477-FEFA-99DC-C8C9-EC963E0CA7B6}"/>
+              </a:ext>
+            </a:extLst>
+          </p:cNvPr>
+          <p:cNvPicPr>
+            <a:picLocks noChangeAspect="1"/>
+          </p:cNvPicPr>
+          <p:nvPr userDrawn="1"/>
+        </p:nvPicPr>
+        <p:blipFill>
+          <a:blip r:embed="rId4">
+            <a:extLst>
+              <a:ext uri="{28A0092B-C50C-407E-A947-70E740481C1C}">
+                <a14:useLocalDpi xmlns:a14="http://schemas.microsoft.com/office/drawing/2010/main" val="0"/>
+              </a:ext>
+            </a:extLst>
+          </a:blip>
+          <a:stretch>
+            <a:fillRect/>
+          </a:stretch>
+        </p:blipFill>
+        <p:spPr>
+          <a:xfrm>
+            <a:off x="1135087" y="2240674"/>
+            <a:ext cx="1734093" cy="1734093"/>
+          </a:xfrm>
+          <a:prstGeom prst="rect">
+            <a:avLst/>
+          </a:prstGeom>
+        </p:spPr>
+      </p:pic>
+    </p:spTree>
+    <p:extLst>
+      <p:ext uri="{BB962C8B-B14F-4D97-AF65-F5344CB8AC3E}">
+        <p14:creationId xmlns:p14="http://schemas.microsoft.com/office/powerpoint/2010/main" val="920521592"/>
+      </p:ext>
+    </p:extLst>
+  </p:cSld>
+  <p:clrMapOvr>
+    <a:masterClrMapping/>
+  </p:clrMapOvr>
+</p:sldLayout>
+</file>
+
+<file path=ppt/slideLayouts/slideLayout10.xml><?xml version="1.0" encoding="utf-8"?>
+<p:sldLayout xmlns:a="http://schemas.openxmlformats.org/drawingml/2006/main" xmlns:r="http://schemas.openxmlformats.org/officeDocument/2006/relationships" xmlns:p="http://schemas.openxmlformats.org/presentationml/2006/main" showMasterSp="0" matchingName="Dark References" preserve="1" userDrawn="1">
+  <p:cSld name="1_Dark References">
+    <p:spTree>
+      <p:nvGrpSpPr>
+        <p:cNvPr id="1" name="Shape 54"/>
+        <p:cNvGrpSpPr/>
+        <p:nvPr/>
+      </p:nvGrpSpPr>
+      <p:grpSpPr>
+        <a:xfrm>
+          <a:off x="0" y="0"/>
+          <a:ext cx="0" cy="0"/>
+          <a:chOff x="0" y="0"/>
+          <a:chExt cx="0" cy="0"/>
+        </a:xfrm>
+      </p:grpSpPr>
+      <p:pic>
+        <p:nvPicPr>
+          <p:cNvPr id="10" name="Picture 9">
+            <a:extLst>
+              <a:ext uri="{FF2B5EF4-FFF2-40B4-BE49-F238E27FC236}">
+                <a16:creationId xmlns:a16="http://schemas.microsoft.com/office/drawing/2014/main" id="{579150A8-A6A7-D848-2DEF-2A552A77C406}"/>
+              </a:ext>
+            </a:extLst>
+          </p:cNvPr>
+          <p:cNvPicPr>
+            <a:picLocks noChangeAspect="1"/>
+          </p:cNvPicPr>
+          <p:nvPr userDrawn="1"/>
+        </p:nvPicPr>
+        <p:blipFill>
+          <a:blip r:embed="rId2">
+            <a:extLst>
+              <a:ext uri="{28A0092B-C50C-407E-A947-70E740481C1C}">
+                <a14:useLocalDpi xmlns:a14="http://schemas.microsoft.com/office/drawing/2010/main" val="0"/>
+              </a:ext>
+            </a:extLst>
+          </a:blip>
+          <a:stretch>
+            <a:fillRect/>
+          </a:stretch>
+        </p:blipFill>
+        <p:spPr>
+          <a:xfrm>
+            <a:off x="0" y="0"/>
+            <a:ext cx="12192000" cy="6858000"/>
+          </a:xfrm>
+          <a:prstGeom prst="rect">
+            <a:avLst/>
+          </a:prstGeom>
+        </p:spPr>
+      </p:pic>
+      <p:sp>
+        <p:nvSpPr>
+          <p:cNvPr id="55" name="Google Shape;55;p10"/>
+          <p:cNvSpPr txBox="1">
+            <a:spLocks noGrp="1"/>
+          </p:cNvSpPr>
+          <p:nvPr>
+            <p:ph type="sldNum" idx="12"/>
+          </p:nvPr>
+        </p:nvSpPr>
+        <p:spPr>
+          <a:xfrm>
+            <a:off x="6457950" y="4767263"/>
+            <a:ext cx="2057400" cy="274637"/>
+          </a:xfrm>
+          <a:prstGeom prst="rect">
+            <a:avLst/>
+          </a:prstGeom>
+          <a:noFill/>
+          <a:ln>
+            <a:noFill/>
+          </a:ln>
+        </p:spPr>
+        <p:txBody>
+          <a:bodyPr spcFirstLastPara="1" vert="horz" wrap="square" lIns="91440" tIns="45720" rIns="91440" bIns="45720" rtlCol="0" anchor="ctr" anchorCtr="0">
+            <a:noAutofit/>
+          </a:bodyPr>
+          <a:lstStyle>
+            <a:defPPr marR="0" lvl="0" algn="l" rtl="0">
+              <a:lnSpc>
+                <a:spcPct val="100000"/>
+              </a:lnSpc>
+              <a:spcBef>
+                <a:spcPts val="0"/>
+              </a:spcBef>
+              <a:spcAft>
+                <a:spcPts val="0"/>
+              </a:spcAft>
+            </a:defPPr>
+            <a:lvl1pPr marR="0" lvl="0" algn="r" rtl="0">
+              <a:lnSpc>
+                <a:spcPct val="100000"/>
+              </a:lnSpc>
+              <a:spcBef>
+                <a:spcPts val="0"/>
+              </a:spcBef>
+              <a:spcAft>
+                <a:spcPts val="0"/>
+              </a:spcAft>
+              <a:buClr>
+                <a:srgbClr val="000000"/>
+              </a:buClr>
+              <a:buFont typeface="Arial"/>
+              <a:defRPr sz="1200" b="0" i="0" u="none" strike="noStrike" cap="none">
+                <a:solidFill>
+                  <a:schemeClr val="tx1">
+                    <a:tint val="75000"/>
+                  </a:schemeClr>
+                </a:solidFill>
+                <a:latin typeface="Helvetica Light" panose="020B0403020202020204" pitchFamily="34" charset="0"/>
+                <a:ea typeface="Arial"/>
+                <a:cs typeface="Arial"/>
+                <a:sym typeface="Arial"/>
+              </a:defRPr>
+            </a:lvl1pPr>
+            <a:lvl2pPr marR="0" lvl="1" algn="l" rtl="0">
+              <a:lnSpc>
+                <a:spcPct val="100000"/>
+              </a:lnSpc>
+              <a:spcBef>
+                <a:spcPts val="0"/>
+              </a:spcBef>
+              <a:spcAft>
+                <a:spcPts val="0"/>
+              </a:spcAft>
+              <a:buClr>
+                <a:srgbClr val="000000"/>
+              </a:buClr>
+              <a:buFont typeface="Arial"/>
+              <a:defRPr sz="1400" b="0" i="0" u="none" strike="noStrike" cap="none">
+                <a:solidFill>
+                  <a:srgbClr val="000000"/>
+                </a:solidFill>
+                <a:latin typeface="Arial"/>
+                <a:ea typeface="Arial"/>
+                <a:cs typeface="Arial"/>
+                <a:sym typeface="Arial"/>
+              </a:defRPr>
+            </a:lvl2pPr>
+            <a:lvl3pPr marR="0" lvl="2" algn="l" rtl="0">
+              <a:lnSpc>
+                <a:spcPct val="100000"/>
+              </a:lnSpc>
+              <a:spcBef>
+                <a:spcPts val="0"/>
+              </a:spcBef>
+              <a:spcAft>
+                <a:spcPts val="0"/>
+              </a:spcAft>
+              <a:buClr>
+                <a:srgbClr val="000000"/>
+              </a:buClr>
+              <a:buFont typeface="Arial"/>
+              <a:defRPr sz="1400" b="0" i="0" u="none" strike="noStrike" cap="none">
+                <a:solidFill>
+                  <a:srgbClr val="000000"/>
+                </a:solidFill>
+                <a:latin typeface="Arial"/>
+                <a:ea typeface="Arial"/>
+                <a:cs typeface="Arial"/>
+                <a:sym typeface="Arial"/>
+              </a:defRPr>
+            </a:lvl3pPr>
+            <a:lvl4pPr marR="0" lvl="3" algn="l" rtl="0">
+              <a:lnSpc>
+                <a:spcPct val="100000"/>
+              </a:lnSpc>
+              <a:spcBef>
+                <a:spcPts val="0"/>
+              </a:spcBef>
+              <a:spcAft>
+                <a:spcPts val="0"/>
+              </a:spcAft>
+              <a:buClr>
+                <a:srgbClr val="000000"/>
+              </a:buClr>
+              <a:buFont typeface="Arial"/>
+              <a:defRPr sz="1400" b="0" i="0" u="none" strike="noStrike" cap="none">
+                <a:solidFill>
+                  <a:srgbClr val="000000"/>
+                </a:solidFill>
+                <a:latin typeface="Arial"/>
+                <a:ea typeface="Arial"/>
+                <a:cs typeface="Arial"/>
+                <a:sym typeface="Arial"/>
+              </a:defRPr>
+            </a:lvl4pPr>
+            <a:lvl5pPr marR="0" lvl="4" algn="l" rtl="0">
+              <a:lnSpc>
+                <a:spcPct val="100000"/>
+              </a:lnSpc>
+              <a:spcBef>
+                <a:spcPts val="0"/>
+              </a:spcBef>
+              <a:spcAft>
+                <a:spcPts val="0"/>
+              </a:spcAft>
+              <a:buClr>
+                <a:srgbClr val="000000"/>
+              </a:buClr>
+              <a:buFont typeface="Arial"/>
+              <a:defRPr sz="1400" b="0" i="0" u="none" strike="noStrike" cap="none">
+                <a:solidFill>
+                  <a:srgbClr val="000000"/>
+                </a:solidFill>
+                <a:latin typeface="Arial"/>
+                <a:ea typeface="Arial"/>
+                <a:cs typeface="Arial"/>
+                <a:sym typeface="Arial"/>
+              </a:defRPr>
+            </a:lvl5pPr>
+            <a:lvl6pPr marR="0" lvl="5" algn="l" rtl="0">
+              <a:lnSpc>
+                <a:spcPct val="100000"/>
+              </a:lnSpc>
+              <a:spcBef>
+                <a:spcPts val="0"/>
+              </a:spcBef>
+              <a:spcAft>
+                <a:spcPts val="0"/>
+              </a:spcAft>
+              <a:buClr>
+                <a:srgbClr val="000000"/>
+              </a:buClr>
+              <a:buFont typeface="Arial"/>
+              <a:defRPr sz="1400" b="0" i="0" u="none" strike="noStrike" cap="none">
+                <a:solidFill>
+                  <a:srgbClr val="000000"/>
+                </a:solidFill>
+                <a:latin typeface="Arial"/>
+                <a:ea typeface="Arial"/>
+                <a:cs typeface="Arial"/>
+                <a:sym typeface="Arial"/>
+              </a:defRPr>
+            </a:lvl6pPr>
+            <a:lvl7pPr marR="0" lvl="6" algn="l" rtl="0">
+              <a:lnSpc>
+                <a:spcPct val="100000"/>
+              </a:lnSpc>
+              <a:spcBef>
+                <a:spcPts val="0"/>
+              </a:spcBef>
+              <a:spcAft>
+                <a:spcPts val="0"/>
+              </a:spcAft>
+              <a:buClr>
+                <a:srgbClr val="000000"/>
+              </a:buClr>
+              <a:buFont typeface="Arial"/>
+              <a:defRPr sz="1400" b="0" i="0" u="none" strike="noStrike" cap="none">
+                <a:solidFill>
+                  <a:srgbClr val="000000"/>
+                </a:solidFill>
+                <a:latin typeface="Arial"/>
+                <a:ea typeface="Arial"/>
+                <a:cs typeface="Arial"/>
+                <a:sym typeface="Arial"/>
+              </a:defRPr>
+            </a:lvl7pPr>
+            <a:lvl8pPr marR="0" lvl="7" algn="l" rtl="0">
+              <a:lnSpc>
+                <a:spcPct val="100000"/>
+              </a:lnSpc>
+              <a:spcBef>
+                <a:spcPts val="0"/>
+              </a:spcBef>
+              <a:spcAft>
+                <a:spcPts val="0"/>
+              </a:spcAft>
+              <a:buClr>
+                <a:srgbClr val="000000"/>
+              </a:buClr>
+              <a:buFont typeface="Arial"/>
+              <a:defRPr sz="1400" b="0" i="0" u="none" strike="noStrike" cap="none">
+                <a:solidFill>
+                  <a:srgbClr val="000000"/>
+                </a:solidFill>
+                <a:latin typeface="Arial"/>
+                <a:ea typeface="Arial"/>
+                <a:cs typeface="Arial"/>
+                <a:sym typeface="Arial"/>
+              </a:defRPr>
+            </a:lvl8pPr>
+            <a:lvl9pPr marR="0" lvl="8" algn="l" rtl="0">
+              <a:lnSpc>
+                <a:spcPct val="100000"/>
+              </a:lnSpc>
+              <a:spcBef>
+                <a:spcPts val="0"/>
+              </a:spcBef>
+              <a:spcAft>
+                <a:spcPts val="0"/>
+              </a:spcAft>
+              <a:buClr>
+                <a:srgbClr val="000000"/>
+              </a:buClr>
+              <a:buFont typeface="Arial"/>
+              <a:defRPr sz="1400" b="0" i="0" u="none" strike="noStrike" cap="none">
+                <a:solidFill>
+                  <a:srgbClr val="000000"/>
+                </a:solidFill>
+                <a:latin typeface="Arial"/>
+                <a:ea typeface="Arial"/>
+                <a:cs typeface="Arial"/>
+                <a:sym typeface="Arial"/>
+              </a:defRPr>
+            </a:lvl9pPr>
+          </a:lstStyle>
+          <a:p>
+            <a:fld id="{3BF01AD4-1839-794E-BD90-91AB590172A7}" type="slidenum">
+              <a:rPr lang="en-DE" smtClean="0"/>
+              <a:pPr/>
+              <a:t>‹#›</a:t>
+            </a:fld>
+            <a:endParaRPr lang="en"/>
+          </a:p>
+        </p:txBody>
+      </p:sp>
+      <p:cxnSp>
+        <p:nvCxnSpPr>
+          <p:cNvPr id="57" name="Google Shape;57;p10"/>
+          <p:cNvCxnSpPr/>
+          <p:nvPr/>
+        </p:nvCxnSpPr>
+        <p:spPr>
+          <a:xfrm>
+            <a:off x="3716421" y="2608481"/>
+            <a:ext cx="0" cy="1600400"/>
+          </a:xfrm>
+          <a:prstGeom prst="straightConnector1">
+            <a:avLst/>
+          </a:prstGeom>
+          <a:noFill/>
+          <a:ln w="19050" cap="flat" cmpd="sng">
+            <a:solidFill>
+              <a:schemeClr val="lt1"/>
+            </a:solidFill>
+            <a:prstDash val="solid"/>
+            <a:miter lim="800000"/>
+            <a:headEnd type="none" w="sm" len="sm"/>
+            <a:tailEnd type="none" w="sm" len="sm"/>
+          </a:ln>
+        </p:spPr>
+      </p:cxnSp>
+      <p:sp>
+        <p:nvSpPr>
+          <p:cNvPr id="60" name="Google Shape;60;p10"/>
+          <p:cNvSpPr txBox="1">
+            <a:spLocks noGrp="1"/>
+          </p:cNvSpPr>
+          <p:nvPr>
+            <p:ph type="sldNum" idx="2"/>
+          </p:nvPr>
+        </p:nvSpPr>
+        <p:spPr>
+          <a:xfrm>
+            <a:off x="6457950" y="4767263"/>
+            <a:ext cx="2057400" cy="274637"/>
+          </a:xfrm>
+          <a:prstGeom prst="rect">
+            <a:avLst/>
+          </a:prstGeom>
+          <a:noFill/>
+          <a:ln>
+            <a:noFill/>
+          </a:ln>
+        </p:spPr>
+        <p:txBody>
+          <a:bodyPr spcFirstLastPara="1" vert="horz" wrap="square" lIns="91440" tIns="45720" rIns="91440" bIns="45720" rtlCol="0" anchor="ctr" anchorCtr="0">
+            <a:noAutofit/>
+          </a:bodyPr>
+          <a:lstStyle>
+            <a:defPPr marR="0" lvl="0" algn="l" rtl="0">
+              <a:lnSpc>
+                <a:spcPct val="100000"/>
+              </a:lnSpc>
+              <a:spcBef>
+                <a:spcPts val="0"/>
+              </a:spcBef>
+              <a:spcAft>
+                <a:spcPts val="0"/>
+              </a:spcAft>
+            </a:defPPr>
+            <a:lvl1pPr marR="0" lvl="0" algn="r" rtl="0">
+              <a:lnSpc>
+                <a:spcPct val="100000"/>
+              </a:lnSpc>
+              <a:spcBef>
+                <a:spcPts val="0"/>
+              </a:spcBef>
+              <a:spcAft>
+                <a:spcPts val="0"/>
+              </a:spcAft>
+              <a:buClr>
+                <a:srgbClr val="000000"/>
+              </a:buClr>
+              <a:buFont typeface="Arial"/>
+              <a:defRPr sz="1200" b="0" i="0" u="none" strike="noStrike" cap="none">
+                <a:solidFill>
+                  <a:schemeClr val="tx1">
+                    <a:tint val="75000"/>
+                  </a:schemeClr>
+                </a:solidFill>
+                <a:latin typeface="Helvetica Light" panose="020B0403020202020204" pitchFamily="34" charset="0"/>
+                <a:ea typeface="Arial"/>
+                <a:cs typeface="Arial"/>
+                <a:sym typeface="Arial"/>
+              </a:defRPr>
+            </a:lvl1pPr>
+            <a:lvl2pPr marR="0" lvl="1" algn="l" rtl="0">
+              <a:lnSpc>
+                <a:spcPct val="100000"/>
+              </a:lnSpc>
+              <a:spcBef>
+                <a:spcPts val="0"/>
+              </a:spcBef>
+              <a:spcAft>
+                <a:spcPts val="0"/>
+              </a:spcAft>
+              <a:buClr>
+                <a:srgbClr val="000000"/>
+              </a:buClr>
+              <a:buFont typeface="Arial"/>
+              <a:defRPr sz="1400" b="0" i="0" u="none" strike="noStrike" cap="none">
+                <a:solidFill>
+                  <a:srgbClr val="000000"/>
+                </a:solidFill>
+                <a:latin typeface="Arial"/>
+                <a:ea typeface="Arial"/>
+                <a:cs typeface="Arial"/>
+                <a:sym typeface="Arial"/>
+              </a:defRPr>
+            </a:lvl2pPr>
+            <a:lvl3pPr marR="0" lvl="2" algn="l" rtl="0">
+              <a:lnSpc>
+                <a:spcPct val="100000"/>
+              </a:lnSpc>
+              <a:spcBef>
+                <a:spcPts val="0"/>
+              </a:spcBef>
+              <a:spcAft>
+                <a:spcPts val="0"/>
+              </a:spcAft>
+              <a:buClr>
+                <a:srgbClr val="000000"/>
+              </a:buClr>
+              <a:buFont typeface="Arial"/>
+              <a:defRPr sz="1400" b="0" i="0" u="none" strike="noStrike" cap="none">
+                <a:solidFill>
+                  <a:srgbClr val="000000"/>
+                </a:solidFill>
+                <a:latin typeface="Arial"/>
+                <a:ea typeface="Arial"/>
+                <a:cs typeface="Arial"/>
+                <a:sym typeface="Arial"/>
+              </a:defRPr>
+            </a:lvl3pPr>
+            <a:lvl4pPr marR="0" lvl="3" algn="l" rtl="0">
+              <a:lnSpc>
+                <a:spcPct val="100000"/>
+              </a:lnSpc>
+              <a:spcBef>
+                <a:spcPts val="0"/>
+              </a:spcBef>
+              <a:spcAft>
+                <a:spcPts val="0"/>
+              </a:spcAft>
+              <a:buClr>
+                <a:srgbClr val="000000"/>
+              </a:buClr>
+              <a:buFont typeface="Arial"/>
+              <a:defRPr sz="1400" b="0" i="0" u="none" strike="noStrike" cap="none">
+                <a:solidFill>
+                  <a:srgbClr val="000000"/>
+                </a:solidFill>
+                <a:latin typeface="Arial"/>
+                <a:ea typeface="Arial"/>
+                <a:cs typeface="Arial"/>
+                <a:sym typeface="Arial"/>
+              </a:defRPr>
+            </a:lvl4pPr>
+            <a:lvl5pPr marR="0" lvl="4" algn="l" rtl="0">
+              <a:lnSpc>
+                <a:spcPct val="100000"/>
+              </a:lnSpc>
+              <a:spcBef>
+                <a:spcPts val="0"/>
+              </a:spcBef>
+              <a:spcAft>
+                <a:spcPts val="0"/>
+              </a:spcAft>
+              <a:buClr>
+                <a:srgbClr val="000000"/>
+              </a:buClr>
+              <a:buFont typeface="Arial"/>
+              <a:defRPr sz="1400" b="0" i="0" u="none" strike="noStrike" cap="none">
+                <a:solidFill>
+                  <a:srgbClr val="000000"/>
+                </a:solidFill>
+                <a:latin typeface="Arial"/>
+                <a:ea typeface="Arial"/>
+                <a:cs typeface="Arial"/>
+                <a:sym typeface="Arial"/>
+              </a:defRPr>
+            </a:lvl5pPr>
+            <a:lvl6pPr marR="0" lvl="5" algn="l" rtl="0">
+              <a:lnSpc>
+                <a:spcPct val="100000"/>
+              </a:lnSpc>
+              <a:spcBef>
+                <a:spcPts val="0"/>
+              </a:spcBef>
+              <a:spcAft>
+                <a:spcPts val="0"/>
+              </a:spcAft>
+              <a:buClr>
+                <a:srgbClr val="000000"/>
+              </a:buClr>
+              <a:buFont typeface="Arial"/>
+              <a:defRPr sz="1400" b="0" i="0" u="none" strike="noStrike" cap="none">
+                <a:solidFill>
+                  <a:srgbClr val="000000"/>
+                </a:solidFill>
+                <a:latin typeface="Arial"/>
+                <a:ea typeface="Arial"/>
+                <a:cs typeface="Arial"/>
+                <a:sym typeface="Arial"/>
+              </a:defRPr>
+            </a:lvl6pPr>
+            <a:lvl7pPr marR="0" lvl="6" algn="l" rtl="0">
+              <a:lnSpc>
+                <a:spcPct val="100000"/>
+              </a:lnSpc>
+              <a:spcBef>
+                <a:spcPts val="0"/>
+              </a:spcBef>
+              <a:spcAft>
+                <a:spcPts val="0"/>
+              </a:spcAft>
+              <a:buClr>
+                <a:srgbClr val="000000"/>
+              </a:buClr>
+              <a:buFont typeface="Arial"/>
+              <a:defRPr sz="1400" b="0" i="0" u="none" strike="noStrike" cap="none">
+                <a:solidFill>
+                  <a:srgbClr val="000000"/>
+                </a:solidFill>
+                <a:latin typeface="Arial"/>
+                <a:ea typeface="Arial"/>
+                <a:cs typeface="Arial"/>
+                <a:sym typeface="Arial"/>
+              </a:defRPr>
+            </a:lvl7pPr>
+            <a:lvl8pPr marR="0" lvl="7" algn="l" rtl="0">
+              <a:lnSpc>
+                <a:spcPct val="100000"/>
+              </a:lnSpc>
+              <a:spcBef>
+                <a:spcPts val="0"/>
+              </a:spcBef>
+              <a:spcAft>
+                <a:spcPts val="0"/>
+              </a:spcAft>
+              <a:buClr>
+                <a:srgbClr val="000000"/>
+              </a:buClr>
+              <a:buFont typeface="Arial"/>
+              <a:defRPr sz="1400" b="0" i="0" u="none" strike="noStrike" cap="none">
+                <a:solidFill>
+                  <a:srgbClr val="000000"/>
+                </a:solidFill>
+                <a:latin typeface="Arial"/>
+                <a:ea typeface="Arial"/>
+                <a:cs typeface="Arial"/>
+                <a:sym typeface="Arial"/>
+              </a:defRPr>
+            </a:lvl8pPr>
+            <a:lvl9pPr marR="0" lvl="8" algn="l" rtl="0">
+              <a:lnSpc>
+                <a:spcPct val="100000"/>
+              </a:lnSpc>
+              <a:spcBef>
+                <a:spcPts val="0"/>
+              </a:spcBef>
+              <a:spcAft>
+                <a:spcPts val="0"/>
+              </a:spcAft>
+              <a:buClr>
+                <a:srgbClr val="000000"/>
+              </a:buClr>
+              <a:buFont typeface="Arial"/>
+              <a:defRPr sz="1400" b="0" i="0" u="none" strike="noStrike" cap="none">
+                <a:solidFill>
+                  <a:srgbClr val="000000"/>
+                </a:solidFill>
+                <a:latin typeface="Arial"/>
+                <a:ea typeface="Arial"/>
+                <a:cs typeface="Arial"/>
+                <a:sym typeface="Arial"/>
+              </a:defRPr>
+            </a:lvl9pPr>
+          </a:lstStyle>
+          <a:p>
+            <a:fld id="{3BF01AD4-1839-794E-BD90-91AB590172A7}" type="slidenum">
+              <a:rPr lang="en-DE" smtClean="0"/>
+              <a:pPr/>
+              <a:t>‹#›</a:t>
+            </a:fld>
+            <a:endParaRPr lang="en"/>
+          </a:p>
+        </p:txBody>
+      </p:sp>
+      <p:pic>
+        <p:nvPicPr>
+          <p:cNvPr id="62" name="Google Shape;62;p10"/>
+          <p:cNvPicPr preferRelativeResize="0"/>
+          <p:nvPr/>
+        </p:nvPicPr>
+        <p:blipFill>
+          <a:blip r:embed="rId3">
+            <a:extLst>
+              <a:ext uri="{28A0092B-C50C-407E-A947-70E740481C1C}">
+                <a14:useLocalDpi xmlns:a14="http://schemas.microsoft.com/office/drawing/2010/main" val="0"/>
+              </a:ext>
+              <a:ext uri="{96DAC541-7B7A-43D3-8B79-37D633B846F1}">
+                <asvg:svgBlip xmlns:asvg="http://schemas.microsoft.com/office/drawing/2016/SVG/main" r:embed="rId4"/>
+              </a:ext>
+            </a:extLst>
+          </a:blip>
+          <a:srcRect/>
+          <a:stretch/>
+        </p:blipFill>
+        <p:spPr>
+          <a:xfrm>
+            <a:off x="3071993" y="6285589"/>
+            <a:ext cx="414529" cy="408850"/>
+          </a:xfrm>
+          <a:prstGeom prst="rect">
+            <a:avLst/>
+          </a:prstGeom>
+          <a:noFill/>
+          <a:ln>
+            <a:noFill/>
+          </a:ln>
+        </p:spPr>
+      </p:pic>
+      <p:pic>
+        <p:nvPicPr>
+          <p:cNvPr id="64" name="Google Shape;64;p10"/>
+          <p:cNvPicPr preferRelativeResize="0"/>
+          <p:nvPr/>
+        </p:nvPicPr>
+        <p:blipFill>
+          <a:blip r:embed="rId5">
+            <a:extLst>
+              <a:ext uri="{28A0092B-C50C-407E-A947-70E740481C1C}">
+                <a14:useLocalDpi xmlns:a14="http://schemas.microsoft.com/office/drawing/2010/main" val="0"/>
+              </a:ext>
+              <a:ext uri="{96DAC541-7B7A-43D3-8B79-37D633B846F1}">
+                <asvg:svgBlip xmlns:asvg="http://schemas.microsoft.com/office/drawing/2016/SVG/main" r:embed="rId6"/>
+              </a:ext>
+            </a:extLst>
+          </a:blip>
+          <a:srcRect/>
+          <a:stretch/>
+        </p:blipFill>
+        <p:spPr>
+          <a:xfrm>
+            <a:off x="152659" y="6282751"/>
+            <a:ext cx="414528" cy="414528"/>
+          </a:xfrm>
+          <a:prstGeom prst="rect">
+            <a:avLst/>
+          </a:prstGeom>
+          <a:noFill/>
+          <a:ln>
+            <a:noFill/>
+          </a:ln>
+        </p:spPr>
+      </p:pic>
+      <p:sp>
+        <p:nvSpPr>
+          <p:cNvPr id="6" name="Picture Placeholder 5">
+            <a:extLst>
+              <a:ext uri="{FF2B5EF4-FFF2-40B4-BE49-F238E27FC236}">
+                <a16:creationId xmlns:a16="http://schemas.microsoft.com/office/drawing/2014/main" id="{2631C45D-A4AF-1223-E180-EB9E96FA2AE4}"/>
+              </a:ext>
+            </a:extLst>
+          </p:cNvPr>
+          <p:cNvSpPr>
+            <a:spLocks noGrp="1"/>
+          </p:cNvSpPr>
+          <p:nvPr>
+            <p:ph type="pic" sz="quarter" idx="13"/>
+          </p:nvPr>
+        </p:nvSpPr>
+        <p:spPr>
+          <a:xfrm>
+            <a:off x="277813" y="1289050"/>
+            <a:ext cx="3206750" cy="4024313"/>
+          </a:xfrm>
+        </p:spPr>
+        <p:txBody>
+          <a:bodyPr/>
+          <a:lstStyle>
+            <a:lvl1pPr marL="0" indent="0">
+              <a:buNone/>
+              <a:defRPr/>
+            </a:lvl1pPr>
+          </a:lstStyle>
+          <a:p>
+            <a:endParaRPr lang="en-DE" dirty="0"/>
+          </a:p>
+        </p:txBody>
+      </p:sp>
+      <p:sp>
+        <p:nvSpPr>
+          <p:cNvPr id="8" name="Text Placeholder 7">
+            <a:extLst>
+              <a:ext uri="{FF2B5EF4-FFF2-40B4-BE49-F238E27FC236}">
+                <a16:creationId xmlns:a16="http://schemas.microsoft.com/office/drawing/2014/main" id="{E469473F-31A1-DA1A-1446-8C54C99F5645}"/>
+              </a:ext>
+            </a:extLst>
+          </p:cNvPr>
+          <p:cNvSpPr>
+            <a:spLocks noGrp="1"/>
+          </p:cNvSpPr>
+          <p:nvPr>
+            <p:ph type="body" sz="quarter" idx="14"/>
+          </p:nvPr>
+        </p:nvSpPr>
+        <p:spPr>
+          <a:xfrm>
+            <a:off x="4382294" y="1289050"/>
+            <a:ext cx="6911975" cy="1828800"/>
+          </a:xfrm>
+        </p:spPr>
+        <p:txBody>
+          <a:bodyPr/>
+          <a:lstStyle>
+            <a:lvl1pPr marL="0" indent="0">
+              <a:buNone/>
+              <a:defRPr/>
+            </a:lvl1pPr>
+          </a:lstStyle>
+          <a:p>
+            <a:pPr lvl="0"/>
+            <a:endParaRPr lang="en-DE" dirty="0"/>
+          </a:p>
+        </p:txBody>
+      </p:sp>
+      <p:sp>
+        <p:nvSpPr>
+          <p:cNvPr id="9" name="Text Placeholder 7">
+            <a:extLst>
+              <a:ext uri="{FF2B5EF4-FFF2-40B4-BE49-F238E27FC236}">
+                <a16:creationId xmlns:a16="http://schemas.microsoft.com/office/drawing/2014/main" id="{7D27FFAE-CDC4-C5E3-ACA9-B1B660F21931}"/>
+              </a:ext>
+            </a:extLst>
+          </p:cNvPr>
+          <p:cNvSpPr>
+            <a:spLocks noGrp="1"/>
+          </p:cNvSpPr>
+          <p:nvPr>
+            <p:ph type="body" sz="quarter" idx="15"/>
+          </p:nvPr>
+        </p:nvSpPr>
+        <p:spPr>
+          <a:xfrm>
+            <a:off x="4382293" y="3310572"/>
+            <a:ext cx="6911975" cy="1828800"/>
+          </a:xfrm>
+        </p:spPr>
+        <p:txBody>
+          <a:bodyPr/>
+          <a:lstStyle>
+            <a:lvl1pPr marL="0" indent="0">
+              <a:buNone/>
+              <a:defRPr/>
+            </a:lvl1pPr>
+          </a:lstStyle>
+          <a:p>
+            <a:pPr lvl="0"/>
+            <a:endParaRPr lang="en-DE" dirty="0"/>
+          </a:p>
+        </p:txBody>
+      </p:sp>
+      <p:sp>
+        <p:nvSpPr>
+          <p:cNvPr id="12" name="Text Placeholder 11">
+            <a:extLst>
+              <a:ext uri="{FF2B5EF4-FFF2-40B4-BE49-F238E27FC236}">
+                <a16:creationId xmlns:a16="http://schemas.microsoft.com/office/drawing/2014/main" id="{AB34C56E-9BDB-F5E2-1AD6-4C9ACB81D802}"/>
+              </a:ext>
+            </a:extLst>
+          </p:cNvPr>
+          <p:cNvSpPr>
+            <a:spLocks noGrp="1"/>
+          </p:cNvSpPr>
+          <p:nvPr>
+            <p:ph type="body" sz="quarter" idx="16"/>
+          </p:nvPr>
+        </p:nvSpPr>
+        <p:spPr>
+          <a:xfrm>
+            <a:off x="700759" y="6295340"/>
+            <a:ext cx="2302323" cy="408600"/>
+          </a:xfrm>
+        </p:spPr>
+        <p:txBody>
+          <a:bodyPr anchor="ctr">
+            <a:normAutofit/>
+          </a:bodyPr>
+          <a:lstStyle>
+            <a:lvl1pPr marL="0" indent="0">
+              <a:buNone/>
+              <a:defRPr sz="2000"/>
+            </a:lvl1pPr>
+          </a:lstStyle>
+          <a:p>
+            <a:pPr lvl="0"/>
+            <a:endParaRPr lang="en-DE" dirty="0"/>
+          </a:p>
+        </p:txBody>
+      </p:sp>
+      <p:sp>
+        <p:nvSpPr>
+          <p:cNvPr id="13" name="Text Placeholder 11">
+            <a:extLst>
+              <a:ext uri="{FF2B5EF4-FFF2-40B4-BE49-F238E27FC236}">
+                <a16:creationId xmlns:a16="http://schemas.microsoft.com/office/drawing/2014/main" id="{210C2267-198C-B65E-1588-1D8ADC032B0D}"/>
+              </a:ext>
+            </a:extLst>
+          </p:cNvPr>
+          <p:cNvSpPr>
+            <a:spLocks noGrp="1"/>
+          </p:cNvSpPr>
+          <p:nvPr>
+            <p:ph type="body" sz="quarter" idx="17"/>
+          </p:nvPr>
+        </p:nvSpPr>
+        <p:spPr>
+          <a:xfrm>
+            <a:off x="3540472" y="6295340"/>
+            <a:ext cx="2302323" cy="408600"/>
+          </a:xfrm>
+        </p:spPr>
+        <p:txBody>
+          <a:bodyPr anchor="ctr">
+            <a:normAutofit/>
+          </a:bodyPr>
+          <a:lstStyle>
+            <a:lvl1pPr marL="0" indent="0">
+              <a:buNone/>
+              <a:defRPr sz="2000"/>
+            </a:lvl1pPr>
+          </a:lstStyle>
+          <a:p>
+            <a:pPr lvl="0"/>
+            <a:endParaRPr lang="en-DE" dirty="0"/>
+          </a:p>
+        </p:txBody>
+      </p:sp>
+    </p:spTree>
+    <p:extLst>
+      <p:ext uri="{BB962C8B-B14F-4D97-AF65-F5344CB8AC3E}">
+        <p14:creationId xmlns:p14="http://schemas.microsoft.com/office/powerpoint/2010/main" val="1914357449"/>
+      </p:ext>
+    </p:extLst>
+  </p:cSld>
+  <p:clrMapOvr>
+    <a:masterClrMapping/>
+  </p:clrMapOvr>
+</p:sldLayout>
+</file>
+
+<file path=ppt/slideLayouts/slideLayout11.xml><?xml version="1.0" encoding="utf-8"?>
+<p:sldLayout xmlns:a="http://schemas.openxmlformats.org/drawingml/2006/main" xmlns:r="http://schemas.openxmlformats.org/officeDocument/2006/relationships" xmlns:p="http://schemas.openxmlformats.org/presentationml/2006/main" showMasterSp="0" matchingName="Dark References" preserve="1" userDrawn="1">
+  <p:cSld name="1_Dark References">
+    <p:spTree>
+      <p:nvGrpSpPr>
+        <p:cNvPr id="1" name="Shape 54"/>
+        <p:cNvGrpSpPr/>
+        <p:nvPr/>
+      </p:nvGrpSpPr>
+      <p:grpSpPr>
+        <a:xfrm>
+          <a:off x="0" y="0"/>
+          <a:ext cx="0" cy="0"/>
+          <a:chOff x="0" y="0"/>
+          <a:chExt cx="0" cy="0"/>
+        </a:xfrm>
+      </p:grpSpPr>
+      <p:pic>
+        <p:nvPicPr>
+          <p:cNvPr id="10" name="Picture 9">
+            <a:extLst>
+              <a:ext uri="{FF2B5EF4-FFF2-40B4-BE49-F238E27FC236}">
+                <a16:creationId xmlns:a16="http://schemas.microsoft.com/office/drawing/2014/main" id="{579150A8-A6A7-D848-2DEF-2A552A77C406}"/>
+              </a:ext>
+            </a:extLst>
+          </p:cNvPr>
+          <p:cNvPicPr>
+            <a:picLocks noChangeAspect="1"/>
+          </p:cNvPicPr>
+          <p:nvPr userDrawn="1"/>
+        </p:nvPicPr>
+        <p:blipFill>
+          <a:blip r:embed="rId2">
+            <a:extLst>
+              <a:ext uri="{28A0092B-C50C-407E-A947-70E740481C1C}">
+                <a14:useLocalDpi xmlns:a14="http://schemas.microsoft.com/office/drawing/2010/main" val="0"/>
+              </a:ext>
+            </a:extLst>
+          </a:blip>
+          <a:stretch>
+            <a:fillRect/>
+          </a:stretch>
+        </p:blipFill>
+        <p:spPr>
+          <a:xfrm>
+            <a:off x="0" y="0"/>
+            <a:ext cx="12192000" cy="6858000"/>
+          </a:xfrm>
+          <a:prstGeom prst="rect">
+            <a:avLst/>
+          </a:prstGeom>
+        </p:spPr>
+      </p:pic>
+      <p:sp>
+        <p:nvSpPr>
+          <p:cNvPr id="55" name="Google Shape;55;p10"/>
+          <p:cNvSpPr txBox="1">
+            <a:spLocks noGrp="1"/>
+          </p:cNvSpPr>
+          <p:nvPr>
+            <p:ph type="sldNum" idx="12"/>
+          </p:nvPr>
+        </p:nvSpPr>
+        <p:spPr>
+          <a:xfrm>
+            <a:off x="6457950" y="4767263"/>
+            <a:ext cx="2057400" cy="274637"/>
+          </a:xfrm>
+          <a:prstGeom prst="rect">
+            <a:avLst/>
+          </a:prstGeom>
+          <a:noFill/>
+          <a:ln>
+            <a:noFill/>
+          </a:ln>
+        </p:spPr>
+        <p:txBody>
+          <a:bodyPr spcFirstLastPara="1" vert="horz" wrap="square" lIns="91440" tIns="45720" rIns="91440" bIns="45720" rtlCol="0" anchor="ctr" anchorCtr="0">
+            <a:noAutofit/>
+          </a:bodyPr>
+          <a:lstStyle>
+            <a:defPPr marR="0" lvl="0" algn="l" rtl="0">
+              <a:lnSpc>
+                <a:spcPct val="100000"/>
+              </a:lnSpc>
+              <a:spcBef>
+                <a:spcPts val="0"/>
+              </a:spcBef>
+              <a:spcAft>
+                <a:spcPts val="0"/>
+              </a:spcAft>
+            </a:defPPr>
+            <a:lvl1pPr marR="0" lvl="0" algn="r" rtl="0">
+              <a:lnSpc>
+                <a:spcPct val="100000"/>
+              </a:lnSpc>
+              <a:spcBef>
+                <a:spcPts val="0"/>
+              </a:spcBef>
+              <a:spcAft>
+                <a:spcPts val="0"/>
+              </a:spcAft>
+              <a:buClr>
+                <a:srgbClr val="000000"/>
+              </a:buClr>
+              <a:buFont typeface="Arial"/>
+              <a:defRPr sz="1200" b="0" i="0" u="none" strike="noStrike" cap="none">
+                <a:solidFill>
+                  <a:schemeClr val="tx1">
+                    <a:tint val="75000"/>
+                  </a:schemeClr>
+                </a:solidFill>
+                <a:latin typeface="Helvetica Light" panose="020B0403020202020204" pitchFamily="34" charset="0"/>
+                <a:ea typeface="Arial"/>
+                <a:cs typeface="Arial"/>
+                <a:sym typeface="Arial"/>
+              </a:defRPr>
+            </a:lvl1pPr>
+            <a:lvl2pPr marR="0" lvl="1" algn="l" rtl="0">
+              <a:lnSpc>
+                <a:spcPct val="100000"/>
+              </a:lnSpc>
+              <a:spcBef>
+                <a:spcPts val="0"/>
+              </a:spcBef>
+              <a:spcAft>
+                <a:spcPts val="0"/>
+              </a:spcAft>
+              <a:buClr>
+                <a:srgbClr val="000000"/>
+              </a:buClr>
+              <a:buFont typeface="Arial"/>
+              <a:defRPr sz="1400" b="0" i="0" u="none" strike="noStrike" cap="none">
+                <a:solidFill>
+                  <a:srgbClr val="000000"/>
+                </a:solidFill>
+                <a:latin typeface="Arial"/>
+                <a:ea typeface="Arial"/>
+                <a:cs typeface="Arial"/>
+                <a:sym typeface="Arial"/>
+              </a:defRPr>
+            </a:lvl2pPr>
+            <a:lvl3pPr marR="0" lvl="2" algn="l" rtl="0">
+              <a:lnSpc>
+                <a:spcPct val="100000"/>
+              </a:lnSpc>
+              <a:spcBef>
+                <a:spcPts val="0"/>
+              </a:spcBef>
+              <a:spcAft>
+                <a:spcPts val="0"/>
+              </a:spcAft>
+              <a:buClr>
+                <a:srgbClr val="000000"/>
+              </a:buClr>
+              <a:buFont typeface="Arial"/>
+              <a:defRPr sz="1400" b="0" i="0" u="none" strike="noStrike" cap="none">
+                <a:solidFill>
+                  <a:srgbClr val="000000"/>
+                </a:solidFill>
+                <a:latin typeface="Arial"/>
+                <a:ea typeface="Arial"/>
+                <a:cs typeface="Arial"/>
+                <a:sym typeface="Arial"/>
+              </a:defRPr>
+            </a:lvl3pPr>
+            <a:lvl4pPr marR="0" lvl="3" algn="l" rtl="0">
+              <a:lnSpc>
+                <a:spcPct val="100000"/>
+              </a:lnSpc>
+              <a:spcBef>
+                <a:spcPts val="0"/>
+              </a:spcBef>
+              <a:spcAft>
+                <a:spcPts val="0"/>
+              </a:spcAft>
+              <a:buClr>
+                <a:srgbClr val="000000"/>
+              </a:buClr>
+              <a:buFont typeface="Arial"/>
+              <a:defRPr sz="1400" b="0" i="0" u="none" strike="noStrike" cap="none">
+                <a:solidFill>
+                  <a:srgbClr val="000000"/>
+                </a:solidFill>
+                <a:latin typeface="Arial"/>
+                <a:ea typeface="Arial"/>
+                <a:cs typeface="Arial"/>
+                <a:sym typeface="Arial"/>
+              </a:defRPr>
+            </a:lvl4pPr>
+            <a:lvl5pPr marR="0" lvl="4" algn="l" rtl="0">
+              <a:lnSpc>
+                <a:spcPct val="100000"/>
+              </a:lnSpc>
+              <a:spcBef>
+                <a:spcPts val="0"/>
+              </a:spcBef>
+              <a:spcAft>
+                <a:spcPts val="0"/>
+              </a:spcAft>
+              <a:buClr>
+                <a:srgbClr val="000000"/>
+              </a:buClr>
+              <a:buFont typeface="Arial"/>
+              <a:defRPr sz="1400" b="0" i="0" u="none" strike="noStrike" cap="none">
+                <a:solidFill>
+                  <a:srgbClr val="000000"/>
+                </a:solidFill>
+                <a:latin typeface="Arial"/>
+                <a:ea typeface="Arial"/>
+                <a:cs typeface="Arial"/>
+                <a:sym typeface="Arial"/>
+              </a:defRPr>
+            </a:lvl5pPr>
+            <a:lvl6pPr marR="0" lvl="5" algn="l" rtl="0">
+              <a:lnSpc>
+                <a:spcPct val="100000"/>
+              </a:lnSpc>
+              <a:spcBef>
+                <a:spcPts val="0"/>
+              </a:spcBef>
+              <a:spcAft>
+                <a:spcPts val="0"/>
+              </a:spcAft>
+              <a:buClr>
+                <a:srgbClr val="000000"/>
+              </a:buClr>
+              <a:buFont typeface="Arial"/>
+              <a:defRPr sz="1400" b="0" i="0" u="none" strike="noStrike" cap="none">
+                <a:solidFill>
+                  <a:srgbClr val="000000"/>
+                </a:solidFill>
+                <a:latin typeface="Arial"/>
+                <a:ea typeface="Arial"/>
+                <a:cs typeface="Arial"/>
+                <a:sym typeface="Arial"/>
+              </a:defRPr>
+            </a:lvl6pPr>
+            <a:lvl7pPr marR="0" lvl="6" algn="l" rtl="0">
+              <a:lnSpc>
+                <a:spcPct val="100000"/>
+              </a:lnSpc>
+              <a:spcBef>
+                <a:spcPts val="0"/>
+              </a:spcBef>
+              <a:spcAft>
+                <a:spcPts val="0"/>
+              </a:spcAft>
+              <a:buClr>
+                <a:srgbClr val="000000"/>
+              </a:buClr>
+              <a:buFont typeface="Arial"/>
+              <a:defRPr sz="1400" b="0" i="0" u="none" strike="noStrike" cap="none">
+                <a:solidFill>
+                  <a:srgbClr val="000000"/>
+                </a:solidFill>
+                <a:latin typeface="Arial"/>
+                <a:ea typeface="Arial"/>
+                <a:cs typeface="Arial"/>
+                <a:sym typeface="Arial"/>
+              </a:defRPr>
+            </a:lvl7pPr>
+            <a:lvl8pPr marR="0" lvl="7" algn="l" rtl="0">
+              <a:lnSpc>
+                <a:spcPct val="100000"/>
+              </a:lnSpc>
+              <a:spcBef>
+                <a:spcPts val="0"/>
+              </a:spcBef>
+              <a:spcAft>
+                <a:spcPts val="0"/>
+              </a:spcAft>
+              <a:buClr>
+                <a:srgbClr val="000000"/>
+              </a:buClr>
+              <a:buFont typeface="Arial"/>
+              <a:defRPr sz="1400" b="0" i="0" u="none" strike="noStrike" cap="none">
+                <a:solidFill>
+                  <a:srgbClr val="000000"/>
+                </a:solidFill>
+                <a:latin typeface="Arial"/>
+                <a:ea typeface="Arial"/>
+                <a:cs typeface="Arial"/>
+                <a:sym typeface="Arial"/>
+              </a:defRPr>
+            </a:lvl8pPr>
+            <a:lvl9pPr marR="0" lvl="8" algn="l" rtl="0">
+              <a:lnSpc>
+                <a:spcPct val="100000"/>
+              </a:lnSpc>
+              <a:spcBef>
+                <a:spcPts val="0"/>
+              </a:spcBef>
+              <a:spcAft>
+                <a:spcPts val="0"/>
+              </a:spcAft>
+              <a:buClr>
+                <a:srgbClr val="000000"/>
+              </a:buClr>
+              <a:buFont typeface="Arial"/>
+              <a:defRPr sz="1400" b="0" i="0" u="none" strike="noStrike" cap="none">
+                <a:solidFill>
+                  <a:srgbClr val="000000"/>
+                </a:solidFill>
+                <a:latin typeface="Arial"/>
+                <a:ea typeface="Arial"/>
+                <a:cs typeface="Arial"/>
+                <a:sym typeface="Arial"/>
+              </a:defRPr>
+            </a:lvl9pPr>
+          </a:lstStyle>
+          <a:p>
+            <a:fld id="{3BF01AD4-1839-794E-BD90-91AB590172A7}" type="slidenum">
+              <a:rPr lang="en-DE" smtClean="0"/>
+              <a:pPr/>
+              <a:t>‹#›</a:t>
+            </a:fld>
+            <a:endParaRPr lang="en"/>
+          </a:p>
+        </p:txBody>
+      </p:sp>
+      <p:cxnSp>
+        <p:nvCxnSpPr>
+          <p:cNvPr id="57" name="Google Shape;57;p10"/>
+          <p:cNvCxnSpPr/>
+          <p:nvPr/>
+        </p:nvCxnSpPr>
+        <p:spPr>
+          <a:xfrm>
+            <a:off x="3716421" y="2608481"/>
+            <a:ext cx="0" cy="1600400"/>
+          </a:xfrm>
+          <a:prstGeom prst="straightConnector1">
+            <a:avLst/>
+          </a:prstGeom>
+          <a:noFill/>
+          <a:ln w="19050" cap="flat" cmpd="sng">
+            <a:solidFill>
+              <a:schemeClr val="lt1"/>
+            </a:solidFill>
+            <a:prstDash val="solid"/>
+            <a:miter lim="800000"/>
+            <a:headEnd type="none" w="sm" len="sm"/>
+            <a:tailEnd type="none" w="sm" len="sm"/>
+          </a:ln>
+        </p:spPr>
+      </p:cxnSp>
+      <p:sp>
+        <p:nvSpPr>
+          <p:cNvPr id="60" name="Google Shape;60;p10"/>
+          <p:cNvSpPr txBox="1">
+            <a:spLocks noGrp="1"/>
+          </p:cNvSpPr>
+          <p:nvPr>
+            <p:ph type="sldNum" idx="2"/>
+          </p:nvPr>
+        </p:nvSpPr>
+        <p:spPr>
+          <a:xfrm>
+            <a:off x="6457950" y="4767263"/>
+            <a:ext cx="2057400" cy="274637"/>
+          </a:xfrm>
+          <a:prstGeom prst="rect">
+            <a:avLst/>
+          </a:prstGeom>
+          <a:noFill/>
+          <a:ln>
+            <a:noFill/>
+          </a:ln>
+        </p:spPr>
+        <p:txBody>
+          <a:bodyPr spcFirstLastPara="1" vert="horz" wrap="square" lIns="91440" tIns="45720" rIns="91440" bIns="45720" rtlCol="0" anchor="ctr" anchorCtr="0">
+            <a:noAutofit/>
+          </a:bodyPr>
+          <a:lstStyle>
+            <a:defPPr marR="0" lvl="0" algn="l" rtl="0">
+              <a:lnSpc>
+                <a:spcPct val="100000"/>
+              </a:lnSpc>
+              <a:spcBef>
+                <a:spcPts val="0"/>
+              </a:spcBef>
+              <a:spcAft>
+                <a:spcPts val="0"/>
+              </a:spcAft>
+            </a:defPPr>
+            <a:lvl1pPr marR="0" lvl="0" algn="r" rtl="0">
+              <a:lnSpc>
+                <a:spcPct val="100000"/>
+              </a:lnSpc>
+              <a:spcBef>
+                <a:spcPts val="0"/>
+              </a:spcBef>
+              <a:spcAft>
+                <a:spcPts val="0"/>
+              </a:spcAft>
+              <a:buClr>
+                <a:srgbClr val="000000"/>
+              </a:buClr>
+              <a:buFont typeface="Arial"/>
+              <a:defRPr sz="1200" b="0" i="0" u="none" strike="noStrike" cap="none">
+                <a:solidFill>
+                  <a:schemeClr val="tx1">
+                    <a:tint val="75000"/>
+                  </a:schemeClr>
+                </a:solidFill>
+                <a:latin typeface="Helvetica Light" panose="020B0403020202020204" pitchFamily="34" charset="0"/>
+                <a:ea typeface="Arial"/>
+                <a:cs typeface="Arial"/>
+                <a:sym typeface="Arial"/>
+              </a:defRPr>
+            </a:lvl1pPr>
+            <a:lvl2pPr marR="0" lvl="1" algn="l" rtl="0">
+              <a:lnSpc>
+                <a:spcPct val="100000"/>
+              </a:lnSpc>
+              <a:spcBef>
+                <a:spcPts val="0"/>
+              </a:spcBef>
+              <a:spcAft>
+                <a:spcPts val="0"/>
+              </a:spcAft>
+              <a:buClr>
+                <a:srgbClr val="000000"/>
+              </a:buClr>
+              <a:buFont typeface="Arial"/>
+              <a:defRPr sz="1400" b="0" i="0" u="none" strike="noStrike" cap="none">
+                <a:solidFill>
+                  <a:srgbClr val="000000"/>
+                </a:solidFill>
+                <a:latin typeface="Arial"/>
+                <a:ea typeface="Arial"/>
+                <a:cs typeface="Arial"/>
+                <a:sym typeface="Arial"/>
+              </a:defRPr>
+            </a:lvl2pPr>
+            <a:lvl3pPr marR="0" lvl="2" algn="l" rtl="0">
+              <a:lnSpc>
+                <a:spcPct val="100000"/>
+              </a:lnSpc>
+              <a:spcBef>
+                <a:spcPts val="0"/>
+              </a:spcBef>
+              <a:spcAft>
+                <a:spcPts val="0"/>
+              </a:spcAft>
+              <a:buClr>
+                <a:srgbClr val="000000"/>
+              </a:buClr>
+              <a:buFont typeface="Arial"/>
+              <a:defRPr sz="1400" b="0" i="0" u="none" strike="noStrike" cap="none">
+                <a:solidFill>
+                  <a:srgbClr val="000000"/>
+                </a:solidFill>
+                <a:latin typeface="Arial"/>
+                <a:ea typeface="Arial"/>
+                <a:cs typeface="Arial"/>
+                <a:sym typeface="Arial"/>
+              </a:defRPr>
+            </a:lvl3pPr>
+            <a:lvl4pPr marR="0" lvl="3" algn="l" rtl="0">
+              <a:lnSpc>
+                <a:spcPct val="100000"/>
+              </a:lnSpc>
+              <a:spcBef>
+                <a:spcPts val="0"/>
+              </a:spcBef>
+              <a:spcAft>
+                <a:spcPts val="0"/>
+              </a:spcAft>
+              <a:buClr>
+                <a:srgbClr val="000000"/>
+              </a:buClr>
+              <a:buFont typeface="Arial"/>
+              <a:defRPr sz="1400" b="0" i="0" u="none" strike="noStrike" cap="none">
+                <a:solidFill>
+                  <a:srgbClr val="000000"/>
+                </a:solidFill>
+                <a:latin typeface="Arial"/>
+                <a:ea typeface="Arial"/>
+                <a:cs typeface="Arial"/>
+                <a:sym typeface="Arial"/>
+              </a:defRPr>
+            </a:lvl4pPr>
+            <a:lvl5pPr marR="0" lvl="4" algn="l" rtl="0">
+              <a:lnSpc>
+                <a:spcPct val="100000"/>
+              </a:lnSpc>
+              <a:spcBef>
+                <a:spcPts val="0"/>
+              </a:spcBef>
+              <a:spcAft>
+                <a:spcPts val="0"/>
+              </a:spcAft>
+              <a:buClr>
+                <a:srgbClr val="000000"/>
+              </a:buClr>
+              <a:buFont typeface="Arial"/>
+              <a:defRPr sz="1400" b="0" i="0" u="none" strike="noStrike" cap="none">
+                <a:solidFill>
+                  <a:srgbClr val="000000"/>
+                </a:solidFill>
+                <a:latin typeface="Arial"/>
+                <a:ea typeface="Arial"/>
+                <a:cs typeface="Arial"/>
+                <a:sym typeface="Arial"/>
+              </a:defRPr>
+            </a:lvl5pPr>
+            <a:lvl6pPr marR="0" lvl="5" algn="l" rtl="0">
+              <a:lnSpc>
+                <a:spcPct val="100000"/>
+              </a:lnSpc>
+              <a:spcBef>
+                <a:spcPts val="0"/>
+              </a:spcBef>
+              <a:spcAft>
+                <a:spcPts val="0"/>
+              </a:spcAft>
+              <a:buClr>
+                <a:srgbClr val="000000"/>
+              </a:buClr>
+              <a:buFont typeface="Arial"/>
+              <a:defRPr sz="1400" b="0" i="0" u="none" strike="noStrike" cap="none">
+                <a:solidFill>
+                  <a:srgbClr val="000000"/>
+                </a:solidFill>
+                <a:latin typeface="Arial"/>
+                <a:ea typeface="Arial"/>
+                <a:cs typeface="Arial"/>
+                <a:sym typeface="Arial"/>
+              </a:defRPr>
+            </a:lvl6pPr>
+            <a:lvl7pPr marR="0" lvl="6" algn="l" rtl="0">
+              <a:lnSpc>
+                <a:spcPct val="100000"/>
+              </a:lnSpc>
+              <a:spcBef>
+                <a:spcPts val="0"/>
+              </a:spcBef>
+              <a:spcAft>
+                <a:spcPts val="0"/>
+              </a:spcAft>
+              <a:buClr>
+                <a:srgbClr val="000000"/>
+              </a:buClr>
+              <a:buFont typeface="Arial"/>
+              <a:defRPr sz="1400" b="0" i="0" u="none" strike="noStrike" cap="none">
+                <a:solidFill>
+                  <a:srgbClr val="000000"/>
+                </a:solidFill>
+                <a:latin typeface="Arial"/>
+                <a:ea typeface="Arial"/>
+                <a:cs typeface="Arial"/>
+                <a:sym typeface="Arial"/>
+              </a:defRPr>
+            </a:lvl7pPr>
+            <a:lvl8pPr marR="0" lvl="7" algn="l" rtl="0">
+              <a:lnSpc>
+                <a:spcPct val="100000"/>
+              </a:lnSpc>
+              <a:spcBef>
+                <a:spcPts val="0"/>
+              </a:spcBef>
+              <a:spcAft>
+                <a:spcPts val="0"/>
+              </a:spcAft>
+              <a:buClr>
+                <a:srgbClr val="000000"/>
+              </a:buClr>
+              <a:buFont typeface="Arial"/>
+              <a:defRPr sz="1400" b="0" i="0" u="none" strike="noStrike" cap="none">
+                <a:solidFill>
+                  <a:srgbClr val="000000"/>
+                </a:solidFill>
+                <a:latin typeface="Arial"/>
+                <a:ea typeface="Arial"/>
+                <a:cs typeface="Arial"/>
+                <a:sym typeface="Arial"/>
+              </a:defRPr>
+            </a:lvl8pPr>
+            <a:lvl9pPr marR="0" lvl="8" algn="l" rtl="0">
+              <a:lnSpc>
+                <a:spcPct val="100000"/>
+              </a:lnSpc>
+              <a:spcBef>
+                <a:spcPts val="0"/>
+              </a:spcBef>
+              <a:spcAft>
+                <a:spcPts val="0"/>
+              </a:spcAft>
+              <a:buClr>
+                <a:srgbClr val="000000"/>
+              </a:buClr>
+              <a:buFont typeface="Arial"/>
+              <a:defRPr sz="1400" b="0" i="0" u="none" strike="noStrike" cap="none">
+                <a:solidFill>
+                  <a:srgbClr val="000000"/>
+                </a:solidFill>
+                <a:latin typeface="Arial"/>
+                <a:ea typeface="Arial"/>
+                <a:cs typeface="Arial"/>
+                <a:sym typeface="Arial"/>
+              </a:defRPr>
+            </a:lvl9pPr>
+          </a:lstStyle>
+          <a:p>
+            <a:fld id="{3BF01AD4-1839-794E-BD90-91AB590172A7}" type="slidenum">
+              <a:rPr lang="en-DE" smtClean="0"/>
+              <a:pPr/>
+              <a:t>‹#›</a:t>
+            </a:fld>
+            <a:endParaRPr lang="en"/>
+          </a:p>
+        </p:txBody>
+      </p:sp>
+      <p:pic>
+        <p:nvPicPr>
+          <p:cNvPr id="64" name="Google Shape;64;p10"/>
+          <p:cNvPicPr preferRelativeResize="0"/>
+          <p:nvPr/>
+        </p:nvPicPr>
+        <p:blipFill>
+          <a:blip r:embed="rId3">
+            <a:extLst>
+              <a:ext uri="{28A0092B-C50C-407E-A947-70E740481C1C}">
+                <a14:useLocalDpi xmlns:a14="http://schemas.microsoft.com/office/drawing/2010/main" val="0"/>
+              </a:ext>
+              <a:ext uri="{96DAC541-7B7A-43D3-8B79-37D633B846F1}">
+                <asvg:svgBlip xmlns:asvg="http://schemas.microsoft.com/office/drawing/2016/SVG/main" r:embed="rId4"/>
+              </a:ext>
+            </a:extLst>
+          </a:blip>
+          <a:srcRect/>
+          <a:stretch/>
+        </p:blipFill>
+        <p:spPr>
+          <a:xfrm>
+            <a:off x="152659" y="6282751"/>
+            <a:ext cx="414528" cy="414528"/>
+          </a:xfrm>
+          <a:prstGeom prst="rect">
+            <a:avLst/>
+          </a:prstGeom>
+          <a:noFill/>
+          <a:ln>
+            <a:noFill/>
+          </a:ln>
+        </p:spPr>
+      </p:pic>
+      <p:sp>
+        <p:nvSpPr>
+          <p:cNvPr id="6" name="Picture Placeholder 5">
+            <a:extLst>
+              <a:ext uri="{FF2B5EF4-FFF2-40B4-BE49-F238E27FC236}">
+                <a16:creationId xmlns:a16="http://schemas.microsoft.com/office/drawing/2014/main" id="{2631C45D-A4AF-1223-E180-EB9E96FA2AE4}"/>
+              </a:ext>
+            </a:extLst>
+          </p:cNvPr>
+          <p:cNvSpPr>
+            <a:spLocks noGrp="1"/>
+          </p:cNvSpPr>
+          <p:nvPr>
+            <p:ph type="pic" sz="quarter" idx="13"/>
+          </p:nvPr>
+        </p:nvSpPr>
+        <p:spPr>
+          <a:xfrm>
+            <a:off x="277813" y="1289050"/>
+            <a:ext cx="3206750" cy="4024313"/>
+          </a:xfrm>
+        </p:spPr>
+        <p:txBody>
+          <a:bodyPr/>
+          <a:lstStyle>
+            <a:lvl1pPr marL="0" indent="0">
+              <a:buNone/>
+              <a:defRPr/>
+            </a:lvl1pPr>
+          </a:lstStyle>
+          <a:p>
+            <a:endParaRPr lang="en-DE" dirty="0"/>
+          </a:p>
+        </p:txBody>
+      </p:sp>
+      <p:sp>
+        <p:nvSpPr>
+          <p:cNvPr id="8" name="Text Placeholder 7">
+            <a:extLst>
+              <a:ext uri="{FF2B5EF4-FFF2-40B4-BE49-F238E27FC236}">
+                <a16:creationId xmlns:a16="http://schemas.microsoft.com/office/drawing/2014/main" id="{E469473F-31A1-DA1A-1446-8C54C99F5645}"/>
+              </a:ext>
+            </a:extLst>
+          </p:cNvPr>
+          <p:cNvSpPr>
+            <a:spLocks noGrp="1"/>
+          </p:cNvSpPr>
+          <p:nvPr>
+            <p:ph type="body" sz="quarter" idx="14"/>
+          </p:nvPr>
+        </p:nvSpPr>
+        <p:spPr>
+          <a:xfrm>
+            <a:off x="4382294" y="1289050"/>
+            <a:ext cx="6911975" cy="1828800"/>
+          </a:xfrm>
+        </p:spPr>
+        <p:txBody>
+          <a:bodyPr/>
+          <a:lstStyle>
+            <a:lvl1pPr marL="0" indent="0">
+              <a:buNone/>
+              <a:defRPr/>
+            </a:lvl1pPr>
+          </a:lstStyle>
+          <a:p>
+            <a:pPr lvl="0"/>
+            <a:endParaRPr lang="en-DE" dirty="0"/>
+          </a:p>
+        </p:txBody>
+      </p:sp>
+      <p:sp>
+        <p:nvSpPr>
+          <p:cNvPr id="9" name="Text Placeholder 7">
+            <a:extLst>
+              <a:ext uri="{FF2B5EF4-FFF2-40B4-BE49-F238E27FC236}">
+                <a16:creationId xmlns:a16="http://schemas.microsoft.com/office/drawing/2014/main" id="{7D27FFAE-CDC4-C5E3-ACA9-B1B660F21931}"/>
+              </a:ext>
+            </a:extLst>
+          </p:cNvPr>
+          <p:cNvSpPr>
+            <a:spLocks noGrp="1"/>
+          </p:cNvSpPr>
+          <p:nvPr>
+            <p:ph type="body" sz="quarter" idx="15"/>
+          </p:nvPr>
+        </p:nvSpPr>
+        <p:spPr>
+          <a:xfrm>
+            <a:off x="4382293" y="3310572"/>
+            <a:ext cx="6911975" cy="1828800"/>
+          </a:xfrm>
+        </p:spPr>
+        <p:txBody>
+          <a:bodyPr/>
+          <a:lstStyle>
+            <a:lvl1pPr marL="0" indent="0">
+              <a:buNone/>
+              <a:defRPr/>
+            </a:lvl1pPr>
+          </a:lstStyle>
+          <a:p>
+            <a:pPr lvl="0"/>
+            <a:endParaRPr lang="en-DE" dirty="0"/>
+          </a:p>
+        </p:txBody>
+      </p:sp>
+      <p:sp>
+        <p:nvSpPr>
+          <p:cNvPr id="12" name="Text Placeholder 11">
+            <a:extLst>
+              <a:ext uri="{FF2B5EF4-FFF2-40B4-BE49-F238E27FC236}">
+                <a16:creationId xmlns:a16="http://schemas.microsoft.com/office/drawing/2014/main" id="{AB34C56E-9BDB-F5E2-1AD6-4C9ACB81D802}"/>
+              </a:ext>
+            </a:extLst>
+          </p:cNvPr>
+          <p:cNvSpPr>
+            <a:spLocks noGrp="1"/>
+          </p:cNvSpPr>
+          <p:nvPr>
+            <p:ph type="body" sz="quarter" idx="16"/>
+          </p:nvPr>
+        </p:nvSpPr>
+        <p:spPr>
+          <a:xfrm>
+            <a:off x="700759" y="6295340"/>
+            <a:ext cx="2302323" cy="408600"/>
+          </a:xfrm>
+        </p:spPr>
+        <p:txBody>
+          <a:bodyPr anchor="ctr">
+            <a:normAutofit/>
+          </a:bodyPr>
+          <a:lstStyle>
+            <a:lvl1pPr marL="0" indent="0">
+              <a:buNone/>
+              <a:defRPr sz="2000"/>
+            </a:lvl1pPr>
+          </a:lstStyle>
+          <a:p>
+            <a:pPr lvl="0"/>
+            <a:endParaRPr lang="en-DE" dirty="0"/>
+          </a:p>
+        </p:txBody>
+      </p:sp>
+    </p:spTree>
+    <p:extLst>
+      <p:ext uri="{BB962C8B-B14F-4D97-AF65-F5344CB8AC3E}">
+        <p14:creationId xmlns:p14="http://schemas.microsoft.com/office/powerpoint/2010/main" val="3658211383"/>
+      </p:ext>
+    </p:extLst>
+  </p:cSld>
+  <p:clrMapOvr>
+    <a:masterClrMapping/>
+  </p:clrMapOvr>
+</p:sldLayout>
+</file>
+
+<file path=ppt/slideLayouts/slideLayout12.xml><?xml version="1.0" encoding="utf-8"?>
+<p:sldLayout xmlns:a="http://schemas.openxmlformats.org/drawingml/2006/main" xmlns:r="http://schemas.openxmlformats.org/officeDocument/2006/relationships" xmlns:p="http://schemas.openxmlformats.org/presentationml/2006/main" showMasterSp="0" matchingName="Dark Title (side)" preserve="1" userDrawn="1">
+  <p:cSld name="Dark Title (side)">
+    <p:bg>
+      <p:bgPr>
+        <a:solidFill>
+          <a:srgbClr val="FFFFFF"/>
+        </a:solidFill>
+        <a:effectLst/>
+      </p:bgPr>
+    </p:bg>
+    <p:spTree>
+      <p:nvGrpSpPr>
+        <p:cNvPr id="1" name="Shape 21"/>
+        <p:cNvGrpSpPr/>
+        <p:nvPr/>
+      </p:nvGrpSpPr>
+      <p:grpSpPr>
+        <a:xfrm>
+          <a:off x="0" y="0"/>
+          <a:ext cx="0" cy="0"/>
+          <a:chOff x="0" y="0"/>
+          <a:chExt cx="0" cy="0"/>
+        </a:xfrm>
+      </p:grpSpPr>
+      <p:pic>
+        <p:nvPicPr>
+          <p:cNvPr id="9" name="Picture 8">
+            <a:extLst>
+              <a:ext uri="{FF2B5EF4-FFF2-40B4-BE49-F238E27FC236}">
+                <a16:creationId xmlns:a16="http://schemas.microsoft.com/office/drawing/2014/main" id="{36419E6D-792C-A294-2683-62B5DDD1906D}"/>
+              </a:ext>
+            </a:extLst>
+          </p:cNvPr>
+          <p:cNvPicPr>
+            <a:picLocks noChangeAspect="1"/>
+          </p:cNvPicPr>
+          <p:nvPr userDrawn="1"/>
+        </p:nvPicPr>
+        <p:blipFill>
+          <a:blip r:embed="rId2">
+            <a:alphaModFix amt="85000"/>
+            <a:extLst>
+              <a:ext uri="{28A0092B-C50C-407E-A947-70E740481C1C}">
+                <a14:useLocalDpi xmlns:a14="http://schemas.microsoft.com/office/drawing/2010/main" val="0"/>
+              </a:ext>
+            </a:extLst>
+          </a:blip>
+          <a:srcRect/>
+          <a:stretch/>
+        </p:blipFill>
+        <p:spPr>
+          <a:xfrm>
+            <a:off x="0" y="0"/>
+            <a:ext cx="12192000" cy="6858000"/>
+          </a:xfrm>
+          <a:prstGeom prst="rect">
+            <a:avLst/>
+          </a:prstGeom>
+        </p:spPr>
+      </p:pic>
+      <p:cxnSp>
+        <p:nvCxnSpPr>
+          <p:cNvPr id="24" name="Google Shape;24;p4"/>
+          <p:cNvCxnSpPr>
+            <a:cxnSpLocks/>
+          </p:cNvCxnSpPr>
+          <p:nvPr/>
+        </p:nvCxnSpPr>
+        <p:spPr>
+          <a:xfrm>
+            <a:off x="3932481" y="1505165"/>
+            <a:ext cx="0" cy="3703899"/>
+          </a:xfrm>
+          <a:prstGeom prst="straightConnector1">
+            <a:avLst/>
+          </a:prstGeom>
+          <a:noFill/>
+          <a:ln w="38100" cap="flat" cmpd="sng">
+            <a:solidFill>
+              <a:schemeClr val="bg1"/>
+            </a:solidFill>
+            <a:prstDash val="solid"/>
+            <a:miter lim="800000"/>
+            <a:headEnd type="none" w="sm" len="sm"/>
+            <a:tailEnd type="none" w="sm" len="sm"/>
+          </a:ln>
+        </p:spPr>
+      </p:cxnSp>
+      <p:pic>
+        <p:nvPicPr>
+          <p:cNvPr id="13" name="Picture Placeholder 38">
+            <a:extLst>
+              <a:ext uri="{FF2B5EF4-FFF2-40B4-BE49-F238E27FC236}">
+                <a16:creationId xmlns:a16="http://schemas.microsoft.com/office/drawing/2014/main" id="{79C63365-FF4F-9CE1-4D8D-35CF8A436F98}"/>
+              </a:ext>
+            </a:extLst>
+          </p:cNvPr>
+          <p:cNvPicPr>
+            <a:picLocks noChangeAspect="1"/>
+          </p:cNvPicPr>
+          <p:nvPr userDrawn="1"/>
+        </p:nvPicPr>
+        <p:blipFill rotWithShape="1">
+          <a:blip r:embed="rId3" cstate="print">
+            <a:extLst>
+              <a:ext uri="{28A0092B-C50C-407E-A947-70E740481C1C}">
+                <a14:useLocalDpi xmlns:a14="http://schemas.microsoft.com/office/drawing/2010/main" val="0"/>
+              </a:ext>
+            </a:extLst>
+          </a:blip>
+          <a:srcRect l="21021" r="-224"/>
+          <a:stretch/>
+        </p:blipFill>
+        <p:spPr>
+          <a:xfrm>
+            <a:off x="287847" y="4311065"/>
+            <a:ext cx="3428575" cy="862663"/>
+          </a:xfrm>
+          <a:prstGeom prst="rect">
+            <a:avLst/>
+          </a:prstGeom>
+        </p:spPr>
+      </p:pic>
+      <p:sp>
+        <p:nvSpPr>
+          <p:cNvPr id="3" name="Subtitle 2">
+            <a:extLst>
+              <a:ext uri="{FF2B5EF4-FFF2-40B4-BE49-F238E27FC236}">
+                <a16:creationId xmlns:a16="http://schemas.microsoft.com/office/drawing/2014/main" id="{1F06C64B-0747-1E3C-2F6F-023166FCC9D7}"/>
+              </a:ext>
+            </a:extLst>
+          </p:cNvPr>
+          <p:cNvSpPr>
+            <a:spLocks noGrp="1"/>
+          </p:cNvSpPr>
+          <p:nvPr>
+            <p:ph type="subTitle" idx="1" hasCustomPrompt="1"/>
+          </p:nvPr>
+        </p:nvSpPr>
+        <p:spPr>
+          <a:xfrm>
+            <a:off x="4003842" y="2772613"/>
+            <a:ext cx="8031731" cy="1374157"/>
+          </a:xfrm>
+        </p:spPr>
+        <p:txBody>
+          <a:bodyPr/>
+          <a:lstStyle>
+            <a:lvl1pPr marL="0" indent="0" algn="l">
+              <a:buNone/>
+              <a:defRPr sz="2400"/>
+            </a:lvl1pPr>
+            <a:lvl2pPr marL="457200" indent="0" algn="ctr">
+              <a:buNone/>
+              <a:defRPr sz="2000"/>
+            </a:lvl2pPr>
+            <a:lvl3pPr marL="914400" indent="0" algn="ctr">
+              <a:buNone/>
+              <a:defRPr sz="1800"/>
+            </a:lvl3pPr>
+            <a:lvl4pPr marL="1371600" indent="0" algn="ctr">
+              <a:buNone/>
+              <a:defRPr sz="1600"/>
+            </a:lvl4pPr>
+            <a:lvl5pPr marL="1828800" indent="0" algn="ctr">
+              <a:buNone/>
+              <a:defRPr sz="1600"/>
+            </a:lvl5pPr>
+            <a:lvl6pPr marL="2286000" indent="0" algn="ctr">
+              <a:buNone/>
+              <a:defRPr sz="1600"/>
+            </a:lvl6pPr>
+            <a:lvl7pPr marL="2743200" indent="0" algn="ctr">
+              <a:buNone/>
+              <a:defRPr sz="1600"/>
+            </a:lvl7pPr>
+            <a:lvl8pPr marL="3200400" indent="0" algn="ctr">
+              <a:buNone/>
+              <a:defRPr sz="1600"/>
+            </a:lvl8pPr>
+            <a:lvl9pPr marL="3657600" indent="0" algn="ctr">
+              <a:buNone/>
+              <a:defRPr sz="1600"/>
+            </a:lvl9pPr>
+          </a:lstStyle>
+          <a:p>
+            <a:r>
+              <a:rPr lang="en-GB" dirty="0"/>
+              <a:t>[Full name, including title and/or post-name letters] [Full author list, if required] [Institution(s)]</a:t>
+            </a:r>
+          </a:p>
+          <a:p>
+            <a:endParaRPr lang="en-GB" dirty="0"/>
+          </a:p>
+        </p:txBody>
+      </p:sp>
+      <p:sp>
+        <p:nvSpPr>
+          <p:cNvPr id="5" name="Title 11">
+            <a:extLst>
+              <a:ext uri="{FF2B5EF4-FFF2-40B4-BE49-F238E27FC236}">
+                <a16:creationId xmlns:a16="http://schemas.microsoft.com/office/drawing/2014/main" id="{C1C11967-B9EF-8DFC-1D07-D3C98B4BC9A6}"/>
+              </a:ext>
+            </a:extLst>
+          </p:cNvPr>
+          <p:cNvSpPr>
+            <a:spLocks noGrp="1"/>
+          </p:cNvSpPr>
+          <p:nvPr>
+            <p:ph type="title"/>
+          </p:nvPr>
+        </p:nvSpPr>
+        <p:spPr>
+          <a:xfrm>
+            <a:off x="4004268" y="1519073"/>
+            <a:ext cx="8031731" cy="1108624"/>
+          </a:xfrm>
+        </p:spPr>
+        <p:txBody>
+          <a:bodyPr anchor="b">
+            <a:normAutofit/>
+          </a:bodyPr>
+          <a:lstStyle>
+            <a:lvl1pPr>
+              <a:defRPr sz="3600">
+                <a:solidFill>
+                  <a:srgbClr val="FFFFFF"/>
+                </a:solidFill>
+              </a:defRPr>
+            </a:lvl1pPr>
+          </a:lstStyle>
+          <a:p>
+            <a:r>
+              <a:rPr lang="en-GB" dirty="0"/>
+              <a:t>Click to edit Master title style</a:t>
+            </a:r>
+            <a:endParaRPr lang="en-DE" dirty="0"/>
+          </a:p>
+        </p:txBody>
+      </p:sp>
+      <p:sp>
+        <p:nvSpPr>
+          <p:cNvPr id="7" name="Content Placeholder 3">
+            <a:extLst>
+              <a:ext uri="{FF2B5EF4-FFF2-40B4-BE49-F238E27FC236}">
+                <a16:creationId xmlns:a16="http://schemas.microsoft.com/office/drawing/2014/main" id="{87A97C8E-5DDF-1A84-41CE-EAEE753B7FF2}"/>
+              </a:ext>
+            </a:extLst>
+          </p:cNvPr>
+          <p:cNvSpPr>
+            <a:spLocks noGrp="1"/>
+          </p:cNvSpPr>
+          <p:nvPr>
+            <p:ph sz="quarter" idx="10" hasCustomPrompt="1"/>
+          </p:nvPr>
+        </p:nvSpPr>
+        <p:spPr>
+          <a:xfrm>
+            <a:off x="4003843" y="4455981"/>
+            <a:ext cx="8031730" cy="753083"/>
+          </a:xfrm>
+        </p:spPr>
+        <p:txBody>
+          <a:bodyPr>
+            <a:normAutofit/>
+          </a:bodyPr>
+          <a:lstStyle>
+            <a:lvl1pPr marL="0" indent="0">
+              <a:buNone/>
+              <a:defRPr sz="1800">
+                <a:solidFill>
+                  <a:schemeClr val="tx1">
+                    <a:lumMod val="65000"/>
+                    <a:lumOff val="35000"/>
+                  </a:schemeClr>
+                </a:solidFill>
+              </a:defRPr>
+            </a:lvl1pPr>
+          </a:lstStyle>
+          <a:p>
+            <a:pPr lvl="0"/>
+            <a:r>
+              <a:rPr lang="en-DE" dirty="0"/>
+              <a:t>[Event date], [Event name]</a:t>
+            </a:r>
+          </a:p>
+        </p:txBody>
+      </p:sp>
+      <p:pic>
+        <p:nvPicPr>
+          <p:cNvPr id="11" name="Picture 10">
+            <a:extLst>
+              <a:ext uri="{FF2B5EF4-FFF2-40B4-BE49-F238E27FC236}">
+                <a16:creationId xmlns:a16="http://schemas.microsoft.com/office/drawing/2014/main" id="{283C8477-FEFA-99DC-C8C9-EC963E0CA7B6}"/>
+              </a:ext>
+            </a:extLst>
+          </p:cNvPr>
+          <p:cNvPicPr>
+            <a:picLocks noChangeAspect="1"/>
+          </p:cNvPicPr>
+          <p:nvPr userDrawn="1"/>
+        </p:nvPicPr>
+        <p:blipFill>
+          <a:blip r:embed="rId4">
+            <a:extLst>
+              <a:ext uri="{28A0092B-C50C-407E-A947-70E740481C1C}">
+                <a14:useLocalDpi xmlns:a14="http://schemas.microsoft.com/office/drawing/2010/main" val="0"/>
+              </a:ext>
+            </a:extLst>
+          </a:blip>
+          <a:stretch>
+            <a:fillRect/>
+          </a:stretch>
+        </p:blipFill>
+        <p:spPr>
+          <a:xfrm>
+            <a:off x="1135087" y="2240674"/>
+            <a:ext cx="1734093" cy="1734093"/>
+          </a:xfrm>
+          <a:prstGeom prst="rect">
+            <a:avLst/>
+          </a:prstGeom>
+        </p:spPr>
+      </p:pic>
+    </p:spTree>
+    <p:extLst>
+      <p:ext uri="{BB962C8B-B14F-4D97-AF65-F5344CB8AC3E}">
+        <p14:creationId xmlns:p14="http://schemas.microsoft.com/office/powerpoint/2010/main" val="3840208296"/>
+      </p:ext>
+    </p:extLst>
+  </p:cSld>
+  <p:clrMapOvr>
+    <a:masterClrMapping/>
+  </p:clrMapOvr>
+</p:sldLayout>
+</file>
+
+<file path=ppt/slideLayouts/slideLayout13.xml><?xml version="1.0" encoding="utf-8"?>
+<p:sldLayout xmlns:a="http://schemas.openxmlformats.org/drawingml/2006/main" xmlns:r="http://schemas.openxmlformats.org/officeDocument/2006/relationships" xmlns:p="http://schemas.openxmlformats.org/presentationml/2006/main" showMasterSp="0" matchingName="TITLE_2" preserve="1">
+  <p:cSld name="TITLE_2">
+    <p:spTree>
+      <p:nvGrpSpPr>
+        <p:cNvPr id="1" name="Shape 66"/>
+        <p:cNvGrpSpPr/>
+        <p:nvPr/>
+      </p:nvGrpSpPr>
+      <p:grpSpPr>
+        <a:xfrm>
+          <a:off x="0" y="0"/>
+          <a:ext cx="0" cy="0"/>
+          <a:chOff x="0" y="0"/>
+          <a:chExt cx="0" cy="0"/>
+        </a:xfrm>
+      </p:grpSpPr>
+      <p:pic>
+        <p:nvPicPr>
+          <p:cNvPr id="3" name="Picture 2">
+            <a:extLst>
+              <a:ext uri="{FF2B5EF4-FFF2-40B4-BE49-F238E27FC236}">
+                <a16:creationId xmlns:a16="http://schemas.microsoft.com/office/drawing/2014/main" id="{CE9D00BC-3D57-EDF1-5A7C-9E84FDAA4BA6}"/>
+              </a:ext>
+            </a:extLst>
+          </p:cNvPr>
+          <p:cNvPicPr>
+            <a:picLocks noChangeAspect="1"/>
+          </p:cNvPicPr>
+          <p:nvPr userDrawn="1"/>
+        </p:nvPicPr>
+        <p:blipFill>
+          <a:blip r:embed="rId2">
+            <a:alphaModFix amt="85000"/>
+            <a:extLst>
+              <a:ext uri="{28A0092B-C50C-407E-A947-70E740481C1C}">
+                <a14:useLocalDpi xmlns:a14="http://schemas.microsoft.com/office/drawing/2010/main" val="0"/>
+              </a:ext>
+            </a:extLst>
+          </a:blip>
+          <a:srcRect/>
+          <a:stretch/>
+        </p:blipFill>
+        <p:spPr>
+          <a:xfrm>
+            <a:off x="0" y="0"/>
+            <a:ext cx="12192000" cy="6858000"/>
+          </a:xfrm>
+          <a:prstGeom prst="rect">
+            <a:avLst/>
+          </a:prstGeom>
+        </p:spPr>
+      </p:pic>
+      <p:sp>
+        <p:nvSpPr>
+          <p:cNvPr id="67" name="Google Shape;67;p11"/>
+          <p:cNvSpPr txBox="1">
+            <a:spLocks noGrp="1"/>
+          </p:cNvSpPr>
+          <p:nvPr>
+            <p:ph type="ctrTitle"/>
+          </p:nvPr>
+        </p:nvSpPr>
+        <p:spPr>
+          <a:xfrm>
+            <a:off x="415611" y="992767"/>
+            <a:ext cx="11360800" cy="2736800"/>
+          </a:xfrm>
+          <a:prstGeom prst="rect">
+            <a:avLst/>
+          </a:prstGeom>
+        </p:spPr>
+        <p:txBody>
+          <a:bodyPr spcFirstLastPara="1" wrap="square" lIns="91425" tIns="45700" rIns="91425" bIns="45700" anchor="b" anchorCtr="0">
+            <a:noAutofit/>
+          </a:bodyPr>
+          <a:lstStyle>
+            <a:lvl1pPr lvl="0" algn="ctr" rtl="0">
+              <a:spcBef>
+                <a:spcPts val="0"/>
+              </a:spcBef>
+              <a:spcAft>
+                <a:spcPts val="0"/>
+              </a:spcAft>
+              <a:buSzPts val="5200"/>
+              <a:buNone/>
+              <a:defRPr sz="6933">
+                <a:solidFill>
+                  <a:srgbClr val="0E2D38"/>
+                </a:solidFill>
+              </a:defRPr>
+            </a:lvl1pPr>
+            <a:lvl2pPr lvl="1" algn="ctr" rtl="0">
+              <a:spcBef>
+                <a:spcPts val="0"/>
+              </a:spcBef>
+              <a:spcAft>
+                <a:spcPts val="0"/>
+              </a:spcAft>
+              <a:buSzPts val="5200"/>
+              <a:buNone/>
+              <a:defRPr sz="6933"/>
+            </a:lvl2pPr>
+            <a:lvl3pPr lvl="2" algn="ctr" rtl="0">
+              <a:spcBef>
+                <a:spcPts val="0"/>
+              </a:spcBef>
+              <a:spcAft>
+                <a:spcPts val="0"/>
+              </a:spcAft>
+              <a:buSzPts val="5200"/>
+              <a:buNone/>
+              <a:defRPr sz="6933"/>
+            </a:lvl3pPr>
+            <a:lvl4pPr lvl="3" algn="ctr" rtl="0">
+              <a:spcBef>
+                <a:spcPts val="0"/>
+              </a:spcBef>
+              <a:spcAft>
+                <a:spcPts val="0"/>
+              </a:spcAft>
+              <a:buSzPts val="5200"/>
+              <a:buNone/>
+              <a:defRPr sz="6933"/>
+            </a:lvl4pPr>
+            <a:lvl5pPr lvl="4" algn="ctr" rtl="0">
+              <a:spcBef>
+                <a:spcPts val="0"/>
+              </a:spcBef>
+              <a:spcAft>
+                <a:spcPts val="0"/>
+              </a:spcAft>
+              <a:buSzPts val="5200"/>
+              <a:buNone/>
+              <a:defRPr sz="6933"/>
+            </a:lvl5pPr>
+            <a:lvl6pPr lvl="5" algn="ctr" rtl="0">
+              <a:spcBef>
+                <a:spcPts val="0"/>
+              </a:spcBef>
+              <a:spcAft>
+                <a:spcPts val="0"/>
+              </a:spcAft>
+              <a:buSzPts val="5200"/>
+              <a:buNone/>
+              <a:defRPr sz="6933"/>
+            </a:lvl6pPr>
+            <a:lvl7pPr lvl="6" algn="ctr" rtl="0">
+              <a:spcBef>
+                <a:spcPts val="0"/>
+              </a:spcBef>
+              <a:spcAft>
+                <a:spcPts val="0"/>
+              </a:spcAft>
+              <a:buSzPts val="5200"/>
+              <a:buNone/>
+              <a:defRPr sz="6933"/>
+            </a:lvl7pPr>
+            <a:lvl8pPr lvl="7" algn="ctr" rtl="0">
+              <a:spcBef>
+                <a:spcPts val="0"/>
+              </a:spcBef>
+              <a:spcAft>
+                <a:spcPts val="0"/>
+              </a:spcAft>
+              <a:buSzPts val="5200"/>
+              <a:buNone/>
+              <a:defRPr sz="6933"/>
+            </a:lvl8pPr>
+            <a:lvl9pPr lvl="8" algn="ctr" rtl="0">
+              <a:spcBef>
+                <a:spcPts val="0"/>
+              </a:spcBef>
+              <a:spcAft>
+                <a:spcPts val="0"/>
+              </a:spcAft>
+              <a:buSzPts val="5200"/>
+              <a:buNone/>
+              <a:defRPr sz="6933"/>
+            </a:lvl9pPr>
+          </a:lstStyle>
+          <a:p>
+            <a:endParaRPr dirty="0"/>
+          </a:p>
+        </p:txBody>
+      </p:sp>
+      <p:sp>
+        <p:nvSpPr>
+          <p:cNvPr id="68" name="Google Shape;68;p11"/>
+          <p:cNvSpPr txBox="1">
+            <a:spLocks noGrp="1"/>
+          </p:cNvSpPr>
+          <p:nvPr>
+            <p:ph type="subTitle" idx="1"/>
+          </p:nvPr>
+        </p:nvSpPr>
+        <p:spPr>
+          <a:xfrm>
+            <a:off x="415600" y="3778833"/>
+            <a:ext cx="11360800" cy="1056800"/>
+          </a:xfrm>
+          <a:prstGeom prst="rect">
+            <a:avLst/>
+          </a:prstGeom>
+        </p:spPr>
+        <p:txBody>
+          <a:bodyPr spcFirstLastPara="1" wrap="square" lIns="91425" tIns="45700" rIns="91425" bIns="45700" anchor="t" anchorCtr="0">
+            <a:normAutofit/>
+          </a:bodyPr>
+          <a:lstStyle>
+            <a:lvl1pPr lvl="0" algn="ctr" rtl="0">
+              <a:lnSpc>
+                <a:spcPct val="100000"/>
+              </a:lnSpc>
+              <a:spcBef>
+                <a:spcPts val="800"/>
+              </a:spcBef>
+              <a:spcAft>
+                <a:spcPts val="0"/>
+              </a:spcAft>
+              <a:buSzPts val="2800"/>
+              <a:buNone/>
+              <a:defRPr sz="3733">
+                <a:solidFill>
+                  <a:schemeClr val="bg1"/>
+                </a:solidFill>
+              </a:defRPr>
+            </a:lvl1pPr>
+            <a:lvl2pPr lvl="1" algn="ctr" rtl="0">
+              <a:lnSpc>
+                <a:spcPct val="100000"/>
+              </a:lnSpc>
+              <a:spcBef>
+                <a:spcPts val="400"/>
+              </a:spcBef>
+              <a:spcAft>
+                <a:spcPts val="0"/>
+              </a:spcAft>
+              <a:buSzPts val="2800"/>
+              <a:buNone/>
+              <a:defRPr sz="3733"/>
+            </a:lvl2pPr>
+            <a:lvl3pPr lvl="2" algn="ctr" rtl="0">
+              <a:lnSpc>
+                <a:spcPct val="100000"/>
+              </a:lnSpc>
+              <a:spcBef>
+                <a:spcPts val="400"/>
+              </a:spcBef>
+              <a:spcAft>
+                <a:spcPts val="0"/>
+              </a:spcAft>
+              <a:buSzPts val="2800"/>
+              <a:buNone/>
+              <a:defRPr sz="3733"/>
+            </a:lvl3pPr>
+            <a:lvl4pPr lvl="3" algn="ctr" rtl="0">
+              <a:lnSpc>
+                <a:spcPct val="100000"/>
+              </a:lnSpc>
+              <a:spcBef>
+                <a:spcPts val="400"/>
+              </a:spcBef>
+              <a:spcAft>
+                <a:spcPts val="0"/>
+              </a:spcAft>
+              <a:buSzPts val="2800"/>
+              <a:buNone/>
+              <a:defRPr sz="3733"/>
+            </a:lvl4pPr>
+            <a:lvl5pPr lvl="4" algn="ctr" rtl="0">
+              <a:lnSpc>
+                <a:spcPct val="100000"/>
+              </a:lnSpc>
+              <a:spcBef>
+                <a:spcPts val="667"/>
+              </a:spcBef>
+              <a:spcAft>
+                <a:spcPts val="0"/>
+              </a:spcAft>
+              <a:buSzPts val="2800"/>
+              <a:buNone/>
+              <a:defRPr sz="3733"/>
+            </a:lvl5pPr>
+            <a:lvl6pPr lvl="5" algn="ctr" rtl="0">
+              <a:lnSpc>
+                <a:spcPct val="100000"/>
+              </a:lnSpc>
+              <a:spcBef>
+                <a:spcPts val="667"/>
+              </a:spcBef>
+              <a:spcAft>
+                <a:spcPts val="0"/>
+              </a:spcAft>
+              <a:buSzPts val="2800"/>
+              <a:buNone/>
+              <a:defRPr sz="3733"/>
+            </a:lvl6pPr>
+            <a:lvl7pPr lvl="6" algn="ctr" rtl="0">
+              <a:lnSpc>
+                <a:spcPct val="100000"/>
+              </a:lnSpc>
+              <a:spcBef>
+                <a:spcPts val="667"/>
+              </a:spcBef>
+              <a:spcAft>
+                <a:spcPts val="0"/>
+              </a:spcAft>
+              <a:buSzPts val="2800"/>
+              <a:buNone/>
+              <a:defRPr sz="3733"/>
+            </a:lvl7pPr>
+            <a:lvl8pPr lvl="7" algn="ctr" rtl="0">
+              <a:lnSpc>
+                <a:spcPct val="100000"/>
+              </a:lnSpc>
+              <a:spcBef>
+                <a:spcPts val="667"/>
+              </a:spcBef>
+              <a:spcAft>
+                <a:spcPts val="0"/>
+              </a:spcAft>
+              <a:buSzPts val="2800"/>
+              <a:buNone/>
+              <a:defRPr sz="3733"/>
+            </a:lvl8pPr>
+            <a:lvl9pPr lvl="8" algn="ctr" rtl="0">
+              <a:lnSpc>
+                <a:spcPct val="100000"/>
+              </a:lnSpc>
+              <a:spcBef>
+                <a:spcPts val="667"/>
+              </a:spcBef>
+              <a:spcAft>
+                <a:spcPts val="0"/>
+              </a:spcAft>
+              <a:buSzPts val="2800"/>
+              <a:buNone/>
+              <a:defRPr sz="3733"/>
+            </a:lvl9pPr>
+          </a:lstStyle>
+          <a:p>
+            <a:endParaRPr dirty="0"/>
+          </a:p>
+        </p:txBody>
+      </p:sp>
+    </p:spTree>
+    <p:extLst>
+      <p:ext uri="{BB962C8B-B14F-4D97-AF65-F5344CB8AC3E}">
+        <p14:creationId xmlns:p14="http://schemas.microsoft.com/office/powerpoint/2010/main" val="399611620"/>
+      </p:ext>
+    </p:extLst>
+  </p:cSld>
+  <p:clrMapOvr>
+    <a:masterClrMapping/>
+  </p:clrMapOvr>
+</p:sldLayout>
+</file>
+
+<file path=ppt/slideLayouts/slideLayout14.xml><?xml version="1.0" encoding="utf-8"?>
 <p:sldLayout xmlns:a="http://schemas.openxmlformats.org/drawingml/2006/main" xmlns:r="http://schemas.openxmlformats.org/officeDocument/2006/relationships" xmlns:p="http://schemas.openxmlformats.org/presentationml/2006/main" preserve="1" userDrawn="1">
   <p:cSld name="Title slide">
     <p:spTree>
@@ -741,7 +3442,11 @@
           <a:lstStyle>
             <a:lvl1pPr marL="0" indent="0" algn="l">
               <a:buNone/>
-              <a:defRPr sz="2400"/>
+              <a:defRPr sz="2400">
+                <a:solidFill>
+                  <a:srgbClr val="0E2D38"/>
+                </a:solidFill>
+              </a:defRPr>
             </a:lvl1pPr>
             <a:lvl2pPr marL="457200" indent="0" algn="ctr">
               <a:buNone/>
@@ -815,7 +3520,11 @@
           </a:bodyPr>
           <a:lstStyle>
             <a:lvl1pPr>
-              <a:defRPr sz="3600"/>
+              <a:defRPr sz="3600">
+                <a:solidFill>
+                  <a:srgbClr val="0E2D38"/>
+                </a:solidFill>
+              </a:defRPr>
             </a:lvl1pPr>
           </a:lstStyle>
           <a:p>
@@ -878,7 +3587,7 @@
     </p:spTree>
     <p:extLst>
       <p:ext uri="{BB962C8B-B14F-4D97-AF65-F5344CB8AC3E}">
-        <p14:creationId xmlns:p14="http://schemas.microsoft.com/office/powerpoint/2010/main" val="2219985906"/>
+        <p14:creationId xmlns:p14="http://schemas.microsoft.com/office/powerpoint/2010/main" val="4061247862"/>
       </p:ext>
     </p:extLst>
   </p:cSld>
@@ -888,7 +3597,463 @@
 </p:sldLayout>
 </file>
 
-<file path=ppt/slideLayouts/slideLayout10.xml><?xml version="1.0" encoding="utf-8"?>
+<file path=ppt/slideLayouts/slideLayout15.xml><?xml version="1.0" encoding="utf-8"?>
+<p:sldLayout xmlns:a="http://schemas.openxmlformats.org/drawingml/2006/main" xmlns:r="http://schemas.openxmlformats.org/officeDocument/2006/relationships" xmlns:p="http://schemas.openxmlformats.org/presentationml/2006/main" preserve="1" userDrawn="1">
+  <p:cSld name="Slide with text/content (1 column)">
+    <p:spTree>
+      <p:nvGrpSpPr>
+        <p:cNvPr id="1" name=""/>
+        <p:cNvGrpSpPr/>
+        <p:nvPr/>
+      </p:nvGrpSpPr>
+      <p:grpSpPr>
+        <a:xfrm>
+          <a:off x="0" y="0"/>
+          <a:ext cx="0" cy="0"/>
+          <a:chOff x="0" y="0"/>
+          <a:chExt cx="0" cy="0"/>
+        </a:xfrm>
+      </p:grpSpPr>
+      <p:sp>
+        <p:nvSpPr>
+          <p:cNvPr id="3" name="Content Placeholder 2">
+            <a:extLst>
+              <a:ext uri="{FF2B5EF4-FFF2-40B4-BE49-F238E27FC236}">
+                <a16:creationId xmlns:a16="http://schemas.microsoft.com/office/drawing/2014/main" id="{C42B0433-50EC-6784-D802-9118B6C69D19}"/>
+              </a:ext>
+            </a:extLst>
+          </p:cNvPr>
+          <p:cNvSpPr>
+            <a:spLocks noGrp="1"/>
+          </p:cNvSpPr>
+          <p:nvPr>
+            <p:ph idx="1"/>
+          </p:nvPr>
+        </p:nvSpPr>
+        <p:spPr/>
+        <p:txBody>
+          <a:bodyPr>
+            <a:normAutofit/>
+          </a:bodyPr>
+          <a:lstStyle>
+            <a:lvl1pPr>
+              <a:defRPr sz="2800"/>
+            </a:lvl1pPr>
+            <a:lvl2pPr>
+              <a:defRPr sz="2400"/>
+            </a:lvl2pPr>
+            <a:lvl3pPr>
+              <a:defRPr sz="2000"/>
+            </a:lvl3pPr>
+            <a:lvl4pPr>
+              <a:defRPr sz="1800"/>
+            </a:lvl4pPr>
+            <a:lvl5pPr>
+              <a:defRPr sz="1800"/>
+            </a:lvl5pPr>
+          </a:lstStyle>
+          <a:p>
+            <a:pPr lvl="0"/>
+            <a:r>
+              <a:rPr lang="en-GB" dirty="0"/>
+              <a:t>Click to edit Master text styles</a:t>
+            </a:r>
+          </a:p>
+          <a:p>
+            <a:pPr lvl="1"/>
+            <a:r>
+              <a:rPr lang="en-GB" dirty="0"/>
+              <a:t>Second level</a:t>
+            </a:r>
+          </a:p>
+          <a:p>
+            <a:pPr lvl="2"/>
+            <a:r>
+              <a:rPr lang="en-GB" dirty="0"/>
+              <a:t>Third level</a:t>
+            </a:r>
+          </a:p>
+          <a:p>
+            <a:pPr lvl="3"/>
+            <a:r>
+              <a:rPr lang="en-GB" dirty="0"/>
+              <a:t>Fourth level</a:t>
+            </a:r>
+          </a:p>
+          <a:p>
+            <a:pPr lvl="4"/>
+            <a:r>
+              <a:rPr lang="en-GB" dirty="0"/>
+              <a:t>Fifth level</a:t>
+            </a:r>
+            <a:endParaRPr lang="en-DE" dirty="0"/>
+          </a:p>
+        </p:txBody>
+      </p:sp>
+      <p:sp>
+        <p:nvSpPr>
+          <p:cNvPr id="4" name="Title 3">
+            <a:extLst>
+              <a:ext uri="{FF2B5EF4-FFF2-40B4-BE49-F238E27FC236}">
+                <a16:creationId xmlns:a16="http://schemas.microsoft.com/office/drawing/2014/main" id="{CADA256B-B176-F1F9-4E08-9BC37F45D258}"/>
+              </a:ext>
+            </a:extLst>
+          </p:cNvPr>
+          <p:cNvSpPr>
+            <a:spLocks noGrp="1"/>
+          </p:cNvSpPr>
+          <p:nvPr>
+            <p:ph type="title"/>
+          </p:nvPr>
+        </p:nvSpPr>
+        <p:spPr/>
+        <p:txBody>
+          <a:bodyPr/>
+          <a:lstStyle/>
+          <a:p>
+            <a:r>
+              <a:rPr lang="en-GB"/>
+              <a:t>Click to edit Master title style</a:t>
+            </a:r>
+            <a:endParaRPr lang="en-DE"/>
+          </a:p>
+        </p:txBody>
+      </p:sp>
+      <p:sp>
+        <p:nvSpPr>
+          <p:cNvPr id="5" name="Text Placeholder 5">
+            <a:extLst>
+              <a:ext uri="{FF2B5EF4-FFF2-40B4-BE49-F238E27FC236}">
+                <a16:creationId xmlns:a16="http://schemas.microsoft.com/office/drawing/2014/main" id="{0B889C71-D37B-E007-AF76-0066DE5AF167}"/>
+              </a:ext>
+            </a:extLst>
+          </p:cNvPr>
+          <p:cNvSpPr>
+            <a:spLocks noGrp="1"/>
+          </p:cNvSpPr>
+          <p:nvPr>
+            <p:ph type="body" sz="quarter" idx="11"/>
+          </p:nvPr>
+        </p:nvSpPr>
+        <p:spPr>
+          <a:xfrm>
+            <a:off x="6831013" y="6225115"/>
+            <a:ext cx="3549650" cy="365125"/>
+          </a:xfrm>
+        </p:spPr>
+        <p:txBody>
+          <a:bodyPr>
+            <a:noAutofit/>
+          </a:bodyPr>
+          <a:lstStyle>
+            <a:lvl1pPr marL="0" indent="0">
+              <a:buNone/>
+              <a:defRPr sz="2000"/>
+            </a:lvl1pPr>
+          </a:lstStyle>
+          <a:p>
+            <a:pPr lvl="0"/>
+            <a:endParaRPr lang="en-DE" dirty="0"/>
+          </a:p>
+        </p:txBody>
+      </p:sp>
+      <p:sp>
+        <p:nvSpPr>
+          <p:cNvPr id="6" name="Slide Number Placeholder 5">
+            <a:extLst>
+              <a:ext uri="{FF2B5EF4-FFF2-40B4-BE49-F238E27FC236}">
+                <a16:creationId xmlns:a16="http://schemas.microsoft.com/office/drawing/2014/main" id="{36313234-B904-AA1D-6FDE-7C8C73A7BC42}"/>
+              </a:ext>
+            </a:extLst>
+          </p:cNvPr>
+          <p:cNvSpPr>
+            <a:spLocks noGrp="1"/>
+          </p:cNvSpPr>
+          <p:nvPr>
+            <p:ph type="sldNum" sz="quarter" idx="12"/>
+          </p:nvPr>
+        </p:nvSpPr>
+        <p:spPr/>
+        <p:txBody>
+          <a:bodyPr/>
+          <a:lstStyle/>
+          <a:p>
+            <a:fld id="{2C0D6744-4E72-634D-83C3-20CC96599462}" type="slidenum">
+              <a:rPr lang="en-DE" smtClean="0"/>
+              <a:pPr/>
+              <a:t>‹#›</a:t>
+            </a:fld>
+            <a:endParaRPr lang="en-DE" dirty="0"/>
+          </a:p>
+        </p:txBody>
+      </p:sp>
+    </p:spTree>
+    <p:extLst>
+      <p:ext uri="{BB962C8B-B14F-4D97-AF65-F5344CB8AC3E}">
+        <p14:creationId xmlns:p14="http://schemas.microsoft.com/office/powerpoint/2010/main" val="1533962725"/>
+      </p:ext>
+    </p:extLst>
+  </p:cSld>
+  <p:clrMapOvr>
+    <a:masterClrMapping/>
+  </p:clrMapOvr>
+</p:sldLayout>
+</file>
+
+<file path=ppt/slideLayouts/slideLayout16.xml><?xml version="1.0" encoding="utf-8"?>
+<p:sldLayout xmlns:a="http://schemas.openxmlformats.org/drawingml/2006/main" xmlns:r="http://schemas.openxmlformats.org/officeDocument/2006/relationships" xmlns:p="http://schemas.openxmlformats.org/presentationml/2006/main" preserve="1" userDrawn="1">
+  <p:cSld name="Slide with text/content (2 columns)">
+    <p:spTree>
+      <p:nvGrpSpPr>
+        <p:cNvPr id="1" name=""/>
+        <p:cNvGrpSpPr/>
+        <p:nvPr/>
+      </p:nvGrpSpPr>
+      <p:grpSpPr>
+        <a:xfrm>
+          <a:off x="0" y="0"/>
+          <a:ext cx="0" cy="0"/>
+          <a:chOff x="0" y="0"/>
+          <a:chExt cx="0" cy="0"/>
+        </a:xfrm>
+      </p:grpSpPr>
+      <p:sp>
+        <p:nvSpPr>
+          <p:cNvPr id="2" name="Title 1">
+            <a:extLst>
+              <a:ext uri="{FF2B5EF4-FFF2-40B4-BE49-F238E27FC236}">
+                <a16:creationId xmlns:a16="http://schemas.microsoft.com/office/drawing/2014/main" id="{F5293343-BF38-5B08-96D0-93D87ECB824F}"/>
+              </a:ext>
+            </a:extLst>
+          </p:cNvPr>
+          <p:cNvSpPr>
+            <a:spLocks noGrp="1"/>
+          </p:cNvSpPr>
+          <p:nvPr>
+            <p:ph type="title"/>
+          </p:nvPr>
+        </p:nvSpPr>
+        <p:spPr/>
+        <p:txBody>
+          <a:bodyPr/>
+          <a:lstStyle/>
+          <a:p>
+            <a:r>
+              <a:rPr lang="en-GB"/>
+              <a:t>Click to edit Master title style</a:t>
+            </a:r>
+            <a:endParaRPr lang="en-DE"/>
+          </a:p>
+        </p:txBody>
+      </p:sp>
+      <p:sp>
+        <p:nvSpPr>
+          <p:cNvPr id="3" name="Content Placeholder 2">
+            <a:extLst>
+              <a:ext uri="{FF2B5EF4-FFF2-40B4-BE49-F238E27FC236}">
+                <a16:creationId xmlns:a16="http://schemas.microsoft.com/office/drawing/2014/main" id="{5737FC88-B2EE-83A2-FD34-E4C46B52BE16}"/>
+              </a:ext>
+            </a:extLst>
+          </p:cNvPr>
+          <p:cNvSpPr>
+            <a:spLocks noGrp="1"/>
+          </p:cNvSpPr>
+          <p:nvPr>
+            <p:ph sz="half" idx="1"/>
+          </p:nvPr>
+        </p:nvSpPr>
+        <p:spPr>
+          <a:xfrm>
+            <a:off x="156000" y="920749"/>
+            <a:ext cx="5682825" cy="5194301"/>
+          </a:xfrm>
+        </p:spPr>
+        <p:txBody>
+          <a:bodyPr/>
+          <a:lstStyle/>
+          <a:p>
+            <a:pPr lvl="0"/>
+            <a:r>
+              <a:rPr lang="en-GB"/>
+              <a:t>Click to edit Master text styles</a:t>
+            </a:r>
+          </a:p>
+          <a:p>
+            <a:pPr lvl="1"/>
+            <a:r>
+              <a:rPr lang="en-GB"/>
+              <a:t>Second level</a:t>
+            </a:r>
+          </a:p>
+          <a:p>
+            <a:pPr lvl="2"/>
+            <a:r>
+              <a:rPr lang="en-GB"/>
+              <a:t>Third level</a:t>
+            </a:r>
+          </a:p>
+          <a:p>
+            <a:pPr lvl="3"/>
+            <a:r>
+              <a:rPr lang="en-GB"/>
+              <a:t>Fourth level</a:t>
+            </a:r>
+          </a:p>
+          <a:p>
+            <a:pPr lvl="4"/>
+            <a:r>
+              <a:rPr lang="en-GB"/>
+              <a:t>Fifth level</a:t>
+            </a:r>
+            <a:endParaRPr lang="en-DE"/>
+          </a:p>
+        </p:txBody>
+      </p:sp>
+      <p:sp>
+        <p:nvSpPr>
+          <p:cNvPr id="4" name="Content Placeholder 3">
+            <a:extLst>
+              <a:ext uri="{FF2B5EF4-FFF2-40B4-BE49-F238E27FC236}">
+                <a16:creationId xmlns:a16="http://schemas.microsoft.com/office/drawing/2014/main" id="{F80A51E9-7829-7767-4EF5-52DDEEC1A443}"/>
+              </a:ext>
+            </a:extLst>
+          </p:cNvPr>
+          <p:cNvSpPr>
+            <a:spLocks noGrp="1"/>
+          </p:cNvSpPr>
+          <p:nvPr>
+            <p:ph sz="half" idx="2"/>
+          </p:nvPr>
+        </p:nvSpPr>
+        <p:spPr>
+          <a:xfrm>
+            <a:off x="6353177" y="920750"/>
+            <a:ext cx="5686422" cy="5194300"/>
+          </a:xfrm>
+        </p:spPr>
+        <p:txBody>
+          <a:bodyPr/>
+          <a:lstStyle/>
+          <a:p>
+            <a:pPr lvl="0"/>
+            <a:r>
+              <a:rPr lang="en-GB"/>
+              <a:t>Click to edit Master text styles</a:t>
+            </a:r>
+          </a:p>
+          <a:p>
+            <a:pPr lvl="1"/>
+            <a:r>
+              <a:rPr lang="en-GB"/>
+              <a:t>Second level</a:t>
+            </a:r>
+          </a:p>
+          <a:p>
+            <a:pPr lvl="2"/>
+            <a:r>
+              <a:rPr lang="en-GB"/>
+              <a:t>Third level</a:t>
+            </a:r>
+          </a:p>
+          <a:p>
+            <a:pPr lvl="3"/>
+            <a:r>
+              <a:rPr lang="en-GB"/>
+              <a:t>Fourth level</a:t>
+            </a:r>
+          </a:p>
+          <a:p>
+            <a:pPr lvl="4"/>
+            <a:r>
+              <a:rPr lang="en-GB"/>
+              <a:t>Fifth level</a:t>
+            </a:r>
+            <a:endParaRPr lang="en-DE"/>
+          </a:p>
+        </p:txBody>
+      </p:sp>
+      <p:sp>
+        <p:nvSpPr>
+          <p:cNvPr id="6" name="Text Placeholder 5">
+            <a:extLst>
+              <a:ext uri="{FF2B5EF4-FFF2-40B4-BE49-F238E27FC236}">
+                <a16:creationId xmlns:a16="http://schemas.microsoft.com/office/drawing/2014/main" id="{6E2AEAE4-E5C0-8E62-1E70-C1816BF7B7B2}"/>
+              </a:ext>
+            </a:extLst>
+          </p:cNvPr>
+          <p:cNvSpPr>
+            <a:spLocks noGrp="1"/>
+          </p:cNvSpPr>
+          <p:nvPr>
+            <p:ph type="body" sz="quarter" idx="11"/>
+          </p:nvPr>
+        </p:nvSpPr>
+        <p:spPr>
+          <a:xfrm>
+            <a:off x="6831013" y="6225115"/>
+            <a:ext cx="3549650" cy="365125"/>
+          </a:xfrm>
+        </p:spPr>
+        <p:txBody>
+          <a:bodyPr>
+            <a:noAutofit/>
+          </a:bodyPr>
+          <a:lstStyle>
+            <a:lvl1pPr marL="0" indent="0">
+              <a:buNone/>
+              <a:defRPr sz="2000"/>
+            </a:lvl1pPr>
+          </a:lstStyle>
+          <a:p>
+            <a:pPr lvl="0"/>
+            <a:endParaRPr lang="en-DE" dirty="0"/>
+          </a:p>
+        </p:txBody>
+      </p:sp>
+      <p:sp>
+        <p:nvSpPr>
+          <p:cNvPr id="7" name="Slide Number Placeholder 6">
+            <a:extLst>
+              <a:ext uri="{FF2B5EF4-FFF2-40B4-BE49-F238E27FC236}">
+                <a16:creationId xmlns:a16="http://schemas.microsoft.com/office/drawing/2014/main" id="{0B75ABD0-8DAF-DE2A-C821-0F470C992D45}"/>
+              </a:ext>
+            </a:extLst>
+          </p:cNvPr>
+          <p:cNvSpPr>
+            <a:spLocks noGrp="1"/>
+          </p:cNvSpPr>
+          <p:nvPr>
+            <p:ph type="sldNum" sz="quarter" idx="12"/>
+          </p:nvPr>
+        </p:nvSpPr>
+        <p:spPr/>
+        <p:txBody>
+          <a:bodyPr/>
+          <a:lstStyle/>
+          <a:p>
+            <a:fld id="{2C0D6744-4E72-634D-83C3-20CC96599462}" type="slidenum">
+              <a:rPr lang="en-DE" smtClean="0"/>
+              <a:pPr/>
+              <a:t>‹#›</a:t>
+            </a:fld>
+            <a:endParaRPr lang="en-DE" dirty="0"/>
+          </a:p>
+        </p:txBody>
+      </p:sp>
+    </p:spTree>
+    <p:extLst>
+      <p:ext uri="{BB962C8B-B14F-4D97-AF65-F5344CB8AC3E}">
+        <p14:creationId xmlns:p14="http://schemas.microsoft.com/office/powerpoint/2010/main" val="344875001"/>
+      </p:ext>
+    </p:extLst>
+  </p:cSld>
+  <p:clrMapOvr>
+    <a:masterClrMapping/>
+  </p:clrMapOvr>
+</p:sldLayout>
+</file>
+
+<file path=ppt/slideLayouts/slideLayout17.xml><?xml version="1.0" encoding="utf-8"?>
 <p:sldLayout xmlns:a="http://schemas.openxmlformats.org/drawingml/2006/main" xmlns:r="http://schemas.openxmlformats.org/officeDocument/2006/relationships" xmlns:p="http://schemas.openxmlformats.org/presentationml/2006/main" preserve="1" userDrawn="1">
   <p:cSld name="Empty slide with title text">
     <p:spTree>
@@ -947,7 +4112,7 @@
 </p:sldLayout>
 </file>
 
-<file path=ppt/slideLayouts/slideLayout11.xml><?xml version="1.0" encoding="utf-8"?>
+<file path=ppt/slideLayouts/slideLayout18.xml><?xml version="1.0" encoding="utf-8"?>
 <p:sldLayout xmlns:a="http://schemas.openxmlformats.org/drawingml/2006/main" xmlns:r="http://schemas.openxmlformats.org/officeDocument/2006/relationships" xmlns:p="http://schemas.openxmlformats.org/presentationml/2006/main" preserve="1" userDrawn="1">
   <p:cSld name="Empty slide with no title text">
     <p:spTree>
@@ -977,7 +4142,7 @@
 </p:sldLayout>
 </file>
 
-<file path=ppt/slideLayouts/slideLayout12.xml><?xml version="1.0" encoding="utf-8"?>
+<file path=ppt/slideLayouts/slideLayout19.xml><?xml version="1.0" encoding="utf-8"?>
 <p:sldLayout xmlns:a="http://schemas.openxmlformats.org/drawingml/2006/main" xmlns:r="http://schemas.openxmlformats.org/officeDocument/2006/relationships" xmlns:p="http://schemas.openxmlformats.org/presentationml/2006/main" showMasterSp="0" preserve="1" userDrawn="1">
   <p:cSld name="Empty slide">
     <p:spTree>
@@ -1008,6 +4173,1583 @@
 </file>
 
 <file path=ppt/slideLayouts/slideLayout2.xml><?xml version="1.0" encoding="utf-8"?>
+<p:sldLayout xmlns:a="http://schemas.openxmlformats.org/drawingml/2006/main" xmlns:r="http://schemas.openxmlformats.org/officeDocument/2006/relationships" xmlns:p="http://schemas.openxmlformats.org/presentationml/2006/main" showMasterSp="0" matchingName="TITLE_2" preserve="1">
+  <p:cSld name="Section separator">
+    <p:spTree>
+      <p:nvGrpSpPr>
+        <p:cNvPr id="1" name="Shape 66"/>
+        <p:cNvGrpSpPr/>
+        <p:nvPr/>
+      </p:nvGrpSpPr>
+      <p:grpSpPr>
+        <a:xfrm>
+          <a:off x="0" y="0"/>
+          <a:ext cx="0" cy="0"/>
+          <a:chOff x="0" y="0"/>
+          <a:chExt cx="0" cy="0"/>
+        </a:xfrm>
+      </p:grpSpPr>
+      <p:pic>
+        <p:nvPicPr>
+          <p:cNvPr id="5" name="Picture 4">
+            <a:extLst>
+              <a:ext uri="{FF2B5EF4-FFF2-40B4-BE49-F238E27FC236}">
+                <a16:creationId xmlns:a16="http://schemas.microsoft.com/office/drawing/2014/main" id="{79D1EB2D-02D0-0618-85D9-FE1D3382ABAA}"/>
+              </a:ext>
+            </a:extLst>
+          </p:cNvPr>
+          <p:cNvPicPr>
+            <a:picLocks noChangeAspect="1"/>
+          </p:cNvPicPr>
+          <p:nvPr userDrawn="1"/>
+        </p:nvPicPr>
+        <p:blipFill>
+          <a:blip r:embed="rId2">
+            <a:extLst>
+              <a:ext uri="{28A0092B-C50C-407E-A947-70E740481C1C}">
+                <a14:useLocalDpi xmlns:a14="http://schemas.microsoft.com/office/drawing/2010/main" val="0"/>
+              </a:ext>
+            </a:extLst>
+          </a:blip>
+          <a:stretch>
+            <a:fillRect/>
+          </a:stretch>
+        </p:blipFill>
+        <p:spPr>
+          <a:xfrm>
+            <a:off x="0" y="0"/>
+            <a:ext cx="12192000" cy="6858000"/>
+          </a:xfrm>
+          <a:prstGeom prst="rect">
+            <a:avLst/>
+          </a:prstGeom>
+        </p:spPr>
+      </p:pic>
+      <p:sp>
+        <p:nvSpPr>
+          <p:cNvPr id="67" name="Google Shape;67;p11"/>
+          <p:cNvSpPr txBox="1">
+            <a:spLocks noGrp="1"/>
+          </p:cNvSpPr>
+          <p:nvPr>
+            <p:ph type="ctrTitle"/>
+          </p:nvPr>
+        </p:nvSpPr>
+        <p:spPr>
+          <a:xfrm>
+            <a:off x="415611" y="992767"/>
+            <a:ext cx="11360800" cy="2736800"/>
+          </a:xfrm>
+          <a:prstGeom prst="rect">
+            <a:avLst/>
+          </a:prstGeom>
+        </p:spPr>
+        <p:txBody>
+          <a:bodyPr spcFirstLastPara="1" wrap="square" lIns="91425" tIns="45700" rIns="91425" bIns="45700" anchor="b" anchorCtr="0">
+            <a:noAutofit/>
+          </a:bodyPr>
+          <a:lstStyle>
+            <a:lvl1pPr lvl="0" algn="ctr" rtl="0">
+              <a:spcBef>
+                <a:spcPts val="0"/>
+              </a:spcBef>
+              <a:spcAft>
+                <a:spcPts val="0"/>
+              </a:spcAft>
+              <a:buSzPts val="5200"/>
+              <a:buNone/>
+              <a:defRPr sz="6933">
+                <a:solidFill>
+                  <a:srgbClr val="0E2D38"/>
+                </a:solidFill>
+              </a:defRPr>
+            </a:lvl1pPr>
+            <a:lvl2pPr lvl="1" algn="ctr" rtl="0">
+              <a:spcBef>
+                <a:spcPts val="0"/>
+              </a:spcBef>
+              <a:spcAft>
+                <a:spcPts val="0"/>
+              </a:spcAft>
+              <a:buSzPts val="5200"/>
+              <a:buNone/>
+              <a:defRPr sz="6933"/>
+            </a:lvl2pPr>
+            <a:lvl3pPr lvl="2" algn="ctr" rtl="0">
+              <a:spcBef>
+                <a:spcPts val="0"/>
+              </a:spcBef>
+              <a:spcAft>
+                <a:spcPts val="0"/>
+              </a:spcAft>
+              <a:buSzPts val="5200"/>
+              <a:buNone/>
+              <a:defRPr sz="6933"/>
+            </a:lvl3pPr>
+            <a:lvl4pPr lvl="3" algn="ctr" rtl="0">
+              <a:spcBef>
+                <a:spcPts val="0"/>
+              </a:spcBef>
+              <a:spcAft>
+                <a:spcPts val="0"/>
+              </a:spcAft>
+              <a:buSzPts val="5200"/>
+              <a:buNone/>
+              <a:defRPr sz="6933"/>
+            </a:lvl4pPr>
+            <a:lvl5pPr lvl="4" algn="ctr" rtl="0">
+              <a:spcBef>
+                <a:spcPts val="0"/>
+              </a:spcBef>
+              <a:spcAft>
+                <a:spcPts val="0"/>
+              </a:spcAft>
+              <a:buSzPts val="5200"/>
+              <a:buNone/>
+              <a:defRPr sz="6933"/>
+            </a:lvl5pPr>
+            <a:lvl6pPr lvl="5" algn="ctr" rtl="0">
+              <a:spcBef>
+                <a:spcPts val="0"/>
+              </a:spcBef>
+              <a:spcAft>
+                <a:spcPts val="0"/>
+              </a:spcAft>
+              <a:buSzPts val="5200"/>
+              <a:buNone/>
+              <a:defRPr sz="6933"/>
+            </a:lvl6pPr>
+            <a:lvl7pPr lvl="6" algn="ctr" rtl="0">
+              <a:spcBef>
+                <a:spcPts val="0"/>
+              </a:spcBef>
+              <a:spcAft>
+                <a:spcPts val="0"/>
+              </a:spcAft>
+              <a:buSzPts val="5200"/>
+              <a:buNone/>
+              <a:defRPr sz="6933"/>
+            </a:lvl7pPr>
+            <a:lvl8pPr lvl="7" algn="ctr" rtl="0">
+              <a:spcBef>
+                <a:spcPts val="0"/>
+              </a:spcBef>
+              <a:spcAft>
+                <a:spcPts val="0"/>
+              </a:spcAft>
+              <a:buSzPts val="5200"/>
+              <a:buNone/>
+              <a:defRPr sz="6933"/>
+            </a:lvl8pPr>
+            <a:lvl9pPr lvl="8" algn="ctr" rtl="0">
+              <a:spcBef>
+                <a:spcPts val="0"/>
+              </a:spcBef>
+              <a:spcAft>
+                <a:spcPts val="0"/>
+              </a:spcAft>
+              <a:buSzPts val="5200"/>
+              <a:buNone/>
+              <a:defRPr sz="6933"/>
+            </a:lvl9pPr>
+          </a:lstStyle>
+          <a:p>
+            <a:endParaRPr dirty="0"/>
+          </a:p>
+        </p:txBody>
+      </p:sp>
+      <p:sp>
+        <p:nvSpPr>
+          <p:cNvPr id="68" name="Google Shape;68;p11"/>
+          <p:cNvSpPr txBox="1">
+            <a:spLocks noGrp="1"/>
+          </p:cNvSpPr>
+          <p:nvPr>
+            <p:ph type="subTitle" idx="1"/>
+          </p:nvPr>
+        </p:nvSpPr>
+        <p:spPr>
+          <a:xfrm>
+            <a:off x="415600" y="3778833"/>
+            <a:ext cx="11360800" cy="1056800"/>
+          </a:xfrm>
+          <a:prstGeom prst="rect">
+            <a:avLst/>
+          </a:prstGeom>
+        </p:spPr>
+        <p:txBody>
+          <a:bodyPr spcFirstLastPara="1" wrap="square" lIns="91425" tIns="45700" rIns="91425" bIns="45700" anchor="t" anchorCtr="0">
+            <a:normAutofit/>
+          </a:bodyPr>
+          <a:lstStyle>
+            <a:lvl1pPr lvl="0" algn="ctr" rtl="0">
+              <a:lnSpc>
+                <a:spcPct val="100000"/>
+              </a:lnSpc>
+              <a:spcBef>
+                <a:spcPts val="800"/>
+              </a:spcBef>
+              <a:spcAft>
+                <a:spcPts val="0"/>
+              </a:spcAft>
+              <a:buSzPts val="2800"/>
+              <a:buNone/>
+              <a:defRPr sz="3733">
+                <a:solidFill>
+                  <a:schemeClr val="bg1"/>
+                </a:solidFill>
+              </a:defRPr>
+            </a:lvl1pPr>
+            <a:lvl2pPr lvl="1" algn="ctr" rtl="0">
+              <a:lnSpc>
+                <a:spcPct val="100000"/>
+              </a:lnSpc>
+              <a:spcBef>
+                <a:spcPts val="400"/>
+              </a:spcBef>
+              <a:spcAft>
+                <a:spcPts val="0"/>
+              </a:spcAft>
+              <a:buSzPts val="2800"/>
+              <a:buNone/>
+              <a:defRPr sz="3733"/>
+            </a:lvl2pPr>
+            <a:lvl3pPr lvl="2" algn="ctr" rtl="0">
+              <a:lnSpc>
+                <a:spcPct val="100000"/>
+              </a:lnSpc>
+              <a:spcBef>
+                <a:spcPts val="400"/>
+              </a:spcBef>
+              <a:spcAft>
+                <a:spcPts val="0"/>
+              </a:spcAft>
+              <a:buSzPts val="2800"/>
+              <a:buNone/>
+              <a:defRPr sz="3733"/>
+            </a:lvl3pPr>
+            <a:lvl4pPr lvl="3" algn="ctr" rtl="0">
+              <a:lnSpc>
+                <a:spcPct val="100000"/>
+              </a:lnSpc>
+              <a:spcBef>
+                <a:spcPts val="400"/>
+              </a:spcBef>
+              <a:spcAft>
+                <a:spcPts val="0"/>
+              </a:spcAft>
+              <a:buSzPts val="2800"/>
+              <a:buNone/>
+              <a:defRPr sz="3733"/>
+            </a:lvl4pPr>
+            <a:lvl5pPr lvl="4" algn="ctr" rtl="0">
+              <a:lnSpc>
+                <a:spcPct val="100000"/>
+              </a:lnSpc>
+              <a:spcBef>
+                <a:spcPts val="667"/>
+              </a:spcBef>
+              <a:spcAft>
+                <a:spcPts val="0"/>
+              </a:spcAft>
+              <a:buSzPts val="2800"/>
+              <a:buNone/>
+              <a:defRPr sz="3733"/>
+            </a:lvl5pPr>
+            <a:lvl6pPr lvl="5" algn="ctr" rtl="0">
+              <a:lnSpc>
+                <a:spcPct val="100000"/>
+              </a:lnSpc>
+              <a:spcBef>
+                <a:spcPts val="667"/>
+              </a:spcBef>
+              <a:spcAft>
+                <a:spcPts val="0"/>
+              </a:spcAft>
+              <a:buSzPts val="2800"/>
+              <a:buNone/>
+              <a:defRPr sz="3733"/>
+            </a:lvl6pPr>
+            <a:lvl7pPr lvl="6" algn="ctr" rtl="0">
+              <a:lnSpc>
+                <a:spcPct val="100000"/>
+              </a:lnSpc>
+              <a:spcBef>
+                <a:spcPts val="667"/>
+              </a:spcBef>
+              <a:spcAft>
+                <a:spcPts val="0"/>
+              </a:spcAft>
+              <a:buSzPts val="2800"/>
+              <a:buNone/>
+              <a:defRPr sz="3733"/>
+            </a:lvl7pPr>
+            <a:lvl8pPr lvl="7" algn="ctr" rtl="0">
+              <a:lnSpc>
+                <a:spcPct val="100000"/>
+              </a:lnSpc>
+              <a:spcBef>
+                <a:spcPts val="667"/>
+              </a:spcBef>
+              <a:spcAft>
+                <a:spcPts val="0"/>
+              </a:spcAft>
+              <a:buSzPts val="2800"/>
+              <a:buNone/>
+              <a:defRPr sz="3733"/>
+            </a:lvl8pPr>
+            <a:lvl9pPr lvl="8" algn="ctr" rtl="0">
+              <a:lnSpc>
+                <a:spcPct val="100000"/>
+              </a:lnSpc>
+              <a:spcBef>
+                <a:spcPts val="667"/>
+              </a:spcBef>
+              <a:spcAft>
+                <a:spcPts val="0"/>
+              </a:spcAft>
+              <a:buSzPts val="2800"/>
+              <a:buNone/>
+              <a:defRPr sz="3733"/>
+            </a:lvl9pPr>
+          </a:lstStyle>
+          <a:p>
+            <a:endParaRPr dirty="0"/>
+          </a:p>
+        </p:txBody>
+      </p:sp>
+    </p:spTree>
+    <p:extLst>
+      <p:ext uri="{BB962C8B-B14F-4D97-AF65-F5344CB8AC3E}">
+        <p14:creationId xmlns:p14="http://schemas.microsoft.com/office/powerpoint/2010/main" val="3770519690"/>
+      </p:ext>
+    </p:extLst>
+  </p:cSld>
+  <p:clrMapOvr>
+    <a:masterClrMapping/>
+  </p:clrMapOvr>
+</p:sldLayout>
+</file>
+
+<file path=ppt/slideLayouts/slideLayout20.xml><?xml version="1.0" encoding="utf-8"?>
+<p:sldLayout xmlns:a="http://schemas.openxmlformats.org/drawingml/2006/main" xmlns:r="http://schemas.openxmlformats.org/officeDocument/2006/relationships" xmlns:p="http://schemas.openxmlformats.org/presentationml/2006/main" showMasterSp="0" matchingName="Dark References" preserve="1" userDrawn="1">
+  <p:cSld name="Dark References">
+    <p:spTree>
+      <p:nvGrpSpPr>
+        <p:cNvPr id="1" name="Shape 54"/>
+        <p:cNvGrpSpPr/>
+        <p:nvPr/>
+      </p:nvGrpSpPr>
+      <p:grpSpPr>
+        <a:xfrm>
+          <a:off x="0" y="0"/>
+          <a:ext cx="0" cy="0"/>
+          <a:chOff x="0" y="0"/>
+          <a:chExt cx="0" cy="0"/>
+        </a:xfrm>
+      </p:grpSpPr>
+      <p:pic>
+        <p:nvPicPr>
+          <p:cNvPr id="5" name="Picture 4">
+            <a:extLst>
+              <a:ext uri="{FF2B5EF4-FFF2-40B4-BE49-F238E27FC236}">
+                <a16:creationId xmlns:a16="http://schemas.microsoft.com/office/drawing/2014/main" id="{8243973C-9245-EAF0-AC58-A16A47890ED0}"/>
+              </a:ext>
+            </a:extLst>
+          </p:cNvPr>
+          <p:cNvPicPr>
+            <a:picLocks noChangeAspect="1"/>
+          </p:cNvPicPr>
+          <p:nvPr userDrawn="1"/>
+        </p:nvPicPr>
+        <p:blipFill>
+          <a:blip r:embed="rId2">
+            <a:alphaModFix amt="85000"/>
+            <a:extLst>
+              <a:ext uri="{28A0092B-C50C-407E-A947-70E740481C1C}">
+                <a14:useLocalDpi xmlns:a14="http://schemas.microsoft.com/office/drawing/2010/main" val="0"/>
+              </a:ext>
+            </a:extLst>
+          </a:blip>
+          <a:srcRect/>
+          <a:stretch/>
+        </p:blipFill>
+        <p:spPr>
+          <a:xfrm>
+            <a:off x="0" y="0"/>
+            <a:ext cx="12192000" cy="6858000"/>
+          </a:xfrm>
+          <a:prstGeom prst="rect">
+            <a:avLst/>
+          </a:prstGeom>
+        </p:spPr>
+      </p:pic>
+      <p:cxnSp>
+        <p:nvCxnSpPr>
+          <p:cNvPr id="57" name="Google Shape;57;p10"/>
+          <p:cNvCxnSpPr/>
+          <p:nvPr/>
+        </p:nvCxnSpPr>
+        <p:spPr>
+          <a:xfrm>
+            <a:off x="3716421" y="2608481"/>
+            <a:ext cx="0" cy="1600400"/>
+          </a:xfrm>
+          <a:prstGeom prst="straightConnector1">
+            <a:avLst/>
+          </a:prstGeom>
+          <a:noFill/>
+          <a:ln w="19050" cap="flat" cmpd="sng">
+            <a:solidFill>
+              <a:schemeClr val="lt1"/>
+            </a:solidFill>
+            <a:prstDash val="solid"/>
+            <a:miter lim="800000"/>
+            <a:headEnd type="none" w="sm" len="sm"/>
+            <a:tailEnd type="none" w="sm" len="sm"/>
+          </a:ln>
+        </p:spPr>
+      </p:cxnSp>
+      <p:pic>
+        <p:nvPicPr>
+          <p:cNvPr id="62" name="Google Shape;62;p10"/>
+          <p:cNvPicPr preferRelativeResize="0"/>
+          <p:nvPr/>
+        </p:nvPicPr>
+        <p:blipFill>
+          <a:blip r:embed="rId3">
+            <a:extLst>
+              <a:ext uri="{28A0092B-C50C-407E-A947-70E740481C1C}">
+                <a14:useLocalDpi xmlns:a14="http://schemas.microsoft.com/office/drawing/2010/main" val="0"/>
+              </a:ext>
+              <a:ext uri="{96DAC541-7B7A-43D3-8B79-37D633B846F1}">
+                <asvg:svgBlip xmlns:asvg="http://schemas.microsoft.com/office/drawing/2016/SVG/main" r:embed="rId4"/>
+              </a:ext>
+            </a:extLst>
+          </a:blip>
+          <a:srcRect/>
+          <a:stretch/>
+        </p:blipFill>
+        <p:spPr>
+          <a:xfrm>
+            <a:off x="3071993" y="6285589"/>
+            <a:ext cx="414529" cy="408850"/>
+          </a:xfrm>
+          <a:prstGeom prst="rect">
+            <a:avLst/>
+          </a:prstGeom>
+          <a:noFill/>
+          <a:ln>
+            <a:noFill/>
+          </a:ln>
+        </p:spPr>
+      </p:pic>
+      <p:pic>
+        <p:nvPicPr>
+          <p:cNvPr id="64" name="Google Shape;64;p10"/>
+          <p:cNvPicPr preferRelativeResize="0"/>
+          <p:nvPr/>
+        </p:nvPicPr>
+        <p:blipFill>
+          <a:blip r:embed="rId5">
+            <a:extLst>
+              <a:ext uri="{28A0092B-C50C-407E-A947-70E740481C1C}">
+                <a14:useLocalDpi xmlns:a14="http://schemas.microsoft.com/office/drawing/2010/main" val="0"/>
+              </a:ext>
+              <a:ext uri="{96DAC541-7B7A-43D3-8B79-37D633B846F1}">
+                <asvg:svgBlip xmlns:asvg="http://schemas.microsoft.com/office/drawing/2016/SVG/main" r:embed="rId6"/>
+              </a:ext>
+            </a:extLst>
+          </a:blip>
+          <a:srcRect/>
+          <a:stretch/>
+        </p:blipFill>
+        <p:spPr>
+          <a:xfrm>
+            <a:off x="152659" y="6282751"/>
+            <a:ext cx="414528" cy="414528"/>
+          </a:xfrm>
+          <a:prstGeom prst="rect">
+            <a:avLst/>
+          </a:prstGeom>
+          <a:noFill/>
+          <a:ln>
+            <a:noFill/>
+          </a:ln>
+        </p:spPr>
+      </p:pic>
+      <p:pic>
+        <p:nvPicPr>
+          <p:cNvPr id="65" name="Google Shape;65;p10"/>
+          <p:cNvPicPr preferRelativeResize="0"/>
+          <p:nvPr/>
+        </p:nvPicPr>
+        <p:blipFill>
+          <a:blip r:embed="rId7">
+            <a:extLst>
+              <a:ext uri="{28A0092B-C50C-407E-A947-70E740481C1C}">
+                <a14:useLocalDpi xmlns:a14="http://schemas.microsoft.com/office/drawing/2010/main" val="0"/>
+              </a:ext>
+              <a:ext uri="{96DAC541-7B7A-43D3-8B79-37D633B846F1}">
+                <asvg:svgBlip xmlns:asvg="http://schemas.microsoft.com/office/drawing/2016/SVG/main" r:embed="rId8"/>
+              </a:ext>
+            </a:extLst>
+          </a:blip>
+          <a:srcRect/>
+          <a:stretch/>
+        </p:blipFill>
+        <p:spPr>
+          <a:xfrm>
+            <a:off x="5971585" y="6318997"/>
+            <a:ext cx="408600" cy="336106"/>
+          </a:xfrm>
+          <a:prstGeom prst="rect">
+            <a:avLst/>
+          </a:prstGeom>
+          <a:noFill/>
+          <a:ln>
+            <a:noFill/>
+          </a:ln>
+        </p:spPr>
+      </p:pic>
+      <p:sp>
+        <p:nvSpPr>
+          <p:cNvPr id="6" name="Picture Placeholder 5">
+            <a:extLst>
+              <a:ext uri="{FF2B5EF4-FFF2-40B4-BE49-F238E27FC236}">
+                <a16:creationId xmlns:a16="http://schemas.microsoft.com/office/drawing/2014/main" id="{2631C45D-A4AF-1223-E180-EB9E96FA2AE4}"/>
+              </a:ext>
+            </a:extLst>
+          </p:cNvPr>
+          <p:cNvSpPr>
+            <a:spLocks noGrp="1"/>
+          </p:cNvSpPr>
+          <p:nvPr>
+            <p:ph type="pic" sz="quarter" idx="13"/>
+          </p:nvPr>
+        </p:nvSpPr>
+        <p:spPr>
+          <a:xfrm>
+            <a:off x="277813" y="1289050"/>
+            <a:ext cx="3206750" cy="4024313"/>
+          </a:xfrm>
+        </p:spPr>
+        <p:txBody>
+          <a:bodyPr/>
+          <a:lstStyle>
+            <a:lvl1pPr marL="0" indent="0">
+              <a:buNone/>
+              <a:defRPr/>
+            </a:lvl1pPr>
+          </a:lstStyle>
+          <a:p>
+            <a:endParaRPr lang="en-DE" dirty="0"/>
+          </a:p>
+        </p:txBody>
+      </p:sp>
+      <p:sp>
+        <p:nvSpPr>
+          <p:cNvPr id="8" name="Text Placeholder 7">
+            <a:extLst>
+              <a:ext uri="{FF2B5EF4-FFF2-40B4-BE49-F238E27FC236}">
+                <a16:creationId xmlns:a16="http://schemas.microsoft.com/office/drawing/2014/main" id="{E469473F-31A1-DA1A-1446-8C54C99F5645}"/>
+              </a:ext>
+            </a:extLst>
+          </p:cNvPr>
+          <p:cNvSpPr>
+            <a:spLocks noGrp="1"/>
+          </p:cNvSpPr>
+          <p:nvPr>
+            <p:ph type="body" sz="quarter" idx="14"/>
+          </p:nvPr>
+        </p:nvSpPr>
+        <p:spPr>
+          <a:xfrm>
+            <a:off x="4382294" y="1289050"/>
+            <a:ext cx="6911975" cy="1828800"/>
+          </a:xfrm>
+        </p:spPr>
+        <p:txBody>
+          <a:bodyPr/>
+          <a:lstStyle>
+            <a:lvl1pPr marL="0" indent="0">
+              <a:buNone/>
+              <a:defRPr/>
+            </a:lvl1pPr>
+          </a:lstStyle>
+          <a:p>
+            <a:pPr lvl="0"/>
+            <a:endParaRPr lang="en-DE" dirty="0"/>
+          </a:p>
+        </p:txBody>
+      </p:sp>
+      <p:sp>
+        <p:nvSpPr>
+          <p:cNvPr id="12" name="Text Placeholder 11">
+            <a:extLst>
+              <a:ext uri="{FF2B5EF4-FFF2-40B4-BE49-F238E27FC236}">
+                <a16:creationId xmlns:a16="http://schemas.microsoft.com/office/drawing/2014/main" id="{AB34C56E-9BDB-F5E2-1AD6-4C9ACB81D802}"/>
+              </a:ext>
+            </a:extLst>
+          </p:cNvPr>
+          <p:cNvSpPr>
+            <a:spLocks noGrp="1"/>
+          </p:cNvSpPr>
+          <p:nvPr>
+            <p:ph type="body" sz="quarter" idx="16"/>
+          </p:nvPr>
+        </p:nvSpPr>
+        <p:spPr>
+          <a:xfrm>
+            <a:off x="700759" y="6295340"/>
+            <a:ext cx="2302323" cy="408600"/>
+          </a:xfrm>
+        </p:spPr>
+        <p:txBody>
+          <a:bodyPr anchor="ctr">
+            <a:normAutofit/>
+          </a:bodyPr>
+          <a:lstStyle>
+            <a:lvl1pPr marL="0" indent="0">
+              <a:buNone/>
+              <a:defRPr sz="2000"/>
+            </a:lvl1pPr>
+          </a:lstStyle>
+          <a:p>
+            <a:pPr lvl="0"/>
+            <a:endParaRPr lang="en-DE" dirty="0"/>
+          </a:p>
+        </p:txBody>
+      </p:sp>
+      <p:sp>
+        <p:nvSpPr>
+          <p:cNvPr id="13" name="Text Placeholder 11">
+            <a:extLst>
+              <a:ext uri="{FF2B5EF4-FFF2-40B4-BE49-F238E27FC236}">
+                <a16:creationId xmlns:a16="http://schemas.microsoft.com/office/drawing/2014/main" id="{210C2267-198C-B65E-1588-1D8ADC032B0D}"/>
+              </a:ext>
+            </a:extLst>
+          </p:cNvPr>
+          <p:cNvSpPr>
+            <a:spLocks noGrp="1"/>
+          </p:cNvSpPr>
+          <p:nvPr>
+            <p:ph type="body" sz="quarter" idx="17"/>
+          </p:nvPr>
+        </p:nvSpPr>
+        <p:spPr>
+          <a:xfrm>
+            <a:off x="3540472" y="6295340"/>
+            <a:ext cx="2302323" cy="408600"/>
+          </a:xfrm>
+        </p:spPr>
+        <p:txBody>
+          <a:bodyPr anchor="ctr">
+            <a:normAutofit/>
+          </a:bodyPr>
+          <a:lstStyle>
+            <a:lvl1pPr marL="0" indent="0">
+              <a:buNone/>
+              <a:defRPr sz="2000"/>
+            </a:lvl1pPr>
+          </a:lstStyle>
+          <a:p>
+            <a:pPr lvl="0"/>
+            <a:endParaRPr lang="en-DE" dirty="0"/>
+          </a:p>
+        </p:txBody>
+      </p:sp>
+      <p:sp>
+        <p:nvSpPr>
+          <p:cNvPr id="14" name="Text Placeholder 11">
+            <a:extLst>
+              <a:ext uri="{FF2B5EF4-FFF2-40B4-BE49-F238E27FC236}">
+                <a16:creationId xmlns:a16="http://schemas.microsoft.com/office/drawing/2014/main" id="{B755F42B-5D4D-06C9-BCF0-324CE2951DC3}"/>
+              </a:ext>
+            </a:extLst>
+          </p:cNvPr>
+          <p:cNvSpPr>
+            <a:spLocks noGrp="1"/>
+          </p:cNvSpPr>
+          <p:nvPr>
+            <p:ph type="body" sz="quarter" idx="18"/>
+          </p:nvPr>
+        </p:nvSpPr>
+        <p:spPr>
+          <a:xfrm>
+            <a:off x="6395146" y="6295340"/>
+            <a:ext cx="2302323" cy="408600"/>
+          </a:xfrm>
+        </p:spPr>
+        <p:txBody>
+          <a:bodyPr anchor="ctr">
+            <a:normAutofit/>
+          </a:bodyPr>
+          <a:lstStyle>
+            <a:lvl1pPr marL="0" indent="0">
+              <a:buNone/>
+              <a:defRPr sz="2000"/>
+            </a:lvl1pPr>
+          </a:lstStyle>
+          <a:p>
+            <a:pPr lvl="0"/>
+            <a:endParaRPr lang="en-DE" dirty="0"/>
+          </a:p>
+        </p:txBody>
+      </p:sp>
+      <p:sp>
+        <p:nvSpPr>
+          <p:cNvPr id="7" name="Text Placeholder 7">
+            <a:extLst>
+              <a:ext uri="{FF2B5EF4-FFF2-40B4-BE49-F238E27FC236}">
+                <a16:creationId xmlns:a16="http://schemas.microsoft.com/office/drawing/2014/main" id="{601629C1-0A84-0479-0506-5F80A7013C53}"/>
+              </a:ext>
+            </a:extLst>
+          </p:cNvPr>
+          <p:cNvSpPr>
+            <a:spLocks noGrp="1"/>
+          </p:cNvSpPr>
+          <p:nvPr>
+            <p:ph type="body" sz="quarter" idx="15"/>
+          </p:nvPr>
+        </p:nvSpPr>
+        <p:spPr>
+          <a:xfrm>
+            <a:off x="4382293" y="3310572"/>
+            <a:ext cx="6911975" cy="1828800"/>
+          </a:xfrm>
+        </p:spPr>
+        <p:txBody>
+          <a:bodyPr/>
+          <a:lstStyle>
+            <a:lvl1pPr marL="0" indent="0">
+              <a:buNone/>
+              <a:defRPr/>
+            </a:lvl1pPr>
+          </a:lstStyle>
+          <a:p>
+            <a:pPr lvl="0"/>
+            <a:endParaRPr lang="en-DE" dirty="0"/>
+          </a:p>
+        </p:txBody>
+      </p:sp>
+    </p:spTree>
+    <p:extLst>
+      <p:ext uri="{BB962C8B-B14F-4D97-AF65-F5344CB8AC3E}">
+        <p14:creationId xmlns:p14="http://schemas.microsoft.com/office/powerpoint/2010/main" val="749175935"/>
+      </p:ext>
+    </p:extLst>
+  </p:cSld>
+  <p:clrMapOvr>
+    <a:masterClrMapping/>
+  </p:clrMapOvr>
+</p:sldLayout>
+</file>
+
+<file path=ppt/slideLayouts/slideLayout21.xml><?xml version="1.0" encoding="utf-8"?>
+<p:sldLayout xmlns:a="http://schemas.openxmlformats.org/drawingml/2006/main" xmlns:r="http://schemas.openxmlformats.org/officeDocument/2006/relationships" xmlns:p="http://schemas.openxmlformats.org/presentationml/2006/main" showMasterSp="0" matchingName="Dark References" preserve="1" userDrawn="1">
+  <p:cSld name="1_Dark References">
+    <p:spTree>
+      <p:nvGrpSpPr>
+        <p:cNvPr id="1" name="Shape 54"/>
+        <p:cNvGrpSpPr/>
+        <p:nvPr/>
+      </p:nvGrpSpPr>
+      <p:grpSpPr>
+        <a:xfrm>
+          <a:off x="0" y="0"/>
+          <a:ext cx="0" cy="0"/>
+          <a:chOff x="0" y="0"/>
+          <a:chExt cx="0" cy="0"/>
+        </a:xfrm>
+      </p:grpSpPr>
+      <p:pic>
+        <p:nvPicPr>
+          <p:cNvPr id="5" name="Picture 4">
+            <a:extLst>
+              <a:ext uri="{FF2B5EF4-FFF2-40B4-BE49-F238E27FC236}">
+                <a16:creationId xmlns:a16="http://schemas.microsoft.com/office/drawing/2014/main" id="{571C9378-B3C2-3490-B694-78DF69383BE1}"/>
+              </a:ext>
+            </a:extLst>
+          </p:cNvPr>
+          <p:cNvPicPr>
+            <a:picLocks noChangeAspect="1"/>
+          </p:cNvPicPr>
+          <p:nvPr userDrawn="1"/>
+        </p:nvPicPr>
+        <p:blipFill>
+          <a:blip r:embed="rId2">
+            <a:alphaModFix amt="85000"/>
+            <a:extLst>
+              <a:ext uri="{28A0092B-C50C-407E-A947-70E740481C1C}">
+                <a14:useLocalDpi xmlns:a14="http://schemas.microsoft.com/office/drawing/2010/main" val="0"/>
+              </a:ext>
+            </a:extLst>
+          </a:blip>
+          <a:srcRect/>
+          <a:stretch/>
+        </p:blipFill>
+        <p:spPr>
+          <a:xfrm>
+            <a:off x="0" y="0"/>
+            <a:ext cx="12192000" cy="6858000"/>
+          </a:xfrm>
+          <a:prstGeom prst="rect">
+            <a:avLst/>
+          </a:prstGeom>
+        </p:spPr>
+      </p:pic>
+      <p:cxnSp>
+        <p:nvCxnSpPr>
+          <p:cNvPr id="57" name="Google Shape;57;p10"/>
+          <p:cNvCxnSpPr/>
+          <p:nvPr/>
+        </p:nvCxnSpPr>
+        <p:spPr>
+          <a:xfrm>
+            <a:off x="3716421" y="2608481"/>
+            <a:ext cx="0" cy="1600400"/>
+          </a:xfrm>
+          <a:prstGeom prst="straightConnector1">
+            <a:avLst/>
+          </a:prstGeom>
+          <a:noFill/>
+          <a:ln w="19050" cap="flat" cmpd="sng">
+            <a:solidFill>
+              <a:schemeClr val="lt1"/>
+            </a:solidFill>
+            <a:prstDash val="solid"/>
+            <a:miter lim="800000"/>
+            <a:headEnd type="none" w="sm" len="sm"/>
+            <a:tailEnd type="none" w="sm" len="sm"/>
+          </a:ln>
+        </p:spPr>
+      </p:cxnSp>
+      <p:pic>
+        <p:nvPicPr>
+          <p:cNvPr id="62" name="Google Shape;62;p10"/>
+          <p:cNvPicPr preferRelativeResize="0"/>
+          <p:nvPr/>
+        </p:nvPicPr>
+        <p:blipFill rotWithShape="1">
+          <a:blip r:embed="rId3">
+            <a:alphaModFix/>
+            <a:biLevel thresh="75000"/>
+          </a:blip>
+          <a:srcRect/>
+          <a:stretch/>
+        </p:blipFill>
+        <p:spPr>
+          <a:xfrm>
+            <a:off x="3071993" y="6282750"/>
+            <a:ext cx="414529" cy="414529"/>
+          </a:xfrm>
+          <a:prstGeom prst="rect">
+            <a:avLst/>
+          </a:prstGeom>
+          <a:noFill/>
+          <a:ln>
+            <a:noFill/>
+          </a:ln>
+        </p:spPr>
+      </p:pic>
+      <p:pic>
+        <p:nvPicPr>
+          <p:cNvPr id="64" name="Google Shape;64;p10"/>
+          <p:cNvPicPr preferRelativeResize="0"/>
+          <p:nvPr/>
+        </p:nvPicPr>
+        <p:blipFill>
+          <a:blip r:embed="rId4">
+            <a:extLst>
+              <a:ext uri="{28A0092B-C50C-407E-A947-70E740481C1C}">
+                <a14:useLocalDpi xmlns:a14="http://schemas.microsoft.com/office/drawing/2010/main" val="0"/>
+              </a:ext>
+              <a:ext uri="{96DAC541-7B7A-43D3-8B79-37D633B846F1}">
+                <asvg:svgBlip xmlns:asvg="http://schemas.microsoft.com/office/drawing/2016/SVG/main" r:embed="rId5"/>
+              </a:ext>
+            </a:extLst>
+          </a:blip>
+          <a:srcRect/>
+          <a:stretch/>
+        </p:blipFill>
+        <p:spPr>
+          <a:xfrm>
+            <a:off x="152659" y="6282751"/>
+            <a:ext cx="414528" cy="414528"/>
+          </a:xfrm>
+          <a:prstGeom prst="rect">
+            <a:avLst/>
+          </a:prstGeom>
+          <a:noFill/>
+          <a:ln>
+            <a:noFill/>
+          </a:ln>
+        </p:spPr>
+      </p:pic>
+      <p:sp>
+        <p:nvSpPr>
+          <p:cNvPr id="6" name="Picture Placeholder 5">
+            <a:extLst>
+              <a:ext uri="{FF2B5EF4-FFF2-40B4-BE49-F238E27FC236}">
+                <a16:creationId xmlns:a16="http://schemas.microsoft.com/office/drawing/2014/main" id="{2631C45D-A4AF-1223-E180-EB9E96FA2AE4}"/>
+              </a:ext>
+            </a:extLst>
+          </p:cNvPr>
+          <p:cNvSpPr>
+            <a:spLocks noGrp="1"/>
+          </p:cNvSpPr>
+          <p:nvPr>
+            <p:ph type="pic" sz="quarter" idx="13"/>
+          </p:nvPr>
+        </p:nvSpPr>
+        <p:spPr>
+          <a:xfrm>
+            <a:off x="277813" y="1289050"/>
+            <a:ext cx="3206750" cy="4024313"/>
+          </a:xfrm>
+        </p:spPr>
+        <p:txBody>
+          <a:bodyPr/>
+          <a:lstStyle>
+            <a:lvl1pPr marL="0" indent="0">
+              <a:buNone/>
+              <a:defRPr/>
+            </a:lvl1pPr>
+          </a:lstStyle>
+          <a:p>
+            <a:endParaRPr lang="en-DE" dirty="0"/>
+          </a:p>
+        </p:txBody>
+      </p:sp>
+      <p:sp>
+        <p:nvSpPr>
+          <p:cNvPr id="8" name="Text Placeholder 7">
+            <a:extLst>
+              <a:ext uri="{FF2B5EF4-FFF2-40B4-BE49-F238E27FC236}">
+                <a16:creationId xmlns:a16="http://schemas.microsoft.com/office/drawing/2014/main" id="{E469473F-31A1-DA1A-1446-8C54C99F5645}"/>
+              </a:ext>
+            </a:extLst>
+          </p:cNvPr>
+          <p:cNvSpPr>
+            <a:spLocks noGrp="1"/>
+          </p:cNvSpPr>
+          <p:nvPr>
+            <p:ph type="body" sz="quarter" idx="14"/>
+          </p:nvPr>
+        </p:nvSpPr>
+        <p:spPr>
+          <a:xfrm>
+            <a:off x="4382294" y="1289050"/>
+            <a:ext cx="6911975" cy="1828800"/>
+          </a:xfrm>
+        </p:spPr>
+        <p:txBody>
+          <a:bodyPr/>
+          <a:lstStyle>
+            <a:lvl1pPr marL="0" indent="0">
+              <a:buNone/>
+              <a:defRPr/>
+            </a:lvl1pPr>
+          </a:lstStyle>
+          <a:p>
+            <a:pPr lvl="0"/>
+            <a:endParaRPr lang="en-DE" dirty="0"/>
+          </a:p>
+        </p:txBody>
+      </p:sp>
+      <p:sp>
+        <p:nvSpPr>
+          <p:cNvPr id="12" name="Text Placeholder 11">
+            <a:extLst>
+              <a:ext uri="{FF2B5EF4-FFF2-40B4-BE49-F238E27FC236}">
+                <a16:creationId xmlns:a16="http://schemas.microsoft.com/office/drawing/2014/main" id="{AB34C56E-9BDB-F5E2-1AD6-4C9ACB81D802}"/>
+              </a:ext>
+            </a:extLst>
+          </p:cNvPr>
+          <p:cNvSpPr>
+            <a:spLocks noGrp="1"/>
+          </p:cNvSpPr>
+          <p:nvPr>
+            <p:ph type="body" sz="quarter" idx="16"/>
+          </p:nvPr>
+        </p:nvSpPr>
+        <p:spPr>
+          <a:xfrm>
+            <a:off x="700759" y="6295340"/>
+            <a:ext cx="2302323" cy="408600"/>
+          </a:xfrm>
+        </p:spPr>
+        <p:txBody>
+          <a:bodyPr anchor="ctr">
+            <a:normAutofit/>
+          </a:bodyPr>
+          <a:lstStyle>
+            <a:lvl1pPr marL="0" indent="0">
+              <a:buNone/>
+              <a:defRPr sz="2000"/>
+            </a:lvl1pPr>
+          </a:lstStyle>
+          <a:p>
+            <a:pPr lvl="0"/>
+            <a:endParaRPr lang="en-DE" dirty="0"/>
+          </a:p>
+        </p:txBody>
+      </p:sp>
+      <p:sp>
+        <p:nvSpPr>
+          <p:cNvPr id="13" name="Text Placeholder 11">
+            <a:extLst>
+              <a:ext uri="{FF2B5EF4-FFF2-40B4-BE49-F238E27FC236}">
+                <a16:creationId xmlns:a16="http://schemas.microsoft.com/office/drawing/2014/main" id="{210C2267-198C-B65E-1588-1D8ADC032B0D}"/>
+              </a:ext>
+            </a:extLst>
+          </p:cNvPr>
+          <p:cNvSpPr>
+            <a:spLocks noGrp="1"/>
+          </p:cNvSpPr>
+          <p:nvPr>
+            <p:ph type="body" sz="quarter" idx="17"/>
+          </p:nvPr>
+        </p:nvSpPr>
+        <p:spPr>
+          <a:xfrm>
+            <a:off x="3540472" y="6295340"/>
+            <a:ext cx="2302323" cy="408600"/>
+          </a:xfrm>
+        </p:spPr>
+        <p:txBody>
+          <a:bodyPr anchor="ctr">
+            <a:normAutofit/>
+          </a:bodyPr>
+          <a:lstStyle>
+            <a:lvl1pPr marL="0" indent="0">
+              <a:buNone/>
+              <a:defRPr sz="2000"/>
+            </a:lvl1pPr>
+          </a:lstStyle>
+          <a:p>
+            <a:pPr lvl="0"/>
+            <a:endParaRPr lang="en-DE" dirty="0"/>
+          </a:p>
+        </p:txBody>
+      </p:sp>
+      <p:sp>
+        <p:nvSpPr>
+          <p:cNvPr id="7" name="Text Placeholder 7">
+            <a:extLst>
+              <a:ext uri="{FF2B5EF4-FFF2-40B4-BE49-F238E27FC236}">
+                <a16:creationId xmlns:a16="http://schemas.microsoft.com/office/drawing/2014/main" id="{3BB4A897-33F0-001A-94D7-0DAB9D90E6F2}"/>
+              </a:ext>
+            </a:extLst>
+          </p:cNvPr>
+          <p:cNvSpPr>
+            <a:spLocks noGrp="1"/>
+          </p:cNvSpPr>
+          <p:nvPr>
+            <p:ph type="body" sz="quarter" idx="15"/>
+          </p:nvPr>
+        </p:nvSpPr>
+        <p:spPr>
+          <a:xfrm>
+            <a:off x="4382293" y="3310572"/>
+            <a:ext cx="6911975" cy="1828800"/>
+          </a:xfrm>
+        </p:spPr>
+        <p:txBody>
+          <a:bodyPr/>
+          <a:lstStyle>
+            <a:lvl1pPr marL="0" indent="0">
+              <a:buNone/>
+              <a:defRPr/>
+            </a:lvl1pPr>
+          </a:lstStyle>
+          <a:p>
+            <a:pPr lvl="0"/>
+            <a:endParaRPr lang="en-DE" dirty="0"/>
+          </a:p>
+        </p:txBody>
+      </p:sp>
+    </p:spTree>
+    <p:extLst>
+      <p:ext uri="{BB962C8B-B14F-4D97-AF65-F5344CB8AC3E}">
+        <p14:creationId xmlns:p14="http://schemas.microsoft.com/office/powerpoint/2010/main" val="4150270547"/>
+      </p:ext>
+    </p:extLst>
+  </p:cSld>
+  <p:clrMapOvr>
+    <a:masterClrMapping/>
+  </p:clrMapOvr>
+</p:sldLayout>
+</file>
+
+<file path=ppt/slideLayouts/slideLayout22.xml><?xml version="1.0" encoding="utf-8"?>
+<p:sldLayout xmlns:a="http://schemas.openxmlformats.org/drawingml/2006/main" xmlns:r="http://schemas.openxmlformats.org/officeDocument/2006/relationships" xmlns:p="http://schemas.openxmlformats.org/presentationml/2006/main" showMasterSp="0" matchingName="Dark References" preserve="1" userDrawn="1">
+  <p:cSld name="1_Dark References">
+    <p:spTree>
+      <p:nvGrpSpPr>
+        <p:cNvPr id="1" name="Shape 54"/>
+        <p:cNvGrpSpPr/>
+        <p:nvPr/>
+      </p:nvGrpSpPr>
+      <p:grpSpPr>
+        <a:xfrm>
+          <a:off x="0" y="0"/>
+          <a:ext cx="0" cy="0"/>
+          <a:chOff x="0" y="0"/>
+          <a:chExt cx="0" cy="0"/>
+        </a:xfrm>
+      </p:grpSpPr>
+      <p:pic>
+        <p:nvPicPr>
+          <p:cNvPr id="2" name="Picture 1">
+            <a:extLst>
+              <a:ext uri="{FF2B5EF4-FFF2-40B4-BE49-F238E27FC236}">
+                <a16:creationId xmlns:a16="http://schemas.microsoft.com/office/drawing/2014/main" id="{8B627619-3344-185B-7E1C-2B46F09DC6BD}"/>
+              </a:ext>
+            </a:extLst>
+          </p:cNvPr>
+          <p:cNvPicPr>
+            <a:picLocks noChangeAspect="1"/>
+          </p:cNvPicPr>
+          <p:nvPr userDrawn="1"/>
+        </p:nvPicPr>
+        <p:blipFill>
+          <a:blip r:embed="rId2">
+            <a:alphaModFix amt="85000"/>
+            <a:extLst>
+              <a:ext uri="{28A0092B-C50C-407E-A947-70E740481C1C}">
+                <a14:useLocalDpi xmlns:a14="http://schemas.microsoft.com/office/drawing/2010/main" val="0"/>
+              </a:ext>
+            </a:extLst>
+          </a:blip>
+          <a:srcRect/>
+          <a:stretch/>
+        </p:blipFill>
+        <p:spPr>
+          <a:xfrm>
+            <a:off x="0" y="0"/>
+            <a:ext cx="12192000" cy="6858000"/>
+          </a:xfrm>
+          <a:prstGeom prst="rect">
+            <a:avLst/>
+          </a:prstGeom>
+        </p:spPr>
+      </p:pic>
+      <p:cxnSp>
+        <p:nvCxnSpPr>
+          <p:cNvPr id="57" name="Google Shape;57;p10"/>
+          <p:cNvCxnSpPr/>
+          <p:nvPr/>
+        </p:nvCxnSpPr>
+        <p:spPr>
+          <a:xfrm>
+            <a:off x="3716421" y="2608481"/>
+            <a:ext cx="0" cy="1600400"/>
+          </a:xfrm>
+          <a:prstGeom prst="straightConnector1">
+            <a:avLst/>
+          </a:prstGeom>
+          <a:noFill/>
+          <a:ln w="19050" cap="flat" cmpd="sng">
+            <a:solidFill>
+              <a:schemeClr val="lt1"/>
+            </a:solidFill>
+            <a:prstDash val="solid"/>
+            <a:miter lim="800000"/>
+            <a:headEnd type="none" w="sm" len="sm"/>
+            <a:tailEnd type="none" w="sm" len="sm"/>
+          </a:ln>
+        </p:spPr>
+      </p:cxnSp>
+      <p:pic>
+        <p:nvPicPr>
+          <p:cNvPr id="64" name="Google Shape;64;p10"/>
+          <p:cNvPicPr preferRelativeResize="0"/>
+          <p:nvPr/>
+        </p:nvPicPr>
+        <p:blipFill>
+          <a:blip r:embed="rId3">
+            <a:extLst>
+              <a:ext uri="{28A0092B-C50C-407E-A947-70E740481C1C}">
+                <a14:useLocalDpi xmlns:a14="http://schemas.microsoft.com/office/drawing/2010/main" val="0"/>
+              </a:ext>
+              <a:ext uri="{96DAC541-7B7A-43D3-8B79-37D633B846F1}">
+                <asvg:svgBlip xmlns:asvg="http://schemas.microsoft.com/office/drawing/2016/SVG/main" r:embed="rId4"/>
+              </a:ext>
+            </a:extLst>
+          </a:blip>
+          <a:srcRect/>
+          <a:stretch/>
+        </p:blipFill>
+        <p:spPr>
+          <a:xfrm>
+            <a:off x="152659" y="6282751"/>
+            <a:ext cx="414528" cy="414528"/>
+          </a:xfrm>
+          <a:prstGeom prst="rect">
+            <a:avLst/>
+          </a:prstGeom>
+          <a:noFill/>
+          <a:ln>
+            <a:noFill/>
+          </a:ln>
+        </p:spPr>
+      </p:pic>
+      <p:sp>
+        <p:nvSpPr>
+          <p:cNvPr id="6" name="Picture Placeholder 5">
+            <a:extLst>
+              <a:ext uri="{FF2B5EF4-FFF2-40B4-BE49-F238E27FC236}">
+                <a16:creationId xmlns:a16="http://schemas.microsoft.com/office/drawing/2014/main" id="{2631C45D-A4AF-1223-E180-EB9E96FA2AE4}"/>
+              </a:ext>
+            </a:extLst>
+          </p:cNvPr>
+          <p:cNvSpPr>
+            <a:spLocks noGrp="1"/>
+          </p:cNvSpPr>
+          <p:nvPr>
+            <p:ph type="pic" sz="quarter" idx="13"/>
+          </p:nvPr>
+        </p:nvSpPr>
+        <p:spPr>
+          <a:xfrm>
+            <a:off x="277813" y="1289050"/>
+            <a:ext cx="3206750" cy="4024313"/>
+          </a:xfrm>
+        </p:spPr>
+        <p:txBody>
+          <a:bodyPr/>
+          <a:lstStyle>
+            <a:lvl1pPr marL="0" indent="0">
+              <a:buNone/>
+              <a:defRPr/>
+            </a:lvl1pPr>
+          </a:lstStyle>
+          <a:p>
+            <a:endParaRPr lang="en-DE" dirty="0"/>
+          </a:p>
+        </p:txBody>
+      </p:sp>
+      <p:sp>
+        <p:nvSpPr>
+          <p:cNvPr id="8" name="Text Placeholder 7">
+            <a:extLst>
+              <a:ext uri="{FF2B5EF4-FFF2-40B4-BE49-F238E27FC236}">
+                <a16:creationId xmlns:a16="http://schemas.microsoft.com/office/drawing/2014/main" id="{E469473F-31A1-DA1A-1446-8C54C99F5645}"/>
+              </a:ext>
+            </a:extLst>
+          </p:cNvPr>
+          <p:cNvSpPr>
+            <a:spLocks noGrp="1"/>
+          </p:cNvSpPr>
+          <p:nvPr>
+            <p:ph type="body" sz="quarter" idx="14"/>
+          </p:nvPr>
+        </p:nvSpPr>
+        <p:spPr>
+          <a:xfrm>
+            <a:off x="4382294" y="1289050"/>
+            <a:ext cx="6911975" cy="1828800"/>
+          </a:xfrm>
+        </p:spPr>
+        <p:txBody>
+          <a:bodyPr/>
+          <a:lstStyle>
+            <a:lvl1pPr marL="0" indent="0">
+              <a:buNone/>
+              <a:defRPr/>
+            </a:lvl1pPr>
+          </a:lstStyle>
+          <a:p>
+            <a:pPr lvl="0"/>
+            <a:endParaRPr lang="en-DE" dirty="0"/>
+          </a:p>
+        </p:txBody>
+      </p:sp>
+      <p:sp>
+        <p:nvSpPr>
+          <p:cNvPr id="12" name="Text Placeholder 11">
+            <a:extLst>
+              <a:ext uri="{FF2B5EF4-FFF2-40B4-BE49-F238E27FC236}">
+                <a16:creationId xmlns:a16="http://schemas.microsoft.com/office/drawing/2014/main" id="{AB34C56E-9BDB-F5E2-1AD6-4C9ACB81D802}"/>
+              </a:ext>
+            </a:extLst>
+          </p:cNvPr>
+          <p:cNvSpPr>
+            <a:spLocks noGrp="1"/>
+          </p:cNvSpPr>
+          <p:nvPr>
+            <p:ph type="body" sz="quarter" idx="16"/>
+          </p:nvPr>
+        </p:nvSpPr>
+        <p:spPr>
+          <a:xfrm>
+            <a:off x="700759" y="6295340"/>
+            <a:ext cx="2302323" cy="408600"/>
+          </a:xfrm>
+        </p:spPr>
+        <p:txBody>
+          <a:bodyPr anchor="ctr">
+            <a:normAutofit/>
+          </a:bodyPr>
+          <a:lstStyle>
+            <a:lvl1pPr marL="0" indent="0">
+              <a:buNone/>
+              <a:defRPr sz="2000"/>
+            </a:lvl1pPr>
+          </a:lstStyle>
+          <a:p>
+            <a:pPr lvl="0"/>
+            <a:endParaRPr lang="en-DE" dirty="0"/>
+          </a:p>
+        </p:txBody>
+      </p:sp>
+      <p:sp>
+        <p:nvSpPr>
+          <p:cNvPr id="4" name="Text Placeholder 7">
+            <a:extLst>
+              <a:ext uri="{FF2B5EF4-FFF2-40B4-BE49-F238E27FC236}">
+                <a16:creationId xmlns:a16="http://schemas.microsoft.com/office/drawing/2014/main" id="{D5540357-5332-D5D8-7379-56AD173E43EA}"/>
+              </a:ext>
+            </a:extLst>
+          </p:cNvPr>
+          <p:cNvSpPr>
+            <a:spLocks noGrp="1"/>
+          </p:cNvSpPr>
+          <p:nvPr>
+            <p:ph type="body" sz="quarter" idx="15"/>
+          </p:nvPr>
+        </p:nvSpPr>
+        <p:spPr>
+          <a:xfrm>
+            <a:off x="4382293" y="3310572"/>
+            <a:ext cx="6911975" cy="1828800"/>
+          </a:xfrm>
+        </p:spPr>
+        <p:txBody>
+          <a:bodyPr/>
+          <a:lstStyle>
+            <a:lvl1pPr marL="0" indent="0">
+              <a:buNone/>
+              <a:defRPr/>
+            </a:lvl1pPr>
+          </a:lstStyle>
+          <a:p>
+            <a:pPr lvl="0"/>
+            <a:endParaRPr lang="en-DE" dirty="0"/>
+          </a:p>
+        </p:txBody>
+      </p:sp>
+    </p:spTree>
+    <p:extLst>
+      <p:ext uri="{BB962C8B-B14F-4D97-AF65-F5344CB8AC3E}">
+        <p14:creationId xmlns:p14="http://schemas.microsoft.com/office/powerpoint/2010/main" val="127269235"/>
+      </p:ext>
+    </p:extLst>
+  </p:cSld>
+  <p:clrMapOvr>
+    <a:masterClrMapping/>
+  </p:clrMapOvr>
+</p:sldLayout>
+</file>
+
+<file path=ppt/slideLayouts/slideLayout3.xml><?xml version="1.0" encoding="utf-8"?>
+<p:sldLayout xmlns:a="http://schemas.openxmlformats.org/drawingml/2006/main" xmlns:r="http://schemas.openxmlformats.org/officeDocument/2006/relationships" xmlns:p="http://schemas.openxmlformats.org/presentationml/2006/main" preserve="1" userDrawn="1">
+  <p:cSld name="Title slide (Variant 1)">
+    <p:spTree>
+      <p:nvGrpSpPr>
+        <p:cNvPr id="1" name=""/>
+        <p:cNvGrpSpPr/>
+        <p:nvPr/>
+      </p:nvGrpSpPr>
+      <p:grpSpPr>
+        <a:xfrm>
+          <a:off x="0" y="0"/>
+          <a:ext cx="0" cy="0"/>
+          <a:chOff x="0" y="0"/>
+          <a:chExt cx="0" cy="0"/>
+        </a:xfrm>
+      </p:grpSpPr>
+      <p:sp>
+        <p:nvSpPr>
+          <p:cNvPr id="3" name="Subtitle 2">
+            <a:extLst>
+              <a:ext uri="{FF2B5EF4-FFF2-40B4-BE49-F238E27FC236}">
+                <a16:creationId xmlns:a16="http://schemas.microsoft.com/office/drawing/2014/main" id="{582DEE7C-AF0C-A94C-0089-53BA99335C72}"/>
+              </a:ext>
+            </a:extLst>
+          </p:cNvPr>
+          <p:cNvSpPr>
+            <a:spLocks noGrp="1"/>
+          </p:cNvSpPr>
+          <p:nvPr>
+            <p:ph type="subTitle" idx="1" hasCustomPrompt="1"/>
+          </p:nvPr>
+        </p:nvSpPr>
+        <p:spPr>
+          <a:xfrm>
+            <a:off x="156000" y="3243098"/>
+            <a:ext cx="11880000" cy="1538452"/>
+          </a:xfrm>
+        </p:spPr>
+        <p:txBody>
+          <a:bodyPr/>
+          <a:lstStyle>
+            <a:lvl1pPr marL="0" indent="0" algn="l">
+              <a:buNone/>
+              <a:defRPr sz="2400"/>
+            </a:lvl1pPr>
+            <a:lvl2pPr marL="457200" indent="0" algn="ctr">
+              <a:buNone/>
+              <a:defRPr sz="2000"/>
+            </a:lvl2pPr>
+            <a:lvl3pPr marL="914400" indent="0" algn="ctr">
+              <a:buNone/>
+              <a:defRPr sz="1800"/>
+            </a:lvl3pPr>
+            <a:lvl4pPr marL="1371600" indent="0" algn="ctr">
+              <a:buNone/>
+              <a:defRPr sz="1600"/>
+            </a:lvl4pPr>
+            <a:lvl5pPr marL="1828800" indent="0" algn="ctr">
+              <a:buNone/>
+              <a:defRPr sz="1600"/>
+            </a:lvl5pPr>
+            <a:lvl6pPr marL="2286000" indent="0" algn="ctr">
+              <a:buNone/>
+              <a:defRPr sz="1600"/>
+            </a:lvl6pPr>
+            <a:lvl7pPr marL="2743200" indent="0" algn="ctr">
+              <a:buNone/>
+              <a:defRPr sz="1600"/>
+            </a:lvl7pPr>
+            <a:lvl8pPr marL="3200400" indent="0" algn="ctr">
+              <a:buNone/>
+              <a:defRPr sz="1600"/>
+            </a:lvl8pPr>
+            <a:lvl9pPr marL="3657600" indent="0" algn="ctr">
+              <a:buNone/>
+              <a:defRPr sz="1600"/>
+            </a:lvl9pPr>
+          </a:lstStyle>
+          <a:p>
+            <a:r>
+              <a:rPr lang="en-GB" dirty="0"/>
+              <a:t>[Full name, including title and/or post-name letters] [Full author list, if required] [Institution(s)]</a:t>
+            </a:r>
+          </a:p>
+          <a:p>
+            <a:endParaRPr lang="en-GB" dirty="0"/>
+          </a:p>
+        </p:txBody>
+      </p:sp>
+      <p:sp>
+        <p:nvSpPr>
+          <p:cNvPr id="12" name="Title 11">
+            <a:extLst>
+              <a:ext uri="{FF2B5EF4-FFF2-40B4-BE49-F238E27FC236}">
+                <a16:creationId xmlns:a16="http://schemas.microsoft.com/office/drawing/2014/main" id="{928B059B-334C-45D2-2325-10DA6A37B897}"/>
+              </a:ext>
+            </a:extLst>
+          </p:cNvPr>
+          <p:cNvSpPr>
+            <a:spLocks noGrp="1"/>
+          </p:cNvSpPr>
+          <p:nvPr>
+            <p:ph type="title"/>
+          </p:nvPr>
+        </p:nvSpPr>
+        <p:spPr>
+          <a:xfrm>
+            <a:off x="156000" y="1519073"/>
+            <a:ext cx="11880000" cy="1443202"/>
+          </a:xfrm>
+        </p:spPr>
+        <p:txBody>
+          <a:bodyPr anchor="b">
+            <a:normAutofit/>
+          </a:bodyPr>
+          <a:lstStyle>
+            <a:lvl1pPr>
+              <a:defRPr sz="3600">
+                <a:solidFill>
+                  <a:srgbClr val="0E2D38"/>
+                </a:solidFill>
+              </a:defRPr>
+            </a:lvl1pPr>
+          </a:lstStyle>
+          <a:p>
+            <a:r>
+              <a:rPr lang="en-GB" dirty="0"/>
+              <a:t>Click to edit Master title style</a:t>
+            </a:r>
+            <a:endParaRPr lang="en-DE" dirty="0"/>
+          </a:p>
+        </p:txBody>
+      </p:sp>
+      <p:sp>
+        <p:nvSpPr>
+          <p:cNvPr id="4" name="Content Placeholder 3">
+            <a:extLst>
+              <a:ext uri="{FF2B5EF4-FFF2-40B4-BE49-F238E27FC236}">
+                <a16:creationId xmlns:a16="http://schemas.microsoft.com/office/drawing/2014/main" id="{697BC65F-206A-0B48-AF56-FE3AA1676AEE}"/>
+              </a:ext>
+            </a:extLst>
+          </p:cNvPr>
+          <p:cNvSpPr>
+            <a:spLocks noGrp="1"/>
+          </p:cNvSpPr>
+          <p:nvPr>
+            <p:ph sz="quarter" idx="10" hasCustomPrompt="1"/>
+          </p:nvPr>
+        </p:nvSpPr>
+        <p:spPr>
+          <a:xfrm>
+            <a:off x="155574" y="4945063"/>
+            <a:ext cx="11879999" cy="1026367"/>
+          </a:xfrm>
+        </p:spPr>
+        <p:txBody>
+          <a:bodyPr>
+            <a:normAutofit/>
+          </a:bodyPr>
+          <a:lstStyle>
+            <a:lvl1pPr marL="0" indent="0">
+              <a:buNone/>
+              <a:defRPr sz="1800">
+                <a:solidFill>
+                  <a:schemeClr val="tx1">
+                    <a:lumMod val="65000"/>
+                    <a:lumOff val="35000"/>
+                  </a:schemeClr>
+                </a:solidFill>
+              </a:defRPr>
+            </a:lvl1pPr>
+          </a:lstStyle>
+          <a:p>
+            <a:pPr lvl="0"/>
+            <a:r>
+              <a:rPr lang="en-DE" dirty="0"/>
+              <a:t>[Event date], [Event name]</a:t>
+            </a:r>
+          </a:p>
+        </p:txBody>
+      </p:sp>
+    </p:spTree>
+    <p:extLst>
+      <p:ext uri="{BB962C8B-B14F-4D97-AF65-F5344CB8AC3E}">
+        <p14:creationId xmlns:p14="http://schemas.microsoft.com/office/powerpoint/2010/main" val="2219985906"/>
+      </p:ext>
+    </p:extLst>
+  </p:cSld>
+  <p:clrMapOvr>
+    <a:masterClrMapping/>
+  </p:clrMapOvr>
+</p:sldLayout>
+</file>
+
+<file path=ppt/slideLayouts/slideLayout4.xml><?xml version="1.0" encoding="utf-8"?>
 <p:sldLayout xmlns:a="http://schemas.openxmlformats.org/drawingml/2006/main" xmlns:r="http://schemas.openxmlformats.org/officeDocument/2006/relationships" xmlns:p="http://schemas.openxmlformats.org/presentationml/2006/main" preserve="1" userDrawn="1">
   <p:cSld name="Slide with text/content (1 column)">
     <p:spTree>
@@ -1047,19 +5789,39 @@
           </a:bodyPr>
           <a:lstStyle>
             <a:lvl1pPr>
-              <a:defRPr sz="2800"/>
+              <a:defRPr sz="2800">
+                <a:solidFill>
+                  <a:srgbClr val="0E2D38"/>
+                </a:solidFill>
+              </a:defRPr>
             </a:lvl1pPr>
             <a:lvl2pPr>
-              <a:defRPr sz="2400"/>
+              <a:defRPr sz="2400">
+                <a:solidFill>
+                  <a:srgbClr val="0E2D38"/>
+                </a:solidFill>
+              </a:defRPr>
             </a:lvl2pPr>
             <a:lvl3pPr>
-              <a:defRPr sz="2000"/>
+              <a:defRPr sz="2000">
+                <a:solidFill>
+                  <a:srgbClr val="0E2D38"/>
+                </a:solidFill>
+              </a:defRPr>
             </a:lvl3pPr>
             <a:lvl4pPr>
-              <a:defRPr sz="1800"/>
+              <a:defRPr sz="1800">
+                <a:solidFill>
+                  <a:srgbClr val="0E2D38"/>
+                </a:solidFill>
+              </a:defRPr>
             </a:lvl4pPr>
             <a:lvl5pPr>
-              <a:defRPr sz="1800"/>
+              <a:defRPr sz="1800">
+                <a:solidFill>
+                  <a:srgbClr val="0E2D38"/>
+                </a:solidFill>
+              </a:defRPr>
             </a:lvl5pPr>
           </a:lstStyle>
           <a:p>
@@ -1122,10 +5884,78 @@
           <a:lstStyle/>
           <a:p>
             <a:r>
-              <a:rPr lang="en-GB"/>
+              <a:rPr lang="en-GB" dirty="0"/>
               <a:t>Click to edit Master title style</a:t>
             </a:r>
-            <a:endParaRPr lang="en-DE"/>
+            <a:endParaRPr lang="en-DE" dirty="0"/>
+          </a:p>
+        </p:txBody>
+      </p:sp>
+      <p:sp>
+        <p:nvSpPr>
+          <p:cNvPr id="2" name="Slide Number Placeholder 1">
+            <a:extLst>
+              <a:ext uri="{FF2B5EF4-FFF2-40B4-BE49-F238E27FC236}">
+                <a16:creationId xmlns:a16="http://schemas.microsoft.com/office/drawing/2014/main" id="{C0D1A7E1-5264-7F90-1485-99D2C93E40AF}"/>
+              </a:ext>
+            </a:extLst>
+          </p:cNvPr>
+          <p:cNvSpPr>
+            <a:spLocks noGrp="1"/>
+          </p:cNvSpPr>
+          <p:nvPr>
+            <p:ph type="sldNum" sz="quarter" idx="10"/>
+          </p:nvPr>
+        </p:nvSpPr>
+        <p:spPr/>
+        <p:txBody>
+          <a:bodyPr/>
+          <a:lstStyle/>
+          <a:p>
+            <a:fld id="{498EEE73-6CBB-5A43-915D-6D3EC7AE1E7C}" type="slidenum">
+              <a:rPr lang="en-DE" smtClean="0"/>
+              <a:pPr/>
+              <a:t>‹#›</a:t>
+            </a:fld>
+            <a:endParaRPr lang="en-DE" dirty="0"/>
+          </a:p>
+        </p:txBody>
+      </p:sp>
+      <p:sp>
+        <p:nvSpPr>
+          <p:cNvPr id="6" name="Text Placeholder 5">
+            <a:extLst>
+              <a:ext uri="{FF2B5EF4-FFF2-40B4-BE49-F238E27FC236}">
+                <a16:creationId xmlns:a16="http://schemas.microsoft.com/office/drawing/2014/main" id="{4A5AA9EC-4E9A-B538-D5DD-3217C6C3880C}"/>
+              </a:ext>
+            </a:extLst>
+          </p:cNvPr>
+          <p:cNvSpPr>
+            <a:spLocks noGrp="1"/>
+          </p:cNvSpPr>
+          <p:nvPr>
+            <p:ph type="body" sz="quarter" idx="11"/>
+          </p:nvPr>
+        </p:nvSpPr>
+        <p:spPr>
+          <a:xfrm>
+            <a:off x="6831013" y="6225115"/>
+            <a:ext cx="3549650" cy="365125"/>
+          </a:xfrm>
+        </p:spPr>
+        <p:txBody>
+          <a:bodyPr>
+            <a:noAutofit/>
+          </a:bodyPr>
+          <a:lstStyle>
+            <a:lvl1pPr marL="0" indent="0">
+              <a:buNone/>
+              <a:defRPr sz="2000"/>
+            </a:lvl1pPr>
+          </a:lstStyle>
+          <a:p>
+            <a:pPr lvl="0"/>
+            <a:endParaRPr lang="en-DE" dirty="0"/>
           </a:p>
         </p:txBody>
       </p:sp>
@@ -1142,8 +5972,8 @@
 </p:sldLayout>
 </file>
 
-<file path=ppt/slideLayouts/slideLayout3.xml><?xml version="1.0" encoding="utf-8"?>
-<p:sldLayout xmlns:a="http://schemas.openxmlformats.org/drawingml/2006/main" xmlns:r="http://schemas.openxmlformats.org/officeDocument/2006/relationships" xmlns:p="http://schemas.openxmlformats.org/presentationml/2006/main" type="twoObj" preserve="1">
+<file path=ppt/slideLayouts/slideLayout5.xml><?xml version="1.0" encoding="utf-8"?>
+<p:sldLayout xmlns:a="http://schemas.openxmlformats.org/drawingml/2006/main" xmlns:r="http://schemas.openxmlformats.org/officeDocument/2006/relationships" xmlns:p="http://schemas.openxmlformats.org/presentationml/2006/main" preserve="1" userDrawn="1">
   <p:cSld name="Slide with text/content (2 columns)">
     <p:spTree>
       <p:nvGrpSpPr>
@@ -1314,6 +6144,79 @@
           </a:p>
         </p:txBody>
       </p:sp>
+      <p:sp>
+        <p:nvSpPr>
+          <p:cNvPr id="5" name="Slide Number Placeholder 4">
+            <a:extLst>
+              <a:ext uri="{FF2B5EF4-FFF2-40B4-BE49-F238E27FC236}">
+                <a16:creationId xmlns:a16="http://schemas.microsoft.com/office/drawing/2014/main" id="{4B9B8D81-A910-D785-4C0C-365DDA4AB0DF}"/>
+              </a:ext>
+            </a:extLst>
+          </p:cNvPr>
+          <p:cNvSpPr>
+            <a:spLocks noGrp="1"/>
+          </p:cNvSpPr>
+          <p:nvPr>
+            <p:ph type="sldNum" sz="quarter" idx="10"/>
+          </p:nvPr>
+        </p:nvSpPr>
+        <p:spPr>
+          <a:xfrm>
+            <a:off x="10596282" y="6225115"/>
+            <a:ext cx="1436400" cy="365125"/>
+          </a:xfrm>
+        </p:spPr>
+        <p:txBody>
+          <a:bodyPr/>
+          <a:lstStyle/>
+          <a:p>
+            <a:fld id="{498EEE73-6CBB-5A43-915D-6D3EC7AE1E7C}" type="slidenum">
+              <a:rPr lang="en-DE" smtClean="0"/>
+              <a:pPr/>
+              <a:t>‹#›</a:t>
+            </a:fld>
+            <a:endParaRPr lang="en-DE" dirty="0"/>
+          </a:p>
+        </p:txBody>
+      </p:sp>
+      <p:sp>
+        <p:nvSpPr>
+          <p:cNvPr id="6" name="Text Placeholder 5">
+            <a:extLst>
+              <a:ext uri="{FF2B5EF4-FFF2-40B4-BE49-F238E27FC236}">
+                <a16:creationId xmlns:a16="http://schemas.microsoft.com/office/drawing/2014/main" id="{7040B2A3-AEE6-BC60-2B01-4890D3CE7051}"/>
+              </a:ext>
+            </a:extLst>
+          </p:cNvPr>
+          <p:cNvSpPr>
+            <a:spLocks noGrp="1"/>
+          </p:cNvSpPr>
+          <p:nvPr>
+            <p:ph type="body" sz="quarter" idx="11"/>
+          </p:nvPr>
+        </p:nvSpPr>
+        <p:spPr>
+          <a:xfrm>
+            <a:off x="6831013" y="6225115"/>
+            <a:ext cx="3549650" cy="365125"/>
+          </a:xfrm>
+        </p:spPr>
+        <p:txBody>
+          <a:bodyPr>
+            <a:noAutofit/>
+          </a:bodyPr>
+          <a:lstStyle>
+            <a:lvl1pPr marL="0" indent="0">
+              <a:buNone/>
+              <a:defRPr sz="2000"/>
+            </a:lvl1pPr>
+          </a:lstStyle>
+          <a:p>
+            <a:pPr lvl="0"/>
+            <a:endParaRPr lang="en-DE" dirty="0"/>
+          </a:p>
+        </p:txBody>
+      </p:sp>
     </p:spTree>
     <p:extLst>
       <p:ext uri="{BB962C8B-B14F-4D97-AF65-F5344CB8AC3E}">
@@ -1327,7 +6230,7 @@
 </p:sldLayout>
 </file>
 
-<file path=ppt/slideLayouts/slideLayout4.xml><?xml version="1.0" encoding="utf-8"?>
+<file path=ppt/slideLayouts/slideLayout6.xml><?xml version="1.0" encoding="utf-8"?>
 <p:sldLayout xmlns:a="http://schemas.openxmlformats.org/drawingml/2006/main" xmlns:r="http://schemas.openxmlformats.org/officeDocument/2006/relationships" xmlns:p="http://schemas.openxmlformats.org/presentationml/2006/main" preserve="1" userDrawn="1">
   <p:cSld name="Empty slide with title text">
     <p:spTree>
@@ -1386,7 +6289,7 @@
 </p:sldLayout>
 </file>
 
-<file path=ppt/slideLayouts/slideLayout5.xml><?xml version="1.0" encoding="utf-8"?>
+<file path=ppt/slideLayouts/slideLayout7.xml><?xml version="1.0" encoding="utf-8"?>
 <p:sldLayout xmlns:a="http://schemas.openxmlformats.org/drawingml/2006/main" xmlns:r="http://schemas.openxmlformats.org/officeDocument/2006/relationships" xmlns:p="http://schemas.openxmlformats.org/presentationml/2006/main" preserve="1" userDrawn="1">
   <p:cSld name="Empty slide with no title text">
     <p:spTree>
@@ -1416,7 +6319,7 @@
 </p:sldLayout>
 </file>
 
-<file path=ppt/slideLayouts/slideLayout6.xml><?xml version="1.0" encoding="utf-8"?>
+<file path=ppt/slideLayouts/slideLayout8.xml><?xml version="1.0" encoding="utf-8"?>
 <p:sldLayout xmlns:a="http://schemas.openxmlformats.org/drawingml/2006/main" xmlns:r="http://schemas.openxmlformats.org/officeDocument/2006/relationships" xmlns:p="http://schemas.openxmlformats.org/presentationml/2006/main" showMasterSp="0" preserve="1" userDrawn="1">
   <p:cSld name="Empty slide">
     <p:spTree>
@@ -1446,12 +6349,12 @@
 </p:sldLayout>
 </file>
 
-<file path=ppt/slideLayouts/slideLayout7.xml><?xml version="1.0" encoding="utf-8"?>
-<p:sldLayout xmlns:a="http://schemas.openxmlformats.org/drawingml/2006/main" xmlns:r="http://schemas.openxmlformats.org/officeDocument/2006/relationships" xmlns:p="http://schemas.openxmlformats.org/presentationml/2006/main" preserve="1" userDrawn="1">
-  <p:cSld name="Title slide">
+<file path=ppt/slideLayouts/slideLayout9.xml><?xml version="1.0" encoding="utf-8"?>
+<p:sldLayout xmlns:a="http://schemas.openxmlformats.org/drawingml/2006/main" xmlns:r="http://schemas.openxmlformats.org/officeDocument/2006/relationships" xmlns:p="http://schemas.openxmlformats.org/presentationml/2006/main" showMasterSp="0" matchingName="Dark References" preserve="1" userDrawn="1">
+  <p:cSld name="Acknowledgments, Mail/GH/Tw">
     <p:spTree>
       <p:nvGrpSpPr>
-        <p:cNvPr id="1" name=""/>
+        <p:cNvPr id="1" name="Shape 54"/>
         <p:cNvGrpSpPr/>
         <p:nvPr/>
       </p:nvGrpSpPr>
@@ -1463,12 +6366,712 @@
           <a:chExt cx="0" cy="0"/>
         </a:xfrm>
       </p:grpSpPr>
+      <p:pic>
+        <p:nvPicPr>
+          <p:cNvPr id="10" name="Picture 9">
+            <a:extLst>
+              <a:ext uri="{FF2B5EF4-FFF2-40B4-BE49-F238E27FC236}">
+                <a16:creationId xmlns:a16="http://schemas.microsoft.com/office/drawing/2014/main" id="{579150A8-A6A7-D848-2DEF-2A552A77C406}"/>
+              </a:ext>
+            </a:extLst>
+          </p:cNvPr>
+          <p:cNvPicPr>
+            <a:picLocks noChangeAspect="1"/>
+          </p:cNvPicPr>
+          <p:nvPr userDrawn="1"/>
+        </p:nvPicPr>
+        <p:blipFill>
+          <a:blip r:embed="rId2">
+            <a:extLst>
+              <a:ext uri="{28A0092B-C50C-407E-A947-70E740481C1C}">
+                <a14:useLocalDpi xmlns:a14="http://schemas.microsoft.com/office/drawing/2010/main" val="0"/>
+              </a:ext>
+            </a:extLst>
+          </a:blip>
+          <a:stretch>
+            <a:fillRect/>
+          </a:stretch>
+        </p:blipFill>
+        <p:spPr>
+          <a:xfrm>
+            <a:off x="0" y="0"/>
+            <a:ext cx="12192000" cy="6858000"/>
+          </a:xfrm>
+          <a:prstGeom prst="rect">
+            <a:avLst/>
+          </a:prstGeom>
+        </p:spPr>
+      </p:pic>
       <p:sp>
         <p:nvSpPr>
-          <p:cNvPr id="3" name="Subtitle 2">
+          <p:cNvPr id="55" name="Google Shape;55;p10"/>
+          <p:cNvSpPr txBox="1">
+            <a:spLocks noGrp="1"/>
+          </p:cNvSpPr>
+          <p:nvPr>
+            <p:ph type="sldNum" idx="12"/>
+          </p:nvPr>
+        </p:nvSpPr>
+        <p:spPr>
+          <a:xfrm>
+            <a:off x="6457950" y="4767263"/>
+            <a:ext cx="2057400" cy="274637"/>
+          </a:xfrm>
+          <a:prstGeom prst="rect">
+            <a:avLst/>
+          </a:prstGeom>
+          <a:noFill/>
+          <a:ln>
+            <a:noFill/>
+          </a:ln>
+        </p:spPr>
+        <p:txBody>
+          <a:bodyPr spcFirstLastPara="1" vert="horz" wrap="square" lIns="91440" tIns="45720" rIns="91440" bIns="45720" rtlCol="0" anchor="ctr" anchorCtr="0">
+            <a:noAutofit/>
+          </a:bodyPr>
+          <a:lstStyle>
+            <a:defPPr marR="0" lvl="0" algn="l" rtl="0">
+              <a:lnSpc>
+                <a:spcPct val="100000"/>
+              </a:lnSpc>
+              <a:spcBef>
+                <a:spcPts val="0"/>
+              </a:spcBef>
+              <a:spcAft>
+                <a:spcPts val="0"/>
+              </a:spcAft>
+            </a:defPPr>
+            <a:lvl1pPr marR="0" lvl="0" algn="r" rtl="0">
+              <a:lnSpc>
+                <a:spcPct val="100000"/>
+              </a:lnSpc>
+              <a:spcBef>
+                <a:spcPts val="0"/>
+              </a:spcBef>
+              <a:spcAft>
+                <a:spcPts val="0"/>
+              </a:spcAft>
+              <a:buClr>
+                <a:srgbClr val="000000"/>
+              </a:buClr>
+              <a:buFont typeface="Arial"/>
+              <a:defRPr sz="1200" b="0" i="0" u="none" strike="noStrike" cap="none">
+                <a:solidFill>
+                  <a:schemeClr val="tx1">
+                    <a:tint val="75000"/>
+                  </a:schemeClr>
+                </a:solidFill>
+                <a:latin typeface="Helvetica Light" panose="020B0403020202020204" pitchFamily="34" charset="0"/>
+                <a:ea typeface="Arial"/>
+                <a:cs typeface="Arial"/>
+                <a:sym typeface="Arial"/>
+              </a:defRPr>
+            </a:lvl1pPr>
+            <a:lvl2pPr marR="0" lvl="1" algn="l" rtl="0">
+              <a:lnSpc>
+                <a:spcPct val="100000"/>
+              </a:lnSpc>
+              <a:spcBef>
+                <a:spcPts val="0"/>
+              </a:spcBef>
+              <a:spcAft>
+                <a:spcPts val="0"/>
+              </a:spcAft>
+              <a:buClr>
+                <a:srgbClr val="000000"/>
+              </a:buClr>
+              <a:buFont typeface="Arial"/>
+              <a:defRPr sz="1400" b="0" i="0" u="none" strike="noStrike" cap="none">
+                <a:solidFill>
+                  <a:srgbClr val="000000"/>
+                </a:solidFill>
+                <a:latin typeface="Arial"/>
+                <a:ea typeface="Arial"/>
+                <a:cs typeface="Arial"/>
+                <a:sym typeface="Arial"/>
+              </a:defRPr>
+            </a:lvl2pPr>
+            <a:lvl3pPr marR="0" lvl="2" algn="l" rtl="0">
+              <a:lnSpc>
+                <a:spcPct val="100000"/>
+              </a:lnSpc>
+              <a:spcBef>
+                <a:spcPts val="0"/>
+              </a:spcBef>
+              <a:spcAft>
+                <a:spcPts val="0"/>
+              </a:spcAft>
+              <a:buClr>
+                <a:srgbClr val="000000"/>
+              </a:buClr>
+              <a:buFont typeface="Arial"/>
+              <a:defRPr sz="1400" b="0" i="0" u="none" strike="noStrike" cap="none">
+                <a:solidFill>
+                  <a:srgbClr val="000000"/>
+                </a:solidFill>
+                <a:latin typeface="Arial"/>
+                <a:ea typeface="Arial"/>
+                <a:cs typeface="Arial"/>
+                <a:sym typeface="Arial"/>
+              </a:defRPr>
+            </a:lvl3pPr>
+            <a:lvl4pPr marR="0" lvl="3" algn="l" rtl="0">
+              <a:lnSpc>
+                <a:spcPct val="100000"/>
+              </a:lnSpc>
+              <a:spcBef>
+                <a:spcPts val="0"/>
+              </a:spcBef>
+              <a:spcAft>
+                <a:spcPts val="0"/>
+              </a:spcAft>
+              <a:buClr>
+                <a:srgbClr val="000000"/>
+              </a:buClr>
+              <a:buFont typeface="Arial"/>
+              <a:defRPr sz="1400" b="0" i="0" u="none" strike="noStrike" cap="none">
+                <a:solidFill>
+                  <a:srgbClr val="000000"/>
+                </a:solidFill>
+                <a:latin typeface="Arial"/>
+                <a:ea typeface="Arial"/>
+                <a:cs typeface="Arial"/>
+                <a:sym typeface="Arial"/>
+              </a:defRPr>
+            </a:lvl4pPr>
+            <a:lvl5pPr marR="0" lvl="4" algn="l" rtl="0">
+              <a:lnSpc>
+                <a:spcPct val="100000"/>
+              </a:lnSpc>
+              <a:spcBef>
+                <a:spcPts val="0"/>
+              </a:spcBef>
+              <a:spcAft>
+                <a:spcPts val="0"/>
+              </a:spcAft>
+              <a:buClr>
+                <a:srgbClr val="000000"/>
+              </a:buClr>
+              <a:buFont typeface="Arial"/>
+              <a:defRPr sz="1400" b="0" i="0" u="none" strike="noStrike" cap="none">
+                <a:solidFill>
+                  <a:srgbClr val="000000"/>
+                </a:solidFill>
+                <a:latin typeface="Arial"/>
+                <a:ea typeface="Arial"/>
+                <a:cs typeface="Arial"/>
+                <a:sym typeface="Arial"/>
+              </a:defRPr>
+            </a:lvl5pPr>
+            <a:lvl6pPr marR="0" lvl="5" algn="l" rtl="0">
+              <a:lnSpc>
+                <a:spcPct val="100000"/>
+              </a:lnSpc>
+              <a:spcBef>
+                <a:spcPts val="0"/>
+              </a:spcBef>
+              <a:spcAft>
+                <a:spcPts val="0"/>
+              </a:spcAft>
+              <a:buClr>
+                <a:srgbClr val="000000"/>
+              </a:buClr>
+              <a:buFont typeface="Arial"/>
+              <a:defRPr sz="1400" b="0" i="0" u="none" strike="noStrike" cap="none">
+                <a:solidFill>
+                  <a:srgbClr val="000000"/>
+                </a:solidFill>
+                <a:latin typeface="Arial"/>
+                <a:ea typeface="Arial"/>
+                <a:cs typeface="Arial"/>
+                <a:sym typeface="Arial"/>
+              </a:defRPr>
+            </a:lvl6pPr>
+            <a:lvl7pPr marR="0" lvl="6" algn="l" rtl="0">
+              <a:lnSpc>
+                <a:spcPct val="100000"/>
+              </a:lnSpc>
+              <a:spcBef>
+                <a:spcPts val="0"/>
+              </a:spcBef>
+              <a:spcAft>
+                <a:spcPts val="0"/>
+              </a:spcAft>
+              <a:buClr>
+                <a:srgbClr val="000000"/>
+              </a:buClr>
+              <a:buFont typeface="Arial"/>
+              <a:defRPr sz="1400" b="0" i="0" u="none" strike="noStrike" cap="none">
+                <a:solidFill>
+                  <a:srgbClr val="000000"/>
+                </a:solidFill>
+                <a:latin typeface="Arial"/>
+                <a:ea typeface="Arial"/>
+                <a:cs typeface="Arial"/>
+                <a:sym typeface="Arial"/>
+              </a:defRPr>
+            </a:lvl7pPr>
+            <a:lvl8pPr marR="0" lvl="7" algn="l" rtl="0">
+              <a:lnSpc>
+                <a:spcPct val="100000"/>
+              </a:lnSpc>
+              <a:spcBef>
+                <a:spcPts val="0"/>
+              </a:spcBef>
+              <a:spcAft>
+                <a:spcPts val="0"/>
+              </a:spcAft>
+              <a:buClr>
+                <a:srgbClr val="000000"/>
+              </a:buClr>
+              <a:buFont typeface="Arial"/>
+              <a:defRPr sz="1400" b="0" i="0" u="none" strike="noStrike" cap="none">
+                <a:solidFill>
+                  <a:srgbClr val="000000"/>
+                </a:solidFill>
+                <a:latin typeface="Arial"/>
+                <a:ea typeface="Arial"/>
+                <a:cs typeface="Arial"/>
+                <a:sym typeface="Arial"/>
+              </a:defRPr>
+            </a:lvl8pPr>
+            <a:lvl9pPr marR="0" lvl="8" algn="l" rtl="0">
+              <a:lnSpc>
+                <a:spcPct val="100000"/>
+              </a:lnSpc>
+              <a:spcBef>
+                <a:spcPts val="0"/>
+              </a:spcBef>
+              <a:spcAft>
+                <a:spcPts val="0"/>
+              </a:spcAft>
+              <a:buClr>
+                <a:srgbClr val="000000"/>
+              </a:buClr>
+              <a:buFont typeface="Arial"/>
+              <a:defRPr sz="1400" b="0" i="0" u="none" strike="noStrike" cap="none">
+                <a:solidFill>
+                  <a:srgbClr val="000000"/>
+                </a:solidFill>
+                <a:latin typeface="Arial"/>
+                <a:ea typeface="Arial"/>
+                <a:cs typeface="Arial"/>
+                <a:sym typeface="Arial"/>
+              </a:defRPr>
+            </a:lvl9pPr>
+          </a:lstStyle>
+          <a:p>
+            <a:fld id="{3BF01AD4-1839-794E-BD90-91AB590172A7}" type="slidenum">
+              <a:rPr lang="en-DE" smtClean="0"/>
+              <a:pPr/>
+              <a:t>‹#›</a:t>
+            </a:fld>
+            <a:endParaRPr lang="en"/>
+          </a:p>
+        </p:txBody>
+      </p:sp>
+      <p:cxnSp>
+        <p:nvCxnSpPr>
+          <p:cNvPr id="57" name="Google Shape;57;p10"/>
+          <p:cNvCxnSpPr/>
+          <p:nvPr/>
+        </p:nvCxnSpPr>
+        <p:spPr>
+          <a:xfrm>
+            <a:off x="3716421" y="2608481"/>
+            <a:ext cx="0" cy="1600400"/>
+          </a:xfrm>
+          <a:prstGeom prst="straightConnector1">
+            <a:avLst/>
+          </a:prstGeom>
+          <a:noFill/>
+          <a:ln w="19050" cap="flat" cmpd="sng">
+            <a:solidFill>
+              <a:schemeClr val="lt1"/>
+            </a:solidFill>
+            <a:prstDash val="solid"/>
+            <a:miter lim="800000"/>
+            <a:headEnd type="none" w="sm" len="sm"/>
+            <a:tailEnd type="none" w="sm" len="sm"/>
+          </a:ln>
+        </p:spPr>
+      </p:cxnSp>
+      <p:sp>
+        <p:nvSpPr>
+          <p:cNvPr id="60" name="Google Shape;60;p10"/>
+          <p:cNvSpPr txBox="1">
+            <a:spLocks noGrp="1"/>
+          </p:cNvSpPr>
+          <p:nvPr>
+            <p:ph type="sldNum" idx="2"/>
+          </p:nvPr>
+        </p:nvSpPr>
+        <p:spPr>
+          <a:xfrm>
+            <a:off x="6457950" y="4767263"/>
+            <a:ext cx="2057400" cy="274637"/>
+          </a:xfrm>
+          <a:prstGeom prst="rect">
+            <a:avLst/>
+          </a:prstGeom>
+          <a:noFill/>
+          <a:ln>
+            <a:noFill/>
+          </a:ln>
+        </p:spPr>
+        <p:txBody>
+          <a:bodyPr spcFirstLastPara="1" vert="horz" wrap="square" lIns="91440" tIns="45720" rIns="91440" bIns="45720" rtlCol="0" anchor="ctr" anchorCtr="0">
+            <a:noAutofit/>
+          </a:bodyPr>
+          <a:lstStyle>
+            <a:defPPr marR="0" lvl="0" algn="l" rtl="0">
+              <a:lnSpc>
+                <a:spcPct val="100000"/>
+              </a:lnSpc>
+              <a:spcBef>
+                <a:spcPts val="0"/>
+              </a:spcBef>
+              <a:spcAft>
+                <a:spcPts val="0"/>
+              </a:spcAft>
+            </a:defPPr>
+            <a:lvl1pPr marR="0" lvl="0" algn="r" rtl="0">
+              <a:lnSpc>
+                <a:spcPct val="100000"/>
+              </a:lnSpc>
+              <a:spcBef>
+                <a:spcPts val="0"/>
+              </a:spcBef>
+              <a:spcAft>
+                <a:spcPts val="0"/>
+              </a:spcAft>
+              <a:buClr>
+                <a:srgbClr val="000000"/>
+              </a:buClr>
+              <a:buFont typeface="Arial"/>
+              <a:defRPr sz="1200" b="0" i="0" u="none" strike="noStrike" cap="none">
+                <a:solidFill>
+                  <a:schemeClr val="tx1">
+                    <a:tint val="75000"/>
+                  </a:schemeClr>
+                </a:solidFill>
+                <a:latin typeface="Helvetica Light" panose="020B0403020202020204" pitchFamily="34" charset="0"/>
+                <a:ea typeface="Arial"/>
+                <a:cs typeface="Arial"/>
+                <a:sym typeface="Arial"/>
+              </a:defRPr>
+            </a:lvl1pPr>
+            <a:lvl2pPr marR="0" lvl="1" algn="l" rtl="0">
+              <a:lnSpc>
+                <a:spcPct val="100000"/>
+              </a:lnSpc>
+              <a:spcBef>
+                <a:spcPts val="0"/>
+              </a:spcBef>
+              <a:spcAft>
+                <a:spcPts val="0"/>
+              </a:spcAft>
+              <a:buClr>
+                <a:srgbClr val="000000"/>
+              </a:buClr>
+              <a:buFont typeface="Arial"/>
+              <a:defRPr sz="1400" b="0" i="0" u="none" strike="noStrike" cap="none">
+                <a:solidFill>
+                  <a:srgbClr val="000000"/>
+                </a:solidFill>
+                <a:latin typeface="Arial"/>
+                <a:ea typeface="Arial"/>
+                <a:cs typeface="Arial"/>
+                <a:sym typeface="Arial"/>
+              </a:defRPr>
+            </a:lvl2pPr>
+            <a:lvl3pPr marR="0" lvl="2" algn="l" rtl="0">
+              <a:lnSpc>
+                <a:spcPct val="100000"/>
+              </a:lnSpc>
+              <a:spcBef>
+                <a:spcPts val="0"/>
+              </a:spcBef>
+              <a:spcAft>
+                <a:spcPts val="0"/>
+              </a:spcAft>
+              <a:buClr>
+                <a:srgbClr val="000000"/>
+              </a:buClr>
+              <a:buFont typeface="Arial"/>
+              <a:defRPr sz="1400" b="0" i="0" u="none" strike="noStrike" cap="none">
+                <a:solidFill>
+                  <a:srgbClr val="000000"/>
+                </a:solidFill>
+                <a:latin typeface="Arial"/>
+                <a:ea typeface="Arial"/>
+                <a:cs typeface="Arial"/>
+                <a:sym typeface="Arial"/>
+              </a:defRPr>
+            </a:lvl3pPr>
+            <a:lvl4pPr marR="0" lvl="3" algn="l" rtl="0">
+              <a:lnSpc>
+                <a:spcPct val="100000"/>
+              </a:lnSpc>
+              <a:spcBef>
+                <a:spcPts val="0"/>
+              </a:spcBef>
+              <a:spcAft>
+                <a:spcPts val="0"/>
+              </a:spcAft>
+              <a:buClr>
+                <a:srgbClr val="000000"/>
+              </a:buClr>
+              <a:buFont typeface="Arial"/>
+              <a:defRPr sz="1400" b="0" i="0" u="none" strike="noStrike" cap="none">
+                <a:solidFill>
+                  <a:srgbClr val="000000"/>
+                </a:solidFill>
+                <a:latin typeface="Arial"/>
+                <a:ea typeface="Arial"/>
+                <a:cs typeface="Arial"/>
+                <a:sym typeface="Arial"/>
+              </a:defRPr>
+            </a:lvl4pPr>
+            <a:lvl5pPr marR="0" lvl="4" algn="l" rtl="0">
+              <a:lnSpc>
+                <a:spcPct val="100000"/>
+              </a:lnSpc>
+              <a:spcBef>
+                <a:spcPts val="0"/>
+              </a:spcBef>
+              <a:spcAft>
+                <a:spcPts val="0"/>
+              </a:spcAft>
+              <a:buClr>
+                <a:srgbClr val="000000"/>
+              </a:buClr>
+              <a:buFont typeface="Arial"/>
+              <a:defRPr sz="1400" b="0" i="0" u="none" strike="noStrike" cap="none">
+                <a:solidFill>
+                  <a:srgbClr val="000000"/>
+                </a:solidFill>
+                <a:latin typeface="Arial"/>
+                <a:ea typeface="Arial"/>
+                <a:cs typeface="Arial"/>
+                <a:sym typeface="Arial"/>
+              </a:defRPr>
+            </a:lvl5pPr>
+            <a:lvl6pPr marR="0" lvl="5" algn="l" rtl="0">
+              <a:lnSpc>
+                <a:spcPct val="100000"/>
+              </a:lnSpc>
+              <a:spcBef>
+                <a:spcPts val="0"/>
+              </a:spcBef>
+              <a:spcAft>
+                <a:spcPts val="0"/>
+              </a:spcAft>
+              <a:buClr>
+                <a:srgbClr val="000000"/>
+              </a:buClr>
+              <a:buFont typeface="Arial"/>
+              <a:defRPr sz="1400" b="0" i="0" u="none" strike="noStrike" cap="none">
+                <a:solidFill>
+                  <a:srgbClr val="000000"/>
+                </a:solidFill>
+                <a:latin typeface="Arial"/>
+                <a:ea typeface="Arial"/>
+                <a:cs typeface="Arial"/>
+                <a:sym typeface="Arial"/>
+              </a:defRPr>
+            </a:lvl6pPr>
+            <a:lvl7pPr marR="0" lvl="6" algn="l" rtl="0">
+              <a:lnSpc>
+                <a:spcPct val="100000"/>
+              </a:lnSpc>
+              <a:spcBef>
+                <a:spcPts val="0"/>
+              </a:spcBef>
+              <a:spcAft>
+                <a:spcPts val="0"/>
+              </a:spcAft>
+              <a:buClr>
+                <a:srgbClr val="000000"/>
+              </a:buClr>
+              <a:buFont typeface="Arial"/>
+              <a:defRPr sz="1400" b="0" i="0" u="none" strike="noStrike" cap="none">
+                <a:solidFill>
+                  <a:srgbClr val="000000"/>
+                </a:solidFill>
+                <a:latin typeface="Arial"/>
+                <a:ea typeface="Arial"/>
+                <a:cs typeface="Arial"/>
+                <a:sym typeface="Arial"/>
+              </a:defRPr>
+            </a:lvl7pPr>
+            <a:lvl8pPr marR="0" lvl="7" algn="l" rtl="0">
+              <a:lnSpc>
+                <a:spcPct val="100000"/>
+              </a:lnSpc>
+              <a:spcBef>
+                <a:spcPts val="0"/>
+              </a:spcBef>
+              <a:spcAft>
+                <a:spcPts val="0"/>
+              </a:spcAft>
+              <a:buClr>
+                <a:srgbClr val="000000"/>
+              </a:buClr>
+              <a:buFont typeface="Arial"/>
+              <a:defRPr sz="1400" b="0" i="0" u="none" strike="noStrike" cap="none">
+                <a:solidFill>
+                  <a:srgbClr val="000000"/>
+                </a:solidFill>
+                <a:latin typeface="Arial"/>
+                <a:ea typeface="Arial"/>
+                <a:cs typeface="Arial"/>
+                <a:sym typeface="Arial"/>
+              </a:defRPr>
+            </a:lvl8pPr>
+            <a:lvl9pPr marR="0" lvl="8" algn="l" rtl="0">
+              <a:lnSpc>
+                <a:spcPct val="100000"/>
+              </a:lnSpc>
+              <a:spcBef>
+                <a:spcPts val="0"/>
+              </a:spcBef>
+              <a:spcAft>
+                <a:spcPts val="0"/>
+              </a:spcAft>
+              <a:buClr>
+                <a:srgbClr val="000000"/>
+              </a:buClr>
+              <a:buFont typeface="Arial"/>
+              <a:defRPr sz="1400" b="0" i="0" u="none" strike="noStrike" cap="none">
+                <a:solidFill>
+                  <a:srgbClr val="000000"/>
+                </a:solidFill>
+                <a:latin typeface="Arial"/>
+                <a:ea typeface="Arial"/>
+                <a:cs typeface="Arial"/>
+                <a:sym typeface="Arial"/>
+              </a:defRPr>
+            </a:lvl9pPr>
+          </a:lstStyle>
+          <a:p>
+            <a:fld id="{3BF01AD4-1839-794E-BD90-91AB590172A7}" type="slidenum">
+              <a:rPr lang="en-DE" smtClean="0"/>
+              <a:pPr/>
+              <a:t>‹#›</a:t>
+            </a:fld>
+            <a:endParaRPr lang="en"/>
+          </a:p>
+        </p:txBody>
+      </p:sp>
+      <p:pic>
+        <p:nvPicPr>
+          <p:cNvPr id="62" name="Google Shape;62;p10"/>
+          <p:cNvPicPr preferRelativeResize="0"/>
+          <p:nvPr/>
+        </p:nvPicPr>
+        <p:blipFill>
+          <a:blip r:embed="rId3">
+            <a:extLst>
+              <a:ext uri="{28A0092B-C50C-407E-A947-70E740481C1C}">
+                <a14:useLocalDpi xmlns:a14="http://schemas.microsoft.com/office/drawing/2010/main" val="0"/>
+              </a:ext>
+              <a:ext uri="{96DAC541-7B7A-43D3-8B79-37D633B846F1}">
+                <asvg:svgBlip xmlns:asvg="http://schemas.microsoft.com/office/drawing/2016/SVG/main" r:embed="rId4"/>
+              </a:ext>
+            </a:extLst>
+          </a:blip>
+          <a:srcRect/>
+          <a:stretch/>
+        </p:blipFill>
+        <p:spPr>
+          <a:xfrm>
+            <a:off x="3071993" y="6285589"/>
+            <a:ext cx="414529" cy="408850"/>
+          </a:xfrm>
+          <a:prstGeom prst="rect">
+            <a:avLst/>
+          </a:prstGeom>
+          <a:noFill/>
+          <a:ln>
+            <a:noFill/>
+          </a:ln>
+        </p:spPr>
+      </p:pic>
+      <p:pic>
+        <p:nvPicPr>
+          <p:cNvPr id="64" name="Google Shape;64;p10"/>
+          <p:cNvPicPr preferRelativeResize="0"/>
+          <p:nvPr/>
+        </p:nvPicPr>
+        <p:blipFill>
+          <a:blip r:embed="rId5">
+            <a:extLst>
+              <a:ext uri="{28A0092B-C50C-407E-A947-70E740481C1C}">
+                <a14:useLocalDpi xmlns:a14="http://schemas.microsoft.com/office/drawing/2010/main" val="0"/>
+              </a:ext>
+              <a:ext uri="{96DAC541-7B7A-43D3-8B79-37D633B846F1}">
+                <asvg:svgBlip xmlns:asvg="http://schemas.microsoft.com/office/drawing/2016/SVG/main" r:embed="rId6"/>
+              </a:ext>
+            </a:extLst>
+          </a:blip>
+          <a:srcRect/>
+          <a:stretch/>
+        </p:blipFill>
+        <p:spPr>
+          <a:xfrm>
+            <a:off x="152659" y="6282751"/>
+            <a:ext cx="414528" cy="414528"/>
+          </a:xfrm>
+          <a:prstGeom prst="rect">
+            <a:avLst/>
+          </a:prstGeom>
+          <a:noFill/>
+          <a:ln>
+            <a:noFill/>
+          </a:ln>
+        </p:spPr>
+      </p:pic>
+      <p:pic>
+        <p:nvPicPr>
+          <p:cNvPr id="65" name="Google Shape;65;p10"/>
+          <p:cNvPicPr preferRelativeResize="0"/>
+          <p:nvPr/>
+        </p:nvPicPr>
+        <p:blipFill>
+          <a:blip r:embed="rId7">
+            <a:extLst>
+              <a:ext uri="{28A0092B-C50C-407E-A947-70E740481C1C}">
+                <a14:useLocalDpi xmlns:a14="http://schemas.microsoft.com/office/drawing/2010/main" val="0"/>
+              </a:ext>
+              <a:ext uri="{96DAC541-7B7A-43D3-8B79-37D633B846F1}">
+                <asvg:svgBlip xmlns:asvg="http://schemas.microsoft.com/office/drawing/2016/SVG/main" r:embed="rId8"/>
+              </a:ext>
+            </a:extLst>
+          </a:blip>
+          <a:srcRect/>
+          <a:stretch/>
+        </p:blipFill>
+        <p:spPr>
+          <a:xfrm>
+            <a:off x="5971585" y="6318997"/>
+            <a:ext cx="408600" cy="336106"/>
+          </a:xfrm>
+          <a:prstGeom prst="rect">
+            <a:avLst/>
+          </a:prstGeom>
+          <a:noFill/>
+          <a:ln>
+            <a:noFill/>
+          </a:ln>
+        </p:spPr>
+      </p:pic>
+      <p:sp>
+        <p:nvSpPr>
+          <p:cNvPr id="6" name="Picture Placeholder 5">
             <a:extLst>
               <a:ext uri="{FF2B5EF4-FFF2-40B4-BE49-F238E27FC236}">
-                <a16:creationId xmlns:a16="http://schemas.microsoft.com/office/drawing/2014/main" id="{582DEE7C-AF0C-A94C-0089-53BA99335C72}"/>
+                <a16:creationId xmlns:a16="http://schemas.microsoft.com/office/drawing/2014/main" id="{2631C45D-A4AF-1223-E180-EB9E96FA2AE4}"/>
               </a:ext>
             </a:extLst>
           </p:cNvPr>
@@ -1476,72 +7079,34 @@
             <a:spLocks noGrp="1"/>
           </p:cNvSpPr>
           <p:nvPr>
-            <p:ph type="subTitle" idx="1" hasCustomPrompt="1"/>
+            <p:ph type="pic" sz="quarter" idx="13"/>
           </p:nvPr>
         </p:nvSpPr>
         <p:spPr>
           <a:xfrm>
-            <a:off x="156000" y="3243098"/>
-            <a:ext cx="11880000" cy="1538452"/>
+            <a:off x="277813" y="1289050"/>
+            <a:ext cx="3206750" cy="4024313"/>
           </a:xfrm>
         </p:spPr>
         <p:txBody>
           <a:bodyPr/>
           <a:lstStyle>
-            <a:lvl1pPr marL="0" indent="0" algn="l">
-              <a:buNone/>
-              <a:defRPr sz="2400"/>
+            <a:lvl1pPr marL="0" indent="0">
+              <a:buNone/>
+              <a:defRPr/>
             </a:lvl1pPr>
-            <a:lvl2pPr marL="457200" indent="0" algn="ctr">
-              <a:buNone/>
-              <a:defRPr sz="2000"/>
-            </a:lvl2pPr>
-            <a:lvl3pPr marL="914400" indent="0" algn="ctr">
-              <a:buNone/>
-              <a:defRPr sz="1800"/>
-            </a:lvl3pPr>
-            <a:lvl4pPr marL="1371600" indent="0" algn="ctr">
-              <a:buNone/>
-              <a:defRPr sz="1600"/>
-            </a:lvl4pPr>
-            <a:lvl5pPr marL="1828800" indent="0" algn="ctr">
-              <a:buNone/>
-              <a:defRPr sz="1600"/>
-            </a:lvl5pPr>
-            <a:lvl6pPr marL="2286000" indent="0" algn="ctr">
-              <a:buNone/>
-              <a:defRPr sz="1600"/>
-            </a:lvl6pPr>
-            <a:lvl7pPr marL="2743200" indent="0" algn="ctr">
-              <a:buNone/>
-              <a:defRPr sz="1600"/>
-            </a:lvl7pPr>
-            <a:lvl8pPr marL="3200400" indent="0" algn="ctr">
-              <a:buNone/>
-              <a:defRPr sz="1600"/>
-            </a:lvl8pPr>
-            <a:lvl9pPr marL="3657600" indent="0" algn="ctr">
-              <a:buNone/>
-              <a:defRPr sz="1600"/>
-            </a:lvl9pPr>
           </a:lstStyle>
           <a:p>
-            <a:r>
-              <a:rPr lang="en-GB" dirty="0"/>
-              <a:t>[Full name, including title and/or post-name letters] [Full author list, if required] [Institution(s)]</a:t>
-            </a:r>
-          </a:p>
-          <a:p>
-            <a:endParaRPr lang="en-GB" dirty="0"/>
+            <a:endParaRPr lang="en-DE" dirty="0"/>
           </a:p>
         </p:txBody>
       </p:sp>
       <p:sp>
         <p:nvSpPr>
-          <p:cNvPr id="12" name="Title 11">
+          <p:cNvPr id="8" name="Text Placeholder 7">
             <a:extLst>
               <a:ext uri="{FF2B5EF4-FFF2-40B4-BE49-F238E27FC236}">
-                <a16:creationId xmlns:a16="http://schemas.microsoft.com/office/drawing/2014/main" id="{928B059B-334C-45D2-2325-10DA6A37B897}"/>
+                <a16:creationId xmlns:a16="http://schemas.microsoft.com/office/drawing/2014/main" id="{E469473F-31A1-DA1A-1446-8C54C99F5645}"/>
               </a:ext>
             </a:extLst>
           </p:cNvPr>
@@ -1549,43 +7114,35 @@
             <a:spLocks noGrp="1"/>
           </p:cNvSpPr>
           <p:nvPr>
-            <p:ph type="title"/>
+            <p:ph type="body" sz="quarter" idx="14"/>
           </p:nvPr>
         </p:nvSpPr>
         <p:spPr>
           <a:xfrm>
-            <a:off x="156000" y="1519073"/>
-            <a:ext cx="11880000" cy="1443202"/>
+            <a:off x="4382294" y="1289050"/>
+            <a:ext cx="6911975" cy="1828800"/>
           </a:xfrm>
         </p:spPr>
         <p:txBody>
-          <a:bodyPr anchor="b">
-            <a:normAutofit/>
-          </a:bodyPr>
+          <a:bodyPr/>
           <a:lstStyle>
-            <a:lvl1pPr>
-              <a:defRPr sz="3600">
-                <a:solidFill>
-                  <a:schemeClr val="tx1"/>
-                </a:solidFill>
-              </a:defRPr>
+            <a:lvl1pPr marL="0" indent="0">
+              <a:buNone/>
+              <a:defRPr/>
             </a:lvl1pPr>
           </a:lstStyle>
           <a:p>
-            <a:r>
-              <a:rPr lang="en-GB" dirty="0"/>
-              <a:t>Click to edit Master title style</a:t>
-            </a:r>
+            <a:pPr lvl="0"/>
             <a:endParaRPr lang="en-DE" dirty="0"/>
           </a:p>
         </p:txBody>
       </p:sp>
       <p:sp>
         <p:nvSpPr>
-          <p:cNvPr id="4" name="Content Placeholder 3">
+          <p:cNvPr id="9" name="Text Placeholder 7">
             <a:extLst>
               <a:ext uri="{FF2B5EF4-FFF2-40B4-BE49-F238E27FC236}">
-                <a16:creationId xmlns:a16="http://schemas.microsoft.com/office/drawing/2014/main" id="{697BC65F-206A-0B48-AF56-FE3AA1676AEE}"/>
+                <a16:creationId xmlns:a16="http://schemas.microsoft.com/office/drawing/2014/main" id="{7D27FFAE-CDC4-C5E3-ACA9-B1B660F21931}"/>
               </a:ext>
             </a:extLst>
           </p:cNvPr>
@@ -1593,365 +7150,147 @@
             <a:spLocks noGrp="1"/>
           </p:cNvSpPr>
           <p:nvPr>
-            <p:ph sz="quarter" idx="10" hasCustomPrompt="1"/>
+            <p:ph type="body" sz="quarter" idx="15"/>
           </p:nvPr>
         </p:nvSpPr>
         <p:spPr>
           <a:xfrm>
-            <a:off x="155574" y="4945063"/>
-            <a:ext cx="11879999" cy="1026367"/>
+            <a:off x="4382293" y="3310572"/>
+            <a:ext cx="6911975" cy="1828800"/>
           </a:xfrm>
         </p:spPr>
         <p:txBody>
-          <a:bodyPr>
+          <a:bodyPr/>
+          <a:lstStyle>
+            <a:lvl1pPr marL="0" indent="0">
+              <a:buNone/>
+              <a:defRPr/>
+            </a:lvl1pPr>
+          </a:lstStyle>
+          <a:p>
+            <a:pPr lvl="0"/>
+            <a:endParaRPr lang="en-DE" dirty="0"/>
+          </a:p>
+        </p:txBody>
+      </p:sp>
+      <p:sp>
+        <p:nvSpPr>
+          <p:cNvPr id="12" name="Text Placeholder 11">
+            <a:extLst>
+              <a:ext uri="{FF2B5EF4-FFF2-40B4-BE49-F238E27FC236}">
+                <a16:creationId xmlns:a16="http://schemas.microsoft.com/office/drawing/2014/main" id="{AB34C56E-9BDB-F5E2-1AD6-4C9ACB81D802}"/>
+              </a:ext>
+            </a:extLst>
+          </p:cNvPr>
+          <p:cNvSpPr>
+            <a:spLocks noGrp="1"/>
+          </p:cNvSpPr>
+          <p:nvPr>
+            <p:ph type="body" sz="quarter" idx="16"/>
+          </p:nvPr>
+        </p:nvSpPr>
+        <p:spPr>
+          <a:xfrm>
+            <a:off x="700759" y="6295340"/>
+            <a:ext cx="2302323" cy="408600"/>
+          </a:xfrm>
+        </p:spPr>
+        <p:txBody>
+          <a:bodyPr anchor="ctr">
             <a:normAutofit/>
           </a:bodyPr>
           <a:lstStyle>
             <a:lvl1pPr marL="0" indent="0">
               <a:buNone/>
-              <a:defRPr sz="1800">
-                <a:solidFill>
-                  <a:schemeClr val="tx1">
-                    <a:lumMod val="65000"/>
-                    <a:lumOff val="35000"/>
-                  </a:schemeClr>
-                </a:solidFill>
-              </a:defRPr>
+              <a:defRPr sz="2000"/>
             </a:lvl1pPr>
           </a:lstStyle>
           <a:p>
             <a:pPr lvl="0"/>
-            <a:r>
-              <a:rPr lang="en-DE" dirty="0"/>
-              <a:t>[Event date], [Event name]</a:t>
-            </a:r>
+            <a:endParaRPr lang="en-DE" dirty="0"/>
+          </a:p>
+        </p:txBody>
+      </p:sp>
+      <p:sp>
+        <p:nvSpPr>
+          <p:cNvPr id="13" name="Text Placeholder 11">
+            <a:extLst>
+              <a:ext uri="{FF2B5EF4-FFF2-40B4-BE49-F238E27FC236}">
+                <a16:creationId xmlns:a16="http://schemas.microsoft.com/office/drawing/2014/main" id="{210C2267-198C-B65E-1588-1D8ADC032B0D}"/>
+              </a:ext>
+            </a:extLst>
+          </p:cNvPr>
+          <p:cNvSpPr>
+            <a:spLocks noGrp="1"/>
+          </p:cNvSpPr>
+          <p:nvPr>
+            <p:ph type="body" sz="quarter" idx="17"/>
+          </p:nvPr>
+        </p:nvSpPr>
+        <p:spPr>
+          <a:xfrm>
+            <a:off x="3540472" y="6295340"/>
+            <a:ext cx="2302323" cy="408600"/>
+          </a:xfrm>
+        </p:spPr>
+        <p:txBody>
+          <a:bodyPr anchor="ctr">
+            <a:normAutofit/>
+          </a:bodyPr>
+          <a:lstStyle>
+            <a:lvl1pPr marL="0" indent="0">
+              <a:buNone/>
+              <a:defRPr sz="2000"/>
+            </a:lvl1pPr>
+          </a:lstStyle>
+          <a:p>
+            <a:pPr lvl="0"/>
+            <a:endParaRPr lang="en-DE" dirty="0"/>
+          </a:p>
+        </p:txBody>
+      </p:sp>
+      <p:sp>
+        <p:nvSpPr>
+          <p:cNvPr id="14" name="Text Placeholder 11">
+            <a:extLst>
+              <a:ext uri="{FF2B5EF4-FFF2-40B4-BE49-F238E27FC236}">
+                <a16:creationId xmlns:a16="http://schemas.microsoft.com/office/drawing/2014/main" id="{B755F42B-5D4D-06C9-BCF0-324CE2951DC3}"/>
+              </a:ext>
+            </a:extLst>
+          </p:cNvPr>
+          <p:cNvSpPr>
+            <a:spLocks noGrp="1"/>
+          </p:cNvSpPr>
+          <p:nvPr>
+            <p:ph type="body" sz="quarter" idx="18"/>
+          </p:nvPr>
+        </p:nvSpPr>
+        <p:spPr>
+          <a:xfrm>
+            <a:off x="6395146" y="6295340"/>
+            <a:ext cx="2302323" cy="408600"/>
+          </a:xfrm>
+        </p:spPr>
+        <p:txBody>
+          <a:bodyPr anchor="ctr">
+            <a:normAutofit/>
+          </a:bodyPr>
+          <a:lstStyle>
+            <a:lvl1pPr marL="0" indent="0">
+              <a:buNone/>
+              <a:defRPr sz="2000"/>
+            </a:lvl1pPr>
+          </a:lstStyle>
+          <a:p>
+            <a:pPr lvl="0"/>
+            <a:endParaRPr lang="en-DE" dirty="0"/>
           </a:p>
         </p:txBody>
       </p:sp>
     </p:spTree>
     <p:extLst>
       <p:ext uri="{BB962C8B-B14F-4D97-AF65-F5344CB8AC3E}">
-        <p14:creationId xmlns:p14="http://schemas.microsoft.com/office/powerpoint/2010/main" val="4061247862"/>
-      </p:ext>
-    </p:extLst>
-  </p:cSld>
-  <p:clrMapOvr>
-    <a:masterClrMapping/>
-  </p:clrMapOvr>
-</p:sldLayout>
-</file>
-
-<file path=ppt/slideLayouts/slideLayout8.xml><?xml version="1.0" encoding="utf-8"?>
-<p:sldLayout xmlns:a="http://schemas.openxmlformats.org/drawingml/2006/main" xmlns:r="http://schemas.openxmlformats.org/officeDocument/2006/relationships" xmlns:p="http://schemas.openxmlformats.org/presentationml/2006/main" preserve="1" userDrawn="1">
-  <p:cSld name="Slide with text/content (1 column)">
-    <p:spTree>
-      <p:nvGrpSpPr>
-        <p:cNvPr id="1" name=""/>
-        <p:cNvGrpSpPr/>
-        <p:nvPr/>
-      </p:nvGrpSpPr>
-      <p:grpSpPr>
-        <a:xfrm>
-          <a:off x="0" y="0"/>
-          <a:ext cx="0" cy="0"/>
-          <a:chOff x="0" y="0"/>
-          <a:chExt cx="0" cy="0"/>
-        </a:xfrm>
-      </p:grpSpPr>
-      <p:sp>
-        <p:nvSpPr>
-          <p:cNvPr id="3" name="Content Placeholder 2">
-            <a:extLst>
-              <a:ext uri="{FF2B5EF4-FFF2-40B4-BE49-F238E27FC236}">
-                <a16:creationId xmlns:a16="http://schemas.microsoft.com/office/drawing/2014/main" id="{C42B0433-50EC-6784-D802-9118B6C69D19}"/>
-              </a:ext>
-            </a:extLst>
-          </p:cNvPr>
-          <p:cNvSpPr>
-            <a:spLocks noGrp="1"/>
-          </p:cNvSpPr>
-          <p:nvPr>
-            <p:ph idx="1"/>
-          </p:nvPr>
-        </p:nvSpPr>
-        <p:spPr/>
-        <p:txBody>
-          <a:bodyPr>
-            <a:normAutofit/>
-          </a:bodyPr>
-          <a:lstStyle>
-            <a:lvl1pPr>
-              <a:defRPr sz="2800"/>
-            </a:lvl1pPr>
-            <a:lvl2pPr>
-              <a:defRPr sz="2400"/>
-            </a:lvl2pPr>
-            <a:lvl3pPr>
-              <a:defRPr sz="2000"/>
-            </a:lvl3pPr>
-            <a:lvl4pPr>
-              <a:defRPr sz="1800"/>
-            </a:lvl4pPr>
-            <a:lvl5pPr>
-              <a:defRPr sz="1800"/>
-            </a:lvl5pPr>
-          </a:lstStyle>
-          <a:p>
-            <a:pPr lvl="0"/>
-            <a:r>
-              <a:rPr lang="en-GB" dirty="0"/>
-              <a:t>Click to edit Master text styles</a:t>
-            </a:r>
-          </a:p>
-          <a:p>
-            <a:pPr lvl="1"/>
-            <a:r>
-              <a:rPr lang="en-GB" dirty="0"/>
-              <a:t>Second level</a:t>
-            </a:r>
-          </a:p>
-          <a:p>
-            <a:pPr lvl="2"/>
-            <a:r>
-              <a:rPr lang="en-GB" dirty="0"/>
-              <a:t>Third level</a:t>
-            </a:r>
-          </a:p>
-          <a:p>
-            <a:pPr lvl="3"/>
-            <a:r>
-              <a:rPr lang="en-GB" dirty="0"/>
-              <a:t>Fourth level</a:t>
-            </a:r>
-          </a:p>
-          <a:p>
-            <a:pPr lvl="4"/>
-            <a:r>
-              <a:rPr lang="en-GB" dirty="0"/>
-              <a:t>Fifth level</a:t>
-            </a:r>
-            <a:endParaRPr lang="en-DE" dirty="0"/>
-          </a:p>
-        </p:txBody>
-      </p:sp>
-      <p:sp>
-        <p:nvSpPr>
-          <p:cNvPr id="4" name="Title 3">
-            <a:extLst>
-              <a:ext uri="{FF2B5EF4-FFF2-40B4-BE49-F238E27FC236}">
-                <a16:creationId xmlns:a16="http://schemas.microsoft.com/office/drawing/2014/main" id="{CADA256B-B176-F1F9-4E08-9BC37F45D258}"/>
-              </a:ext>
-            </a:extLst>
-          </p:cNvPr>
-          <p:cNvSpPr>
-            <a:spLocks noGrp="1"/>
-          </p:cNvSpPr>
-          <p:nvPr>
-            <p:ph type="title"/>
-          </p:nvPr>
-        </p:nvSpPr>
-        <p:spPr/>
-        <p:txBody>
-          <a:bodyPr/>
-          <a:lstStyle/>
-          <a:p>
-            <a:r>
-              <a:rPr lang="en-GB"/>
-              <a:t>Click to edit Master title style</a:t>
-            </a:r>
-            <a:endParaRPr lang="en-DE"/>
-          </a:p>
-        </p:txBody>
-      </p:sp>
-    </p:spTree>
-    <p:extLst>
-      <p:ext uri="{BB962C8B-B14F-4D97-AF65-F5344CB8AC3E}">
-        <p14:creationId xmlns:p14="http://schemas.microsoft.com/office/powerpoint/2010/main" val="1533962725"/>
-      </p:ext>
-    </p:extLst>
-  </p:cSld>
-  <p:clrMapOvr>
-    <a:masterClrMapping/>
-  </p:clrMapOvr>
-</p:sldLayout>
-</file>
-
-<file path=ppt/slideLayouts/slideLayout9.xml><?xml version="1.0" encoding="utf-8"?>
-<p:sldLayout xmlns:a="http://schemas.openxmlformats.org/drawingml/2006/main" xmlns:r="http://schemas.openxmlformats.org/officeDocument/2006/relationships" xmlns:p="http://schemas.openxmlformats.org/presentationml/2006/main" type="twoObj" preserve="1">
-  <p:cSld name="Slide with text/content (2 columns)">
-    <p:spTree>
-      <p:nvGrpSpPr>
-        <p:cNvPr id="1" name=""/>
-        <p:cNvGrpSpPr/>
-        <p:nvPr/>
-      </p:nvGrpSpPr>
-      <p:grpSpPr>
-        <a:xfrm>
-          <a:off x="0" y="0"/>
-          <a:ext cx="0" cy="0"/>
-          <a:chOff x="0" y="0"/>
-          <a:chExt cx="0" cy="0"/>
-        </a:xfrm>
-      </p:grpSpPr>
-      <p:sp>
-        <p:nvSpPr>
-          <p:cNvPr id="2" name="Title 1">
-            <a:extLst>
-              <a:ext uri="{FF2B5EF4-FFF2-40B4-BE49-F238E27FC236}">
-                <a16:creationId xmlns:a16="http://schemas.microsoft.com/office/drawing/2014/main" id="{F5293343-BF38-5B08-96D0-93D87ECB824F}"/>
-              </a:ext>
-            </a:extLst>
-          </p:cNvPr>
-          <p:cNvSpPr>
-            <a:spLocks noGrp="1"/>
-          </p:cNvSpPr>
-          <p:nvPr>
-            <p:ph type="title"/>
-          </p:nvPr>
-        </p:nvSpPr>
-        <p:spPr/>
-        <p:txBody>
-          <a:bodyPr/>
-          <a:lstStyle/>
-          <a:p>
-            <a:r>
-              <a:rPr lang="en-GB"/>
-              <a:t>Click to edit Master title style</a:t>
-            </a:r>
-            <a:endParaRPr lang="en-DE"/>
-          </a:p>
-        </p:txBody>
-      </p:sp>
-      <p:sp>
-        <p:nvSpPr>
-          <p:cNvPr id="3" name="Content Placeholder 2">
-            <a:extLst>
-              <a:ext uri="{FF2B5EF4-FFF2-40B4-BE49-F238E27FC236}">
-                <a16:creationId xmlns:a16="http://schemas.microsoft.com/office/drawing/2014/main" id="{5737FC88-B2EE-83A2-FD34-E4C46B52BE16}"/>
-              </a:ext>
-            </a:extLst>
-          </p:cNvPr>
-          <p:cNvSpPr>
-            <a:spLocks noGrp="1"/>
-          </p:cNvSpPr>
-          <p:nvPr>
-            <p:ph sz="half" idx="1"/>
-          </p:nvPr>
-        </p:nvSpPr>
-        <p:spPr>
-          <a:xfrm>
-            <a:off x="156000" y="920749"/>
-            <a:ext cx="5682825" cy="5194301"/>
-          </a:xfrm>
-        </p:spPr>
-        <p:txBody>
-          <a:bodyPr/>
-          <a:lstStyle/>
-          <a:p>
-            <a:pPr lvl="0"/>
-            <a:r>
-              <a:rPr lang="en-GB"/>
-              <a:t>Click to edit Master text styles</a:t>
-            </a:r>
-          </a:p>
-          <a:p>
-            <a:pPr lvl="1"/>
-            <a:r>
-              <a:rPr lang="en-GB"/>
-              <a:t>Second level</a:t>
-            </a:r>
-          </a:p>
-          <a:p>
-            <a:pPr lvl="2"/>
-            <a:r>
-              <a:rPr lang="en-GB"/>
-              <a:t>Third level</a:t>
-            </a:r>
-          </a:p>
-          <a:p>
-            <a:pPr lvl="3"/>
-            <a:r>
-              <a:rPr lang="en-GB"/>
-              <a:t>Fourth level</a:t>
-            </a:r>
-          </a:p>
-          <a:p>
-            <a:pPr lvl="4"/>
-            <a:r>
-              <a:rPr lang="en-GB"/>
-              <a:t>Fifth level</a:t>
-            </a:r>
-            <a:endParaRPr lang="en-DE"/>
-          </a:p>
-        </p:txBody>
-      </p:sp>
-      <p:sp>
-        <p:nvSpPr>
-          <p:cNvPr id="4" name="Content Placeholder 3">
-            <a:extLst>
-              <a:ext uri="{FF2B5EF4-FFF2-40B4-BE49-F238E27FC236}">
-                <a16:creationId xmlns:a16="http://schemas.microsoft.com/office/drawing/2014/main" id="{F80A51E9-7829-7767-4EF5-52DDEEC1A443}"/>
-              </a:ext>
-            </a:extLst>
-          </p:cNvPr>
-          <p:cNvSpPr>
-            <a:spLocks noGrp="1"/>
-          </p:cNvSpPr>
-          <p:nvPr>
-            <p:ph sz="half" idx="2"/>
-          </p:nvPr>
-        </p:nvSpPr>
-        <p:spPr>
-          <a:xfrm>
-            <a:off x="6353177" y="920750"/>
-            <a:ext cx="5686422" cy="5194300"/>
-          </a:xfrm>
-        </p:spPr>
-        <p:txBody>
-          <a:bodyPr/>
-          <a:lstStyle/>
-          <a:p>
-            <a:pPr lvl="0"/>
-            <a:r>
-              <a:rPr lang="en-GB"/>
-              <a:t>Click to edit Master text styles</a:t>
-            </a:r>
-          </a:p>
-          <a:p>
-            <a:pPr lvl="1"/>
-            <a:r>
-              <a:rPr lang="en-GB"/>
-              <a:t>Second level</a:t>
-            </a:r>
-          </a:p>
-          <a:p>
-            <a:pPr lvl="2"/>
-            <a:r>
-              <a:rPr lang="en-GB"/>
-              <a:t>Third level</a:t>
-            </a:r>
-          </a:p>
-          <a:p>
-            <a:pPr lvl="3"/>
-            <a:r>
-              <a:rPr lang="en-GB"/>
-              <a:t>Fourth level</a:t>
-            </a:r>
-          </a:p>
-          <a:p>
-            <a:pPr lvl="4"/>
-            <a:r>
-              <a:rPr lang="en-GB"/>
-              <a:t>Fifth level</a:t>
-            </a:r>
-            <a:endParaRPr lang="en-DE"/>
-          </a:p>
-        </p:txBody>
-      </p:sp>
-    </p:spTree>
-    <p:extLst>
-      <p:ext uri="{BB962C8B-B14F-4D97-AF65-F5344CB8AC3E}">
-        <p14:creationId xmlns:p14="http://schemas.microsoft.com/office/powerpoint/2010/main" val="344875001"/>
+        <p14:creationId xmlns:p14="http://schemas.microsoft.com/office/powerpoint/2010/main" val="1784353847"/>
       </p:ext>
     </p:extLst>
   </p:cSld>
@@ -1998,7 +7337,7 @@
           <p:nvPr userDrawn="1"/>
         </p:nvPicPr>
         <p:blipFill rotWithShape="1">
-          <a:blip r:embed="rId8">
+          <a:blip r:embed="rId13">
             <a:extLst>
               <a:ext uri="{28A0092B-C50C-407E-A947-70E740481C1C}">
                 <a14:useLocalDpi xmlns:a14="http://schemas.microsoft.com/office/drawing/2010/main" val="0"/>
@@ -2135,7 +7474,7 @@
         </p:nvGrpSpPr>
         <p:grpSpPr>
           <a:xfrm>
-            <a:off x="9193782" y="6277481"/>
+            <a:off x="156000" y="6277481"/>
             <a:ext cx="2838743" cy="312759"/>
             <a:chOff x="25678256" y="1213808"/>
             <a:chExt cx="16502519" cy="1818168"/>
@@ -2156,7 +7495,7 @@
             <p:nvPr userDrawn="1"/>
           </p:nvPicPr>
           <p:blipFill rotWithShape="1">
-            <a:blip r:embed="rId9" cstate="print">
+            <a:blip r:embed="rId14" cstate="print">
               <a:extLst>
                 <a:ext uri="{28A0092B-C50C-407E-A947-70E740481C1C}">
                   <a14:useLocalDpi xmlns:a14="http://schemas.microsoft.com/office/drawing/2010/main" val="0"/>
@@ -2191,13 +7530,13 @@
             <p:nvPr userDrawn="1"/>
           </p:nvPicPr>
           <p:blipFill>
-            <a:blip r:embed="rId10" cstate="print">
+            <a:blip r:embed="rId15" cstate="print">
               <a:extLst>
                 <a:ext uri="{28A0092B-C50C-407E-A947-70E740481C1C}">
                   <a14:useLocalDpi xmlns:a14="http://schemas.microsoft.com/office/drawing/2010/main" val="0"/>
                 </a:ext>
                 <a:ext uri="{96DAC541-7B7A-43D3-8B79-37D633B846F1}">
-                  <asvg:svgBlip xmlns:asvg="http://schemas.microsoft.com/office/drawing/2016/SVG/main" r:embed="rId11"/>
+                  <asvg:svgBlip xmlns:asvg="http://schemas.microsoft.com/office/drawing/2016/SVG/main" r:embed="rId16"/>
                 </a:ext>
               </a:extLst>
             </a:blip>
@@ -2230,13 +7569,13 @@
             <p:nvPr userDrawn="1"/>
           </p:nvPicPr>
           <p:blipFill rotWithShape="1">
-            <a:blip r:embed="rId12">
+            <a:blip r:embed="rId17">
               <a:extLst>
                 <a:ext uri="{28A0092B-C50C-407E-A947-70E740481C1C}">
                   <a14:useLocalDpi xmlns:a14="http://schemas.microsoft.com/office/drawing/2010/main" val="0"/>
                 </a:ext>
                 <a:ext uri="{96DAC541-7B7A-43D3-8B79-37D633B846F1}">
-                  <asvg:svgBlip xmlns:asvg="http://schemas.microsoft.com/office/drawing/2016/SVG/main" r:embed="rId13"/>
+                  <asvg:svgBlip xmlns:asvg="http://schemas.microsoft.com/office/drawing/2016/SVG/main" r:embed="rId18"/>
                 </a:ext>
               </a:extLst>
             </a:blip>
@@ -2268,13 +7607,13 @@
             <p:nvPr userDrawn="1"/>
           </p:nvPicPr>
           <p:blipFill rotWithShape="1">
-            <a:blip r:embed="rId12">
+            <a:blip r:embed="rId17">
               <a:extLst>
                 <a:ext uri="{28A0092B-C50C-407E-A947-70E740481C1C}">
                   <a14:useLocalDpi xmlns:a14="http://schemas.microsoft.com/office/drawing/2010/main" val="0"/>
                 </a:ext>
                 <a:ext uri="{96DAC541-7B7A-43D3-8B79-37D633B846F1}">
-                  <asvg:svgBlip xmlns:asvg="http://schemas.microsoft.com/office/drawing/2016/SVG/main" r:embed="rId13"/>
+                  <asvg:svgBlip xmlns:asvg="http://schemas.microsoft.com/office/drawing/2016/SVG/main" r:embed="rId18"/>
                 </a:ext>
               </a:extLst>
             </a:blip>
@@ -2307,7 +7646,7 @@
           <p:nvPr userDrawn="1"/>
         </p:nvPicPr>
         <p:blipFill rotWithShape="1">
-          <a:blip r:embed="rId8">
+          <a:blip r:embed="rId13">
             <a:extLst>
               <a:ext uri="{28A0092B-C50C-407E-A947-70E740481C1C}">
                 <a14:useLocalDpi xmlns:a14="http://schemas.microsoft.com/office/drawing/2010/main" val="0"/>
@@ -2327,6 +7666,55 @@
           </a:prstGeom>
         </p:spPr>
       </p:pic>
+      <p:sp>
+        <p:nvSpPr>
+          <p:cNvPr id="5" name="Slide Number Placeholder 4">
+            <a:extLst>
+              <a:ext uri="{FF2B5EF4-FFF2-40B4-BE49-F238E27FC236}">
+                <a16:creationId xmlns:a16="http://schemas.microsoft.com/office/drawing/2014/main" id="{BA318F7C-863F-D94E-1089-98A7B625D780}"/>
+              </a:ext>
+            </a:extLst>
+          </p:cNvPr>
+          <p:cNvSpPr>
+            <a:spLocks noGrp="1"/>
+          </p:cNvSpPr>
+          <p:nvPr>
+            <p:ph type="sldNum" sz="quarter" idx="4"/>
+          </p:nvPr>
+        </p:nvSpPr>
+        <p:spPr>
+          <a:xfrm>
+            <a:off x="10596282" y="6225115"/>
+            <a:ext cx="1440000" cy="365125"/>
+          </a:xfrm>
+          <a:prstGeom prst="rect">
+            <a:avLst/>
+          </a:prstGeom>
+        </p:spPr>
+        <p:txBody>
+          <a:bodyPr vert="horz" lIns="91440" tIns="45720" rIns="91440" bIns="45720" rtlCol="0" anchor="ctr"/>
+          <a:lstStyle>
+            <a:lvl1pPr algn="r">
+              <a:defRPr sz="1200">
+                <a:solidFill>
+                  <a:srgbClr val="0E2D38"/>
+                </a:solidFill>
+                <a:latin typeface="Helvetica Neue" panose="02000503000000020004" pitchFamily="2" charset="0"/>
+                <a:ea typeface="Helvetica Neue" panose="02000503000000020004" pitchFamily="2" charset="0"/>
+                <a:cs typeface="Helvetica Neue" panose="02000503000000020004" pitchFamily="2" charset="0"/>
+              </a:defRPr>
+            </a:lvl1pPr>
+          </a:lstStyle>
+          <a:p>
+            <a:fld id="{498EEE73-6CBB-5A43-915D-6D3EC7AE1E7C}" type="slidenum">
+              <a:rPr lang="en-DE" smtClean="0"/>
+              <a:pPr/>
+              <a:t>‹#›</a:t>
+            </a:fld>
+            <a:endParaRPr lang="en-DE" dirty="0"/>
+          </a:p>
+        </p:txBody>
+      </p:sp>
     </p:spTree>
     <p:extLst>
       <p:ext uri="{BB962C8B-B14F-4D97-AF65-F5344CB8AC3E}">
@@ -2336,13 +7724,19 @@
   </p:cSld>
   <p:clrMap bg1="lt1" tx1="dk1" bg2="lt2" tx2="dk2" accent1="accent1" accent2="accent2" accent3="accent3" accent4="accent4" accent5="accent5" accent6="accent6" hlink="hlink" folHlink="folHlink"/>
   <p:sldLayoutIdLst>
-    <p:sldLayoutId id="2147483930" r:id="rId1"/>
-    <p:sldLayoutId id="2147483931" r:id="rId2"/>
-    <p:sldLayoutId id="2147483933" r:id="rId3"/>
-    <p:sldLayoutId id="2147483934" r:id="rId4"/>
-    <p:sldLayoutId id="2147483935" r:id="rId5"/>
-    <p:sldLayoutId id="2147483936" r:id="rId6"/>
+    <p:sldLayoutId id="2147483944" r:id="rId1"/>
+    <p:sldLayoutId id="2147483945" r:id="rId2"/>
+    <p:sldLayoutId id="2147483930" r:id="rId3"/>
+    <p:sldLayoutId id="2147483931" r:id="rId4"/>
+    <p:sldLayoutId id="2147483933" r:id="rId5"/>
+    <p:sldLayoutId id="2147483934" r:id="rId6"/>
+    <p:sldLayoutId id="2147483935" r:id="rId7"/>
+    <p:sldLayoutId id="2147483936" r:id="rId8"/>
+    <p:sldLayoutId id="2147483946" r:id="rId9"/>
+    <p:sldLayoutId id="2147483947" r:id="rId10"/>
+    <p:sldLayoutId id="2147483948" r:id="rId11"/>
   </p:sldLayoutIdLst>
+  <p:hf hdr="0" ftr="0" dt="0"/>
   <p:txStyles>
     <p:titleStyle>
       <a:lvl1pPr algn="l" defTabSz="914400" rtl="0" eaLnBrk="1" latinLnBrk="0" hangingPunct="1">
@@ -2355,7 +7749,7 @@
         <a:buNone/>
         <a:defRPr sz="3000" b="0" i="0" kern="1200">
           <a:solidFill>
-            <a:schemeClr val="tx1"/>
+            <a:srgbClr val="0E2D38"/>
           </a:solidFill>
           <a:latin typeface="Helvetica" pitchFamily="2" charset="0"/>
           <a:ea typeface="+mj-ea"/>
@@ -2375,7 +7769,7 @@
         <a:buChar char="•"/>
         <a:defRPr sz="2800" b="0" i="0" kern="1200">
           <a:solidFill>
-            <a:schemeClr val="tx1"/>
+            <a:srgbClr val="0E2D38"/>
           </a:solidFill>
           <a:latin typeface="Helvetica Light" panose="020B0403020202020204" pitchFamily="34" charset="0"/>
           <a:ea typeface="+mn-ea"/>
@@ -2393,7 +7787,7 @@
         <a:buChar char="•"/>
         <a:defRPr sz="2400" b="0" i="0" kern="1200">
           <a:solidFill>
-            <a:schemeClr val="tx1"/>
+            <a:srgbClr val="0E2D38"/>
           </a:solidFill>
           <a:latin typeface="Helvetica Light" panose="020B0403020202020204" pitchFamily="34" charset="0"/>
           <a:ea typeface="+mn-ea"/>
@@ -2411,7 +7805,7 @@
         <a:buChar char="•"/>
         <a:defRPr sz="2000" b="0" i="0" kern="1200">
           <a:solidFill>
-            <a:schemeClr val="tx1"/>
+            <a:srgbClr val="0E2D38"/>
           </a:solidFill>
           <a:latin typeface="Helvetica Light" panose="020B0403020202020204" pitchFamily="34" charset="0"/>
           <a:ea typeface="+mn-ea"/>
@@ -2429,7 +7823,7 @@
         <a:buChar char="•"/>
         <a:defRPr sz="1800" b="0" i="0" kern="1200">
           <a:solidFill>
-            <a:schemeClr val="tx1"/>
+            <a:srgbClr val="0E2D38"/>
           </a:solidFill>
           <a:latin typeface="Helvetica Light" panose="020B0403020202020204" pitchFamily="34" charset="0"/>
           <a:ea typeface="+mn-ea"/>
@@ -2447,7 +7841,7 @@
         <a:buChar char="•"/>
         <a:defRPr sz="1800" b="0" i="0" kern="1200">
           <a:solidFill>
-            <a:schemeClr val="tx1"/>
+            <a:srgbClr val="0E2D38"/>
           </a:solidFill>
           <a:latin typeface="Helvetica Light" panose="020B0403020202020204" pitchFamily="34" charset="0"/>
           <a:ea typeface="+mn-ea"/>
@@ -2663,7 +8057,8 @@
           <p:nvPr userDrawn="1"/>
         </p:nvPicPr>
         <p:blipFill rotWithShape="1">
-          <a:blip r:embed="rId8">
+          <a:blip r:embed="rId13">
+            <a:alphaModFix amt="85000"/>
             <a:extLst>
               <a:ext uri="{28A0092B-C50C-407E-A947-70E740481C1C}">
                 <a14:useLocalDpi xmlns:a14="http://schemas.microsoft.com/office/drawing/2010/main" val="0"/>
@@ -2786,12 +8181,47 @@
           </a:p>
         </p:txBody>
       </p:sp>
+      <p:pic>
+        <p:nvPicPr>
+          <p:cNvPr id="4" name="Picture 3">
+            <a:extLst>
+              <a:ext uri="{FF2B5EF4-FFF2-40B4-BE49-F238E27FC236}">
+                <a16:creationId xmlns:a16="http://schemas.microsoft.com/office/drawing/2014/main" id="{1BE619C9-9BF0-7194-64C6-7284C6F717FC}"/>
+              </a:ext>
+            </a:extLst>
+          </p:cNvPr>
+          <p:cNvPicPr>
+            <a:picLocks noChangeAspect="1"/>
+          </p:cNvPicPr>
+          <p:nvPr userDrawn="1"/>
+        </p:nvPicPr>
+        <p:blipFill rotWithShape="1">
+          <a:blip r:embed="rId13">
+            <a:extLst>
+              <a:ext uri="{28A0092B-C50C-407E-A947-70E740481C1C}">
+                <a14:useLocalDpi xmlns:a14="http://schemas.microsoft.com/office/drawing/2010/main" val="0"/>
+              </a:ext>
+            </a:extLst>
+          </a:blip>
+          <a:srcRect t="59461" b="6487"/>
+          <a:stretch/>
+        </p:blipFill>
+        <p:spPr>
+          <a:xfrm flipH="1">
+            <a:off x="0" y="6763011"/>
+            <a:ext cx="12192000" cy="94987"/>
+          </a:xfrm>
+          <a:prstGeom prst="rect">
+            <a:avLst/>
+          </a:prstGeom>
+        </p:spPr>
+      </p:pic>
       <p:grpSp>
         <p:nvGrpSpPr>
-          <p:cNvPr id="7" name="Group 6">
+          <p:cNvPr id="5" name="Group 4">
             <a:extLst>
               <a:ext uri="{FF2B5EF4-FFF2-40B4-BE49-F238E27FC236}">
-                <a16:creationId xmlns:a16="http://schemas.microsoft.com/office/drawing/2014/main" id="{6CCEF8CA-7B4F-0B2A-9B9F-D887B00A497A}"/>
+                <a16:creationId xmlns:a16="http://schemas.microsoft.com/office/drawing/2014/main" id="{0D280886-E04E-2FA2-8CA4-1EF0F8E6D167}"/>
               </a:ext>
             </a:extLst>
           </p:cNvPr>
@@ -2800,7 +8230,7 @@
         </p:nvGrpSpPr>
         <p:grpSpPr>
           <a:xfrm>
-            <a:off x="9193782" y="6277481"/>
+            <a:off x="156000" y="6277481"/>
             <a:ext cx="2838743" cy="312759"/>
             <a:chOff x="25678256" y="1213808"/>
             <a:chExt cx="16502519" cy="1818168"/>
@@ -2808,10 +8238,10 @@
         </p:grpSpPr>
         <p:pic>
           <p:nvPicPr>
-            <p:cNvPr id="8" name="Picture Placeholder 38">
+            <p:cNvPr id="6" name="Picture Placeholder 38">
               <a:extLst>
                 <a:ext uri="{FF2B5EF4-FFF2-40B4-BE49-F238E27FC236}">
-                  <a16:creationId xmlns:a16="http://schemas.microsoft.com/office/drawing/2014/main" id="{6C5153D8-994A-9B62-15B4-8947E5C60D80}"/>
+                  <a16:creationId xmlns:a16="http://schemas.microsoft.com/office/drawing/2014/main" id="{52004F97-A4A0-4DFF-4DF3-54E8888161E8}"/>
                 </a:ext>
               </a:extLst>
             </p:cNvPr>
@@ -2821,7 +8251,7 @@
             <p:nvPr userDrawn="1"/>
           </p:nvPicPr>
           <p:blipFill rotWithShape="1">
-            <a:blip r:embed="rId9" cstate="print">
+            <a:blip r:embed="rId14" cstate="print">
               <a:extLst>
                 <a:ext uri="{28A0092B-C50C-407E-A947-70E740481C1C}">
                   <a14:useLocalDpi xmlns:a14="http://schemas.microsoft.com/office/drawing/2010/main" val="0"/>
@@ -2843,10 +8273,10 @@
         </p:pic>
         <p:pic>
           <p:nvPicPr>
-            <p:cNvPr id="9" name="Graphic 8">
+            <p:cNvPr id="12" name="Graphic 11">
               <a:extLst>
                 <a:ext uri="{FF2B5EF4-FFF2-40B4-BE49-F238E27FC236}">
-                  <a16:creationId xmlns:a16="http://schemas.microsoft.com/office/drawing/2014/main" id="{C7D08E24-258B-A058-315A-69B21A80CFDA}"/>
+                  <a16:creationId xmlns:a16="http://schemas.microsoft.com/office/drawing/2014/main" id="{2BEAA4BE-4B8F-3EB6-6587-46177D9B4816}"/>
                 </a:ext>
               </a:extLst>
             </p:cNvPr>
@@ -2856,13 +8286,13 @@
             <p:nvPr userDrawn="1"/>
           </p:nvPicPr>
           <p:blipFill>
-            <a:blip r:embed="rId10" cstate="print">
+            <a:blip r:embed="rId15" cstate="print">
               <a:extLst>
                 <a:ext uri="{28A0092B-C50C-407E-A947-70E740481C1C}">
                   <a14:useLocalDpi xmlns:a14="http://schemas.microsoft.com/office/drawing/2010/main" val="0"/>
                 </a:ext>
                 <a:ext uri="{96DAC541-7B7A-43D3-8B79-37D633B846F1}">
-                  <asvg:svgBlip xmlns:asvg="http://schemas.microsoft.com/office/drawing/2016/SVG/main" r:embed="rId11"/>
+                  <asvg:svgBlip xmlns:asvg="http://schemas.microsoft.com/office/drawing/2016/SVG/main" r:embed="rId16"/>
                 </a:ext>
               </a:extLst>
             </a:blip>
@@ -2882,10 +8312,10 @@
         </p:pic>
         <p:pic>
           <p:nvPicPr>
-            <p:cNvPr id="10" name="Graphic 9">
+            <p:cNvPr id="13" name="Graphic 12">
               <a:extLst>
                 <a:ext uri="{FF2B5EF4-FFF2-40B4-BE49-F238E27FC236}">
-                  <a16:creationId xmlns:a16="http://schemas.microsoft.com/office/drawing/2014/main" id="{10003E41-C03E-3D2F-9DF2-49C04C1DA489}"/>
+                  <a16:creationId xmlns:a16="http://schemas.microsoft.com/office/drawing/2014/main" id="{B8BA9CCA-EF0A-3373-8013-3B977D0641E9}"/>
                 </a:ext>
               </a:extLst>
             </p:cNvPr>
@@ -2895,13 +8325,13 @@
             <p:nvPr userDrawn="1"/>
           </p:nvPicPr>
           <p:blipFill rotWithShape="1">
-            <a:blip r:embed="rId12">
+            <a:blip r:embed="rId17">
               <a:extLst>
                 <a:ext uri="{28A0092B-C50C-407E-A947-70E740481C1C}">
                   <a14:useLocalDpi xmlns:a14="http://schemas.microsoft.com/office/drawing/2010/main" val="0"/>
                 </a:ext>
                 <a:ext uri="{96DAC541-7B7A-43D3-8B79-37D633B846F1}">
-                  <asvg:svgBlip xmlns:asvg="http://schemas.microsoft.com/office/drawing/2016/SVG/main" r:embed="rId13"/>
+                  <asvg:svgBlip xmlns:asvg="http://schemas.microsoft.com/office/drawing/2016/SVG/main" r:embed="rId18"/>
                 </a:ext>
               </a:extLst>
             </a:blip>
@@ -2920,10 +8350,10 @@
         </p:pic>
         <p:pic>
           <p:nvPicPr>
-            <p:cNvPr id="11" name="Graphic 10">
+            <p:cNvPr id="14" name="Graphic 13">
               <a:extLst>
                 <a:ext uri="{FF2B5EF4-FFF2-40B4-BE49-F238E27FC236}">
-                  <a16:creationId xmlns:a16="http://schemas.microsoft.com/office/drawing/2014/main" id="{3FD8F14A-38B4-3140-D793-A47B962E0357}"/>
+                  <a16:creationId xmlns:a16="http://schemas.microsoft.com/office/drawing/2014/main" id="{CC81AD36-35A0-1697-5C70-8FF530130EB5}"/>
                 </a:ext>
               </a:extLst>
             </p:cNvPr>
@@ -2933,13 +8363,13 @@
             <p:nvPr userDrawn="1"/>
           </p:nvPicPr>
           <p:blipFill rotWithShape="1">
-            <a:blip r:embed="rId12">
+            <a:blip r:embed="rId17">
               <a:extLst>
                 <a:ext uri="{28A0092B-C50C-407E-A947-70E740481C1C}">
                   <a14:useLocalDpi xmlns:a14="http://schemas.microsoft.com/office/drawing/2010/main" val="0"/>
                 </a:ext>
                 <a:ext uri="{96DAC541-7B7A-43D3-8B79-37D633B846F1}">
-                  <asvg:svgBlip xmlns:asvg="http://schemas.microsoft.com/office/drawing/2016/SVG/main" r:embed="rId13"/>
+                  <asvg:svgBlip xmlns:asvg="http://schemas.microsoft.com/office/drawing/2016/SVG/main" r:embed="rId18"/>
                 </a:ext>
               </a:extLst>
             </a:blip>
@@ -2957,41 +8387,52 @@
           </p:spPr>
         </p:pic>
       </p:grpSp>
-      <p:pic>
-        <p:nvPicPr>
-          <p:cNvPr id="4" name="Picture 3">
+      <p:sp>
+        <p:nvSpPr>
+          <p:cNvPr id="17" name="Slide Number Placeholder 16">
             <a:extLst>
               <a:ext uri="{FF2B5EF4-FFF2-40B4-BE49-F238E27FC236}">
-                <a16:creationId xmlns:a16="http://schemas.microsoft.com/office/drawing/2014/main" id="{1BE619C9-9BF0-7194-64C6-7284C6F717FC}"/>
+                <a16:creationId xmlns:a16="http://schemas.microsoft.com/office/drawing/2014/main" id="{B98263F2-1280-2089-7A70-49ACF71682AC}"/>
               </a:ext>
             </a:extLst>
           </p:cNvPr>
-          <p:cNvPicPr>
-            <a:picLocks noChangeAspect="1"/>
-          </p:cNvPicPr>
-          <p:nvPr userDrawn="1"/>
-        </p:nvPicPr>
-        <p:blipFill rotWithShape="1">
-          <a:blip r:embed="rId8">
-            <a:extLst>
-              <a:ext uri="{28A0092B-C50C-407E-A947-70E740481C1C}">
-                <a14:useLocalDpi xmlns:a14="http://schemas.microsoft.com/office/drawing/2010/main" val="0"/>
-              </a:ext>
-            </a:extLst>
-          </a:blip>
-          <a:srcRect t="59461" b="6487"/>
-          <a:stretch/>
-        </p:blipFill>
-        <p:spPr>
-          <a:xfrm flipH="1">
-            <a:off x="0" y="6763011"/>
-            <a:ext cx="12192000" cy="94987"/>
+          <p:cNvSpPr>
+            <a:spLocks noGrp="1"/>
+          </p:cNvSpPr>
+          <p:nvPr>
+            <p:ph type="sldNum" sz="quarter" idx="4"/>
+          </p:nvPr>
+        </p:nvSpPr>
+        <p:spPr>
+          <a:xfrm>
+            <a:off x="10594800" y="6224400"/>
+            <a:ext cx="1440000" cy="365125"/>
           </a:xfrm>
           <a:prstGeom prst="rect">
             <a:avLst/>
           </a:prstGeom>
         </p:spPr>
-      </p:pic>
+        <p:txBody>
+          <a:bodyPr vert="horz" lIns="91440" tIns="45720" rIns="91440" bIns="45720" rtlCol="0" anchor="ctr"/>
+          <a:lstStyle>
+            <a:lvl1pPr algn="r">
+              <a:defRPr sz="1200">
+                <a:solidFill>
+                  <a:srgbClr val="0E2D38"/>
+                </a:solidFill>
+              </a:defRPr>
+            </a:lvl1pPr>
+          </a:lstStyle>
+          <a:p>
+            <a:fld id="{2C0D6744-4E72-634D-83C3-20CC96599462}" type="slidenum">
+              <a:rPr lang="en-DE" smtClean="0"/>
+              <a:pPr/>
+              <a:t>‹#›</a:t>
+            </a:fld>
+            <a:endParaRPr lang="en-DE" dirty="0"/>
+          </a:p>
+        </p:txBody>
+      </p:sp>
     </p:spTree>
     <p:extLst>
       <p:ext uri="{BB962C8B-B14F-4D97-AF65-F5344CB8AC3E}">
@@ -3001,13 +8442,19 @@
   </p:cSld>
   <p:clrMap bg1="lt1" tx1="dk1" bg2="lt2" tx2="dk2" accent1="accent1" accent2="accent2" accent3="accent3" accent4="accent4" accent5="accent5" accent6="accent6" hlink="hlink" folHlink="folHlink"/>
   <p:sldLayoutIdLst>
-    <p:sldLayoutId id="2147483938" r:id="rId1"/>
-    <p:sldLayoutId id="2147483939" r:id="rId2"/>
-    <p:sldLayoutId id="2147483940" r:id="rId3"/>
-    <p:sldLayoutId id="2147483941" r:id="rId4"/>
-    <p:sldLayoutId id="2147483942" r:id="rId5"/>
-    <p:sldLayoutId id="2147483943" r:id="rId6"/>
+    <p:sldLayoutId id="2147483949" r:id="rId1"/>
+    <p:sldLayoutId id="2147483950" r:id="rId2"/>
+    <p:sldLayoutId id="2147483938" r:id="rId3"/>
+    <p:sldLayoutId id="2147483939" r:id="rId4"/>
+    <p:sldLayoutId id="2147483940" r:id="rId5"/>
+    <p:sldLayoutId id="2147483941" r:id="rId6"/>
+    <p:sldLayoutId id="2147483942" r:id="rId7"/>
+    <p:sldLayoutId id="2147483943" r:id="rId8"/>
+    <p:sldLayoutId id="2147483951" r:id="rId9"/>
+    <p:sldLayoutId id="2147483952" r:id="rId10"/>
+    <p:sldLayoutId id="2147483953" r:id="rId11"/>
   </p:sldLayoutIdLst>
+  <p:hf hdr="0" ftr="0" dt="0"/>
   <p:txStyles>
     <p:titleStyle>
       <a:lvl1pPr algn="l" defTabSz="914400" rtl="0" eaLnBrk="1" latinLnBrk="0" hangingPunct="1">
@@ -3040,7 +8487,7 @@
         <a:buChar char="•"/>
         <a:defRPr sz="2800" b="0" i="0" kern="1200">
           <a:solidFill>
-            <a:schemeClr val="tx1"/>
+            <a:srgbClr val="0E2D38"/>
           </a:solidFill>
           <a:latin typeface="Helvetica Light" panose="020B0403020202020204" pitchFamily="34" charset="0"/>
           <a:ea typeface="+mn-ea"/>
@@ -3058,7 +8505,7 @@
         <a:buChar char="•"/>
         <a:defRPr sz="2400" b="0" i="0" kern="1200">
           <a:solidFill>
-            <a:schemeClr val="tx1"/>
+            <a:srgbClr val="0E2D38"/>
           </a:solidFill>
           <a:latin typeface="Helvetica Light" panose="020B0403020202020204" pitchFamily="34" charset="0"/>
           <a:ea typeface="+mn-ea"/>
@@ -3076,7 +8523,7 @@
         <a:buChar char="•"/>
         <a:defRPr sz="2000" b="0" i="0" kern="1200">
           <a:solidFill>
-            <a:schemeClr val="tx1"/>
+            <a:srgbClr val="0E2D38"/>
           </a:solidFill>
           <a:latin typeface="Helvetica Light" panose="020B0403020202020204" pitchFamily="34" charset="0"/>
           <a:ea typeface="+mn-ea"/>
@@ -3094,7 +8541,7 @@
         <a:buChar char="•"/>
         <a:defRPr sz="1800" b="0" i="0" kern="1200">
           <a:solidFill>
-            <a:schemeClr val="tx1"/>
+            <a:srgbClr val="0E2D38"/>
           </a:solidFill>
           <a:latin typeface="Helvetica Light" panose="020B0403020202020204" pitchFamily="34" charset="0"/>
           <a:ea typeface="+mn-ea"/>
@@ -3112,7 +8559,7 @@
         <a:buChar char="•"/>
         <a:defRPr sz="1800" b="0" i="0" kern="1200">
           <a:solidFill>
-            <a:schemeClr val="tx1"/>
+            <a:srgbClr val="0E2D38"/>
           </a:solidFill>
           <a:latin typeface="Helvetica Light" panose="020B0403020202020204" pitchFamily="34" charset="0"/>
           <a:ea typeface="+mn-ea"/>
@@ -3289,756 +8736,6 @@
     </p:otherStyle>
   </p:txStyles>
 </p:sldMaster>
-</file>
-
-<file path=ppt/slides/slide1.xml><?xml version="1.0" encoding="utf-8"?>
-<p:sld xmlns:a="http://schemas.openxmlformats.org/drawingml/2006/main" xmlns:r="http://schemas.openxmlformats.org/officeDocument/2006/relationships" xmlns:p="http://schemas.openxmlformats.org/presentationml/2006/main">
-  <p:cSld>
-    <p:spTree>
-      <p:nvGrpSpPr>
-        <p:cNvPr id="1" name=""/>
-        <p:cNvGrpSpPr/>
-        <p:nvPr/>
-      </p:nvGrpSpPr>
-      <p:grpSpPr>
-        <a:xfrm>
-          <a:off x="0" y="0"/>
-          <a:ext cx="0" cy="0"/>
-          <a:chOff x="0" y="0"/>
-          <a:chExt cx="0" cy="0"/>
-        </a:xfrm>
-      </p:grpSpPr>
-      <p:sp>
-        <p:nvSpPr>
-          <p:cNvPr id="2" name="Subtitle 1">
-            <a:extLst>
-              <a:ext uri="{FF2B5EF4-FFF2-40B4-BE49-F238E27FC236}">
-                <a16:creationId xmlns:a16="http://schemas.microsoft.com/office/drawing/2014/main" id="{65364B7E-0CD1-424B-007F-2664052351A2}"/>
-              </a:ext>
-            </a:extLst>
-          </p:cNvPr>
-          <p:cNvSpPr>
-            <a:spLocks noGrp="1"/>
-          </p:cNvSpPr>
-          <p:nvPr>
-            <p:ph type="subTitle" idx="1"/>
-          </p:nvPr>
-        </p:nvSpPr>
-        <p:spPr/>
-        <p:txBody>
-          <a:bodyPr/>
-          <a:lstStyle/>
-          <a:p>
-            <a:endParaRPr lang="en-DE" dirty="0"/>
-          </a:p>
-        </p:txBody>
-      </p:sp>
-      <p:sp>
-        <p:nvSpPr>
-          <p:cNvPr id="3" name="Title 2">
-            <a:extLst>
-              <a:ext uri="{FF2B5EF4-FFF2-40B4-BE49-F238E27FC236}">
-                <a16:creationId xmlns:a16="http://schemas.microsoft.com/office/drawing/2014/main" id="{1C21E01C-FC5A-6C5E-54EB-BF822EBE4505}"/>
-              </a:ext>
-            </a:extLst>
-          </p:cNvPr>
-          <p:cNvSpPr>
-            <a:spLocks noGrp="1"/>
-          </p:cNvSpPr>
-          <p:nvPr>
-            <p:ph type="title"/>
-          </p:nvPr>
-        </p:nvSpPr>
-        <p:spPr/>
-        <p:txBody>
-          <a:bodyPr/>
-          <a:lstStyle/>
-          <a:p>
-            <a:endParaRPr lang="en-DE" dirty="0"/>
-          </a:p>
-        </p:txBody>
-      </p:sp>
-      <p:sp>
-        <p:nvSpPr>
-          <p:cNvPr id="4" name="Content Placeholder 3">
-            <a:extLst>
-              <a:ext uri="{FF2B5EF4-FFF2-40B4-BE49-F238E27FC236}">
-                <a16:creationId xmlns:a16="http://schemas.microsoft.com/office/drawing/2014/main" id="{B40EE059-5391-A8D2-F3A1-8D6A48799FDB}"/>
-              </a:ext>
-            </a:extLst>
-          </p:cNvPr>
-          <p:cNvSpPr>
-            <a:spLocks noGrp="1"/>
-          </p:cNvSpPr>
-          <p:nvPr>
-            <p:ph sz="quarter" idx="10"/>
-          </p:nvPr>
-        </p:nvSpPr>
-        <p:spPr/>
-        <p:txBody>
-          <a:bodyPr/>
-          <a:lstStyle/>
-          <a:p>
-            <a:endParaRPr lang="en-DE"/>
-          </a:p>
-        </p:txBody>
-      </p:sp>
-    </p:spTree>
-    <p:extLst>
-      <p:ext uri="{BB962C8B-B14F-4D97-AF65-F5344CB8AC3E}">
-        <p14:creationId xmlns:p14="http://schemas.microsoft.com/office/powerpoint/2010/main" val="3057095731"/>
-      </p:ext>
-    </p:extLst>
-  </p:cSld>
-  <p:clrMapOvr>
-    <a:masterClrMapping/>
-  </p:clrMapOvr>
-</p:sld>
-</file>
-
-<file path=ppt/slides/slide10.xml><?xml version="1.0" encoding="utf-8"?>
-<p:sld xmlns:a="http://schemas.openxmlformats.org/drawingml/2006/main" xmlns:r="http://schemas.openxmlformats.org/officeDocument/2006/relationships" xmlns:p="http://schemas.openxmlformats.org/presentationml/2006/main">
-  <p:cSld>
-    <p:spTree>
-      <p:nvGrpSpPr>
-        <p:cNvPr id="1" name=""/>
-        <p:cNvGrpSpPr/>
-        <p:nvPr/>
-      </p:nvGrpSpPr>
-      <p:grpSpPr>
-        <a:xfrm>
-          <a:off x="0" y="0"/>
-          <a:ext cx="0" cy="0"/>
-          <a:chOff x="0" y="0"/>
-          <a:chExt cx="0" cy="0"/>
-        </a:xfrm>
-      </p:grpSpPr>
-    </p:spTree>
-    <p:extLst>
-      <p:ext uri="{BB962C8B-B14F-4D97-AF65-F5344CB8AC3E}">
-        <p14:creationId xmlns:p14="http://schemas.microsoft.com/office/powerpoint/2010/main" val="2005801870"/>
-      </p:ext>
-    </p:extLst>
-  </p:cSld>
-  <p:clrMapOvr>
-    <a:masterClrMapping/>
-  </p:clrMapOvr>
-</p:sld>
-</file>
-
-<file path=ppt/slides/slide2.xml><?xml version="1.0" encoding="utf-8"?>
-<p:sld xmlns:a="http://schemas.openxmlformats.org/drawingml/2006/main" xmlns:r="http://schemas.openxmlformats.org/officeDocument/2006/relationships" xmlns:p="http://schemas.openxmlformats.org/presentationml/2006/main">
-  <p:cSld>
-    <p:spTree>
-      <p:nvGrpSpPr>
-        <p:cNvPr id="1" name=""/>
-        <p:cNvGrpSpPr/>
-        <p:nvPr/>
-      </p:nvGrpSpPr>
-      <p:grpSpPr>
-        <a:xfrm>
-          <a:off x="0" y="0"/>
-          <a:ext cx="0" cy="0"/>
-          <a:chOff x="0" y="0"/>
-          <a:chExt cx="0" cy="0"/>
-        </a:xfrm>
-      </p:grpSpPr>
-      <p:sp>
-        <p:nvSpPr>
-          <p:cNvPr id="2" name="Content Placeholder 1">
-            <a:extLst>
-              <a:ext uri="{FF2B5EF4-FFF2-40B4-BE49-F238E27FC236}">
-                <a16:creationId xmlns:a16="http://schemas.microsoft.com/office/drawing/2014/main" id="{2EC3FF54-32BE-03FE-4E1E-11041C91141C}"/>
-              </a:ext>
-            </a:extLst>
-          </p:cNvPr>
-          <p:cNvSpPr>
-            <a:spLocks noGrp="1"/>
-          </p:cNvSpPr>
-          <p:nvPr>
-            <p:ph idx="1"/>
-          </p:nvPr>
-        </p:nvSpPr>
-        <p:spPr/>
-        <p:txBody>
-          <a:bodyPr/>
-          <a:lstStyle/>
-          <a:p>
-            <a:endParaRPr lang="en-DE" dirty="0"/>
-          </a:p>
-        </p:txBody>
-      </p:sp>
-      <p:sp>
-        <p:nvSpPr>
-          <p:cNvPr id="3" name="Title 2">
-            <a:extLst>
-              <a:ext uri="{FF2B5EF4-FFF2-40B4-BE49-F238E27FC236}">
-                <a16:creationId xmlns:a16="http://schemas.microsoft.com/office/drawing/2014/main" id="{9DA3CF30-3CB9-DE62-CF64-404A26D2B564}"/>
-              </a:ext>
-            </a:extLst>
-          </p:cNvPr>
-          <p:cNvSpPr>
-            <a:spLocks noGrp="1"/>
-          </p:cNvSpPr>
-          <p:nvPr>
-            <p:ph type="title"/>
-          </p:nvPr>
-        </p:nvSpPr>
-        <p:spPr/>
-        <p:txBody>
-          <a:bodyPr/>
-          <a:lstStyle/>
-          <a:p>
-            <a:endParaRPr lang="en-DE" dirty="0"/>
-          </a:p>
-        </p:txBody>
-      </p:sp>
-    </p:spTree>
-    <p:extLst>
-      <p:ext uri="{BB962C8B-B14F-4D97-AF65-F5344CB8AC3E}">
-        <p14:creationId xmlns:p14="http://schemas.microsoft.com/office/powerpoint/2010/main" val="1053005060"/>
-      </p:ext>
-    </p:extLst>
-  </p:cSld>
-  <p:clrMapOvr>
-    <a:masterClrMapping/>
-  </p:clrMapOvr>
-</p:sld>
-</file>
-
-<file path=ppt/slides/slide3.xml><?xml version="1.0" encoding="utf-8"?>
-<p:sld xmlns:a="http://schemas.openxmlformats.org/drawingml/2006/main" xmlns:r="http://schemas.openxmlformats.org/officeDocument/2006/relationships" xmlns:p="http://schemas.openxmlformats.org/presentationml/2006/main">
-  <p:cSld>
-    <p:spTree>
-      <p:nvGrpSpPr>
-        <p:cNvPr id="1" name=""/>
-        <p:cNvGrpSpPr/>
-        <p:nvPr/>
-      </p:nvGrpSpPr>
-      <p:grpSpPr>
-        <a:xfrm>
-          <a:off x="0" y="0"/>
-          <a:ext cx="0" cy="0"/>
-          <a:chOff x="0" y="0"/>
-          <a:chExt cx="0" cy="0"/>
-        </a:xfrm>
-      </p:grpSpPr>
-      <p:sp>
-        <p:nvSpPr>
-          <p:cNvPr id="2" name="Title 1">
-            <a:extLst>
-              <a:ext uri="{FF2B5EF4-FFF2-40B4-BE49-F238E27FC236}">
-                <a16:creationId xmlns:a16="http://schemas.microsoft.com/office/drawing/2014/main" id="{AB3BF55B-1D61-0BCB-50B5-0FCE46EDDD0B}"/>
-              </a:ext>
-            </a:extLst>
-          </p:cNvPr>
-          <p:cNvSpPr>
-            <a:spLocks noGrp="1"/>
-          </p:cNvSpPr>
-          <p:nvPr>
-            <p:ph type="title"/>
-          </p:nvPr>
-        </p:nvSpPr>
-        <p:spPr/>
-        <p:txBody>
-          <a:bodyPr/>
-          <a:lstStyle/>
-          <a:p>
-            <a:endParaRPr lang="en-DE" dirty="0"/>
-          </a:p>
-        </p:txBody>
-      </p:sp>
-      <p:sp>
-        <p:nvSpPr>
-          <p:cNvPr id="3" name="Content Placeholder 2">
-            <a:extLst>
-              <a:ext uri="{FF2B5EF4-FFF2-40B4-BE49-F238E27FC236}">
-                <a16:creationId xmlns:a16="http://schemas.microsoft.com/office/drawing/2014/main" id="{9F4D2493-2AE0-2E9B-13B8-A075DAE38E95}"/>
-              </a:ext>
-            </a:extLst>
-          </p:cNvPr>
-          <p:cNvSpPr>
-            <a:spLocks noGrp="1"/>
-          </p:cNvSpPr>
-          <p:nvPr>
-            <p:ph sz="half" idx="1"/>
-          </p:nvPr>
-        </p:nvSpPr>
-        <p:spPr/>
-        <p:txBody>
-          <a:bodyPr/>
-          <a:lstStyle/>
-          <a:p>
-            <a:endParaRPr lang="en-DE" dirty="0"/>
-          </a:p>
-        </p:txBody>
-      </p:sp>
-      <p:sp>
-        <p:nvSpPr>
-          <p:cNvPr id="4" name="Content Placeholder 3">
-            <a:extLst>
-              <a:ext uri="{FF2B5EF4-FFF2-40B4-BE49-F238E27FC236}">
-                <a16:creationId xmlns:a16="http://schemas.microsoft.com/office/drawing/2014/main" id="{EA113C30-499B-B9B9-A169-5372F91A5FB2}"/>
-              </a:ext>
-            </a:extLst>
-          </p:cNvPr>
-          <p:cNvSpPr>
-            <a:spLocks noGrp="1"/>
-          </p:cNvSpPr>
-          <p:nvPr>
-            <p:ph sz="half" idx="2"/>
-          </p:nvPr>
-        </p:nvSpPr>
-        <p:spPr/>
-        <p:txBody>
-          <a:bodyPr/>
-          <a:lstStyle/>
-          <a:p>
-            <a:endParaRPr lang="en-DE"/>
-          </a:p>
-        </p:txBody>
-      </p:sp>
-    </p:spTree>
-    <p:extLst>
-      <p:ext uri="{BB962C8B-B14F-4D97-AF65-F5344CB8AC3E}">
-        <p14:creationId xmlns:p14="http://schemas.microsoft.com/office/powerpoint/2010/main" val="2418560370"/>
-      </p:ext>
-    </p:extLst>
-  </p:cSld>
-  <p:clrMapOvr>
-    <a:masterClrMapping/>
-  </p:clrMapOvr>
-</p:sld>
-</file>
-
-<file path=ppt/slides/slide4.xml><?xml version="1.0" encoding="utf-8"?>
-<p:sld xmlns:a="http://schemas.openxmlformats.org/drawingml/2006/main" xmlns:r="http://schemas.openxmlformats.org/officeDocument/2006/relationships" xmlns:p="http://schemas.openxmlformats.org/presentationml/2006/main">
-  <p:cSld>
-    <p:spTree>
-      <p:nvGrpSpPr>
-        <p:cNvPr id="1" name=""/>
-        <p:cNvGrpSpPr/>
-        <p:nvPr/>
-      </p:nvGrpSpPr>
-      <p:grpSpPr>
-        <a:xfrm>
-          <a:off x="0" y="0"/>
-          <a:ext cx="0" cy="0"/>
-          <a:chOff x="0" y="0"/>
-          <a:chExt cx="0" cy="0"/>
-        </a:xfrm>
-      </p:grpSpPr>
-      <p:sp>
-        <p:nvSpPr>
-          <p:cNvPr id="2" name="Title 1">
-            <a:extLst>
-              <a:ext uri="{FF2B5EF4-FFF2-40B4-BE49-F238E27FC236}">
-                <a16:creationId xmlns:a16="http://schemas.microsoft.com/office/drawing/2014/main" id="{4ED61577-11DF-0349-070E-EB5ECD2DECBA}"/>
-              </a:ext>
-            </a:extLst>
-          </p:cNvPr>
-          <p:cNvSpPr>
-            <a:spLocks noGrp="1"/>
-          </p:cNvSpPr>
-          <p:nvPr>
-            <p:ph type="title"/>
-          </p:nvPr>
-        </p:nvSpPr>
-        <p:spPr/>
-        <p:txBody>
-          <a:bodyPr/>
-          <a:lstStyle/>
-          <a:p>
-            <a:endParaRPr lang="en-DE"/>
-          </a:p>
-        </p:txBody>
-      </p:sp>
-    </p:spTree>
-    <p:extLst>
-      <p:ext uri="{BB962C8B-B14F-4D97-AF65-F5344CB8AC3E}">
-        <p14:creationId xmlns:p14="http://schemas.microsoft.com/office/powerpoint/2010/main" val="511390949"/>
-      </p:ext>
-    </p:extLst>
-  </p:cSld>
-  <p:clrMapOvr>
-    <a:masterClrMapping/>
-  </p:clrMapOvr>
-</p:sld>
-</file>
-
-<file path=ppt/slides/slide5.xml><?xml version="1.0" encoding="utf-8"?>
-<p:sld xmlns:a="http://schemas.openxmlformats.org/drawingml/2006/main" xmlns:r="http://schemas.openxmlformats.org/officeDocument/2006/relationships" xmlns:p="http://schemas.openxmlformats.org/presentationml/2006/main">
-  <p:cSld>
-    <p:spTree>
-      <p:nvGrpSpPr>
-        <p:cNvPr id="1" name=""/>
-        <p:cNvGrpSpPr/>
-        <p:nvPr/>
-      </p:nvGrpSpPr>
-      <p:grpSpPr>
-        <a:xfrm>
-          <a:off x="0" y="0"/>
-          <a:ext cx="0" cy="0"/>
-          <a:chOff x="0" y="0"/>
-          <a:chExt cx="0" cy="0"/>
-        </a:xfrm>
-      </p:grpSpPr>
-    </p:spTree>
-    <p:extLst>
-      <p:ext uri="{BB962C8B-B14F-4D97-AF65-F5344CB8AC3E}">
-        <p14:creationId xmlns:p14="http://schemas.microsoft.com/office/powerpoint/2010/main" val="1497606637"/>
-      </p:ext>
-    </p:extLst>
-  </p:cSld>
-  <p:clrMapOvr>
-    <a:masterClrMapping/>
-  </p:clrMapOvr>
-</p:sld>
-</file>
-
-<file path=ppt/slides/slide6.xml><?xml version="1.0" encoding="utf-8"?>
-<p:sld xmlns:a="http://schemas.openxmlformats.org/drawingml/2006/main" xmlns:r="http://schemas.openxmlformats.org/officeDocument/2006/relationships" xmlns:p="http://schemas.openxmlformats.org/presentationml/2006/main">
-  <p:cSld>
-    <p:spTree>
-      <p:nvGrpSpPr>
-        <p:cNvPr id="1" name=""/>
-        <p:cNvGrpSpPr/>
-        <p:nvPr/>
-      </p:nvGrpSpPr>
-      <p:grpSpPr>
-        <a:xfrm>
-          <a:off x="0" y="0"/>
-          <a:ext cx="0" cy="0"/>
-          <a:chOff x="0" y="0"/>
-          <a:chExt cx="0" cy="0"/>
-        </a:xfrm>
-      </p:grpSpPr>
-      <p:sp>
-        <p:nvSpPr>
-          <p:cNvPr id="2" name="Subtitle 1">
-            <a:extLst>
-              <a:ext uri="{FF2B5EF4-FFF2-40B4-BE49-F238E27FC236}">
-                <a16:creationId xmlns:a16="http://schemas.microsoft.com/office/drawing/2014/main" id="{21C5D475-220B-EF4D-4631-40EDC43CDA08}"/>
-              </a:ext>
-            </a:extLst>
-          </p:cNvPr>
-          <p:cNvSpPr>
-            <a:spLocks noGrp="1"/>
-          </p:cNvSpPr>
-          <p:nvPr>
-            <p:ph type="subTitle" idx="1"/>
-          </p:nvPr>
-        </p:nvSpPr>
-        <p:spPr/>
-        <p:txBody>
-          <a:bodyPr/>
-          <a:lstStyle/>
-          <a:p>
-            <a:endParaRPr lang="en-DE"/>
-          </a:p>
-        </p:txBody>
-      </p:sp>
-      <p:sp>
-        <p:nvSpPr>
-          <p:cNvPr id="3" name="Title 2">
-            <a:extLst>
-              <a:ext uri="{FF2B5EF4-FFF2-40B4-BE49-F238E27FC236}">
-                <a16:creationId xmlns:a16="http://schemas.microsoft.com/office/drawing/2014/main" id="{B6A30BE4-DF06-9AFC-3BC8-DBC1E084C96B}"/>
-              </a:ext>
-            </a:extLst>
-          </p:cNvPr>
-          <p:cNvSpPr>
-            <a:spLocks noGrp="1"/>
-          </p:cNvSpPr>
-          <p:nvPr>
-            <p:ph type="title"/>
-          </p:nvPr>
-        </p:nvSpPr>
-        <p:spPr/>
-        <p:txBody>
-          <a:bodyPr/>
-          <a:lstStyle/>
-          <a:p>
-            <a:endParaRPr lang="en-DE"/>
-          </a:p>
-        </p:txBody>
-      </p:sp>
-      <p:sp>
-        <p:nvSpPr>
-          <p:cNvPr id="4" name="Content Placeholder 3">
-            <a:extLst>
-              <a:ext uri="{FF2B5EF4-FFF2-40B4-BE49-F238E27FC236}">
-                <a16:creationId xmlns:a16="http://schemas.microsoft.com/office/drawing/2014/main" id="{341CBFA5-5EA4-5B41-C839-27FBCA14705C}"/>
-              </a:ext>
-            </a:extLst>
-          </p:cNvPr>
-          <p:cNvSpPr>
-            <a:spLocks noGrp="1"/>
-          </p:cNvSpPr>
-          <p:nvPr>
-            <p:ph sz="quarter" idx="10"/>
-          </p:nvPr>
-        </p:nvSpPr>
-        <p:spPr/>
-        <p:txBody>
-          <a:bodyPr/>
-          <a:lstStyle/>
-          <a:p>
-            <a:endParaRPr lang="en-DE"/>
-          </a:p>
-        </p:txBody>
-      </p:sp>
-    </p:spTree>
-    <p:extLst>
-      <p:ext uri="{BB962C8B-B14F-4D97-AF65-F5344CB8AC3E}">
-        <p14:creationId xmlns:p14="http://schemas.microsoft.com/office/powerpoint/2010/main" val="668716365"/>
-      </p:ext>
-    </p:extLst>
-  </p:cSld>
-  <p:clrMapOvr>
-    <a:masterClrMapping/>
-  </p:clrMapOvr>
-</p:sld>
-</file>
-
-<file path=ppt/slides/slide7.xml><?xml version="1.0" encoding="utf-8"?>
-<p:sld xmlns:a="http://schemas.openxmlformats.org/drawingml/2006/main" xmlns:r="http://schemas.openxmlformats.org/officeDocument/2006/relationships" xmlns:p="http://schemas.openxmlformats.org/presentationml/2006/main">
-  <p:cSld>
-    <p:spTree>
-      <p:nvGrpSpPr>
-        <p:cNvPr id="1" name=""/>
-        <p:cNvGrpSpPr/>
-        <p:nvPr/>
-      </p:nvGrpSpPr>
-      <p:grpSpPr>
-        <a:xfrm>
-          <a:off x="0" y="0"/>
-          <a:ext cx="0" cy="0"/>
-          <a:chOff x="0" y="0"/>
-          <a:chExt cx="0" cy="0"/>
-        </a:xfrm>
-      </p:grpSpPr>
-      <p:sp>
-        <p:nvSpPr>
-          <p:cNvPr id="2" name="Content Placeholder 1">
-            <a:extLst>
-              <a:ext uri="{FF2B5EF4-FFF2-40B4-BE49-F238E27FC236}">
-                <a16:creationId xmlns:a16="http://schemas.microsoft.com/office/drawing/2014/main" id="{C853268B-EEF1-F439-A205-22EE171285BD}"/>
-              </a:ext>
-            </a:extLst>
-          </p:cNvPr>
-          <p:cNvSpPr>
-            <a:spLocks noGrp="1"/>
-          </p:cNvSpPr>
-          <p:nvPr>
-            <p:ph idx="1"/>
-          </p:nvPr>
-        </p:nvSpPr>
-        <p:spPr/>
-        <p:txBody>
-          <a:bodyPr/>
-          <a:lstStyle/>
-          <a:p>
-            <a:endParaRPr lang="en-DE"/>
-          </a:p>
-        </p:txBody>
-      </p:sp>
-      <p:sp>
-        <p:nvSpPr>
-          <p:cNvPr id="3" name="Title 2">
-            <a:extLst>
-              <a:ext uri="{FF2B5EF4-FFF2-40B4-BE49-F238E27FC236}">
-                <a16:creationId xmlns:a16="http://schemas.microsoft.com/office/drawing/2014/main" id="{77EFDA86-3CB5-7440-E732-E2614F4706EC}"/>
-              </a:ext>
-            </a:extLst>
-          </p:cNvPr>
-          <p:cNvSpPr>
-            <a:spLocks noGrp="1"/>
-          </p:cNvSpPr>
-          <p:nvPr>
-            <p:ph type="title"/>
-          </p:nvPr>
-        </p:nvSpPr>
-        <p:spPr/>
-        <p:txBody>
-          <a:bodyPr/>
-          <a:lstStyle/>
-          <a:p>
-            <a:endParaRPr lang="en-DE" dirty="0"/>
-          </a:p>
-        </p:txBody>
-      </p:sp>
-    </p:spTree>
-    <p:extLst>
-      <p:ext uri="{BB962C8B-B14F-4D97-AF65-F5344CB8AC3E}">
-        <p14:creationId xmlns:p14="http://schemas.microsoft.com/office/powerpoint/2010/main" val="742053393"/>
-      </p:ext>
-    </p:extLst>
-  </p:cSld>
-  <p:clrMapOvr>
-    <a:masterClrMapping/>
-  </p:clrMapOvr>
-</p:sld>
-</file>
-
-<file path=ppt/slides/slide8.xml><?xml version="1.0" encoding="utf-8"?>
-<p:sld xmlns:a="http://schemas.openxmlformats.org/drawingml/2006/main" xmlns:r="http://schemas.openxmlformats.org/officeDocument/2006/relationships" xmlns:p="http://schemas.openxmlformats.org/presentationml/2006/main">
-  <p:cSld>
-    <p:spTree>
-      <p:nvGrpSpPr>
-        <p:cNvPr id="1" name=""/>
-        <p:cNvGrpSpPr/>
-        <p:nvPr/>
-      </p:nvGrpSpPr>
-      <p:grpSpPr>
-        <a:xfrm>
-          <a:off x="0" y="0"/>
-          <a:ext cx="0" cy="0"/>
-          <a:chOff x="0" y="0"/>
-          <a:chExt cx="0" cy="0"/>
-        </a:xfrm>
-      </p:grpSpPr>
-      <p:sp>
-        <p:nvSpPr>
-          <p:cNvPr id="2" name="Title 1">
-            <a:extLst>
-              <a:ext uri="{FF2B5EF4-FFF2-40B4-BE49-F238E27FC236}">
-                <a16:creationId xmlns:a16="http://schemas.microsoft.com/office/drawing/2014/main" id="{B554AE68-90DB-A9F6-A8DD-3D739890BF69}"/>
-              </a:ext>
-            </a:extLst>
-          </p:cNvPr>
-          <p:cNvSpPr>
-            <a:spLocks noGrp="1"/>
-          </p:cNvSpPr>
-          <p:nvPr>
-            <p:ph type="title"/>
-          </p:nvPr>
-        </p:nvSpPr>
-        <p:spPr/>
-        <p:txBody>
-          <a:bodyPr/>
-          <a:lstStyle/>
-          <a:p>
-            <a:endParaRPr lang="en-DE"/>
-          </a:p>
-        </p:txBody>
-      </p:sp>
-      <p:sp>
-        <p:nvSpPr>
-          <p:cNvPr id="3" name="Content Placeholder 2">
-            <a:extLst>
-              <a:ext uri="{FF2B5EF4-FFF2-40B4-BE49-F238E27FC236}">
-                <a16:creationId xmlns:a16="http://schemas.microsoft.com/office/drawing/2014/main" id="{0DAD110C-1D12-957F-6F1A-B554885909AB}"/>
-              </a:ext>
-            </a:extLst>
-          </p:cNvPr>
-          <p:cNvSpPr>
-            <a:spLocks noGrp="1"/>
-          </p:cNvSpPr>
-          <p:nvPr>
-            <p:ph sz="half" idx="1"/>
-          </p:nvPr>
-        </p:nvSpPr>
-        <p:spPr/>
-        <p:txBody>
-          <a:bodyPr/>
-          <a:lstStyle/>
-          <a:p>
-            <a:endParaRPr lang="en-DE"/>
-          </a:p>
-        </p:txBody>
-      </p:sp>
-      <p:sp>
-        <p:nvSpPr>
-          <p:cNvPr id="4" name="Content Placeholder 3">
-            <a:extLst>
-              <a:ext uri="{FF2B5EF4-FFF2-40B4-BE49-F238E27FC236}">
-                <a16:creationId xmlns:a16="http://schemas.microsoft.com/office/drawing/2014/main" id="{A0DA41C5-4F38-36F4-A633-51B76D270FC7}"/>
-              </a:ext>
-            </a:extLst>
-          </p:cNvPr>
-          <p:cNvSpPr>
-            <a:spLocks noGrp="1"/>
-          </p:cNvSpPr>
-          <p:nvPr>
-            <p:ph sz="half" idx="2"/>
-          </p:nvPr>
-        </p:nvSpPr>
-        <p:spPr/>
-        <p:txBody>
-          <a:bodyPr/>
-          <a:lstStyle/>
-          <a:p>
-            <a:endParaRPr lang="en-DE"/>
-          </a:p>
-        </p:txBody>
-      </p:sp>
-    </p:spTree>
-    <p:extLst>
-      <p:ext uri="{BB962C8B-B14F-4D97-AF65-F5344CB8AC3E}">
-        <p14:creationId xmlns:p14="http://schemas.microsoft.com/office/powerpoint/2010/main" val="462949339"/>
-      </p:ext>
-    </p:extLst>
-  </p:cSld>
-  <p:clrMapOvr>
-    <a:masterClrMapping/>
-  </p:clrMapOvr>
-</p:sld>
-</file>
-
-<file path=ppt/slides/slide9.xml><?xml version="1.0" encoding="utf-8"?>
-<p:sld xmlns:a="http://schemas.openxmlformats.org/drawingml/2006/main" xmlns:r="http://schemas.openxmlformats.org/officeDocument/2006/relationships" xmlns:p="http://schemas.openxmlformats.org/presentationml/2006/main">
-  <p:cSld>
-    <p:spTree>
-      <p:nvGrpSpPr>
-        <p:cNvPr id="1" name=""/>
-        <p:cNvGrpSpPr/>
-        <p:nvPr/>
-      </p:nvGrpSpPr>
-      <p:grpSpPr>
-        <a:xfrm>
-          <a:off x="0" y="0"/>
-          <a:ext cx="0" cy="0"/>
-          <a:chOff x="0" y="0"/>
-          <a:chExt cx="0" cy="0"/>
-        </a:xfrm>
-      </p:grpSpPr>
-      <p:sp>
-        <p:nvSpPr>
-          <p:cNvPr id="2" name="Title 1">
-            <a:extLst>
-              <a:ext uri="{FF2B5EF4-FFF2-40B4-BE49-F238E27FC236}">
-                <a16:creationId xmlns:a16="http://schemas.microsoft.com/office/drawing/2014/main" id="{7EF9C288-545B-6AF8-832B-056D64AFEAB0}"/>
-              </a:ext>
-            </a:extLst>
-          </p:cNvPr>
-          <p:cNvSpPr>
-            <a:spLocks noGrp="1"/>
-          </p:cNvSpPr>
-          <p:nvPr>
-            <p:ph type="title"/>
-          </p:nvPr>
-        </p:nvSpPr>
-        <p:spPr/>
-        <p:txBody>
-          <a:bodyPr/>
-          <a:lstStyle/>
-          <a:p>
-            <a:endParaRPr lang="en-DE"/>
-          </a:p>
-        </p:txBody>
-      </p:sp>
-    </p:spTree>
-    <p:extLst>
-      <p:ext uri="{BB962C8B-B14F-4D97-AF65-F5344CB8AC3E}">
-        <p14:creationId xmlns:p14="http://schemas.microsoft.com/office/powerpoint/2010/main" val="323310758"/>
-      </p:ext>
-    </p:extLst>
-  </p:cSld>
-  <p:clrMapOvr>
-    <a:masterClrMapping/>
-  </p:clrMapOvr>
-</p:sld>
 </file>
 
 <file path=ppt/theme/theme1.xml><?xml version="1.0" encoding="utf-8"?>

--- a/slides_pptx/2023.05.03_Slides.pptx
+++ b/slides_pptx/2023.05.03_Slides.pptx
@@ -6,11 +6,25 @@
     <p:sldMasterId id="2147483937" r:id="rId2"/>
   </p:sldMasterIdLst>
   <p:notesMasterIdLst>
-    <p:notesMasterId r:id="rId3"/>
+    <p:notesMasterId r:id="rId15"/>
   </p:notesMasterIdLst>
   <p:handoutMasterIdLst>
-    <p:handoutMasterId r:id="rId4"/>
+    <p:handoutMasterId r:id="rId16"/>
   </p:handoutMasterIdLst>
+  <p:sldIdLst>
+    <p:sldId id="256" r:id="rId3"/>
+    <p:sldId id="257" r:id="rId4"/>
+    <p:sldId id="258" r:id="rId5"/>
+    <p:sldId id="259" r:id="rId6"/>
+    <p:sldId id="260" r:id="rId7"/>
+    <p:sldId id="261" r:id="rId8"/>
+    <p:sldId id="262" r:id="rId9"/>
+    <p:sldId id="263" r:id="rId10"/>
+    <p:sldId id="264" r:id="rId11"/>
+    <p:sldId id="265" r:id="rId12"/>
+    <p:sldId id="266" r:id="rId13"/>
+    <p:sldId id="267" r:id="rId14"/>
+  </p:sldIdLst>
   <p:sldSz cx="12192000" cy="6858000"/>
   <p:notesSz cx="6858000" cy="9144000"/>
   <p:defaultTextStyle>
@@ -112,10 +126,24 @@
     <p:ext uri="{521415D9-36F7-43E2-AB2F-B90AF26B5E84}">
       <p14:sectionLst xmlns:p14="http://schemas.microsoft.com/office/powerpoint/2010/main">
         <p14:section name="Variant 1" id="{26E731A6-90F2-AA46-B9F0-278C949BD4FA}">
-          <p14:sldIdLst/>
+          <p14:sldIdLst>
+            <p14:sldId id="256"/>
+            <p14:sldId id="257"/>
+            <p14:sldId id="258"/>
+            <p14:sldId id="259"/>
+            <p14:sldId id="260"/>
+            <p14:sldId id="261"/>
+          </p14:sldIdLst>
         </p14:section>
         <p14:section name="Variant 2" id="{DD0467AF-370A-D345-9219-89A4FF521124}">
-          <p14:sldIdLst/>
+          <p14:sldIdLst>
+            <p14:sldId id="262"/>
+            <p14:sldId id="263"/>
+            <p14:sldId id="264"/>
+            <p14:sldId id="265"/>
+            <p14:sldId id="266"/>
+            <p14:sldId id="267"/>
+          </p14:sldIdLst>
         </p14:section>
       </p14:sectionLst>
     </p:ext>
@@ -674,19 +702,206 @@
 </file>
 
 <file path=ppt/slideLayouts/slideLayout1.xml><?xml version="1.0" encoding="utf-8"?>
-<p:sldLayout xmlns:a="http://schemas.openxmlformats.org/drawingml/2006/main" xmlns:r="http://schemas.openxmlformats.org/officeDocument/2006/relationships" xmlns:p="http://schemas.openxmlformats.org/presentationml/2006/main" showMasterSp="0" matchingName="Dark Title (side)" preserve="1" userDrawn="1">
-  <p:cSld name="fewiknfewkfw">
-    <p:bg>
-      <p:bgPr>
-        <a:solidFill>
-          <a:srgbClr val="FFFFFF"/>
-        </a:solidFill>
-        <a:effectLst/>
-      </p:bgPr>
-    </p:bg>
+<p:sldLayout xmlns:a="http://schemas.openxmlformats.org/drawingml/2006/main" xmlns:r="http://schemas.openxmlformats.org/officeDocument/2006/relationships" xmlns:p="http://schemas.openxmlformats.org/presentationml/2006/main" preserve="1" userDrawn="1">
+  <p:cSld name="Title slide (Variant 1)">
     <p:spTree>
       <p:nvGrpSpPr>
-        <p:cNvPr id="1" name="Shape 21"/>
+        <p:cNvPr id="1" name=""/>
+        <p:cNvGrpSpPr/>
+        <p:nvPr/>
+      </p:nvGrpSpPr>
+      <p:grpSpPr>
+        <a:xfrm>
+          <a:off x="0" y="0"/>
+          <a:ext cx="0" cy="0"/>
+          <a:chOff x="0" y="0"/>
+          <a:chExt cx="0" cy="0"/>
+        </a:xfrm>
+      </p:grpSpPr>
+      <p:sp>
+        <p:nvSpPr>
+          <p:cNvPr id="3" name="Subtitle 2">
+            <a:extLst>
+              <a:ext uri="{FF2B5EF4-FFF2-40B4-BE49-F238E27FC236}">
+                <a16:creationId xmlns:a16="http://schemas.microsoft.com/office/drawing/2014/main" id="{582DEE7C-AF0C-A94C-0089-53BA99335C72}"/>
+              </a:ext>
+            </a:extLst>
+          </p:cNvPr>
+          <p:cNvSpPr>
+            <a:spLocks noGrp="1"/>
+          </p:cNvSpPr>
+          <p:nvPr>
+            <p:ph type="subTitle" idx="1" hasCustomPrompt="1"/>
+          </p:nvPr>
+        </p:nvSpPr>
+        <p:spPr>
+          <a:xfrm>
+            <a:off x="156000" y="3243098"/>
+            <a:ext cx="11880000" cy="1538452"/>
+          </a:xfrm>
+        </p:spPr>
+        <p:txBody>
+          <a:bodyPr/>
+          <a:lstStyle>
+            <a:lvl1pPr marL="0" indent="0" algn="l">
+              <a:buNone/>
+              <a:defRPr sz="2400"/>
+            </a:lvl1pPr>
+            <a:lvl2pPr marL="457200" indent="0" algn="ctr">
+              <a:buNone/>
+              <a:defRPr sz="2000"/>
+            </a:lvl2pPr>
+            <a:lvl3pPr marL="914400" indent="0" algn="ctr">
+              <a:buNone/>
+              <a:defRPr sz="1800"/>
+            </a:lvl3pPr>
+            <a:lvl4pPr marL="1371600" indent="0" algn="ctr">
+              <a:buNone/>
+              <a:defRPr sz="1600"/>
+            </a:lvl4pPr>
+            <a:lvl5pPr marL="1828800" indent="0" algn="ctr">
+              <a:buNone/>
+              <a:defRPr sz="1600"/>
+            </a:lvl5pPr>
+            <a:lvl6pPr marL="2286000" indent="0" algn="ctr">
+              <a:buNone/>
+              <a:defRPr sz="1600"/>
+            </a:lvl6pPr>
+            <a:lvl7pPr marL="2743200" indent="0" algn="ctr">
+              <a:buNone/>
+              <a:defRPr sz="1600"/>
+            </a:lvl7pPr>
+            <a:lvl8pPr marL="3200400" indent="0" algn="ctr">
+              <a:buNone/>
+              <a:defRPr sz="1600"/>
+            </a:lvl8pPr>
+            <a:lvl9pPr marL="3657600" indent="0" algn="ctr">
+              <a:buNone/>
+              <a:defRPr sz="1600"/>
+            </a:lvl9pPr>
+          </a:lstStyle>
+          <a:p>
+            <a:r>
+              <a:rPr lang="en-GB" dirty="0"/>
+              <a:t>[Full name, including title and/or post-name letters] [Full author list, if required] [Institution(s)]</a:t>
+            </a:r>
+          </a:p>
+          <a:p>
+            <a:endParaRPr lang="en-GB" dirty="0"/>
+          </a:p>
+        </p:txBody>
+      </p:sp>
+      <p:sp>
+        <p:nvSpPr>
+          <p:cNvPr id="12" name="Title 11">
+            <a:extLst>
+              <a:ext uri="{FF2B5EF4-FFF2-40B4-BE49-F238E27FC236}">
+                <a16:creationId xmlns:a16="http://schemas.microsoft.com/office/drawing/2014/main" id="{928B059B-334C-45D2-2325-10DA6A37B897}"/>
+              </a:ext>
+            </a:extLst>
+          </p:cNvPr>
+          <p:cNvSpPr>
+            <a:spLocks noGrp="1"/>
+          </p:cNvSpPr>
+          <p:nvPr>
+            <p:ph type="title"/>
+          </p:nvPr>
+        </p:nvSpPr>
+        <p:spPr>
+          <a:xfrm>
+            <a:off x="156000" y="1519073"/>
+            <a:ext cx="11880000" cy="1443202"/>
+          </a:xfrm>
+        </p:spPr>
+        <p:txBody>
+          <a:bodyPr anchor="b">
+            <a:normAutofit/>
+          </a:bodyPr>
+          <a:lstStyle>
+            <a:lvl1pPr>
+              <a:defRPr sz="3600">
+                <a:solidFill>
+                  <a:srgbClr val="0E2D38"/>
+                </a:solidFill>
+              </a:defRPr>
+            </a:lvl1pPr>
+          </a:lstStyle>
+          <a:p>
+            <a:r>
+              <a:rPr lang="en-GB" dirty="0"/>
+              <a:t>Click to edit Master title style</a:t>
+            </a:r>
+            <a:endParaRPr lang="en-DE" dirty="0"/>
+          </a:p>
+        </p:txBody>
+      </p:sp>
+      <p:sp>
+        <p:nvSpPr>
+          <p:cNvPr id="4" name="Content Placeholder 3">
+            <a:extLst>
+              <a:ext uri="{FF2B5EF4-FFF2-40B4-BE49-F238E27FC236}">
+                <a16:creationId xmlns:a16="http://schemas.microsoft.com/office/drawing/2014/main" id="{697BC65F-206A-0B48-AF56-FE3AA1676AEE}"/>
+              </a:ext>
+            </a:extLst>
+          </p:cNvPr>
+          <p:cNvSpPr>
+            <a:spLocks noGrp="1"/>
+          </p:cNvSpPr>
+          <p:nvPr>
+            <p:ph sz="quarter" idx="10" hasCustomPrompt="1"/>
+          </p:nvPr>
+        </p:nvSpPr>
+        <p:spPr>
+          <a:xfrm>
+            <a:off x="155574" y="4945063"/>
+            <a:ext cx="11879999" cy="1026367"/>
+          </a:xfrm>
+        </p:spPr>
+        <p:txBody>
+          <a:bodyPr>
+            <a:normAutofit/>
+          </a:bodyPr>
+          <a:lstStyle>
+            <a:lvl1pPr marL="0" indent="0">
+              <a:buNone/>
+              <a:defRPr sz="1800">
+                <a:solidFill>
+                  <a:schemeClr val="tx1">
+                    <a:lumMod val="65000"/>
+                    <a:lumOff val="35000"/>
+                  </a:schemeClr>
+                </a:solidFill>
+              </a:defRPr>
+            </a:lvl1pPr>
+          </a:lstStyle>
+          <a:p>
+            <a:pPr lvl="0"/>
+            <a:r>
+              <a:rPr lang="en-DE" dirty="0"/>
+              <a:t>[Event date], [Event name]</a:t>
+            </a:r>
+          </a:p>
+        </p:txBody>
+      </p:sp>
+    </p:spTree>
+    <p:extLst>
+      <p:ext uri="{BB962C8B-B14F-4D97-AF65-F5344CB8AC3E}">
+        <p14:creationId xmlns:p14="http://schemas.microsoft.com/office/powerpoint/2010/main" val="2219985906"/>
+      </p:ext>
+    </p:extLst>
+  </p:cSld>
+  <p:clrMapOvr>
+    <a:masterClrMapping/>
+  </p:clrMapOvr>
+</p:sldLayout>
+</file>
+
+<file path=ppt/slideLayouts/slideLayout10.xml><?xml version="1.0" encoding="utf-8"?>
+<p:sldLayout xmlns:a="http://schemas.openxmlformats.org/drawingml/2006/main" xmlns:r="http://schemas.openxmlformats.org/officeDocument/2006/relationships" xmlns:p="http://schemas.openxmlformats.org/presentationml/2006/main" showMasterSp="0" matchingName="Acknowledgments (Email + GitHub" preserve="1" userDrawn="1">
+  <p:cSld name="1_Dark References">
+    <p:spTree>
+      <p:nvGrpSpPr>
+        <p:cNvPr id="1" name="Shape 54"/>
         <p:cNvGrpSpPr/>
         <p:nvPr/>
       </p:nvGrpSpPr>
@@ -700,10 +915,10 @@
       </p:grpSpPr>
       <p:pic>
         <p:nvPicPr>
-          <p:cNvPr id="9" name="Picture 8">
-            <a:extLst>
-              <a:ext uri="{FF2B5EF4-FFF2-40B4-BE49-F238E27FC236}">
-                <a16:creationId xmlns:a16="http://schemas.microsoft.com/office/drawing/2014/main" id="{36419E6D-792C-A294-2683-62B5DDD1906D}"/>
+          <p:cNvPr id="10" name="Picture 9">
+            <a:extLst>
+              <a:ext uri="{FF2B5EF4-FFF2-40B4-BE49-F238E27FC236}">
+                <a16:creationId xmlns:a16="http://schemas.microsoft.com/office/drawing/2014/main" id="{579150A8-A6A7-D848-2DEF-2A552A77C406}"/>
               </a:ext>
             </a:extLst>
           </p:cNvPr>
@@ -734,26 +949,292 @@
           </a:prstGeom>
         </p:spPr>
       </p:pic>
+      <p:sp>
+        <p:nvSpPr>
+          <p:cNvPr id="55" name="Google Shape;55;p10"/>
+          <p:cNvSpPr txBox="1">
+            <a:spLocks noGrp="1"/>
+          </p:cNvSpPr>
+          <p:nvPr>
+            <p:ph type="sldNum" idx="12"/>
+          </p:nvPr>
+        </p:nvSpPr>
+        <p:spPr>
+          <a:xfrm>
+            <a:off x="6457950" y="4767263"/>
+            <a:ext cx="2057400" cy="274637"/>
+          </a:xfrm>
+          <a:prstGeom prst="rect">
+            <a:avLst/>
+          </a:prstGeom>
+          <a:noFill/>
+          <a:ln>
+            <a:noFill/>
+          </a:ln>
+        </p:spPr>
+        <p:txBody>
+          <a:bodyPr spcFirstLastPara="1" vert="horz" wrap="square" lIns="91440" tIns="45720" rIns="91440" bIns="45720" rtlCol="0" anchor="ctr" anchorCtr="0">
+            <a:noAutofit/>
+          </a:bodyPr>
+          <a:lstStyle>
+            <a:defPPr marR="0" lvl="0" algn="l" rtl="0">
+              <a:lnSpc>
+                <a:spcPct val="100000"/>
+              </a:lnSpc>
+              <a:spcBef>
+                <a:spcPts val="0"/>
+              </a:spcBef>
+              <a:spcAft>
+                <a:spcPts val="0"/>
+              </a:spcAft>
+            </a:defPPr>
+            <a:lvl1pPr marR="0" lvl="0" algn="r" rtl="0">
+              <a:lnSpc>
+                <a:spcPct val="100000"/>
+              </a:lnSpc>
+              <a:spcBef>
+                <a:spcPts val="0"/>
+              </a:spcBef>
+              <a:spcAft>
+                <a:spcPts val="0"/>
+              </a:spcAft>
+              <a:buClr>
+                <a:srgbClr val="000000"/>
+              </a:buClr>
+              <a:buFont typeface="Arial"/>
+              <a:defRPr sz="1200" b="0" i="0" u="none" strike="noStrike" cap="none">
+                <a:solidFill>
+                  <a:schemeClr val="tx1">
+                    <a:tint val="75000"/>
+                  </a:schemeClr>
+                </a:solidFill>
+                <a:latin typeface="Helvetica Light" panose="020B0403020202020204" pitchFamily="34" charset="0"/>
+                <a:ea typeface="Arial"/>
+                <a:cs typeface="Arial"/>
+                <a:sym typeface="Arial"/>
+              </a:defRPr>
+            </a:lvl1pPr>
+            <a:lvl2pPr marR="0" lvl="1" algn="l" rtl="0">
+              <a:lnSpc>
+                <a:spcPct val="100000"/>
+              </a:lnSpc>
+              <a:spcBef>
+                <a:spcPts val="0"/>
+              </a:spcBef>
+              <a:spcAft>
+                <a:spcPts val="0"/>
+              </a:spcAft>
+              <a:buClr>
+                <a:srgbClr val="000000"/>
+              </a:buClr>
+              <a:buFont typeface="Arial"/>
+              <a:defRPr sz="1400" b="0" i="0" u="none" strike="noStrike" cap="none">
+                <a:solidFill>
+                  <a:srgbClr val="000000"/>
+                </a:solidFill>
+                <a:latin typeface="Arial"/>
+                <a:ea typeface="Arial"/>
+                <a:cs typeface="Arial"/>
+                <a:sym typeface="Arial"/>
+              </a:defRPr>
+            </a:lvl2pPr>
+            <a:lvl3pPr marR="0" lvl="2" algn="l" rtl="0">
+              <a:lnSpc>
+                <a:spcPct val="100000"/>
+              </a:lnSpc>
+              <a:spcBef>
+                <a:spcPts val="0"/>
+              </a:spcBef>
+              <a:spcAft>
+                <a:spcPts val="0"/>
+              </a:spcAft>
+              <a:buClr>
+                <a:srgbClr val="000000"/>
+              </a:buClr>
+              <a:buFont typeface="Arial"/>
+              <a:defRPr sz="1400" b="0" i="0" u="none" strike="noStrike" cap="none">
+                <a:solidFill>
+                  <a:srgbClr val="000000"/>
+                </a:solidFill>
+                <a:latin typeface="Arial"/>
+                <a:ea typeface="Arial"/>
+                <a:cs typeface="Arial"/>
+                <a:sym typeface="Arial"/>
+              </a:defRPr>
+            </a:lvl3pPr>
+            <a:lvl4pPr marR="0" lvl="3" algn="l" rtl="0">
+              <a:lnSpc>
+                <a:spcPct val="100000"/>
+              </a:lnSpc>
+              <a:spcBef>
+                <a:spcPts val="0"/>
+              </a:spcBef>
+              <a:spcAft>
+                <a:spcPts val="0"/>
+              </a:spcAft>
+              <a:buClr>
+                <a:srgbClr val="000000"/>
+              </a:buClr>
+              <a:buFont typeface="Arial"/>
+              <a:defRPr sz="1400" b="0" i="0" u="none" strike="noStrike" cap="none">
+                <a:solidFill>
+                  <a:srgbClr val="000000"/>
+                </a:solidFill>
+                <a:latin typeface="Arial"/>
+                <a:ea typeface="Arial"/>
+                <a:cs typeface="Arial"/>
+                <a:sym typeface="Arial"/>
+              </a:defRPr>
+            </a:lvl4pPr>
+            <a:lvl5pPr marR="0" lvl="4" algn="l" rtl="0">
+              <a:lnSpc>
+                <a:spcPct val="100000"/>
+              </a:lnSpc>
+              <a:spcBef>
+                <a:spcPts val="0"/>
+              </a:spcBef>
+              <a:spcAft>
+                <a:spcPts val="0"/>
+              </a:spcAft>
+              <a:buClr>
+                <a:srgbClr val="000000"/>
+              </a:buClr>
+              <a:buFont typeface="Arial"/>
+              <a:defRPr sz="1400" b="0" i="0" u="none" strike="noStrike" cap="none">
+                <a:solidFill>
+                  <a:srgbClr val="000000"/>
+                </a:solidFill>
+                <a:latin typeface="Arial"/>
+                <a:ea typeface="Arial"/>
+                <a:cs typeface="Arial"/>
+                <a:sym typeface="Arial"/>
+              </a:defRPr>
+            </a:lvl5pPr>
+            <a:lvl6pPr marR="0" lvl="5" algn="l" rtl="0">
+              <a:lnSpc>
+                <a:spcPct val="100000"/>
+              </a:lnSpc>
+              <a:spcBef>
+                <a:spcPts val="0"/>
+              </a:spcBef>
+              <a:spcAft>
+                <a:spcPts val="0"/>
+              </a:spcAft>
+              <a:buClr>
+                <a:srgbClr val="000000"/>
+              </a:buClr>
+              <a:buFont typeface="Arial"/>
+              <a:defRPr sz="1400" b="0" i="0" u="none" strike="noStrike" cap="none">
+                <a:solidFill>
+                  <a:srgbClr val="000000"/>
+                </a:solidFill>
+                <a:latin typeface="Arial"/>
+                <a:ea typeface="Arial"/>
+                <a:cs typeface="Arial"/>
+                <a:sym typeface="Arial"/>
+              </a:defRPr>
+            </a:lvl6pPr>
+            <a:lvl7pPr marR="0" lvl="6" algn="l" rtl="0">
+              <a:lnSpc>
+                <a:spcPct val="100000"/>
+              </a:lnSpc>
+              <a:spcBef>
+                <a:spcPts val="0"/>
+              </a:spcBef>
+              <a:spcAft>
+                <a:spcPts val="0"/>
+              </a:spcAft>
+              <a:buClr>
+                <a:srgbClr val="000000"/>
+              </a:buClr>
+              <a:buFont typeface="Arial"/>
+              <a:defRPr sz="1400" b="0" i="0" u="none" strike="noStrike" cap="none">
+                <a:solidFill>
+                  <a:srgbClr val="000000"/>
+                </a:solidFill>
+                <a:latin typeface="Arial"/>
+                <a:ea typeface="Arial"/>
+                <a:cs typeface="Arial"/>
+                <a:sym typeface="Arial"/>
+              </a:defRPr>
+            </a:lvl7pPr>
+            <a:lvl8pPr marR="0" lvl="7" algn="l" rtl="0">
+              <a:lnSpc>
+                <a:spcPct val="100000"/>
+              </a:lnSpc>
+              <a:spcBef>
+                <a:spcPts val="0"/>
+              </a:spcBef>
+              <a:spcAft>
+                <a:spcPts val="0"/>
+              </a:spcAft>
+              <a:buClr>
+                <a:srgbClr val="000000"/>
+              </a:buClr>
+              <a:buFont typeface="Arial"/>
+              <a:defRPr sz="1400" b="0" i="0" u="none" strike="noStrike" cap="none">
+                <a:solidFill>
+                  <a:srgbClr val="000000"/>
+                </a:solidFill>
+                <a:latin typeface="Arial"/>
+                <a:ea typeface="Arial"/>
+                <a:cs typeface="Arial"/>
+                <a:sym typeface="Arial"/>
+              </a:defRPr>
+            </a:lvl8pPr>
+            <a:lvl9pPr marR="0" lvl="8" algn="l" rtl="0">
+              <a:lnSpc>
+                <a:spcPct val="100000"/>
+              </a:lnSpc>
+              <a:spcBef>
+                <a:spcPts val="0"/>
+              </a:spcBef>
+              <a:spcAft>
+                <a:spcPts val="0"/>
+              </a:spcAft>
+              <a:buClr>
+                <a:srgbClr val="000000"/>
+              </a:buClr>
+              <a:buFont typeface="Arial"/>
+              <a:defRPr sz="1400" b="0" i="0" u="none" strike="noStrike" cap="none">
+                <a:solidFill>
+                  <a:srgbClr val="000000"/>
+                </a:solidFill>
+                <a:latin typeface="Arial"/>
+                <a:ea typeface="Arial"/>
+                <a:cs typeface="Arial"/>
+                <a:sym typeface="Arial"/>
+              </a:defRPr>
+            </a:lvl9pPr>
+          </a:lstStyle>
+          <a:p>
+            <a:fld id="{3BF01AD4-1839-794E-BD90-91AB590172A7}" type="slidenum">
+              <a:rPr lang="en-DE" smtClean="0"/>
+              <a:pPr/>
+              <a:t>‹#›</a:t>
+            </a:fld>
+            <a:endParaRPr lang="en"/>
+          </a:p>
+        </p:txBody>
+      </p:sp>
       <p:cxnSp>
         <p:nvCxnSpPr>
-          <p:cNvPr id="24" name="Google Shape;24;p4"/>
-          <p:cNvCxnSpPr>
-            <a:cxnSpLocks/>
-          </p:cNvCxnSpPr>
+          <p:cNvPr id="57" name="Google Shape;57;p10"/>
+          <p:cNvCxnSpPr/>
           <p:nvPr/>
         </p:nvCxnSpPr>
         <p:spPr>
           <a:xfrm>
-            <a:off x="3932481" y="1505165"/>
-            <a:ext cx="0" cy="3703899"/>
+            <a:off x="3716421" y="2608481"/>
+            <a:ext cx="0" cy="1600400"/>
           </a:xfrm>
           <a:prstGeom prst="straightConnector1">
             <a:avLst/>
           </a:prstGeom>
           <a:noFill/>
-          <a:ln w="38100" cap="flat" cmpd="sng">
+          <a:ln w="19050" cap="flat" cmpd="sng">
             <a:solidFill>
-              <a:schemeClr val="bg1"/>
+              <a:schemeClr val="lt1"/>
             </a:solidFill>
             <a:prstDash val="solid"/>
             <a:miter lim="800000"/>
@@ -762,12 +1243,561 @@
           </a:ln>
         </p:spPr>
       </p:cxnSp>
+      <p:sp>
+        <p:nvSpPr>
+          <p:cNvPr id="60" name="Google Shape;60;p10"/>
+          <p:cNvSpPr txBox="1">
+            <a:spLocks noGrp="1"/>
+          </p:cNvSpPr>
+          <p:nvPr>
+            <p:ph type="sldNum" idx="2"/>
+          </p:nvPr>
+        </p:nvSpPr>
+        <p:spPr>
+          <a:xfrm>
+            <a:off x="6457950" y="4767263"/>
+            <a:ext cx="2057400" cy="274637"/>
+          </a:xfrm>
+          <a:prstGeom prst="rect">
+            <a:avLst/>
+          </a:prstGeom>
+          <a:noFill/>
+          <a:ln>
+            <a:noFill/>
+          </a:ln>
+        </p:spPr>
+        <p:txBody>
+          <a:bodyPr spcFirstLastPara="1" vert="horz" wrap="square" lIns="91440" tIns="45720" rIns="91440" bIns="45720" rtlCol="0" anchor="ctr" anchorCtr="0">
+            <a:noAutofit/>
+          </a:bodyPr>
+          <a:lstStyle>
+            <a:defPPr marR="0" lvl="0" algn="l" rtl="0">
+              <a:lnSpc>
+                <a:spcPct val="100000"/>
+              </a:lnSpc>
+              <a:spcBef>
+                <a:spcPts val="0"/>
+              </a:spcBef>
+              <a:spcAft>
+                <a:spcPts val="0"/>
+              </a:spcAft>
+            </a:defPPr>
+            <a:lvl1pPr marR="0" lvl="0" algn="r" rtl="0">
+              <a:lnSpc>
+                <a:spcPct val="100000"/>
+              </a:lnSpc>
+              <a:spcBef>
+                <a:spcPts val="0"/>
+              </a:spcBef>
+              <a:spcAft>
+                <a:spcPts val="0"/>
+              </a:spcAft>
+              <a:buClr>
+                <a:srgbClr val="000000"/>
+              </a:buClr>
+              <a:buFont typeface="Arial"/>
+              <a:defRPr sz="1200" b="0" i="0" u="none" strike="noStrike" cap="none">
+                <a:solidFill>
+                  <a:schemeClr val="tx1">
+                    <a:tint val="75000"/>
+                  </a:schemeClr>
+                </a:solidFill>
+                <a:latin typeface="Helvetica Light" panose="020B0403020202020204" pitchFamily="34" charset="0"/>
+                <a:ea typeface="Arial"/>
+                <a:cs typeface="Arial"/>
+                <a:sym typeface="Arial"/>
+              </a:defRPr>
+            </a:lvl1pPr>
+            <a:lvl2pPr marR="0" lvl="1" algn="l" rtl="0">
+              <a:lnSpc>
+                <a:spcPct val="100000"/>
+              </a:lnSpc>
+              <a:spcBef>
+                <a:spcPts val="0"/>
+              </a:spcBef>
+              <a:spcAft>
+                <a:spcPts val="0"/>
+              </a:spcAft>
+              <a:buClr>
+                <a:srgbClr val="000000"/>
+              </a:buClr>
+              <a:buFont typeface="Arial"/>
+              <a:defRPr sz="1400" b="0" i="0" u="none" strike="noStrike" cap="none">
+                <a:solidFill>
+                  <a:srgbClr val="000000"/>
+                </a:solidFill>
+                <a:latin typeface="Arial"/>
+                <a:ea typeface="Arial"/>
+                <a:cs typeface="Arial"/>
+                <a:sym typeface="Arial"/>
+              </a:defRPr>
+            </a:lvl2pPr>
+            <a:lvl3pPr marR="0" lvl="2" algn="l" rtl="0">
+              <a:lnSpc>
+                <a:spcPct val="100000"/>
+              </a:lnSpc>
+              <a:spcBef>
+                <a:spcPts val="0"/>
+              </a:spcBef>
+              <a:spcAft>
+                <a:spcPts val="0"/>
+              </a:spcAft>
+              <a:buClr>
+                <a:srgbClr val="000000"/>
+              </a:buClr>
+              <a:buFont typeface="Arial"/>
+              <a:defRPr sz="1400" b="0" i="0" u="none" strike="noStrike" cap="none">
+                <a:solidFill>
+                  <a:srgbClr val="000000"/>
+                </a:solidFill>
+                <a:latin typeface="Arial"/>
+                <a:ea typeface="Arial"/>
+                <a:cs typeface="Arial"/>
+                <a:sym typeface="Arial"/>
+              </a:defRPr>
+            </a:lvl3pPr>
+            <a:lvl4pPr marR="0" lvl="3" algn="l" rtl="0">
+              <a:lnSpc>
+                <a:spcPct val="100000"/>
+              </a:lnSpc>
+              <a:spcBef>
+                <a:spcPts val="0"/>
+              </a:spcBef>
+              <a:spcAft>
+                <a:spcPts val="0"/>
+              </a:spcAft>
+              <a:buClr>
+                <a:srgbClr val="000000"/>
+              </a:buClr>
+              <a:buFont typeface="Arial"/>
+              <a:defRPr sz="1400" b="0" i="0" u="none" strike="noStrike" cap="none">
+                <a:solidFill>
+                  <a:srgbClr val="000000"/>
+                </a:solidFill>
+                <a:latin typeface="Arial"/>
+                <a:ea typeface="Arial"/>
+                <a:cs typeface="Arial"/>
+                <a:sym typeface="Arial"/>
+              </a:defRPr>
+            </a:lvl4pPr>
+            <a:lvl5pPr marR="0" lvl="4" algn="l" rtl="0">
+              <a:lnSpc>
+                <a:spcPct val="100000"/>
+              </a:lnSpc>
+              <a:spcBef>
+                <a:spcPts val="0"/>
+              </a:spcBef>
+              <a:spcAft>
+                <a:spcPts val="0"/>
+              </a:spcAft>
+              <a:buClr>
+                <a:srgbClr val="000000"/>
+              </a:buClr>
+              <a:buFont typeface="Arial"/>
+              <a:defRPr sz="1400" b="0" i="0" u="none" strike="noStrike" cap="none">
+                <a:solidFill>
+                  <a:srgbClr val="000000"/>
+                </a:solidFill>
+                <a:latin typeface="Arial"/>
+                <a:ea typeface="Arial"/>
+                <a:cs typeface="Arial"/>
+                <a:sym typeface="Arial"/>
+              </a:defRPr>
+            </a:lvl5pPr>
+            <a:lvl6pPr marR="0" lvl="5" algn="l" rtl="0">
+              <a:lnSpc>
+                <a:spcPct val="100000"/>
+              </a:lnSpc>
+              <a:spcBef>
+                <a:spcPts val="0"/>
+              </a:spcBef>
+              <a:spcAft>
+                <a:spcPts val="0"/>
+              </a:spcAft>
+              <a:buClr>
+                <a:srgbClr val="000000"/>
+              </a:buClr>
+              <a:buFont typeface="Arial"/>
+              <a:defRPr sz="1400" b="0" i="0" u="none" strike="noStrike" cap="none">
+                <a:solidFill>
+                  <a:srgbClr val="000000"/>
+                </a:solidFill>
+                <a:latin typeface="Arial"/>
+                <a:ea typeface="Arial"/>
+                <a:cs typeface="Arial"/>
+                <a:sym typeface="Arial"/>
+              </a:defRPr>
+            </a:lvl6pPr>
+            <a:lvl7pPr marR="0" lvl="6" algn="l" rtl="0">
+              <a:lnSpc>
+                <a:spcPct val="100000"/>
+              </a:lnSpc>
+              <a:spcBef>
+                <a:spcPts val="0"/>
+              </a:spcBef>
+              <a:spcAft>
+                <a:spcPts val="0"/>
+              </a:spcAft>
+              <a:buClr>
+                <a:srgbClr val="000000"/>
+              </a:buClr>
+              <a:buFont typeface="Arial"/>
+              <a:defRPr sz="1400" b="0" i="0" u="none" strike="noStrike" cap="none">
+                <a:solidFill>
+                  <a:srgbClr val="000000"/>
+                </a:solidFill>
+                <a:latin typeface="Arial"/>
+                <a:ea typeface="Arial"/>
+                <a:cs typeface="Arial"/>
+                <a:sym typeface="Arial"/>
+              </a:defRPr>
+            </a:lvl7pPr>
+            <a:lvl8pPr marR="0" lvl="7" algn="l" rtl="0">
+              <a:lnSpc>
+                <a:spcPct val="100000"/>
+              </a:lnSpc>
+              <a:spcBef>
+                <a:spcPts val="0"/>
+              </a:spcBef>
+              <a:spcAft>
+                <a:spcPts val="0"/>
+              </a:spcAft>
+              <a:buClr>
+                <a:srgbClr val="000000"/>
+              </a:buClr>
+              <a:buFont typeface="Arial"/>
+              <a:defRPr sz="1400" b="0" i="0" u="none" strike="noStrike" cap="none">
+                <a:solidFill>
+                  <a:srgbClr val="000000"/>
+                </a:solidFill>
+                <a:latin typeface="Arial"/>
+                <a:ea typeface="Arial"/>
+                <a:cs typeface="Arial"/>
+                <a:sym typeface="Arial"/>
+              </a:defRPr>
+            </a:lvl8pPr>
+            <a:lvl9pPr marR="0" lvl="8" algn="l" rtl="0">
+              <a:lnSpc>
+                <a:spcPct val="100000"/>
+              </a:lnSpc>
+              <a:spcBef>
+                <a:spcPts val="0"/>
+              </a:spcBef>
+              <a:spcAft>
+                <a:spcPts val="0"/>
+              </a:spcAft>
+              <a:buClr>
+                <a:srgbClr val="000000"/>
+              </a:buClr>
+              <a:buFont typeface="Arial"/>
+              <a:defRPr sz="1400" b="0" i="0" u="none" strike="noStrike" cap="none">
+                <a:solidFill>
+                  <a:srgbClr val="000000"/>
+                </a:solidFill>
+                <a:latin typeface="Arial"/>
+                <a:ea typeface="Arial"/>
+                <a:cs typeface="Arial"/>
+                <a:sym typeface="Arial"/>
+              </a:defRPr>
+            </a:lvl9pPr>
+          </a:lstStyle>
+          <a:p>
+            <a:fld id="{3BF01AD4-1839-794E-BD90-91AB590172A7}" type="slidenum">
+              <a:rPr lang="en-DE" smtClean="0"/>
+              <a:pPr/>
+              <a:t>‹#›</a:t>
+            </a:fld>
+            <a:endParaRPr lang="en"/>
+          </a:p>
+        </p:txBody>
+      </p:sp>
       <p:pic>
         <p:nvPicPr>
-          <p:cNvPr id="13" name="Picture Placeholder 38">
-            <a:extLst>
-              <a:ext uri="{FF2B5EF4-FFF2-40B4-BE49-F238E27FC236}">
-                <a16:creationId xmlns:a16="http://schemas.microsoft.com/office/drawing/2014/main" id="{79C63365-FF4F-9CE1-4D8D-35CF8A436F98}"/>
+          <p:cNvPr id="62" name="Google Shape;62;p10"/>
+          <p:cNvPicPr preferRelativeResize="0"/>
+          <p:nvPr/>
+        </p:nvPicPr>
+        <p:blipFill>
+          <a:blip r:embed="rId3">
+            <a:extLst>
+              <a:ext uri="{28A0092B-C50C-407E-A947-70E740481C1C}">
+                <a14:useLocalDpi xmlns:a14="http://schemas.microsoft.com/office/drawing/2010/main" val="0"/>
+              </a:ext>
+              <a:ext uri="{96DAC541-7B7A-43D3-8B79-37D633B846F1}">
+                <asvg:svgBlip xmlns:asvg="http://schemas.microsoft.com/office/drawing/2016/SVG/main" r:embed="rId4"/>
+              </a:ext>
+            </a:extLst>
+          </a:blip>
+          <a:srcRect/>
+          <a:stretch/>
+        </p:blipFill>
+        <p:spPr>
+          <a:xfrm>
+            <a:off x="3071993" y="6285589"/>
+            <a:ext cx="414529" cy="408850"/>
+          </a:xfrm>
+          <a:prstGeom prst="rect">
+            <a:avLst/>
+          </a:prstGeom>
+          <a:noFill/>
+          <a:ln>
+            <a:noFill/>
+          </a:ln>
+        </p:spPr>
+      </p:pic>
+      <p:pic>
+        <p:nvPicPr>
+          <p:cNvPr id="64" name="Google Shape;64;p10"/>
+          <p:cNvPicPr preferRelativeResize="0"/>
+          <p:nvPr/>
+        </p:nvPicPr>
+        <p:blipFill>
+          <a:blip r:embed="rId5">
+            <a:extLst>
+              <a:ext uri="{28A0092B-C50C-407E-A947-70E740481C1C}">
+                <a14:useLocalDpi xmlns:a14="http://schemas.microsoft.com/office/drawing/2010/main" val="0"/>
+              </a:ext>
+              <a:ext uri="{96DAC541-7B7A-43D3-8B79-37D633B846F1}">
+                <asvg:svgBlip xmlns:asvg="http://schemas.microsoft.com/office/drawing/2016/SVG/main" r:embed="rId6"/>
+              </a:ext>
+            </a:extLst>
+          </a:blip>
+          <a:srcRect/>
+          <a:stretch/>
+        </p:blipFill>
+        <p:spPr>
+          <a:xfrm>
+            <a:off x="152659" y="6282751"/>
+            <a:ext cx="414528" cy="414528"/>
+          </a:xfrm>
+          <a:prstGeom prst="rect">
+            <a:avLst/>
+          </a:prstGeom>
+          <a:noFill/>
+          <a:ln>
+            <a:noFill/>
+          </a:ln>
+        </p:spPr>
+      </p:pic>
+      <p:sp>
+        <p:nvSpPr>
+          <p:cNvPr id="6" name="Picture Placeholder 5">
+            <a:extLst>
+              <a:ext uri="{FF2B5EF4-FFF2-40B4-BE49-F238E27FC236}">
+                <a16:creationId xmlns:a16="http://schemas.microsoft.com/office/drawing/2014/main" id="{2631C45D-A4AF-1223-E180-EB9E96FA2AE4}"/>
+              </a:ext>
+            </a:extLst>
+          </p:cNvPr>
+          <p:cNvSpPr>
+            <a:spLocks noGrp="1"/>
+          </p:cNvSpPr>
+          <p:nvPr>
+            <p:ph type="pic" sz="quarter" idx="13"/>
+          </p:nvPr>
+        </p:nvSpPr>
+        <p:spPr>
+          <a:xfrm>
+            <a:off x="277813" y="1289050"/>
+            <a:ext cx="3206750" cy="4024313"/>
+          </a:xfrm>
+        </p:spPr>
+        <p:txBody>
+          <a:bodyPr/>
+          <a:lstStyle>
+            <a:lvl1pPr marL="0" indent="0">
+              <a:buNone/>
+              <a:defRPr/>
+            </a:lvl1pPr>
+          </a:lstStyle>
+          <a:p>
+            <a:endParaRPr lang="en-DE" dirty="0"/>
+          </a:p>
+        </p:txBody>
+      </p:sp>
+      <p:sp>
+        <p:nvSpPr>
+          <p:cNvPr id="8" name="Text Placeholder 7">
+            <a:extLst>
+              <a:ext uri="{FF2B5EF4-FFF2-40B4-BE49-F238E27FC236}">
+                <a16:creationId xmlns:a16="http://schemas.microsoft.com/office/drawing/2014/main" id="{E469473F-31A1-DA1A-1446-8C54C99F5645}"/>
+              </a:ext>
+            </a:extLst>
+          </p:cNvPr>
+          <p:cNvSpPr>
+            <a:spLocks noGrp="1"/>
+          </p:cNvSpPr>
+          <p:nvPr>
+            <p:ph type="body" sz="quarter" idx="14"/>
+          </p:nvPr>
+        </p:nvSpPr>
+        <p:spPr>
+          <a:xfrm>
+            <a:off x="4382294" y="1289050"/>
+            <a:ext cx="6911975" cy="1828800"/>
+          </a:xfrm>
+        </p:spPr>
+        <p:txBody>
+          <a:bodyPr/>
+          <a:lstStyle>
+            <a:lvl1pPr marL="0" indent="0">
+              <a:buNone/>
+              <a:defRPr/>
+            </a:lvl1pPr>
+          </a:lstStyle>
+          <a:p>
+            <a:pPr lvl="0"/>
+            <a:endParaRPr lang="en-DE" dirty="0"/>
+          </a:p>
+        </p:txBody>
+      </p:sp>
+      <p:sp>
+        <p:nvSpPr>
+          <p:cNvPr id="9" name="Text Placeholder 7">
+            <a:extLst>
+              <a:ext uri="{FF2B5EF4-FFF2-40B4-BE49-F238E27FC236}">
+                <a16:creationId xmlns:a16="http://schemas.microsoft.com/office/drawing/2014/main" id="{7D27FFAE-CDC4-C5E3-ACA9-B1B660F21931}"/>
+              </a:ext>
+            </a:extLst>
+          </p:cNvPr>
+          <p:cNvSpPr>
+            <a:spLocks noGrp="1"/>
+          </p:cNvSpPr>
+          <p:nvPr>
+            <p:ph type="body" sz="quarter" idx="15"/>
+          </p:nvPr>
+        </p:nvSpPr>
+        <p:spPr>
+          <a:xfrm>
+            <a:off x="4382293" y="3310572"/>
+            <a:ext cx="6911975" cy="1828800"/>
+          </a:xfrm>
+        </p:spPr>
+        <p:txBody>
+          <a:bodyPr/>
+          <a:lstStyle>
+            <a:lvl1pPr marL="0" indent="0">
+              <a:buNone/>
+              <a:defRPr/>
+            </a:lvl1pPr>
+          </a:lstStyle>
+          <a:p>
+            <a:pPr lvl="0"/>
+            <a:endParaRPr lang="en-DE" dirty="0"/>
+          </a:p>
+        </p:txBody>
+      </p:sp>
+      <p:sp>
+        <p:nvSpPr>
+          <p:cNvPr id="12" name="Text Placeholder 11">
+            <a:extLst>
+              <a:ext uri="{FF2B5EF4-FFF2-40B4-BE49-F238E27FC236}">
+                <a16:creationId xmlns:a16="http://schemas.microsoft.com/office/drawing/2014/main" id="{AB34C56E-9BDB-F5E2-1AD6-4C9ACB81D802}"/>
+              </a:ext>
+            </a:extLst>
+          </p:cNvPr>
+          <p:cNvSpPr>
+            <a:spLocks noGrp="1"/>
+          </p:cNvSpPr>
+          <p:nvPr>
+            <p:ph type="body" sz="quarter" idx="16"/>
+          </p:nvPr>
+        </p:nvSpPr>
+        <p:spPr>
+          <a:xfrm>
+            <a:off x="700759" y="6295340"/>
+            <a:ext cx="2302323" cy="408600"/>
+          </a:xfrm>
+        </p:spPr>
+        <p:txBody>
+          <a:bodyPr anchor="ctr">
+            <a:normAutofit/>
+          </a:bodyPr>
+          <a:lstStyle>
+            <a:lvl1pPr marL="0" indent="0">
+              <a:buNone/>
+              <a:defRPr sz="2000"/>
+            </a:lvl1pPr>
+          </a:lstStyle>
+          <a:p>
+            <a:pPr lvl="0"/>
+            <a:endParaRPr lang="en-DE" dirty="0"/>
+          </a:p>
+        </p:txBody>
+      </p:sp>
+      <p:sp>
+        <p:nvSpPr>
+          <p:cNvPr id="13" name="Text Placeholder 11">
+            <a:extLst>
+              <a:ext uri="{FF2B5EF4-FFF2-40B4-BE49-F238E27FC236}">
+                <a16:creationId xmlns:a16="http://schemas.microsoft.com/office/drawing/2014/main" id="{210C2267-198C-B65E-1588-1D8ADC032B0D}"/>
+              </a:ext>
+            </a:extLst>
+          </p:cNvPr>
+          <p:cNvSpPr>
+            <a:spLocks noGrp="1"/>
+          </p:cNvSpPr>
+          <p:nvPr>
+            <p:ph type="body" sz="quarter" idx="17"/>
+          </p:nvPr>
+        </p:nvSpPr>
+        <p:spPr>
+          <a:xfrm>
+            <a:off x="3540472" y="6295340"/>
+            <a:ext cx="2302323" cy="408600"/>
+          </a:xfrm>
+        </p:spPr>
+        <p:txBody>
+          <a:bodyPr anchor="ctr">
+            <a:normAutofit/>
+          </a:bodyPr>
+          <a:lstStyle>
+            <a:lvl1pPr marL="0" indent="0">
+              <a:buNone/>
+              <a:defRPr sz="2000"/>
+            </a:lvl1pPr>
+          </a:lstStyle>
+          <a:p>
+            <a:pPr lvl="0"/>
+            <a:endParaRPr lang="en-DE" dirty="0"/>
+          </a:p>
+        </p:txBody>
+      </p:sp>
+    </p:spTree>
+    <p:extLst>
+      <p:ext uri="{BB962C8B-B14F-4D97-AF65-F5344CB8AC3E}">
+        <p14:creationId xmlns:p14="http://schemas.microsoft.com/office/powerpoint/2010/main" val="1914357449"/>
+      </p:ext>
+    </p:extLst>
+  </p:cSld>
+  <p:clrMapOvr>
+    <a:masterClrMapping/>
+  </p:clrMapOvr>
+</p:sldLayout>
+</file>
+
+<file path=ppt/slideLayouts/slideLayout11.xml><?xml version="1.0" encoding="utf-8"?>
+<p:sldLayout xmlns:a="http://schemas.openxmlformats.org/drawingml/2006/main" xmlns:r="http://schemas.openxmlformats.org/officeDocument/2006/relationships" xmlns:p="http://schemas.openxmlformats.org/presentationml/2006/main" showMasterSp="0" matchingName="Acknowledgments (Email)" preserve="1" userDrawn="1">
+  <p:cSld name="1_Dark References">
+    <p:spTree>
+      <p:nvGrpSpPr>
+        <p:cNvPr id="1" name="Shape 54"/>
+        <p:cNvGrpSpPr/>
+        <p:nvPr/>
+      </p:nvGrpSpPr>
+      <p:grpSpPr>
+        <a:xfrm>
+          <a:off x="0" y="0"/>
+          <a:ext cx="0" cy="0"/>
+          <a:chOff x="0" y="0"/>
+          <a:chExt cx="0" cy="0"/>
+        </a:xfrm>
+      </p:grpSpPr>
+      <p:pic>
+        <p:nvPicPr>
+          <p:cNvPr id="10" name="Picture 9">
+            <a:extLst>
+              <a:ext uri="{FF2B5EF4-FFF2-40B4-BE49-F238E27FC236}">
+                <a16:creationId xmlns:a16="http://schemas.microsoft.com/office/drawing/2014/main" id="{579150A8-A6A7-D848-2DEF-2A552A77C406}"/>
               </a:ext>
             </a:extLst>
           </p:cNvPr>
@@ -776,21 +1806,22 @@
           </p:cNvPicPr>
           <p:nvPr userDrawn="1"/>
         </p:nvPicPr>
-        <p:blipFill rotWithShape="1">
-          <a:blip r:embed="rId3" cstate="print">
+        <p:blipFill>
+          <a:blip r:embed="rId2">
             <a:extLst>
               <a:ext uri="{28A0092B-C50C-407E-A947-70E740481C1C}">
                 <a14:useLocalDpi xmlns:a14="http://schemas.microsoft.com/office/drawing/2010/main" val="0"/>
               </a:ext>
             </a:extLst>
           </a:blip>
-          <a:srcRect l="21021" r="-224"/>
-          <a:stretch/>
+          <a:stretch>
+            <a:fillRect/>
+          </a:stretch>
         </p:blipFill>
         <p:spPr>
           <a:xfrm>
-            <a:off x="287847" y="4311065"/>
-            <a:ext cx="3428575" cy="862663"/>
+            <a:off x="0" y="0"/>
+            <a:ext cx="12192000" cy="6858000"/>
           </a:xfrm>
           <a:prstGeom prst="rect">
             <a:avLst/>
@@ -799,10 +1830,781 @@
       </p:pic>
       <p:sp>
         <p:nvSpPr>
+          <p:cNvPr id="55" name="Google Shape;55;p10"/>
+          <p:cNvSpPr txBox="1">
+            <a:spLocks noGrp="1"/>
+          </p:cNvSpPr>
+          <p:nvPr>
+            <p:ph type="sldNum" idx="12"/>
+          </p:nvPr>
+        </p:nvSpPr>
+        <p:spPr>
+          <a:xfrm>
+            <a:off x="6457950" y="4767263"/>
+            <a:ext cx="2057400" cy="274637"/>
+          </a:xfrm>
+          <a:prstGeom prst="rect">
+            <a:avLst/>
+          </a:prstGeom>
+          <a:noFill/>
+          <a:ln>
+            <a:noFill/>
+          </a:ln>
+        </p:spPr>
+        <p:txBody>
+          <a:bodyPr spcFirstLastPara="1" vert="horz" wrap="square" lIns="91440" tIns="45720" rIns="91440" bIns="45720" rtlCol="0" anchor="ctr" anchorCtr="0">
+            <a:noAutofit/>
+          </a:bodyPr>
+          <a:lstStyle>
+            <a:defPPr marR="0" lvl="0" algn="l" rtl="0">
+              <a:lnSpc>
+                <a:spcPct val="100000"/>
+              </a:lnSpc>
+              <a:spcBef>
+                <a:spcPts val="0"/>
+              </a:spcBef>
+              <a:spcAft>
+                <a:spcPts val="0"/>
+              </a:spcAft>
+            </a:defPPr>
+            <a:lvl1pPr marR="0" lvl="0" algn="r" rtl="0">
+              <a:lnSpc>
+                <a:spcPct val="100000"/>
+              </a:lnSpc>
+              <a:spcBef>
+                <a:spcPts val="0"/>
+              </a:spcBef>
+              <a:spcAft>
+                <a:spcPts val="0"/>
+              </a:spcAft>
+              <a:buClr>
+                <a:srgbClr val="000000"/>
+              </a:buClr>
+              <a:buFont typeface="Arial"/>
+              <a:defRPr sz="1200" b="0" i="0" u="none" strike="noStrike" cap="none">
+                <a:solidFill>
+                  <a:schemeClr val="tx1">
+                    <a:tint val="75000"/>
+                  </a:schemeClr>
+                </a:solidFill>
+                <a:latin typeface="Helvetica Light" panose="020B0403020202020204" pitchFamily="34" charset="0"/>
+                <a:ea typeface="Arial"/>
+                <a:cs typeface="Arial"/>
+                <a:sym typeface="Arial"/>
+              </a:defRPr>
+            </a:lvl1pPr>
+            <a:lvl2pPr marR="0" lvl="1" algn="l" rtl="0">
+              <a:lnSpc>
+                <a:spcPct val="100000"/>
+              </a:lnSpc>
+              <a:spcBef>
+                <a:spcPts val="0"/>
+              </a:spcBef>
+              <a:spcAft>
+                <a:spcPts val="0"/>
+              </a:spcAft>
+              <a:buClr>
+                <a:srgbClr val="000000"/>
+              </a:buClr>
+              <a:buFont typeface="Arial"/>
+              <a:defRPr sz="1400" b="0" i="0" u="none" strike="noStrike" cap="none">
+                <a:solidFill>
+                  <a:srgbClr val="000000"/>
+                </a:solidFill>
+                <a:latin typeface="Arial"/>
+                <a:ea typeface="Arial"/>
+                <a:cs typeface="Arial"/>
+                <a:sym typeface="Arial"/>
+              </a:defRPr>
+            </a:lvl2pPr>
+            <a:lvl3pPr marR="0" lvl="2" algn="l" rtl="0">
+              <a:lnSpc>
+                <a:spcPct val="100000"/>
+              </a:lnSpc>
+              <a:spcBef>
+                <a:spcPts val="0"/>
+              </a:spcBef>
+              <a:spcAft>
+                <a:spcPts val="0"/>
+              </a:spcAft>
+              <a:buClr>
+                <a:srgbClr val="000000"/>
+              </a:buClr>
+              <a:buFont typeface="Arial"/>
+              <a:defRPr sz="1400" b="0" i="0" u="none" strike="noStrike" cap="none">
+                <a:solidFill>
+                  <a:srgbClr val="000000"/>
+                </a:solidFill>
+                <a:latin typeface="Arial"/>
+                <a:ea typeface="Arial"/>
+                <a:cs typeface="Arial"/>
+                <a:sym typeface="Arial"/>
+              </a:defRPr>
+            </a:lvl3pPr>
+            <a:lvl4pPr marR="0" lvl="3" algn="l" rtl="0">
+              <a:lnSpc>
+                <a:spcPct val="100000"/>
+              </a:lnSpc>
+              <a:spcBef>
+                <a:spcPts val="0"/>
+              </a:spcBef>
+              <a:spcAft>
+                <a:spcPts val="0"/>
+              </a:spcAft>
+              <a:buClr>
+                <a:srgbClr val="000000"/>
+              </a:buClr>
+              <a:buFont typeface="Arial"/>
+              <a:defRPr sz="1400" b="0" i="0" u="none" strike="noStrike" cap="none">
+                <a:solidFill>
+                  <a:srgbClr val="000000"/>
+                </a:solidFill>
+                <a:latin typeface="Arial"/>
+                <a:ea typeface="Arial"/>
+                <a:cs typeface="Arial"/>
+                <a:sym typeface="Arial"/>
+              </a:defRPr>
+            </a:lvl4pPr>
+            <a:lvl5pPr marR="0" lvl="4" algn="l" rtl="0">
+              <a:lnSpc>
+                <a:spcPct val="100000"/>
+              </a:lnSpc>
+              <a:spcBef>
+                <a:spcPts val="0"/>
+              </a:spcBef>
+              <a:spcAft>
+                <a:spcPts val="0"/>
+              </a:spcAft>
+              <a:buClr>
+                <a:srgbClr val="000000"/>
+              </a:buClr>
+              <a:buFont typeface="Arial"/>
+              <a:defRPr sz="1400" b="0" i="0" u="none" strike="noStrike" cap="none">
+                <a:solidFill>
+                  <a:srgbClr val="000000"/>
+                </a:solidFill>
+                <a:latin typeface="Arial"/>
+                <a:ea typeface="Arial"/>
+                <a:cs typeface="Arial"/>
+                <a:sym typeface="Arial"/>
+              </a:defRPr>
+            </a:lvl5pPr>
+            <a:lvl6pPr marR="0" lvl="5" algn="l" rtl="0">
+              <a:lnSpc>
+                <a:spcPct val="100000"/>
+              </a:lnSpc>
+              <a:spcBef>
+                <a:spcPts val="0"/>
+              </a:spcBef>
+              <a:spcAft>
+                <a:spcPts val="0"/>
+              </a:spcAft>
+              <a:buClr>
+                <a:srgbClr val="000000"/>
+              </a:buClr>
+              <a:buFont typeface="Arial"/>
+              <a:defRPr sz="1400" b="0" i="0" u="none" strike="noStrike" cap="none">
+                <a:solidFill>
+                  <a:srgbClr val="000000"/>
+                </a:solidFill>
+                <a:latin typeface="Arial"/>
+                <a:ea typeface="Arial"/>
+                <a:cs typeface="Arial"/>
+                <a:sym typeface="Arial"/>
+              </a:defRPr>
+            </a:lvl6pPr>
+            <a:lvl7pPr marR="0" lvl="6" algn="l" rtl="0">
+              <a:lnSpc>
+                <a:spcPct val="100000"/>
+              </a:lnSpc>
+              <a:spcBef>
+                <a:spcPts val="0"/>
+              </a:spcBef>
+              <a:spcAft>
+                <a:spcPts val="0"/>
+              </a:spcAft>
+              <a:buClr>
+                <a:srgbClr val="000000"/>
+              </a:buClr>
+              <a:buFont typeface="Arial"/>
+              <a:defRPr sz="1400" b="0" i="0" u="none" strike="noStrike" cap="none">
+                <a:solidFill>
+                  <a:srgbClr val="000000"/>
+                </a:solidFill>
+                <a:latin typeface="Arial"/>
+                <a:ea typeface="Arial"/>
+                <a:cs typeface="Arial"/>
+                <a:sym typeface="Arial"/>
+              </a:defRPr>
+            </a:lvl7pPr>
+            <a:lvl8pPr marR="0" lvl="7" algn="l" rtl="0">
+              <a:lnSpc>
+                <a:spcPct val="100000"/>
+              </a:lnSpc>
+              <a:spcBef>
+                <a:spcPts val="0"/>
+              </a:spcBef>
+              <a:spcAft>
+                <a:spcPts val="0"/>
+              </a:spcAft>
+              <a:buClr>
+                <a:srgbClr val="000000"/>
+              </a:buClr>
+              <a:buFont typeface="Arial"/>
+              <a:defRPr sz="1400" b="0" i="0" u="none" strike="noStrike" cap="none">
+                <a:solidFill>
+                  <a:srgbClr val="000000"/>
+                </a:solidFill>
+                <a:latin typeface="Arial"/>
+                <a:ea typeface="Arial"/>
+                <a:cs typeface="Arial"/>
+                <a:sym typeface="Arial"/>
+              </a:defRPr>
+            </a:lvl8pPr>
+            <a:lvl9pPr marR="0" lvl="8" algn="l" rtl="0">
+              <a:lnSpc>
+                <a:spcPct val="100000"/>
+              </a:lnSpc>
+              <a:spcBef>
+                <a:spcPts val="0"/>
+              </a:spcBef>
+              <a:spcAft>
+                <a:spcPts val="0"/>
+              </a:spcAft>
+              <a:buClr>
+                <a:srgbClr val="000000"/>
+              </a:buClr>
+              <a:buFont typeface="Arial"/>
+              <a:defRPr sz="1400" b="0" i="0" u="none" strike="noStrike" cap="none">
+                <a:solidFill>
+                  <a:srgbClr val="000000"/>
+                </a:solidFill>
+                <a:latin typeface="Arial"/>
+                <a:ea typeface="Arial"/>
+                <a:cs typeface="Arial"/>
+                <a:sym typeface="Arial"/>
+              </a:defRPr>
+            </a:lvl9pPr>
+          </a:lstStyle>
+          <a:p>
+            <a:fld id="{3BF01AD4-1839-794E-BD90-91AB590172A7}" type="slidenum">
+              <a:rPr lang="en-DE" smtClean="0"/>
+              <a:pPr/>
+              <a:t>‹#›</a:t>
+            </a:fld>
+            <a:endParaRPr lang="en"/>
+          </a:p>
+        </p:txBody>
+      </p:sp>
+      <p:cxnSp>
+        <p:nvCxnSpPr>
+          <p:cNvPr id="57" name="Google Shape;57;p10"/>
+          <p:cNvCxnSpPr/>
+          <p:nvPr/>
+        </p:nvCxnSpPr>
+        <p:spPr>
+          <a:xfrm>
+            <a:off x="3716421" y="2608481"/>
+            <a:ext cx="0" cy="1600400"/>
+          </a:xfrm>
+          <a:prstGeom prst="straightConnector1">
+            <a:avLst/>
+          </a:prstGeom>
+          <a:noFill/>
+          <a:ln w="19050" cap="flat" cmpd="sng">
+            <a:solidFill>
+              <a:schemeClr val="lt1"/>
+            </a:solidFill>
+            <a:prstDash val="solid"/>
+            <a:miter lim="800000"/>
+            <a:headEnd type="none" w="sm" len="sm"/>
+            <a:tailEnd type="none" w="sm" len="sm"/>
+          </a:ln>
+        </p:spPr>
+      </p:cxnSp>
+      <p:sp>
+        <p:nvSpPr>
+          <p:cNvPr id="60" name="Google Shape;60;p10"/>
+          <p:cNvSpPr txBox="1">
+            <a:spLocks noGrp="1"/>
+          </p:cNvSpPr>
+          <p:nvPr>
+            <p:ph type="sldNum" idx="2"/>
+          </p:nvPr>
+        </p:nvSpPr>
+        <p:spPr>
+          <a:xfrm>
+            <a:off x="6457950" y="4767263"/>
+            <a:ext cx="2057400" cy="274637"/>
+          </a:xfrm>
+          <a:prstGeom prst="rect">
+            <a:avLst/>
+          </a:prstGeom>
+          <a:noFill/>
+          <a:ln>
+            <a:noFill/>
+          </a:ln>
+        </p:spPr>
+        <p:txBody>
+          <a:bodyPr spcFirstLastPara="1" vert="horz" wrap="square" lIns="91440" tIns="45720" rIns="91440" bIns="45720" rtlCol="0" anchor="ctr" anchorCtr="0">
+            <a:noAutofit/>
+          </a:bodyPr>
+          <a:lstStyle>
+            <a:defPPr marR="0" lvl="0" algn="l" rtl="0">
+              <a:lnSpc>
+                <a:spcPct val="100000"/>
+              </a:lnSpc>
+              <a:spcBef>
+                <a:spcPts val="0"/>
+              </a:spcBef>
+              <a:spcAft>
+                <a:spcPts val="0"/>
+              </a:spcAft>
+            </a:defPPr>
+            <a:lvl1pPr marR="0" lvl="0" algn="r" rtl="0">
+              <a:lnSpc>
+                <a:spcPct val="100000"/>
+              </a:lnSpc>
+              <a:spcBef>
+                <a:spcPts val="0"/>
+              </a:spcBef>
+              <a:spcAft>
+                <a:spcPts val="0"/>
+              </a:spcAft>
+              <a:buClr>
+                <a:srgbClr val="000000"/>
+              </a:buClr>
+              <a:buFont typeface="Arial"/>
+              <a:defRPr sz="1200" b="0" i="0" u="none" strike="noStrike" cap="none">
+                <a:solidFill>
+                  <a:schemeClr val="tx1">
+                    <a:tint val="75000"/>
+                  </a:schemeClr>
+                </a:solidFill>
+                <a:latin typeface="Helvetica Light" panose="020B0403020202020204" pitchFamily="34" charset="0"/>
+                <a:ea typeface="Arial"/>
+                <a:cs typeface="Arial"/>
+                <a:sym typeface="Arial"/>
+              </a:defRPr>
+            </a:lvl1pPr>
+            <a:lvl2pPr marR="0" lvl="1" algn="l" rtl="0">
+              <a:lnSpc>
+                <a:spcPct val="100000"/>
+              </a:lnSpc>
+              <a:spcBef>
+                <a:spcPts val="0"/>
+              </a:spcBef>
+              <a:spcAft>
+                <a:spcPts val="0"/>
+              </a:spcAft>
+              <a:buClr>
+                <a:srgbClr val="000000"/>
+              </a:buClr>
+              <a:buFont typeface="Arial"/>
+              <a:defRPr sz="1400" b="0" i="0" u="none" strike="noStrike" cap="none">
+                <a:solidFill>
+                  <a:srgbClr val="000000"/>
+                </a:solidFill>
+                <a:latin typeface="Arial"/>
+                <a:ea typeface="Arial"/>
+                <a:cs typeface="Arial"/>
+                <a:sym typeface="Arial"/>
+              </a:defRPr>
+            </a:lvl2pPr>
+            <a:lvl3pPr marR="0" lvl="2" algn="l" rtl="0">
+              <a:lnSpc>
+                <a:spcPct val="100000"/>
+              </a:lnSpc>
+              <a:spcBef>
+                <a:spcPts val="0"/>
+              </a:spcBef>
+              <a:spcAft>
+                <a:spcPts val="0"/>
+              </a:spcAft>
+              <a:buClr>
+                <a:srgbClr val="000000"/>
+              </a:buClr>
+              <a:buFont typeface="Arial"/>
+              <a:defRPr sz="1400" b="0" i="0" u="none" strike="noStrike" cap="none">
+                <a:solidFill>
+                  <a:srgbClr val="000000"/>
+                </a:solidFill>
+                <a:latin typeface="Arial"/>
+                <a:ea typeface="Arial"/>
+                <a:cs typeface="Arial"/>
+                <a:sym typeface="Arial"/>
+              </a:defRPr>
+            </a:lvl3pPr>
+            <a:lvl4pPr marR="0" lvl="3" algn="l" rtl="0">
+              <a:lnSpc>
+                <a:spcPct val="100000"/>
+              </a:lnSpc>
+              <a:spcBef>
+                <a:spcPts val="0"/>
+              </a:spcBef>
+              <a:spcAft>
+                <a:spcPts val="0"/>
+              </a:spcAft>
+              <a:buClr>
+                <a:srgbClr val="000000"/>
+              </a:buClr>
+              <a:buFont typeface="Arial"/>
+              <a:defRPr sz="1400" b="0" i="0" u="none" strike="noStrike" cap="none">
+                <a:solidFill>
+                  <a:srgbClr val="000000"/>
+                </a:solidFill>
+                <a:latin typeface="Arial"/>
+                <a:ea typeface="Arial"/>
+                <a:cs typeface="Arial"/>
+                <a:sym typeface="Arial"/>
+              </a:defRPr>
+            </a:lvl4pPr>
+            <a:lvl5pPr marR="0" lvl="4" algn="l" rtl="0">
+              <a:lnSpc>
+                <a:spcPct val="100000"/>
+              </a:lnSpc>
+              <a:spcBef>
+                <a:spcPts val="0"/>
+              </a:spcBef>
+              <a:spcAft>
+                <a:spcPts val="0"/>
+              </a:spcAft>
+              <a:buClr>
+                <a:srgbClr val="000000"/>
+              </a:buClr>
+              <a:buFont typeface="Arial"/>
+              <a:defRPr sz="1400" b="0" i="0" u="none" strike="noStrike" cap="none">
+                <a:solidFill>
+                  <a:srgbClr val="000000"/>
+                </a:solidFill>
+                <a:latin typeface="Arial"/>
+                <a:ea typeface="Arial"/>
+                <a:cs typeface="Arial"/>
+                <a:sym typeface="Arial"/>
+              </a:defRPr>
+            </a:lvl5pPr>
+            <a:lvl6pPr marR="0" lvl="5" algn="l" rtl="0">
+              <a:lnSpc>
+                <a:spcPct val="100000"/>
+              </a:lnSpc>
+              <a:spcBef>
+                <a:spcPts val="0"/>
+              </a:spcBef>
+              <a:spcAft>
+                <a:spcPts val="0"/>
+              </a:spcAft>
+              <a:buClr>
+                <a:srgbClr val="000000"/>
+              </a:buClr>
+              <a:buFont typeface="Arial"/>
+              <a:defRPr sz="1400" b="0" i="0" u="none" strike="noStrike" cap="none">
+                <a:solidFill>
+                  <a:srgbClr val="000000"/>
+                </a:solidFill>
+                <a:latin typeface="Arial"/>
+                <a:ea typeface="Arial"/>
+                <a:cs typeface="Arial"/>
+                <a:sym typeface="Arial"/>
+              </a:defRPr>
+            </a:lvl6pPr>
+            <a:lvl7pPr marR="0" lvl="6" algn="l" rtl="0">
+              <a:lnSpc>
+                <a:spcPct val="100000"/>
+              </a:lnSpc>
+              <a:spcBef>
+                <a:spcPts val="0"/>
+              </a:spcBef>
+              <a:spcAft>
+                <a:spcPts val="0"/>
+              </a:spcAft>
+              <a:buClr>
+                <a:srgbClr val="000000"/>
+              </a:buClr>
+              <a:buFont typeface="Arial"/>
+              <a:defRPr sz="1400" b="0" i="0" u="none" strike="noStrike" cap="none">
+                <a:solidFill>
+                  <a:srgbClr val="000000"/>
+                </a:solidFill>
+                <a:latin typeface="Arial"/>
+                <a:ea typeface="Arial"/>
+                <a:cs typeface="Arial"/>
+                <a:sym typeface="Arial"/>
+              </a:defRPr>
+            </a:lvl7pPr>
+            <a:lvl8pPr marR="0" lvl="7" algn="l" rtl="0">
+              <a:lnSpc>
+                <a:spcPct val="100000"/>
+              </a:lnSpc>
+              <a:spcBef>
+                <a:spcPts val="0"/>
+              </a:spcBef>
+              <a:spcAft>
+                <a:spcPts val="0"/>
+              </a:spcAft>
+              <a:buClr>
+                <a:srgbClr val="000000"/>
+              </a:buClr>
+              <a:buFont typeface="Arial"/>
+              <a:defRPr sz="1400" b="0" i="0" u="none" strike="noStrike" cap="none">
+                <a:solidFill>
+                  <a:srgbClr val="000000"/>
+                </a:solidFill>
+                <a:latin typeface="Arial"/>
+                <a:ea typeface="Arial"/>
+                <a:cs typeface="Arial"/>
+                <a:sym typeface="Arial"/>
+              </a:defRPr>
+            </a:lvl8pPr>
+            <a:lvl9pPr marR="0" lvl="8" algn="l" rtl="0">
+              <a:lnSpc>
+                <a:spcPct val="100000"/>
+              </a:lnSpc>
+              <a:spcBef>
+                <a:spcPts val="0"/>
+              </a:spcBef>
+              <a:spcAft>
+                <a:spcPts val="0"/>
+              </a:spcAft>
+              <a:buClr>
+                <a:srgbClr val="000000"/>
+              </a:buClr>
+              <a:buFont typeface="Arial"/>
+              <a:defRPr sz="1400" b="0" i="0" u="none" strike="noStrike" cap="none">
+                <a:solidFill>
+                  <a:srgbClr val="000000"/>
+                </a:solidFill>
+                <a:latin typeface="Arial"/>
+                <a:ea typeface="Arial"/>
+                <a:cs typeface="Arial"/>
+                <a:sym typeface="Arial"/>
+              </a:defRPr>
+            </a:lvl9pPr>
+          </a:lstStyle>
+          <a:p>
+            <a:fld id="{3BF01AD4-1839-794E-BD90-91AB590172A7}" type="slidenum">
+              <a:rPr lang="en-DE" smtClean="0"/>
+              <a:pPr/>
+              <a:t>‹#›</a:t>
+            </a:fld>
+            <a:endParaRPr lang="en"/>
+          </a:p>
+        </p:txBody>
+      </p:sp>
+      <p:pic>
+        <p:nvPicPr>
+          <p:cNvPr id="64" name="Google Shape;64;p10"/>
+          <p:cNvPicPr preferRelativeResize="0"/>
+          <p:nvPr/>
+        </p:nvPicPr>
+        <p:blipFill>
+          <a:blip r:embed="rId3">
+            <a:extLst>
+              <a:ext uri="{28A0092B-C50C-407E-A947-70E740481C1C}">
+                <a14:useLocalDpi xmlns:a14="http://schemas.microsoft.com/office/drawing/2010/main" val="0"/>
+              </a:ext>
+              <a:ext uri="{96DAC541-7B7A-43D3-8B79-37D633B846F1}">
+                <asvg:svgBlip xmlns:asvg="http://schemas.microsoft.com/office/drawing/2016/SVG/main" r:embed="rId4"/>
+              </a:ext>
+            </a:extLst>
+          </a:blip>
+          <a:srcRect/>
+          <a:stretch/>
+        </p:blipFill>
+        <p:spPr>
+          <a:xfrm>
+            <a:off x="152659" y="6282751"/>
+            <a:ext cx="414528" cy="414528"/>
+          </a:xfrm>
+          <a:prstGeom prst="rect">
+            <a:avLst/>
+          </a:prstGeom>
+          <a:noFill/>
+          <a:ln>
+            <a:noFill/>
+          </a:ln>
+        </p:spPr>
+      </p:pic>
+      <p:sp>
+        <p:nvSpPr>
+          <p:cNvPr id="6" name="Picture Placeholder 5">
+            <a:extLst>
+              <a:ext uri="{FF2B5EF4-FFF2-40B4-BE49-F238E27FC236}">
+                <a16:creationId xmlns:a16="http://schemas.microsoft.com/office/drawing/2014/main" id="{2631C45D-A4AF-1223-E180-EB9E96FA2AE4}"/>
+              </a:ext>
+            </a:extLst>
+          </p:cNvPr>
+          <p:cNvSpPr>
+            <a:spLocks noGrp="1"/>
+          </p:cNvSpPr>
+          <p:nvPr>
+            <p:ph type="pic" sz="quarter" idx="13"/>
+          </p:nvPr>
+        </p:nvSpPr>
+        <p:spPr>
+          <a:xfrm>
+            <a:off x="277813" y="1289050"/>
+            <a:ext cx="3206750" cy="4024313"/>
+          </a:xfrm>
+        </p:spPr>
+        <p:txBody>
+          <a:bodyPr/>
+          <a:lstStyle>
+            <a:lvl1pPr marL="0" indent="0">
+              <a:buNone/>
+              <a:defRPr/>
+            </a:lvl1pPr>
+          </a:lstStyle>
+          <a:p>
+            <a:endParaRPr lang="en-DE" dirty="0"/>
+          </a:p>
+        </p:txBody>
+      </p:sp>
+      <p:sp>
+        <p:nvSpPr>
+          <p:cNvPr id="8" name="Text Placeholder 7">
+            <a:extLst>
+              <a:ext uri="{FF2B5EF4-FFF2-40B4-BE49-F238E27FC236}">
+                <a16:creationId xmlns:a16="http://schemas.microsoft.com/office/drawing/2014/main" id="{E469473F-31A1-DA1A-1446-8C54C99F5645}"/>
+              </a:ext>
+            </a:extLst>
+          </p:cNvPr>
+          <p:cNvSpPr>
+            <a:spLocks noGrp="1"/>
+          </p:cNvSpPr>
+          <p:nvPr>
+            <p:ph type="body" sz="quarter" idx="14"/>
+          </p:nvPr>
+        </p:nvSpPr>
+        <p:spPr>
+          <a:xfrm>
+            <a:off x="4382294" y="1289050"/>
+            <a:ext cx="6911975" cy="1828800"/>
+          </a:xfrm>
+        </p:spPr>
+        <p:txBody>
+          <a:bodyPr/>
+          <a:lstStyle>
+            <a:lvl1pPr marL="0" indent="0">
+              <a:buNone/>
+              <a:defRPr/>
+            </a:lvl1pPr>
+          </a:lstStyle>
+          <a:p>
+            <a:pPr lvl="0"/>
+            <a:endParaRPr lang="en-DE" dirty="0"/>
+          </a:p>
+        </p:txBody>
+      </p:sp>
+      <p:sp>
+        <p:nvSpPr>
+          <p:cNvPr id="9" name="Text Placeholder 7">
+            <a:extLst>
+              <a:ext uri="{FF2B5EF4-FFF2-40B4-BE49-F238E27FC236}">
+                <a16:creationId xmlns:a16="http://schemas.microsoft.com/office/drawing/2014/main" id="{7D27FFAE-CDC4-C5E3-ACA9-B1B660F21931}"/>
+              </a:ext>
+            </a:extLst>
+          </p:cNvPr>
+          <p:cNvSpPr>
+            <a:spLocks noGrp="1"/>
+          </p:cNvSpPr>
+          <p:nvPr>
+            <p:ph type="body" sz="quarter" idx="15"/>
+          </p:nvPr>
+        </p:nvSpPr>
+        <p:spPr>
+          <a:xfrm>
+            <a:off x="4382293" y="3310572"/>
+            <a:ext cx="6911975" cy="1828800"/>
+          </a:xfrm>
+        </p:spPr>
+        <p:txBody>
+          <a:bodyPr/>
+          <a:lstStyle>
+            <a:lvl1pPr marL="0" indent="0">
+              <a:buNone/>
+              <a:defRPr/>
+            </a:lvl1pPr>
+          </a:lstStyle>
+          <a:p>
+            <a:pPr lvl="0"/>
+            <a:endParaRPr lang="en-DE" dirty="0"/>
+          </a:p>
+        </p:txBody>
+      </p:sp>
+      <p:sp>
+        <p:nvSpPr>
+          <p:cNvPr id="12" name="Text Placeholder 11">
+            <a:extLst>
+              <a:ext uri="{FF2B5EF4-FFF2-40B4-BE49-F238E27FC236}">
+                <a16:creationId xmlns:a16="http://schemas.microsoft.com/office/drawing/2014/main" id="{AB34C56E-9BDB-F5E2-1AD6-4C9ACB81D802}"/>
+              </a:ext>
+            </a:extLst>
+          </p:cNvPr>
+          <p:cNvSpPr>
+            <a:spLocks noGrp="1"/>
+          </p:cNvSpPr>
+          <p:nvPr>
+            <p:ph type="body" sz="quarter" idx="16"/>
+          </p:nvPr>
+        </p:nvSpPr>
+        <p:spPr>
+          <a:xfrm>
+            <a:off x="700759" y="6295340"/>
+            <a:ext cx="2302323" cy="408600"/>
+          </a:xfrm>
+        </p:spPr>
+        <p:txBody>
+          <a:bodyPr anchor="ctr">
+            <a:normAutofit/>
+          </a:bodyPr>
+          <a:lstStyle>
+            <a:lvl1pPr marL="0" indent="0">
+              <a:buNone/>
+              <a:defRPr sz="2000"/>
+            </a:lvl1pPr>
+          </a:lstStyle>
+          <a:p>
+            <a:pPr lvl="0"/>
+            <a:endParaRPr lang="en-DE" dirty="0"/>
+          </a:p>
+        </p:txBody>
+      </p:sp>
+    </p:spTree>
+    <p:extLst>
+      <p:ext uri="{BB962C8B-B14F-4D97-AF65-F5344CB8AC3E}">
+        <p14:creationId xmlns:p14="http://schemas.microsoft.com/office/powerpoint/2010/main" val="3658211383"/>
+      </p:ext>
+    </p:extLst>
+  </p:cSld>
+  <p:clrMapOvr>
+    <a:masterClrMapping/>
+  </p:clrMapOvr>
+</p:sldLayout>
+</file>
+
+<file path=ppt/slideLayouts/slideLayout12.xml><?xml version="1.0" encoding="utf-8"?>
+<p:sldLayout xmlns:a="http://schemas.openxmlformats.org/drawingml/2006/main" xmlns:r="http://schemas.openxmlformats.org/officeDocument/2006/relationships" xmlns:p="http://schemas.openxmlformats.org/presentationml/2006/main" preserve="1" userDrawn="1">
+  <p:cSld name="Title slide">
+    <p:spTree>
+      <p:nvGrpSpPr>
+        <p:cNvPr id="1" name=""/>
+        <p:cNvGrpSpPr/>
+        <p:nvPr/>
+      </p:nvGrpSpPr>
+      <p:grpSpPr>
+        <a:xfrm>
+          <a:off x="0" y="0"/>
+          <a:ext cx="0" cy="0"/>
+          <a:chOff x="0" y="0"/>
+          <a:chExt cx="0" cy="0"/>
+        </a:xfrm>
+      </p:grpSpPr>
+      <p:sp>
+        <p:nvSpPr>
           <p:cNvPr id="3" name="Subtitle 2">
             <a:extLst>
               <a:ext uri="{FF2B5EF4-FFF2-40B4-BE49-F238E27FC236}">
-                <a16:creationId xmlns:a16="http://schemas.microsoft.com/office/drawing/2014/main" id="{1F06C64B-0747-1E3C-2F6F-023166FCC9D7}"/>
+                <a16:creationId xmlns:a16="http://schemas.microsoft.com/office/drawing/2014/main" id="{582DEE7C-AF0C-A94C-0089-53BA99335C72}"/>
               </a:ext>
             </a:extLst>
           </p:cNvPr>
@@ -815,8 +2617,8 @@
         </p:nvSpPr>
         <p:spPr>
           <a:xfrm>
-            <a:off x="4003842" y="2772613"/>
-            <a:ext cx="8031731" cy="1374157"/>
+            <a:off x="156000" y="3243098"/>
+            <a:ext cx="11880000" cy="1538452"/>
           </a:xfrm>
         </p:spPr>
         <p:txBody>
@@ -876,10 +2678,10 @@
       </p:sp>
       <p:sp>
         <p:nvSpPr>
-          <p:cNvPr id="5" name="Title 11">
-            <a:extLst>
-              <a:ext uri="{FF2B5EF4-FFF2-40B4-BE49-F238E27FC236}">
-                <a16:creationId xmlns:a16="http://schemas.microsoft.com/office/drawing/2014/main" id="{C1C11967-B9EF-8DFC-1D07-D3C98B4BC9A6}"/>
+          <p:cNvPr id="12" name="Title 11">
+            <a:extLst>
+              <a:ext uri="{FF2B5EF4-FFF2-40B4-BE49-F238E27FC236}">
+                <a16:creationId xmlns:a16="http://schemas.microsoft.com/office/drawing/2014/main" id="{928B059B-334C-45D2-2325-10DA6A37B897}"/>
               </a:ext>
             </a:extLst>
           </p:cNvPr>
@@ -892,8 +2694,8 @@
         </p:nvSpPr>
         <p:spPr>
           <a:xfrm>
-            <a:off x="4004268" y="1519073"/>
-            <a:ext cx="8031731" cy="1108624"/>
+            <a:off x="156000" y="1519073"/>
+            <a:ext cx="11880000" cy="1443202"/>
           </a:xfrm>
         </p:spPr>
         <p:txBody>
@@ -904,7 +2706,7 @@
             <a:lvl1pPr>
               <a:defRPr sz="3600">
                 <a:solidFill>
-                  <a:srgbClr val="FFFFFF"/>
+                  <a:srgbClr val="0E2D38"/>
                 </a:solidFill>
               </a:defRPr>
             </a:lvl1pPr>
@@ -920,10 +2722,10 @@
       </p:sp>
       <p:sp>
         <p:nvSpPr>
-          <p:cNvPr id="7" name="Content Placeholder 3">
-            <a:extLst>
-              <a:ext uri="{FF2B5EF4-FFF2-40B4-BE49-F238E27FC236}">
-                <a16:creationId xmlns:a16="http://schemas.microsoft.com/office/drawing/2014/main" id="{87A97C8E-5DDF-1A84-41CE-EAEE753B7FF2}"/>
+          <p:cNvPr id="4" name="Content Placeholder 3">
+            <a:extLst>
+              <a:ext uri="{FF2B5EF4-FFF2-40B4-BE49-F238E27FC236}">
+                <a16:creationId xmlns:a16="http://schemas.microsoft.com/office/drawing/2014/main" id="{697BC65F-206A-0B48-AF56-FE3AA1676AEE}"/>
               </a:ext>
             </a:extLst>
           </p:cNvPr>
@@ -936,8 +2738,8 @@
         </p:nvSpPr>
         <p:spPr>
           <a:xfrm>
-            <a:off x="4003843" y="4455981"/>
-            <a:ext cx="8031730" cy="753083"/>
+            <a:off x="155574" y="4945063"/>
+            <a:ext cx="11879999" cy="1026367"/>
           </a:xfrm>
         </p:spPr>
         <p:txBody>
@@ -966,46 +2768,10 @@
           </a:p>
         </p:txBody>
       </p:sp>
-      <p:pic>
-        <p:nvPicPr>
-          <p:cNvPr id="11" name="Picture 10">
-            <a:extLst>
-              <a:ext uri="{FF2B5EF4-FFF2-40B4-BE49-F238E27FC236}">
-                <a16:creationId xmlns:a16="http://schemas.microsoft.com/office/drawing/2014/main" id="{283C8477-FEFA-99DC-C8C9-EC963E0CA7B6}"/>
-              </a:ext>
-            </a:extLst>
-          </p:cNvPr>
-          <p:cNvPicPr>
-            <a:picLocks noChangeAspect="1"/>
-          </p:cNvPicPr>
-          <p:nvPr userDrawn="1"/>
-        </p:nvPicPr>
-        <p:blipFill>
-          <a:blip r:embed="rId4">
-            <a:extLst>
-              <a:ext uri="{28A0092B-C50C-407E-A947-70E740481C1C}">
-                <a14:useLocalDpi xmlns:a14="http://schemas.microsoft.com/office/drawing/2010/main" val="0"/>
-              </a:ext>
-            </a:extLst>
-          </a:blip>
-          <a:stretch>
-            <a:fillRect/>
-          </a:stretch>
-        </p:blipFill>
-        <p:spPr>
-          <a:xfrm>
-            <a:off x="1135087" y="2240674"/>
-            <a:ext cx="1734093" cy="1734093"/>
-          </a:xfrm>
-          <a:prstGeom prst="rect">
-            <a:avLst/>
-          </a:prstGeom>
-        </p:spPr>
-      </p:pic>
     </p:spTree>
     <p:extLst>
       <p:ext uri="{BB962C8B-B14F-4D97-AF65-F5344CB8AC3E}">
-        <p14:creationId xmlns:p14="http://schemas.microsoft.com/office/powerpoint/2010/main" val="920521592"/>
+        <p14:creationId xmlns:p14="http://schemas.microsoft.com/office/powerpoint/2010/main" val="4061247862"/>
       </p:ext>
     </p:extLst>
   </p:cSld>
@@ -1015,1694 +2781,8 @@
 </p:sldLayout>
 </file>
 
-<file path=ppt/slideLayouts/slideLayout10.xml><?xml version="1.0" encoding="utf-8"?>
-<p:sldLayout xmlns:a="http://schemas.openxmlformats.org/drawingml/2006/main" xmlns:r="http://schemas.openxmlformats.org/officeDocument/2006/relationships" xmlns:p="http://schemas.openxmlformats.org/presentationml/2006/main" showMasterSp="0" matchingName="Dark References" preserve="1" userDrawn="1">
-  <p:cSld name="1_Dark References">
-    <p:spTree>
-      <p:nvGrpSpPr>
-        <p:cNvPr id="1" name="Shape 54"/>
-        <p:cNvGrpSpPr/>
-        <p:nvPr/>
-      </p:nvGrpSpPr>
-      <p:grpSpPr>
-        <a:xfrm>
-          <a:off x="0" y="0"/>
-          <a:ext cx="0" cy="0"/>
-          <a:chOff x="0" y="0"/>
-          <a:chExt cx="0" cy="0"/>
-        </a:xfrm>
-      </p:grpSpPr>
-      <p:pic>
-        <p:nvPicPr>
-          <p:cNvPr id="10" name="Picture 9">
-            <a:extLst>
-              <a:ext uri="{FF2B5EF4-FFF2-40B4-BE49-F238E27FC236}">
-                <a16:creationId xmlns:a16="http://schemas.microsoft.com/office/drawing/2014/main" id="{579150A8-A6A7-D848-2DEF-2A552A77C406}"/>
-              </a:ext>
-            </a:extLst>
-          </p:cNvPr>
-          <p:cNvPicPr>
-            <a:picLocks noChangeAspect="1"/>
-          </p:cNvPicPr>
-          <p:nvPr userDrawn="1"/>
-        </p:nvPicPr>
-        <p:blipFill>
-          <a:blip r:embed="rId2">
-            <a:extLst>
-              <a:ext uri="{28A0092B-C50C-407E-A947-70E740481C1C}">
-                <a14:useLocalDpi xmlns:a14="http://schemas.microsoft.com/office/drawing/2010/main" val="0"/>
-              </a:ext>
-            </a:extLst>
-          </a:blip>
-          <a:stretch>
-            <a:fillRect/>
-          </a:stretch>
-        </p:blipFill>
-        <p:spPr>
-          <a:xfrm>
-            <a:off x="0" y="0"/>
-            <a:ext cx="12192000" cy="6858000"/>
-          </a:xfrm>
-          <a:prstGeom prst="rect">
-            <a:avLst/>
-          </a:prstGeom>
-        </p:spPr>
-      </p:pic>
-      <p:sp>
-        <p:nvSpPr>
-          <p:cNvPr id="55" name="Google Shape;55;p10"/>
-          <p:cNvSpPr txBox="1">
-            <a:spLocks noGrp="1"/>
-          </p:cNvSpPr>
-          <p:nvPr>
-            <p:ph type="sldNum" idx="12"/>
-          </p:nvPr>
-        </p:nvSpPr>
-        <p:spPr>
-          <a:xfrm>
-            <a:off x="6457950" y="4767263"/>
-            <a:ext cx="2057400" cy="274637"/>
-          </a:xfrm>
-          <a:prstGeom prst="rect">
-            <a:avLst/>
-          </a:prstGeom>
-          <a:noFill/>
-          <a:ln>
-            <a:noFill/>
-          </a:ln>
-        </p:spPr>
-        <p:txBody>
-          <a:bodyPr spcFirstLastPara="1" vert="horz" wrap="square" lIns="91440" tIns="45720" rIns="91440" bIns="45720" rtlCol="0" anchor="ctr" anchorCtr="0">
-            <a:noAutofit/>
-          </a:bodyPr>
-          <a:lstStyle>
-            <a:defPPr marR="0" lvl="0" algn="l" rtl="0">
-              <a:lnSpc>
-                <a:spcPct val="100000"/>
-              </a:lnSpc>
-              <a:spcBef>
-                <a:spcPts val="0"/>
-              </a:spcBef>
-              <a:spcAft>
-                <a:spcPts val="0"/>
-              </a:spcAft>
-            </a:defPPr>
-            <a:lvl1pPr marR="0" lvl="0" algn="r" rtl="0">
-              <a:lnSpc>
-                <a:spcPct val="100000"/>
-              </a:lnSpc>
-              <a:spcBef>
-                <a:spcPts val="0"/>
-              </a:spcBef>
-              <a:spcAft>
-                <a:spcPts val="0"/>
-              </a:spcAft>
-              <a:buClr>
-                <a:srgbClr val="000000"/>
-              </a:buClr>
-              <a:buFont typeface="Arial"/>
-              <a:defRPr sz="1200" b="0" i="0" u="none" strike="noStrike" cap="none">
-                <a:solidFill>
-                  <a:schemeClr val="tx1">
-                    <a:tint val="75000"/>
-                  </a:schemeClr>
-                </a:solidFill>
-                <a:latin typeface="Helvetica Light" panose="020B0403020202020204" pitchFamily="34" charset="0"/>
-                <a:ea typeface="Arial"/>
-                <a:cs typeface="Arial"/>
-                <a:sym typeface="Arial"/>
-              </a:defRPr>
-            </a:lvl1pPr>
-            <a:lvl2pPr marR="0" lvl="1" algn="l" rtl="0">
-              <a:lnSpc>
-                <a:spcPct val="100000"/>
-              </a:lnSpc>
-              <a:spcBef>
-                <a:spcPts val="0"/>
-              </a:spcBef>
-              <a:spcAft>
-                <a:spcPts val="0"/>
-              </a:spcAft>
-              <a:buClr>
-                <a:srgbClr val="000000"/>
-              </a:buClr>
-              <a:buFont typeface="Arial"/>
-              <a:defRPr sz="1400" b="0" i="0" u="none" strike="noStrike" cap="none">
-                <a:solidFill>
-                  <a:srgbClr val="000000"/>
-                </a:solidFill>
-                <a:latin typeface="Arial"/>
-                <a:ea typeface="Arial"/>
-                <a:cs typeface="Arial"/>
-                <a:sym typeface="Arial"/>
-              </a:defRPr>
-            </a:lvl2pPr>
-            <a:lvl3pPr marR="0" lvl="2" algn="l" rtl="0">
-              <a:lnSpc>
-                <a:spcPct val="100000"/>
-              </a:lnSpc>
-              <a:spcBef>
-                <a:spcPts val="0"/>
-              </a:spcBef>
-              <a:spcAft>
-                <a:spcPts val="0"/>
-              </a:spcAft>
-              <a:buClr>
-                <a:srgbClr val="000000"/>
-              </a:buClr>
-              <a:buFont typeface="Arial"/>
-              <a:defRPr sz="1400" b="0" i="0" u="none" strike="noStrike" cap="none">
-                <a:solidFill>
-                  <a:srgbClr val="000000"/>
-                </a:solidFill>
-                <a:latin typeface="Arial"/>
-                <a:ea typeface="Arial"/>
-                <a:cs typeface="Arial"/>
-                <a:sym typeface="Arial"/>
-              </a:defRPr>
-            </a:lvl3pPr>
-            <a:lvl4pPr marR="0" lvl="3" algn="l" rtl="0">
-              <a:lnSpc>
-                <a:spcPct val="100000"/>
-              </a:lnSpc>
-              <a:spcBef>
-                <a:spcPts val="0"/>
-              </a:spcBef>
-              <a:spcAft>
-                <a:spcPts val="0"/>
-              </a:spcAft>
-              <a:buClr>
-                <a:srgbClr val="000000"/>
-              </a:buClr>
-              <a:buFont typeface="Arial"/>
-              <a:defRPr sz="1400" b="0" i="0" u="none" strike="noStrike" cap="none">
-                <a:solidFill>
-                  <a:srgbClr val="000000"/>
-                </a:solidFill>
-                <a:latin typeface="Arial"/>
-                <a:ea typeface="Arial"/>
-                <a:cs typeface="Arial"/>
-                <a:sym typeface="Arial"/>
-              </a:defRPr>
-            </a:lvl4pPr>
-            <a:lvl5pPr marR="0" lvl="4" algn="l" rtl="0">
-              <a:lnSpc>
-                <a:spcPct val="100000"/>
-              </a:lnSpc>
-              <a:spcBef>
-                <a:spcPts val="0"/>
-              </a:spcBef>
-              <a:spcAft>
-                <a:spcPts val="0"/>
-              </a:spcAft>
-              <a:buClr>
-                <a:srgbClr val="000000"/>
-              </a:buClr>
-              <a:buFont typeface="Arial"/>
-              <a:defRPr sz="1400" b="0" i="0" u="none" strike="noStrike" cap="none">
-                <a:solidFill>
-                  <a:srgbClr val="000000"/>
-                </a:solidFill>
-                <a:latin typeface="Arial"/>
-                <a:ea typeface="Arial"/>
-                <a:cs typeface="Arial"/>
-                <a:sym typeface="Arial"/>
-              </a:defRPr>
-            </a:lvl5pPr>
-            <a:lvl6pPr marR="0" lvl="5" algn="l" rtl="0">
-              <a:lnSpc>
-                <a:spcPct val="100000"/>
-              </a:lnSpc>
-              <a:spcBef>
-                <a:spcPts val="0"/>
-              </a:spcBef>
-              <a:spcAft>
-                <a:spcPts val="0"/>
-              </a:spcAft>
-              <a:buClr>
-                <a:srgbClr val="000000"/>
-              </a:buClr>
-              <a:buFont typeface="Arial"/>
-              <a:defRPr sz="1400" b="0" i="0" u="none" strike="noStrike" cap="none">
-                <a:solidFill>
-                  <a:srgbClr val="000000"/>
-                </a:solidFill>
-                <a:latin typeface="Arial"/>
-                <a:ea typeface="Arial"/>
-                <a:cs typeface="Arial"/>
-                <a:sym typeface="Arial"/>
-              </a:defRPr>
-            </a:lvl6pPr>
-            <a:lvl7pPr marR="0" lvl="6" algn="l" rtl="0">
-              <a:lnSpc>
-                <a:spcPct val="100000"/>
-              </a:lnSpc>
-              <a:spcBef>
-                <a:spcPts val="0"/>
-              </a:spcBef>
-              <a:spcAft>
-                <a:spcPts val="0"/>
-              </a:spcAft>
-              <a:buClr>
-                <a:srgbClr val="000000"/>
-              </a:buClr>
-              <a:buFont typeface="Arial"/>
-              <a:defRPr sz="1400" b="0" i="0" u="none" strike="noStrike" cap="none">
-                <a:solidFill>
-                  <a:srgbClr val="000000"/>
-                </a:solidFill>
-                <a:latin typeface="Arial"/>
-                <a:ea typeface="Arial"/>
-                <a:cs typeface="Arial"/>
-                <a:sym typeface="Arial"/>
-              </a:defRPr>
-            </a:lvl7pPr>
-            <a:lvl8pPr marR="0" lvl="7" algn="l" rtl="0">
-              <a:lnSpc>
-                <a:spcPct val="100000"/>
-              </a:lnSpc>
-              <a:spcBef>
-                <a:spcPts val="0"/>
-              </a:spcBef>
-              <a:spcAft>
-                <a:spcPts val="0"/>
-              </a:spcAft>
-              <a:buClr>
-                <a:srgbClr val="000000"/>
-              </a:buClr>
-              <a:buFont typeface="Arial"/>
-              <a:defRPr sz="1400" b="0" i="0" u="none" strike="noStrike" cap="none">
-                <a:solidFill>
-                  <a:srgbClr val="000000"/>
-                </a:solidFill>
-                <a:latin typeface="Arial"/>
-                <a:ea typeface="Arial"/>
-                <a:cs typeface="Arial"/>
-                <a:sym typeface="Arial"/>
-              </a:defRPr>
-            </a:lvl8pPr>
-            <a:lvl9pPr marR="0" lvl="8" algn="l" rtl="0">
-              <a:lnSpc>
-                <a:spcPct val="100000"/>
-              </a:lnSpc>
-              <a:spcBef>
-                <a:spcPts val="0"/>
-              </a:spcBef>
-              <a:spcAft>
-                <a:spcPts val="0"/>
-              </a:spcAft>
-              <a:buClr>
-                <a:srgbClr val="000000"/>
-              </a:buClr>
-              <a:buFont typeface="Arial"/>
-              <a:defRPr sz="1400" b="0" i="0" u="none" strike="noStrike" cap="none">
-                <a:solidFill>
-                  <a:srgbClr val="000000"/>
-                </a:solidFill>
-                <a:latin typeface="Arial"/>
-                <a:ea typeface="Arial"/>
-                <a:cs typeface="Arial"/>
-                <a:sym typeface="Arial"/>
-              </a:defRPr>
-            </a:lvl9pPr>
-          </a:lstStyle>
-          <a:p>
-            <a:fld id="{3BF01AD4-1839-794E-BD90-91AB590172A7}" type="slidenum">
-              <a:rPr lang="en-DE" smtClean="0"/>
-              <a:pPr/>
-              <a:t>‹#›</a:t>
-            </a:fld>
-            <a:endParaRPr lang="en"/>
-          </a:p>
-        </p:txBody>
-      </p:sp>
-      <p:cxnSp>
-        <p:nvCxnSpPr>
-          <p:cNvPr id="57" name="Google Shape;57;p10"/>
-          <p:cNvCxnSpPr/>
-          <p:nvPr/>
-        </p:nvCxnSpPr>
-        <p:spPr>
-          <a:xfrm>
-            <a:off x="3716421" y="2608481"/>
-            <a:ext cx="0" cy="1600400"/>
-          </a:xfrm>
-          <a:prstGeom prst="straightConnector1">
-            <a:avLst/>
-          </a:prstGeom>
-          <a:noFill/>
-          <a:ln w="19050" cap="flat" cmpd="sng">
-            <a:solidFill>
-              <a:schemeClr val="lt1"/>
-            </a:solidFill>
-            <a:prstDash val="solid"/>
-            <a:miter lim="800000"/>
-            <a:headEnd type="none" w="sm" len="sm"/>
-            <a:tailEnd type="none" w="sm" len="sm"/>
-          </a:ln>
-        </p:spPr>
-      </p:cxnSp>
-      <p:sp>
-        <p:nvSpPr>
-          <p:cNvPr id="60" name="Google Shape;60;p10"/>
-          <p:cNvSpPr txBox="1">
-            <a:spLocks noGrp="1"/>
-          </p:cNvSpPr>
-          <p:nvPr>
-            <p:ph type="sldNum" idx="2"/>
-          </p:nvPr>
-        </p:nvSpPr>
-        <p:spPr>
-          <a:xfrm>
-            <a:off x="6457950" y="4767263"/>
-            <a:ext cx="2057400" cy="274637"/>
-          </a:xfrm>
-          <a:prstGeom prst="rect">
-            <a:avLst/>
-          </a:prstGeom>
-          <a:noFill/>
-          <a:ln>
-            <a:noFill/>
-          </a:ln>
-        </p:spPr>
-        <p:txBody>
-          <a:bodyPr spcFirstLastPara="1" vert="horz" wrap="square" lIns="91440" tIns="45720" rIns="91440" bIns="45720" rtlCol="0" anchor="ctr" anchorCtr="0">
-            <a:noAutofit/>
-          </a:bodyPr>
-          <a:lstStyle>
-            <a:defPPr marR="0" lvl="0" algn="l" rtl="0">
-              <a:lnSpc>
-                <a:spcPct val="100000"/>
-              </a:lnSpc>
-              <a:spcBef>
-                <a:spcPts val="0"/>
-              </a:spcBef>
-              <a:spcAft>
-                <a:spcPts val="0"/>
-              </a:spcAft>
-            </a:defPPr>
-            <a:lvl1pPr marR="0" lvl="0" algn="r" rtl="0">
-              <a:lnSpc>
-                <a:spcPct val="100000"/>
-              </a:lnSpc>
-              <a:spcBef>
-                <a:spcPts val="0"/>
-              </a:spcBef>
-              <a:spcAft>
-                <a:spcPts val="0"/>
-              </a:spcAft>
-              <a:buClr>
-                <a:srgbClr val="000000"/>
-              </a:buClr>
-              <a:buFont typeface="Arial"/>
-              <a:defRPr sz="1200" b="0" i="0" u="none" strike="noStrike" cap="none">
-                <a:solidFill>
-                  <a:schemeClr val="tx1">
-                    <a:tint val="75000"/>
-                  </a:schemeClr>
-                </a:solidFill>
-                <a:latin typeface="Helvetica Light" panose="020B0403020202020204" pitchFamily="34" charset="0"/>
-                <a:ea typeface="Arial"/>
-                <a:cs typeface="Arial"/>
-                <a:sym typeface="Arial"/>
-              </a:defRPr>
-            </a:lvl1pPr>
-            <a:lvl2pPr marR="0" lvl="1" algn="l" rtl="0">
-              <a:lnSpc>
-                <a:spcPct val="100000"/>
-              </a:lnSpc>
-              <a:spcBef>
-                <a:spcPts val="0"/>
-              </a:spcBef>
-              <a:spcAft>
-                <a:spcPts val="0"/>
-              </a:spcAft>
-              <a:buClr>
-                <a:srgbClr val="000000"/>
-              </a:buClr>
-              <a:buFont typeface="Arial"/>
-              <a:defRPr sz="1400" b="0" i="0" u="none" strike="noStrike" cap="none">
-                <a:solidFill>
-                  <a:srgbClr val="000000"/>
-                </a:solidFill>
-                <a:latin typeface="Arial"/>
-                <a:ea typeface="Arial"/>
-                <a:cs typeface="Arial"/>
-                <a:sym typeface="Arial"/>
-              </a:defRPr>
-            </a:lvl2pPr>
-            <a:lvl3pPr marR="0" lvl="2" algn="l" rtl="0">
-              <a:lnSpc>
-                <a:spcPct val="100000"/>
-              </a:lnSpc>
-              <a:spcBef>
-                <a:spcPts val="0"/>
-              </a:spcBef>
-              <a:spcAft>
-                <a:spcPts val="0"/>
-              </a:spcAft>
-              <a:buClr>
-                <a:srgbClr val="000000"/>
-              </a:buClr>
-              <a:buFont typeface="Arial"/>
-              <a:defRPr sz="1400" b="0" i="0" u="none" strike="noStrike" cap="none">
-                <a:solidFill>
-                  <a:srgbClr val="000000"/>
-                </a:solidFill>
-                <a:latin typeface="Arial"/>
-                <a:ea typeface="Arial"/>
-                <a:cs typeface="Arial"/>
-                <a:sym typeface="Arial"/>
-              </a:defRPr>
-            </a:lvl3pPr>
-            <a:lvl4pPr marR="0" lvl="3" algn="l" rtl="0">
-              <a:lnSpc>
-                <a:spcPct val="100000"/>
-              </a:lnSpc>
-              <a:spcBef>
-                <a:spcPts val="0"/>
-              </a:spcBef>
-              <a:spcAft>
-                <a:spcPts val="0"/>
-              </a:spcAft>
-              <a:buClr>
-                <a:srgbClr val="000000"/>
-              </a:buClr>
-              <a:buFont typeface="Arial"/>
-              <a:defRPr sz="1400" b="0" i="0" u="none" strike="noStrike" cap="none">
-                <a:solidFill>
-                  <a:srgbClr val="000000"/>
-                </a:solidFill>
-                <a:latin typeface="Arial"/>
-                <a:ea typeface="Arial"/>
-                <a:cs typeface="Arial"/>
-                <a:sym typeface="Arial"/>
-              </a:defRPr>
-            </a:lvl4pPr>
-            <a:lvl5pPr marR="0" lvl="4" algn="l" rtl="0">
-              <a:lnSpc>
-                <a:spcPct val="100000"/>
-              </a:lnSpc>
-              <a:spcBef>
-                <a:spcPts val="0"/>
-              </a:spcBef>
-              <a:spcAft>
-                <a:spcPts val="0"/>
-              </a:spcAft>
-              <a:buClr>
-                <a:srgbClr val="000000"/>
-              </a:buClr>
-              <a:buFont typeface="Arial"/>
-              <a:defRPr sz="1400" b="0" i="0" u="none" strike="noStrike" cap="none">
-                <a:solidFill>
-                  <a:srgbClr val="000000"/>
-                </a:solidFill>
-                <a:latin typeface="Arial"/>
-                <a:ea typeface="Arial"/>
-                <a:cs typeface="Arial"/>
-                <a:sym typeface="Arial"/>
-              </a:defRPr>
-            </a:lvl5pPr>
-            <a:lvl6pPr marR="0" lvl="5" algn="l" rtl="0">
-              <a:lnSpc>
-                <a:spcPct val="100000"/>
-              </a:lnSpc>
-              <a:spcBef>
-                <a:spcPts val="0"/>
-              </a:spcBef>
-              <a:spcAft>
-                <a:spcPts val="0"/>
-              </a:spcAft>
-              <a:buClr>
-                <a:srgbClr val="000000"/>
-              </a:buClr>
-              <a:buFont typeface="Arial"/>
-              <a:defRPr sz="1400" b="0" i="0" u="none" strike="noStrike" cap="none">
-                <a:solidFill>
-                  <a:srgbClr val="000000"/>
-                </a:solidFill>
-                <a:latin typeface="Arial"/>
-                <a:ea typeface="Arial"/>
-                <a:cs typeface="Arial"/>
-                <a:sym typeface="Arial"/>
-              </a:defRPr>
-            </a:lvl6pPr>
-            <a:lvl7pPr marR="0" lvl="6" algn="l" rtl="0">
-              <a:lnSpc>
-                <a:spcPct val="100000"/>
-              </a:lnSpc>
-              <a:spcBef>
-                <a:spcPts val="0"/>
-              </a:spcBef>
-              <a:spcAft>
-                <a:spcPts val="0"/>
-              </a:spcAft>
-              <a:buClr>
-                <a:srgbClr val="000000"/>
-              </a:buClr>
-              <a:buFont typeface="Arial"/>
-              <a:defRPr sz="1400" b="0" i="0" u="none" strike="noStrike" cap="none">
-                <a:solidFill>
-                  <a:srgbClr val="000000"/>
-                </a:solidFill>
-                <a:latin typeface="Arial"/>
-                <a:ea typeface="Arial"/>
-                <a:cs typeface="Arial"/>
-                <a:sym typeface="Arial"/>
-              </a:defRPr>
-            </a:lvl7pPr>
-            <a:lvl8pPr marR="0" lvl="7" algn="l" rtl="0">
-              <a:lnSpc>
-                <a:spcPct val="100000"/>
-              </a:lnSpc>
-              <a:spcBef>
-                <a:spcPts val="0"/>
-              </a:spcBef>
-              <a:spcAft>
-                <a:spcPts val="0"/>
-              </a:spcAft>
-              <a:buClr>
-                <a:srgbClr val="000000"/>
-              </a:buClr>
-              <a:buFont typeface="Arial"/>
-              <a:defRPr sz="1400" b="0" i="0" u="none" strike="noStrike" cap="none">
-                <a:solidFill>
-                  <a:srgbClr val="000000"/>
-                </a:solidFill>
-                <a:latin typeface="Arial"/>
-                <a:ea typeface="Arial"/>
-                <a:cs typeface="Arial"/>
-                <a:sym typeface="Arial"/>
-              </a:defRPr>
-            </a:lvl8pPr>
-            <a:lvl9pPr marR="0" lvl="8" algn="l" rtl="0">
-              <a:lnSpc>
-                <a:spcPct val="100000"/>
-              </a:lnSpc>
-              <a:spcBef>
-                <a:spcPts val="0"/>
-              </a:spcBef>
-              <a:spcAft>
-                <a:spcPts val="0"/>
-              </a:spcAft>
-              <a:buClr>
-                <a:srgbClr val="000000"/>
-              </a:buClr>
-              <a:buFont typeface="Arial"/>
-              <a:defRPr sz="1400" b="0" i="0" u="none" strike="noStrike" cap="none">
-                <a:solidFill>
-                  <a:srgbClr val="000000"/>
-                </a:solidFill>
-                <a:latin typeface="Arial"/>
-                <a:ea typeface="Arial"/>
-                <a:cs typeface="Arial"/>
-                <a:sym typeface="Arial"/>
-              </a:defRPr>
-            </a:lvl9pPr>
-          </a:lstStyle>
-          <a:p>
-            <a:fld id="{3BF01AD4-1839-794E-BD90-91AB590172A7}" type="slidenum">
-              <a:rPr lang="en-DE" smtClean="0"/>
-              <a:pPr/>
-              <a:t>‹#›</a:t>
-            </a:fld>
-            <a:endParaRPr lang="en"/>
-          </a:p>
-        </p:txBody>
-      </p:sp>
-      <p:pic>
-        <p:nvPicPr>
-          <p:cNvPr id="62" name="Google Shape;62;p10"/>
-          <p:cNvPicPr preferRelativeResize="0"/>
-          <p:nvPr/>
-        </p:nvPicPr>
-        <p:blipFill>
-          <a:blip r:embed="rId3">
-            <a:extLst>
-              <a:ext uri="{28A0092B-C50C-407E-A947-70E740481C1C}">
-                <a14:useLocalDpi xmlns:a14="http://schemas.microsoft.com/office/drawing/2010/main" val="0"/>
-              </a:ext>
-              <a:ext uri="{96DAC541-7B7A-43D3-8B79-37D633B846F1}">
-                <asvg:svgBlip xmlns:asvg="http://schemas.microsoft.com/office/drawing/2016/SVG/main" r:embed="rId4"/>
-              </a:ext>
-            </a:extLst>
-          </a:blip>
-          <a:srcRect/>
-          <a:stretch/>
-        </p:blipFill>
-        <p:spPr>
-          <a:xfrm>
-            <a:off x="3071993" y="6285589"/>
-            <a:ext cx="414529" cy="408850"/>
-          </a:xfrm>
-          <a:prstGeom prst="rect">
-            <a:avLst/>
-          </a:prstGeom>
-          <a:noFill/>
-          <a:ln>
-            <a:noFill/>
-          </a:ln>
-        </p:spPr>
-      </p:pic>
-      <p:pic>
-        <p:nvPicPr>
-          <p:cNvPr id="64" name="Google Shape;64;p10"/>
-          <p:cNvPicPr preferRelativeResize="0"/>
-          <p:nvPr/>
-        </p:nvPicPr>
-        <p:blipFill>
-          <a:blip r:embed="rId5">
-            <a:extLst>
-              <a:ext uri="{28A0092B-C50C-407E-A947-70E740481C1C}">
-                <a14:useLocalDpi xmlns:a14="http://schemas.microsoft.com/office/drawing/2010/main" val="0"/>
-              </a:ext>
-              <a:ext uri="{96DAC541-7B7A-43D3-8B79-37D633B846F1}">
-                <asvg:svgBlip xmlns:asvg="http://schemas.microsoft.com/office/drawing/2016/SVG/main" r:embed="rId6"/>
-              </a:ext>
-            </a:extLst>
-          </a:blip>
-          <a:srcRect/>
-          <a:stretch/>
-        </p:blipFill>
-        <p:spPr>
-          <a:xfrm>
-            <a:off x="152659" y="6282751"/>
-            <a:ext cx="414528" cy="414528"/>
-          </a:xfrm>
-          <a:prstGeom prst="rect">
-            <a:avLst/>
-          </a:prstGeom>
-          <a:noFill/>
-          <a:ln>
-            <a:noFill/>
-          </a:ln>
-        </p:spPr>
-      </p:pic>
-      <p:sp>
-        <p:nvSpPr>
-          <p:cNvPr id="6" name="Picture Placeholder 5">
-            <a:extLst>
-              <a:ext uri="{FF2B5EF4-FFF2-40B4-BE49-F238E27FC236}">
-                <a16:creationId xmlns:a16="http://schemas.microsoft.com/office/drawing/2014/main" id="{2631C45D-A4AF-1223-E180-EB9E96FA2AE4}"/>
-              </a:ext>
-            </a:extLst>
-          </p:cNvPr>
-          <p:cNvSpPr>
-            <a:spLocks noGrp="1"/>
-          </p:cNvSpPr>
-          <p:nvPr>
-            <p:ph type="pic" sz="quarter" idx="13"/>
-          </p:nvPr>
-        </p:nvSpPr>
-        <p:spPr>
-          <a:xfrm>
-            <a:off x="277813" y="1289050"/>
-            <a:ext cx="3206750" cy="4024313"/>
-          </a:xfrm>
-        </p:spPr>
-        <p:txBody>
-          <a:bodyPr/>
-          <a:lstStyle>
-            <a:lvl1pPr marL="0" indent="0">
-              <a:buNone/>
-              <a:defRPr/>
-            </a:lvl1pPr>
-          </a:lstStyle>
-          <a:p>
-            <a:endParaRPr lang="en-DE" dirty="0"/>
-          </a:p>
-        </p:txBody>
-      </p:sp>
-      <p:sp>
-        <p:nvSpPr>
-          <p:cNvPr id="8" name="Text Placeholder 7">
-            <a:extLst>
-              <a:ext uri="{FF2B5EF4-FFF2-40B4-BE49-F238E27FC236}">
-                <a16:creationId xmlns:a16="http://schemas.microsoft.com/office/drawing/2014/main" id="{E469473F-31A1-DA1A-1446-8C54C99F5645}"/>
-              </a:ext>
-            </a:extLst>
-          </p:cNvPr>
-          <p:cNvSpPr>
-            <a:spLocks noGrp="1"/>
-          </p:cNvSpPr>
-          <p:nvPr>
-            <p:ph type="body" sz="quarter" idx="14"/>
-          </p:nvPr>
-        </p:nvSpPr>
-        <p:spPr>
-          <a:xfrm>
-            <a:off x="4382294" y="1289050"/>
-            <a:ext cx="6911975" cy="1828800"/>
-          </a:xfrm>
-        </p:spPr>
-        <p:txBody>
-          <a:bodyPr/>
-          <a:lstStyle>
-            <a:lvl1pPr marL="0" indent="0">
-              <a:buNone/>
-              <a:defRPr/>
-            </a:lvl1pPr>
-          </a:lstStyle>
-          <a:p>
-            <a:pPr lvl="0"/>
-            <a:endParaRPr lang="en-DE" dirty="0"/>
-          </a:p>
-        </p:txBody>
-      </p:sp>
-      <p:sp>
-        <p:nvSpPr>
-          <p:cNvPr id="9" name="Text Placeholder 7">
-            <a:extLst>
-              <a:ext uri="{FF2B5EF4-FFF2-40B4-BE49-F238E27FC236}">
-                <a16:creationId xmlns:a16="http://schemas.microsoft.com/office/drawing/2014/main" id="{7D27FFAE-CDC4-C5E3-ACA9-B1B660F21931}"/>
-              </a:ext>
-            </a:extLst>
-          </p:cNvPr>
-          <p:cNvSpPr>
-            <a:spLocks noGrp="1"/>
-          </p:cNvSpPr>
-          <p:nvPr>
-            <p:ph type="body" sz="quarter" idx="15"/>
-          </p:nvPr>
-        </p:nvSpPr>
-        <p:spPr>
-          <a:xfrm>
-            <a:off x="4382293" y="3310572"/>
-            <a:ext cx="6911975" cy="1828800"/>
-          </a:xfrm>
-        </p:spPr>
-        <p:txBody>
-          <a:bodyPr/>
-          <a:lstStyle>
-            <a:lvl1pPr marL="0" indent="0">
-              <a:buNone/>
-              <a:defRPr/>
-            </a:lvl1pPr>
-          </a:lstStyle>
-          <a:p>
-            <a:pPr lvl="0"/>
-            <a:endParaRPr lang="en-DE" dirty="0"/>
-          </a:p>
-        </p:txBody>
-      </p:sp>
-      <p:sp>
-        <p:nvSpPr>
-          <p:cNvPr id="12" name="Text Placeholder 11">
-            <a:extLst>
-              <a:ext uri="{FF2B5EF4-FFF2-40B4-BE49-F238E27FC236}">
-                <a16:creationId xmlns:a16="http://schemas.microsoft.com/office/drawing/2014/main" id="{AB34C56E-9BDB-F5E2-1AD6-4C9ACB81D802}"/>
-              </a:ext>
-            </a:extLst>
-          </p:cNvPr>
-          <p:cNvSpPr>
-            <a:spLocks noGrp="1"/>
-          </p:cNvSpPr>
-          <p:nvPr>
-            <p:ph type="body" sz="quarter" idx="16"/>
-          </p:nvPr>
-        </p:nvSpPr>
-        <p:spPr>
-          <a:xfrm>
-            <a:off x="700759" y="6295340"/>
-            <a:ext cx="2302323" cy="408600"/>
-          </a:xfrm>
-        </p:spPr>
-        <p:txBody>
-          <a:bodyPr anchor="ctr">
-            <a:normAutofit/>
-          </a:bodyPr>
-          <a:lstStyle>
-            <a:lvl1pPr marL="0" indent="0">
-              <a:buNone/>
-              <a:defRPr sz="2000"/>
-            </a:lvl1pPr>
-          </a:lstStyle>
-          <a:p>
-            <a:pPr lvl="0"/>
-            <a:endParaRPr lang="en-DE" dirty="0"/>
-          </a:p>
-        </p:txBody>
-      </p:sp>
-      <p:sp>
-        <p:nvSpPr>
-          <p:cNvPr id="13" name="Text Placeholder 11">
-            <a:extLst>
-              <a:ext uri="{FF2B5EF4-FFF2-40B4-BE49-F238E27FC236}">
-                <a16:creationId xmlns:a16="http://schemas.microsoft.com/office/drawing/2014/main" id="{210C2267-198C-B65E-1588-1D8ADC032B0D}"/>
-              </a:ext>
-            </a:extLst>
-          </p:cNvPr>
-          <p:cNvSpPr>
-            <a:spLocks noGrp="1"/>
-          </p:cNvSpPr>
-          <p:nvPr>
-            <p:ph type="body" sz="quarter" idx="17"/>
-          </p:nvPr>
-        </p:nvSpPr>
-        <p:spPr>
-          <a:xfrm>
-            <a:off x="3540472" y="6295340"/>
-            <a:ext cx="2302323" cy="408600"/>
-          </a:xfrm>
-        </p:spPr>
-        <p:txBody>
-          <a:bodyPr anchor="ctr">
-            <a:normAutofit/>
-          </a:bodyPr>
-          <a:lstStyle>
-            <a:lvl1pPr marL="0" indent="0">
-              <a:buNone/>
-              <a:defRPr sz="2000"/>
-            </a:lvl1pPr>
-          </a:lstStyle>
-          <a:p>
-            <a:pPr lvl="0"/>
-            <a:endParaRPr lang="en-DE" dirty="0"/>
-          </a:p>
-        </p:txBody>
-      </p:sp>
-    </p:spTree>
-    <p:extLst>
-      <p:ext uri="{BB962C8B-B14F-4D97-AF65-F5344CB8AC3E}">
-        <p14:creationId xmlns:p14="http://schemas.microsoft.com/office/powerpoint/2010/main" val="1914357449"/>
-      </p:ext>
-    </p:extLst>
-  </p:cSld>
-  <p:clrMapOvr>
-    <a:masterClrMapping/>
-  </p:clrMapOvr>
-</p:sldLayout>
-</file>
-
-<file path=ppt/slideLayouts/slideLayout11.xml><?xml version="1.0" encoding="utf-8"?>
-<p:sldLayout xmlns:a="http://schemas.openxmlformats.org/drawingml/2006/main" xmlns:r="http://schemas.openxmlformats.org/officeDocument/2006/relationships" xmlns:p="http://schemas.openxmlformats.org/presentationml/2006/main" showMasterSp="0" matchingName="Dark References" preserve="1" userDrawn="1">
-  <p:cSld name="1_Dark References">
-    <p:spTree>
-      <p:nvGrpSpPr>
-        <p:cNvPr id="1" name="Shape 54"/>
-        <p:cNvGrpSpPr/>
-        <p:nvPr/>
-      </p:nvGrpSpPr>
-      <p:grpSpPr>
-        <a:xfrm>
-          <a:off x="0" y="0"/>
-          <a:ext cx="0" cy="0"/>
-          <a:chOff x="0" y="0"/>
-          <a:chExt cx="0" cy="0"/>
-        </a:xfrm>
-      </p:grpSpPr>
-      <p:pic>
-        <p:nvPicPr>
-          <p:cNvPr id="10" name="Picture 9">
-            <a:extLst>
-              <a:ext uri="{FF2B5EF4-FFF2-40B4-BE49-F238E27FC236}">
-                <a16:creationId xmlns:a16="http://schemas.microsoft.com/office/drawing/2014/main" id="{579150A8-A6A7-D848-2DEF-2A552A77C406}"/>
-              </a:ext>
-            </a:extLst>
-          </p:cNvPr>
-          <p:cNvPicPr>
-            <a:picLocks noChangeAspect="1"/>
-          </p:cNvPicPr>
-          <p:nvPr userDrawn="1"/>
-        </p:nvPicPr>
-        <p:blipFill>
-          <a:blip r:embed="rId2">
-            <a:extLst>
-              <a:ext uri="{28A0092B-C50C-407E-A947-70E740481C1C}">
-                <a14:useLocalDpi xmlns:a14="http://schemas.microsoft.com/office/drawing/2010/main" val="0"/>
-              </a:ext>
-            </a:extLst>
-          </a:blip>
-          <a:stretch>
-            <a:fillRect/>
-          </a:stretch>
-        </p:blipFill>
-        <p:spPr>
-          <a:xfrm>
-            <a:off x="0" y="0"/>
-            <a:ext cx="12192000" cy="6858000"/>
-          </a:xfrm>
-          <a:prstGeom prst="rect">
-            <a:avLst/>
-          </a:prstGeom>
-        </p:spPr>
-      </p:pic>
-      <p:sp>
-        <p:nvSpPr>
-          <p:cNvPr id="55" name="Google Shape;55;p10"/>
-          <p:cNvSpPr txBox="1">
-            <a:spLocks noGrp="1"/>
-          </p:cNvSpPr>
-          <p:nvPr>
-            <p:ph type="sldNum" idx="12"/>
-          </p:nvPr>
-        </p:nvSpPr>
-        <p:spPr>
-          <a:xfrm>
-            <a:off x="6457950" y="4767263"/>
-            <a:ext cx="2057400" cy="274637"/>
-          </a:xfrm>
-          <a:prstGeom prst="rect">
-            <a:avLst/>
-          </a:prstGeom>
-          <a:noFill/>
-          <a:ln>
-            <a:noFill/>
-          </a:ln>
-        </p:spPr>
-        <p:txBody>
-          <a:bodyPr spcFirstLastPara="1" vert="horz" wrap="square" lIns="91440" tIns="45720" rIns="91440" bIns="45720" rtlCol="0" anchor="ctr" anchorCtr="0">
-            <a:noAutofit/>
-          </a:bodyPr>
-          <a:lstStyle>
-            <a:defPPr marR="0" lvl="0" algn="l" rtl="0">
-              <a:lnSpc>
-                <a:spcPct val="100000"/>
-              </a:lnSpc>
-              <a:spcBef>
-                <a:spcPts val="0"/>
-              </a:spcBef>
-              <a:spcAft>
-                <a:spcPts val="0"/>
-              </a:spcAft>
-            </a:defPPr>
-            <a:lvl1pPr marR="0" lvl="0" algn="r" rtl="0">
-              <a:lnSpc>
-                <a:spcPct val="100000"/>
-              </a:lnSpc>
-              <a:spcBef>
-                <a:spcPts val="0"/>
-              </a:spcBef>
-              <a:spcAft>
-                <a:spcPts val="0"/>
-              </a:spcAft>
-              <a:buClr>
-                <a:srgbClr val="000000"/>
-              </a:buClr>
-              <a:buFont typeface="Arial"/>
-              <a:defRPr sz="1200" b="0" i="0" u="none" strike="noStrike" cap="none">
-                <a:solidFill>
-                  <a:schemeClr val="tx1">
-                    <a:tint val="75000"/>
-                  </a:schemeClr>
-                </a:solidFill>
-                <a:latin typeface="Helvetica Light" panose="020B0403020202020204" pitchFamily="34" charset="0"/>
-                <a:ea typeface="Arial"/>
-                <a:cs typeface="Arial"/>
-                <a:sym typeface="Arial"/>
-              </a:defRPr>
-            </a:lvl1pPr>
-            <a:lvl2pPr marR="0" lvl="1" algn="l" rtl="0">
-              <a:lnSpc>
-                <a:spcPct val="100000"/>
-              </a:lnSpc>
-              <a:spcBef>
-                <a:spcPts val="0"/>
-              </a:spcBef>
-              <a:spcAft>
-                <a:spcPts val="0"/>
-              </a:spcAft>
-              <a:buClr>
-                <a:srgbClr val="000000"/>
-              </a:buClr>
-              <a:buFont typeface="Arial"/>
-              <a:defRPr sz="1400" b="0" i="0" u="none" strike="noStrike" cap="none">
-                <a:solidFill>
-                  <a:srgbClr val="000000"/>
-                </a:solidFill>
-                <a:latin typeface="Arial"/>
-                <a:ea typeface="Arial"/>
-                <a:cs typeface="Arial"/>
-                <a:sym typeface="Arial"/>
-              </a:defRPr>
-            </a:lvl2pPr>
-            <a:lvl3pPr marR="0" lvl="2" algn="l" rtl="0">
-              <a:lnSpc>
-                <a:spcPct val="100000"/>
-              </a:lnSpc>
-              <a:spcBef>
-                <a:spcPts val="0"/>
-              </a:spcBef>
-              <a:spcAft>
-                <a:spcPts val="0"/>
-              </a:spcAft>
-              <a:buClr>
-                <a:srgbClr val="000000"/>
-              </a:buClr>
-              <a:buFont typeface="Arial"/>
-              <a:defRPr sz="1400" b="0" i="0" u="none" strike="noStrike" cap="none">
-                <a:solidFill>
-                  <a:srgbClr val="000000"/>
-                </a:solidFill>
-                <a:latin typeface="Arial"/>
-                <a:ea typeface="Arial"/>
-                <a:cs typeface="Arial"/>
-                <a:sym typeface="Arial"/>
-              </a:defRPr>
-            </a:lvl3pPr>
-            <a:lvl4pPr marR="0" lvl="3" algn="l" rtl="0">
-              <a:lnSpc>
-                <a:spcPct val="100000"/>
-              </a:lnSpc>
-              <a:spcBef>
-                <a:spcPts val="0"/>
-              </a:spcBef>
-              <a:spcAft>
-                <a:spcPts val="0"/>
-              </a:spcAft>
-              <a:buClr>
-                <a:srgbClr val="000000"/>
-              </a:buClr>
-              <a:buFont typeface="Arial"/>
-              <a:defRPr sz="1400" b="0" i="0" u="none" strike="noStrike" cap="none">
-                <a:solidFill>
-                  <a:srgbClr val="000000"/>
-                </a:solidFill>
-                <a:latin typeface="Arial"/>
-                <a:ea typeface="Arial"/>
-                <a:cs typeface="Arial"/>
-                <a:sym typeface="Arial"/>
-              </a:defRPr>
-            </a:lvl4pPr>
-            <a:lvl5pPr marR="0" lvl="4" algn="l" rtl="0">
-              <a:lnSpc>
-                <a:spcPct val="100000"/>
-              </a:lnSpc>
-              <a:spcBef>
-                <a:spcPts val="0"/>
-              </a:spcBef>
-              <a:spcAft>
-                <a:spcPts val="0"/>
-              </a:spcAft>
-              <a:buClr>
-                <a:srgbClr val="000000"/>
-              </a:buClr>
-              <a:buFont typeface="Arial"/>
-              <a:defRPr sz="1400" b="0" i="0" u="none" strike="noStrike" cap="none">
-                <a:solidFill>
-                  <a:srgbClr val="000000"/>
-                </a:solidFill>
-                <a:latin typeface="Arial"/>
-                <a:ea typeface="Arial"/>
-                <a:cs typeface="Arial"/>
-                <a:sym typeface="Arial"/>
-              </a:defRPr>
-            </a:lvl5pPr>
-            <a:lvl6pPr marR="0" lvl="5" algn="l" rtl="0">
-              <a:lnSpc>
-                <a:spcPct val="100000"/>
-              </a:lnSpc>
-              <a:spcBef>
-                <a:spcPts val="0"/>
-              </a:spcBef>
-              <a:spcAft>
-                <a:spcPts val="0"/>
-              </a:spcAft>
-              <a:buClr>
-                <a:srgbClr val="000000"/>
-              </a:buClr>
-              <a:buFont typeface="Arial"/>
-              <a:defRPr sz="1400" b="0" i="0" u="none" strike="noStrike" cap="none">
-                <a:solidFill>
-                  <a:srgbClr val="000000"/>
-                </a:solidFill>
-                <a:latin typeface="Arial"/>
-                <a:ea typeface="Arial"/>
-                <a:cs typeface="Arial"/>
-                <a:sym typeface="Arial"/>
-              </a:defRPr>
-            </a:lvl6pPr>
-            <a:lvl7pPr marR="0" lvl="6" algn="l" rtl="0">
-              <a:lnSpc>
-                <a:spcPct val="100000"/>
-              </a:lnSpc>
-              <a:spcBef>
-                <a:spcPts val="0"/>
-              </a:spcBef>
-              <a:spcAft>
-                <a:spcPts val="0"/>
-              </a:spcAft>
-              <a:buClr>
-                <a:srgbClr val="000000"/>
-              </a:buClr>
-              <a:buFont typeface="Arial"/>
-              <a:defRPr sz="1400" b="0" i="0" u="none" strike="noStrike" cap="none">
-                <a:solidFill>
-                  <a:srgbClr val="000000"/>
-                </a:solidFill>
-                <a:latin typeface="Arial"/>
-                <a:ea typeface="Arial"/>
-                <a:cs typeface="Arial"/>
-                <a:sym typeface="Arial"/>
-              </a:defRPr>
-            </a:lvl7pPr>
-            <a:lvl8pPr marR="0" lvl="7" algn="l" rtl="0">
-              <a:lnSpc>
-                <a:spcPct val="100000"/>
-              </a:lnSpc>
-              <a:spcBef>
-                <a:spcPts val="0"/>
-              </a:spcBef>
-              <a:spcAft>
-                <a:spcPts val="0"/>
-              </a:spcAft>
-              <a:buClr>
-                <a:srgbClr val="000000"/>
-              </a:buClr>
-              <a:buFont typeface="Arial"/>
-              <a:defRPr sz="1400" b="0" i="0" u="none" strike="noStrike" cap="none">
-                <a:solidFill>
-                  <a:srgbClr val="000000"/>
-                </a:solidFill>
-                <a:latin typeface="Arial"/>
-                <a:ea typeface="Arial"/>
-                <a:cs typeface="Arial"/>
-                <a:sym typeface="Arial"/>
-              </a:defRPr>
-            </a:lvl8pPr>
-            <a:lvl9pPr marR="0" lvl="8" algn="l" rtl="0">
-              <a:lnSpc>
-                <a:spcPct val="100000"/>
-              </a:lnSpc>
-              <a:spcBef>
-                <a:spcPts val="0"/>
-              </a:spcBef>
-              <a:spcAft>
-                <a:spcPts val="0"/>
-              </a:spcAft>
-              <a:buClr>
-                <a:srgbClr val="000000"/>
-              </a:buClr>
-              <a:buFont typeface="Arial"/>
-              <a:defRPr sz="1400" b="0" i="0" u="none" strike="noStrike" cap="none">
-                <a:solidFill>
-                  <a:srgbClr val="000000"/>
-                </a:solidFill>
-                <a:latin typeface="Arial"/>
-                <a:ea typeface="Arial"/>
-                <a:cs typeface="Arial"/>
-                <a:sym typeface="Arial"/>
-              </a:defRPr>
-            </a:lvl9pPr>
-          </a:lstStyle>
-          <a:p>
-            <a:fld id="{3BF01AD4-1839-794E-BD90-91AB590172A7}" type="slidenum">
-              <a:rPr lang="en-DE" smtClean="0"/>
-              <a:pPr/>
-              <a:t>‹#›</a:t>
-            </a:fld>
-            <a:endParaRPr lang="en"/>
-          </a:p>
-        </p:txBody>
-      </p:sp>
-      <p:cxnSp>
-        <p:nvCxnSpPr>
-          <p:cNvPr id="57" name="Google Shape;57;p10"/>
-          <p:cNvCxnSpPr/>
-          <p:nvPr/>
-        </p:nvCxnSpPr>
-        <p:spPr>
-          <a:xfrm>
-            <a:off x="3716421" y="2608481"/>
-            <a:ext cx="0" cy="1600400"/>
-          </a:xfrm>
-          <a:prstGeom prst="straightConnector1">
-            <a:avLst/>
-          </a:prstGeom>
-          <a:noFill/>
-          <a:ln w="19050" cap="flat" cmpd="sng">
-            <a:solidFill>
-              <a:schemeClr val="lt1"/>
-            </a:solidFill>
-            <a:prstDash val="solid"/>
-            <a:miter lim="800000"/>
-            <a:headEnd type="none" w="sm" len="sm"/>
-            <a:tailEnd type="none" w="sm" len="sm"/>
-          </a:ln>
-        </p:spPr>
-      </p:cxnSp>
-      <p:sp>
-        <p:nvSpPr>
-          <p:cNvPr id="60" name="Google Shape;60;p10"/>
-          <p:cNvSpPr txBox="1">
-            <a:spLocks noGrp="1"/>
-          </p:cNvSpPr>
-          <p:nvPr>
-            <p:ph type="sldNum" idx="2"/>
-          </p:nvPr>
-        </p:nvSpPr>
-        <p:spPr>
-          <a:xfrm>
-            <a:off x="6457950" y="4767263"/>
-            <a:ext cx="2057400" cy="274637"/>
-          </a:xfrm>
-          <a:prstGeom prst="rect">
-            <a:avLst/>
-          </a:prstGeom>
-          <a:noFill/>
-          <a:ln>
-            <a:noFill/>
-          </a:ln>
-        </p:spPr>
-        <p:txBody>
-          <a:bodyPr spcFirstLastPara="1" vert="horz" wrap="square" lIns="91440" tIns="45720" rIns="91440" bIns="45720" rtlCol="0" anchor="ctr" anchorCtr="0">
-            <a:noAutofit/>
-          </a:bodyPr>
-          <a:lstStyle>
-            <a:defPPr marR="0" lvl="0" algn="l" rtl="0">
-              <a:lnSpc>
-                <a:spcPct val="100000"/>
-              </a:lnSpc>
-              <a:spcBef>
-                <a:spcPts val="0"/>
-              </a:spcBef>
-              <a:spcAft>
-                <a:spcPts val="0"/>
-              </a:spcAft>
-            </a:defPPr>
-            <a:lvl1pPr marR="0" lvl="0" algn="r" rtl="0">
-              <a:lnSpc>
-                <a:spcPct val="100000"/>
-              </a:lnSpc>
-              <a:spcBef>
-                <a:spcPts val="0"/>
-              </a:spcBef>
-              <a:spcAft>
-                <a:spcPts val="0"/>
-              </a:spcAft>
-              <a:buClr>
-                <a:srgbClr val="000000"/>
-              </a:buClr>
-              <a:buFont typeface="Arial"/>
-              <a:defRPr sz="1200" b="0" i="0" u="none" strike="noStrike" cap="none">
-                <a:solidFill>
-                  <a:schemeClr val="tx1">
-                    <a:tint val="75000"/>
-                  </a:schemeClr>
-                </a:solidFill>
-                <a:latin typeface="Helvetica Light" panose="020B0403020202020204" pitchFamily="34" charset="0"/>
-                <a:ea typeface="Arial"/>
-                <a:cs typeface="Arial"/>
-                <a:sym typeface="Arial"/>
-              </a:defRPr>
-            </a:lvl1pPr>
-            <a:lvl2pPr marR="0" lvl="1" algn="l" rtl="0">
-              <a:lnSpc>
-                <a:spcPct val="100000"/>
-              </a:lnSpc>
-              <a:spcBef>
-                <a:spcPts val="0"/>
-              </a:spcBef>
-              <a:spcAft>
-                <a:spcPts val="0"/>
-              </a:spcAft>
-              <a:buClr>
-                <a:srgbClr val="000000"/>
-              </a:buClr>
-              <a:buFont typeface="Arial"/>
-              <a:defRPr sz="1400" b="0" i="0" u="none" strike="noStrike" cap="none">
-                <a:solidFill>
-                  <a:srgbClr val="000000"/>
-                </a:solidFill>
-                <a:latin typeface="Arial"/>
-                <a:ea typeface="Arial"/>
-                <a:cs typeface="Arial"/>
-                <a:sym typeface="Arial"/>
-              </a:defRPr>
-            </a:lvl2pPr>
-            <a:lvl3pPr marR="0" lvl="2" algn="l" rtl="0">
-              <a:lnSpc>
-                <a:spcPct val="100000"/>
-              </a:lnSpc>
-              <a:spcBef>
-                <a:spcPts val="0"/>
-              </a:spcBef>
-              <a:spcAft>
-                <a:spcPts val="0"/>
-              </a:spcAft>
-              <a:buClr>
-                <a:srgbClr val="000000"/>
-              </a:buClr>
-              <a:buFont typeface="Arial"/>
-              <a:defRPr sz="1400" b="0" i="0" u="none" strike="noStrike" cap="none">
-                <a:solidFill>
-                  <a:srgbClr val="000000"/>
-                </a:solidFill>
-                <a:latin typeface="Arial"/>
-                <a:ea typeface="Arial"/>
-                <a:cs typeface="Arial"/>
-                <a:sym typeface="Arial"/>
-              </a:defRPr>
-            </a:lvl3pPr>
-            <a:lvl4pPr marR="0" lvl="3" algn="l" rtl="0">
-              <a:lnSpc>
-                <a:spcPct val="100000"/>
-              </a:lnSpc>
-              <a:spcBef>
-                <a:spcPts val="0"/>
-              </a:spcBef>
-              <a:spcAft>
-                <a:spcPts val="0"/>
-              </a:spcAft>
-              <a:buClr>
-                <a:srgbClr val="000000"/>
-              </a:buClr>
-              <a:buFont typeface="Arial"/>
-              <a:defRPr sz="1400" b="0" i="0" u="none" strike="noStrike" cap="none">
-                <a:solidFill>
-                  <a:srgbClr val="000000"/>
-                </a:solidFill>
-                <a:latin typeface="Arial"/>
-                <a:ea typeface="Arial"/>
-                <a:cs typeface="Arial"/>
-                <a:sym typeface="Arial"/>
-              </a:defRPr>
-            </a:lvl4pPr>
-            <a:lvl5pPr marR="0" lvl="4" algn="l" rtl="0">
-              <a:lnSpc>
-                <a:spcPct val="100000"/>
-              </a:lnSpc>
-              <a:spcBef>
-                <a:spcPts val="0"/>
-              </a:spcBef>
-              <a:spcAft>
-                <a:spcPts val="0"/>
-              </a:spcAft>
-              <a:buClr>
-                <a:srgbClr val="000000"/>
-              </a:buClr>
-              <a:buFont typeface="Arial"/>
-              <a:defRPr sz="1400" b="0" i="0" u="none" strike="noStrike" cap="none">
-                <a:solidFill>
-                  <a:srgbClr val="000000"/>
-                </a:solidFill>
-                <a:latin typeface="Arial"/>
-                <a:ea typeface="Arial"/>
-                <a:cs typeface="Arial"/>
-                <a:sym typeface="Arial"/>
-              </a:defRPr>
-            </a:lvl5pPr>
-            <a:lvl6pPr marR="0" lvl="5" algn="l" rtl="0">
-              <a:lnSpc>
-                <a:spcPct val="100000"/>
-              </a:lnSpc>
-              <a:spcBef>
-                <a:spcPts val="0"/>
-              </a:spcBef>
-              <a:spcAft>
-                <a:spcPts val="0"/>
-              </a:spcAft>
-              <a:buClr>
-                <a:srgbClr val="000000"/>
-              </a:buClr>
-              <a:buFont typeface="Arial"/>
-              <a:defRPr sz="1400" b="0" i="0" u="none" strike="noStrike" cap="none">
-                <a:solidFill>
-                  <a:srgbClr val="000000"/>
-                </a:solidFill>
-                <a:latin typeface="Arial"/>
-                <a:ea typeface="Arial"/>
-                <a:cs typeface="Arial"/>
-                <a:sym typeface="Arial"/>
-              </a:defRPr>
-            </a:lvl6pPr>
-            <a:lvl7pPr marR="0" lvl="6" algn="l" rtl="0">
-              <a:lnSpc>
-                <a:spcPct val="100000"/>
-              </a:lnSpc>
-              <a:spcBef>
-                <a:spcPts val="0"/>
-              </a:spcBef>
-              <a:spcAft>
-                <a:spcPts val="0"/>
-              </a:spcAft>
-              <a:buClr>
-                <a:srgbClr val="000000"/>
-              </a:buClr>
-              <a:buFont typeface="Arial"/>
-              <a:defRPr sz="1400" b="0" i="0" u="none" strike="noStrike" cap="none">
-                <a:solidFill>
-                  <a:srgbClr val="000000"/>
-                </a:solidFill>
-                <a:latin typeface="Arial"/>
-                <a:ea typeface="Arial"/>
-                <a:cs typeface="Arial"/>
-                <a:sym typeface="Arial"/>
-              </a:defRPr>
-            </a:lvl7pPr>
-            <a:lvl8pPr marR="0" lvl="7" algn="l" rtl="0">
-              <a:lnSpc>
-                <a:spcPct val="100000"/>
-              </a:lnSpc>
-              <a:spcBef>
-                <a:spcPts val="0"/>
-              </a:spcBef>
-              <a:spcAft>
-                <a:spcPts val="0"/>
-              </a:spcAft>
-              <a:buClr>
-                <a:srgbClr val="000000"/>
-              </a:buClr>
-              <a:buFont typeface="Arial"/>
-              <a:defRPr sz="1400" b="0" i="0" u="none" strike="noStrike" cap="none">
-                <a:solidFill>
-                  <a:srgbClr val="000000"/>
-                </a:solidFill>
-                <a:latin typeface="Arial"/>
-                <a:ea typeface="Arial"/>
-                <a:cs typeface="Arial"/>
-                <a:sym typeface="Arial"/>
-              </a:defRPr>
-            </a:lvl8pPr>
-            <a:lvl9pPr marR="0" lvl="8" algn="l" rtl="0">
-              <a:lnSpc>
-                <a:spcPct val="100000"/>
-              </a:lnSpc>
-              <a:spcBef>
-                <a:spcPts val="0"/>
-              </a:spcBef>
-              <a:spcAft>
-                <a:spcPts val="0"/>
-              </a:spcAft>
-              <a:buClr>
-                <a:srgbClr val="000000"/>
-              </a:buClr>
-              <a:buFont typeface="Arial"/>
-              <a:defRPr sz="1400" b="0" i="0" u="none" strike="noStrike" cap="none">
-                <a:solidFill>
-                  <a:srgbClr val="000000"/>
-                </a:solidFill>
-                <a:latin typeface="Arial"/>
-                <a:ea typeface="Arial"/>
-                <a:cs typeface="Arial"/>
-                <a:sym typeface="Arial"/>
-              </a:defRPr>
-            </a:lvl9pPr>
-          </a:lstStyle>
-          <a:p>
-            <a:fld id="{3BF01AD4-1839-794E-BD90-91AB590172A7}" type="slidenum">
-              <a:rPr lang="en-DE" smtClean="0"/>
-              <a:pPr/>
-              <a:t>‹#›</a:t>
-            </a:fld>
-            <a:endParaRPr lang="en"/>
-          </a:p>
-        </p:txBody>
-      </p:sp>
-      <p:pic>
-        <p:nvPicPr>
-          <p:cNvPr id="64" name="Google Shape;64;p10"/>
-          <p:cNvPicPr preferRelativeResize="0"/>
-          <p:nvPr/>
-        </p:nvPicPr>
-        <p:blipFill>
-          <a:blip r:embed="rId3">
-            <a:extLst>
-              <a:ext uri="{28A0092B-C50C-407E-A947-70E740481C1C}">
-                <a14:useLocalDpi xmlns:a14="http://schemas.microsoft.com/office/drawing/2010/main" val="0"/>
-              </a:ext>
-              <a:ext uri="{96DAC541-7B7A-43D3-8B79-37D633B846F1}">
-                <asvg:svgBlip xmlns:asvg="http://schemas.microsoft.com/office/drawing/2016/SVG/main" r:embed="rId4"/>
-              </a:ext>
-            </a:extLst>
-          </a:blip>
-          <a:srcRect/>
-          <a:stretch/>
-        </p:blipFill>
-        <p:spPr>
-          <a:xfrm>
-            <a:off x="152659" y="6282751"/>
-            <a:ext cx="414528" cy="414528"/>
-          </a:xfrm>
-          <a:prstGeom prst="rect">
-            <a:avLst/>
-          </a:prstGeom>
-          <a:noFill/>
-          <a:ln>
-            <a:noFill/>
-          </a:ln>
-        </p:spPr>
-      </p:pic>
-      <p:sp>
-        <p:nvSpPr>
-          <p:cNvPr id="6" name="Picture Placeholder 5">
-            <a:extLst>
-              <a:ext uri="{FF2B5EF4-FFF2-40B4-BE49-F238E27FC236}">
-                <a16:creationId xmlns:a16="http://schemas.microsoft.com/office/drawing/2014/main" id="{2631C45D-A4AF-1223-E180-EB9E96FA2AE4}"/>
-              </a:ext>
-            </a:extLst>
-          </p:cNvPr>
-          <p:cNvSpPr>
-            <a:spLocks noGrp="1"/>
-          </p:cNvSpPr>
-          <p:nvPr>
-            <p:ph type="pic" sz="quarter" idx="13"/>
-          </p:nvPr>
-        </p:nvSpPr>
-        <p:spPr>
-          <a:xfrm>
-            <a:off x="277813" y="1289050"/>
-            <a:ext cx="3206750" cy="4024313"/>
-          </a:xfrm>
-        </p:spPr>
-        <p:txBody>
-          <a:bodyPr/>
-          <a:lstStyle>
-            <a:lvl1pPr marL="0" indent="0">
-              <a:buNone/>
-              <a:defRPr/>
-            </a:lvl1pPr>
-          </a:lstStyle>
-          <a:p>
-            <a:endParaRPr lang="en-DE" dirty="0"/>
-          </a:p>
-        </p:txBody>
-      </p:sp>
-      <p:sp>
-        <p:nvSpPr>
-          <p:cNvPr id="8" name="Text Placeholder 7">
-            <a:extLst>
-              <a:ext uri="{FF2B5EF4-FFF2-40B4-BE49-F238E27FC236}">
-                <a16:creationId xmlns:a16="http://schemas.microsoft.com/office/drawing/2014/main" id="{E469473F-31A1-DA1A-1446-8C54C99F5645}"/>
-              </a:ext>
-            </a:extLst>
-          </p:cNvPr>
-          <p:cNvSpPr>
-            <a:spLocks noGrp="1"/>
-          </p:cNvSpPr>
-          <p:nvPr>
-            <p:ph type="body" sz="quarter" idx="14"/>
-          </p:nvPr>
-        </p:nvSpPr>
-        <p:spPr>
-          <a:xfrm>
-            <a:off x="4382294" y="1289050"/>
-            <a:ext cx="6911975" cy="1828800"/>
-          </a:xfrm>
-        </p:spPr>
-        <p:txBody>
-          <a:bodyPr/>
-          <a:lstStyle>
-            <a:lvl1pPr marL="0" indent="0">
-              <a:buNone/>
-              <a:defRPr/>
-            </a:lvl1pPr>
-          </a:lstStyle>
-          <a:p>
-            <a:pPr lvl="0"/>
-            <a:endParaRPr lang="en-DE" dirty="0"/>
-          </a:p>
-        </p:txBody>
-      </p:sp>
-      <p:sp>
-        <p:nvSpPr>
-          <p:cNvPr id="9" name="Text Placeholder 7">
-            <a:extLst>
-              <a:ext uri="{FF2B5EF4-FFF2-40B4-BE49-F238E27FC236}">
-                <a16:creationId xmlns:a16="http://schemas.microsoft.com/office/drawing/2014/main" id="{7D27FFAE-CDC4-C5E3-ACA9-B1B660F21931}"/>
-              </a:ext>
-            </a:extLst>
-          </p:cNvPr>
-          <p:cNvSpPr>
-            <a:spLocks noGrp="1"/>
-          </p:cNvSpPr>
-          <p:nvPr>
-            <p:ph type="body" sz="quarter" idx="15"/>
-          </p:nvPr>
-        </p:nvSpPr>
-        <p:spPr>
-          <a:xfrm>
-            <a:off x="4382293" y="3310572"/>
-            <a:ext cx="6911975" cy="1828800"/>
-          </a:xfrm>
-        </p:spPr>
-        <p:txBody>
-          <a:bodyPr/>
-          <a:lstStyle>
-            <a:lvl1pPr marL="0" indent="0">
-              <a:buNone/>
-              <a:defRPr/>
-            </a:lvl1pPr>
-          </a:lstStyle>
-          <a:p>
-            <a:pPr lvl="0"/>
-            <a:endParaRPr lang="en-DE" dirty="0"/>
-          </a:p>
-        </p:txBody>
-      </p:sp>
-      <p:sp>
-        <p:nvSpPr>
-          <p:cNvPr id="12" name="Text Placeholder 11">
-            <a:extLst>
-              <a:ext uri="{FF2B5EF4-FFF2-40B4-BE49-F238E27FC236}">
-                <a16:creationId xmlns:a16="http://schemas.microsoft.com/office/drawing/2014/main" id="{AB34C56E-9BDB-F5E2-1AD6-4C9ACB81D802}"/>
-              </a:ext>
-            </a:extLst>
-          </p:cNvPr>
-          <p:cNvSpPr>
-            <a:spLocks noGrp="1"/>
-          </p:cNvSpPr>
-          <p:nvPr>
-            <p:ph type="body" sz="quarter" idx="16"/>
-          </p:nvPr>
-        </p:nvSpPr>
-        <p:spPr>
-          <a:xfrm>
-            <a:off x="700759" y="6295340"/>
-            <a:ext cx="2302323" cy="408600"/>
-          </a:xfrm>
-        </p:spPr>
-        <p:txBody>
-          <a:bodyPr anchor="ctr">
-            <a:normAutofit/>
-          </a:bodyPr>
-          <a:lstStyle>
-            <a:lvl1pPr marL="0" indent="0">
-              <a:buNone/>
-              <a:defRPr sz="2000"/>
-            </a:lvl1pPr>
-          </a:lstStyle>
-          <a:p>
-            <a:pPr lvl="0"/>
-            <a:endParaRPr lang="en-DE" dirty="0"/>
-          </a:p>
-        </p:txBody>
-      </p:sp>
-    </p:spTree>
-    <p:extLst>
-      <p:ext uri="{BB962C8B-B14F-4D97-AF65-F5344CB8AC3E}">
-        <p14:creationId xmlns:p14="http://schemas.microsoft.com/office/powerpoint/2010/main" val="3658211383"/>
-      </p:ext>
-    </p:extLst>
-  </p:cSld>
-  <p:clrMapOvr>
-    <a:masterClrMapping/>
-  </p:clrMapOvr>
-</p:sldLayout>
-</file>
-
-<file path=ppt/slideLayouts/slideLayout12.xml><?xml version="1.0" encoding="utf-8"?>
-<p:sldLayout xmlns:a="http://schemas.openxmlformats.org/drawingml/2006/main" xmlns:r="http://schemas.openxmlformats.org/officeDocument/2006/relationships" xmlns:p="http://schemas.openxmlformats.org/presentationml/2006/main" showMasterSp="0" matchingName="Dark Title (side)" preserve="1" userDrawn="1">
+<file path=ppt/slideLayouts/slideLayout13.xml><?xml version="1.0" encoding="utf-8"?>
+<p:sldLayout xmlns:a="http://schemas.openxmlformats.org/drawingml/2006/main" xmlns:r="http://schemas.openxmlformats.org/officeDocument/2006/relationships" xmlns:p="http://schemas.openxmlformats.org/presentationml/2006/main" showMasterSp="0" matchingName="Title slide (Variant 2)" preserve="1" userDrawn="1">
   <p:cSld name="Dark Title (side)">
     <p:bg>
       <p:bgPr>
@@ -2790,41 +2870,6 @@
           </a:ln>
         </p:spPr>
       </p:cxnSp>
-      <p:pic>
-        <p:nvPicPr>
-          <p:cNvPr id="13" name="Picture Placeholder 38">
-            <a:extLst>
-              <a:ext uri="{FF2B5EF4-FFF2-40B4-BE49-F238E27FC236}">
-                <a16:creationId xmlns:a16="http://schemas.microsoft.com/office/drawing/2014/main" id="{79C63365-FF4F-9CE1-4D8D-35CF8A436F98}"/>
-              </a:ext>
-            </a:extLst>
-          </p:cNvPr>
-          <p:cNvPicPr>
-            <a:picLocks noChangeAspect="1"/>
-          </p:cNvPicPr>
-          <p:nvPr userDrawn="1"/>
-        </p:nvPicPr>
-        <p:blipFill rotWithShape="1">
-          <a:blip r:embed="rId3" cstate="print">
-            <a:extLst>
-              <a:ext uri="{28A0092B-C50C-407E-A947-70E740481C1C}">
-                <a14:useLocalDpi xmlns:a14="http://schemas.microsoft.com/office/drawing/2010/main" val="0"/>
-              </a:ext>
-            </a:extLst>
-          </a:blip>
-          <a:srcRect l="21021" r="-224"/>
-          <a:stretch/>
-        </p:blipFill>
-        <p:spPr>
-          <a:xfrm>
-            <a:off x="287847" y="4311065"/>
-            <a:ext cx="3428575" cy="862663"/>
-          </a:xfrm>
-          <a:prstGeom prst="rect">
-            <a:avLst/>
-          </a:prstGeom>
-        </p:spPr>
-      </p:pic>
       <p:sp>
         <p:nvSpPr>
           <p:cNvPr id="3" name="Subtitle 2">
@@ -2992,10 +3037,45 @@
       </p:sp>
       <p:pic>
         <p:nvPicPr>
-          <p:cNvPr id="11" name="Picture 10">
-            <a:extLst>
-              <a:ext uri="{FF2B5EF4-FFF2-40B4-BE49-F238E27FC236}">
-                <a16:creationId xmlns:a16="http://schemas.microsoft.com/office/drawing/2014/main" id="{283C8477-FEFA-99DC-C8C9-EC963E0CA7B6}"/>
+          <p:cNvPr id="2" name="Picture Placeholder 38">
+            <a:extLst>
+              <a:ext uri="{FF2B5EF4-FFF2-40B4-BE49-F238E27FC236}">
+                <a16:creationId xmlns:a16="http://schemas.microsoft.com/office/drawing/2014/main" id="{7E240C5D-9FA5-DED5-F5F9-4AC706C11C25}"/>
+              </a:ext>
+            </a:extLst>
+          </p:cNvPr>
+          <p:cNvPicPr>
+            <a:picLocks noChangeAspect="1"/>
+          </p:cNvPicPr>
+          <p:nvPr userDrawn="1"/>
+        </p:nvPicPr>
+        <p:blipFill rotWithShape="1">
+          <a:blip r:embed="rId3" cstate="print">
+            <a:extLst>
+              <a:ext uri="{28A0092B-C50C-407E-A947-70E740481C1C}">
+                <a14:useLocalDpi xmlns:a14="http://schemas.microsoft.com/office/drawing/2010/main" val="0"/>
+              </a:ext>
+            </a:extLst>
+          </a:blip>
+          <a:srcRect l="21021" r="-224"/>
+          <a:stretch/>
+        </p:blipFill>
+        <p:spPr>
+          <a:xfrm>
+            <a:off x="287847" y="3596690"/>
+            <a:ext cx="3428575" cy="862663"/>
+          </a:xfrm>
+          <a:prstGeom prst="rect">
+            <a:avLst/>
+          </a:prstGeom>
+        </p:spPr>
+      </p:pic>
+      <p:pic>
+        <p:nvPicPr>
+          <p:cNvPr id="4" name="Picture 3">
+            <a:extLst>
+              <a:ext uri="{FF2B5EF4-FFF2-40B4-BE49-F238E27FC236}">
+                <a16:creationId xmlns:a16="http://schemas.microsoft.com/office/drawing/2014/main" id="{B1D4F44C-80EE-79AD-650B-2F7CD008C18D}"/>
               </a:ext>
             </a:extLst>
           </p:cNvPr>
@@ -3018,8 +3098,123 @@
         </p:blipFill>
         <p:spPr>
           <a:xfrm>
-            <a:off x="1135087" y="2240674"/>
+            <a:off x="1135087" y="1535824"/>
             <a:ext cx="1734093" cy="1734093"/>
+          </a:xfrm>
+          <a:prstGeom prst="rect">
+            <a:avLst/>
+          </a:prstGeom>
+        </p:spPr>
+      </p:pic>
+      <p:pic>
+        <p:nvPicPr>
+          <p:cNvPr id="6" name="Graphic 5">
+            <a:extLst>
+              <a:ext uri="{FF2B5EF4-FFF2-40B4-BE49-F238E27FC236}">
+                <a16:creationId xmlns:a16="http://schemas.microsoft.com/office/drawing/2014/main" id="{F3716A89-99E9-3F8D-9BDA-D63B8E3307C9}"/>
+              </a:ext>
+            </a:extLst>
+          </p:cNvPr>
+          <p:cNvPicPr>
+            <a:picLocks noChangeAspect="1"/>
+          </p:cNvPicPr>
+          <p:nvPr userDrawn="1"/>
+        </p:nvPicPr>
+        <p:blipFill>
+          <a:blip r:embed="rId5" cstate="print">
+            <a:extLst>
+              <a:ext uri="{28A0092B-C50C-407E-A947-70E740481C1C}">
+                <a14:useLocalDpi xmlns:a14="http://schemas.microsoft.com/office/drawing/2010/main" val="0"/>
+              </a:ext>
+              <a:ext uri="{96DAC541-7B7A-43D3-8B79-37D633B846F1}">
+                <asvg:svgBlip xmlns:asvg="http://schemas.microsoft.com/office/drawing/2016/SVG/main" r:embed="rId6"/>
+              </a:ext>
+            </a:extLst>
+          </a:blip>
+          <a:stretch>
+            <a:fillRect/>
+          </a:stretch>
+        </p:blipFill>
+        <p:spPr>
+          <a:xfrm>
+            <a:off x="2812030" y="4679819"/>
+            <a:ext cx="844157" cy="529245"/>
+          </a:xfrm>
+          <a:prstGeom prst="rect">
+            <a:avLst/>
+          </a:prstGeom>
+        </p:spPr>
+      </p:pic>
+      <p:pic>
+        <p:nvPicPr>
+          <p:cNvPr id="8" name="Graphic 7">
+            <a:extLst>
+              <a:ext uri="{FF2B5EF4-FFF2-40B4-BE49-F238E27FC236}">
+                <a16:creationId xmlns:a16="http://schemas.microsoft.com/office/drawing/2014/main" id="{53228CB1-8845-B97B-C719-6A799A988884}"/>
+              </a:ext>
+            </a:extLst>
+          </p:cNvPr>
+          <p:cNvPicPr>
+            <a:picLocks noChangeAspect="1"/>
+          </p:cNvPicPr>
+          <p:nvPr userDrawn="1"/>
+        </p:nvPicPr>
+        <p:blipFill rotWithShape="1">
+          <a:blip r:embed="rId7">
+            <a:extLst>
+              <a:ext uri="{28A0092B-C50C-407E-A947-70E740481C1C}">
+                <a14:useLocalDpi xmlns:a14="http://schemas.microsoft.com/office/drawing/2010/main" val="0"/>
+              </a:ext>
+              <a:ext uri="{96DAC541-7B7A-43D3-8B79-37D633B846F1}">
+                <asvg:svgBlip xmlns:asvg="http://schemas.microsoft.com/office/drawing/2016/SVG/main" r:embed="rId8"/>
+              </a:ext>
+            </a:extLst>
+          </a:blip>
+          <a:srcRect t="-1" r="81934" b="-1"/>
+          <a:stretch/>
+        </p:blipFill>
+        <p:spPr>
+          <a:xfrm>
+            <a:off x="440438" y="4679819"/>
+            <a:ext cx="601738" cy="529245"/>
+          </a:xfrm>
+          <a:prstGeom prst="rect">
+            <a:avLst/>
+          </a:prstGeom>
+        </p:spPr>
+      </p:pic>
+      <p:pic>
+        <p:nvPicPr>
+          <p:cNvPr id="10" name="Graphic 9">
+            <a:extLst>
+              <a:ext uri="{FF2B5EF4-FFF2-40B4-BE49-F238E27FC236}">
+                <a16:creationId xmlns:a16="http://schemas.microsoft.com/office/drawing/2014/main" id="{A2BA9D06-4207-9F10-BCD6-186501B43F0B}"/>
+              </a:ext>
+            </a:extLst>
+          </p:cNvPr>
+          <p:cNvPicPr>
+            <a:picLocks noChangeAspect="1"/>
+          </p:cNvPicPr>
+          <p:nvPr userDrawn="1"/>
+        </p:nvPicPr>
+        <p:blipFill rotWithShape="1">
+          <a:blip r:embed="rId7">
+            <a:extLst>
+              <a:ext uri="{28A0092B-C50C-407E-A947-70E740481C1C}">
+                <a14:useLocalDpi xmlns:a14="http://schemas.microsoft.com/office/drawing/2010/main" val="0"/>
+              </a:ext>
+              <a:ext uri="{96DAC541-7B7A-43D3-8B79-37D633B846F1}">
+                <asvg:svgBlip xmlns:asvg="http://schemas.microsoft.com/office/drawing/2016/SVG/main" r:embed="rId8"/>
+              </a:ext>
+            </a:extLst>
+          </a:blip>
+          <a:srcRect l="81992"/>
+          <a:stretch/>
+        </p:blipFill>
+        <p:spPr>
+          <a:xfrm>
+            <a:off x="1042176" y="4679820"/>
+            <a:ext cx="599795" cy="529244"/>
           </a:xfrm>
           <a:prstGeom prst="rect">
             <a:avLst/>
@@ -3039,8 +3234,8 @@
 </p:sldLayout>
 </file>
 
-<file path=ppt/slideLayouts/slideLayout13.xml><?xml version="1.0" encoding="utf-8"?>
-<p:sldLayout xmlns:a="http://schemas.openxmlformats.org/drawingml/2006/main" xmlns:r="http://schemas.openxmlformats.org/officeDocument/2006/relationships" xmlns:p="http://schemas.openxmlformats.org/presentationml/2006/main" showMasterSp="0" matchingName="TITLE_2" preserve="1">
+<file path=ppt/slideLayouts/slideLayout14.xml><?xml version="1.0" encoding="utf-8"?>
+<p:sldLayout xmlns:a="http://schemas.openxmlformats.org/drawingml/2006/main" xmlns:r="http://schemas.openxmlformats.org/officeDocument/2006/relationships" xmlns:p="http://schemas.openxmlformats.org/presentationml/2006/main" showMasterSp="0" matchingName="Section separator" preserve="1">
   <p:cSld name="TITLE_2">
     <p:spTree>
       <p:nvGrpSpPr>
@@ -3389,205 +3584,6 @@
     <p:extLst>
       <p:ext uri="{BB962C8B-B14F-4D97-AF65-F5344CB8AC3E}">
         <p14:creationId xmlns:p14="http://schemas.microsoft.com/office/powerpoint/2010/main" val="399611620"/>
-      </p:ext>
-    </p:extLst>
-  </p:cSld>
-  <p:clrMapOvr>
-    <a:masterClrMapping/>
-  </p:clrMapOvr>
-</p:sldLayout>
-</file>
-
-<file path=ppt/slideLayouts/slideLayout14.xml><?xml version="1.0" encoding="utf-8"?>
-<p:sldLayout xmlns:a="http://schemas.openxmlformats.org/drawingml/2006/main" xmlns:r="http://schemas.openxmlformats.org/officeDocument/2006/relationships" xmlns:p="http://schemas.openxmlformats.org/presentationml/2006/main" preserve="1" userDrawn="1">
-  <p:cSld name="Title slide">
-    <p:spTree>
-      <p:nvGrpSpPr>
-        <p:cNvPr id="1" name=""/>
-        <p:cNvGrpSpPr/>
-        <p:nvPr/>
-      </p:nvGrpSpPr>
-      <p:grpSpPr>
-        <a:xfrm>
-          <a:off x="0" y="0"/>
-          <a:ext cx="0" cy="0"/>
-          <a:chOff x="0" y="0"/>
-          <a:chExt cx="0" cy="0"/>
-        </a:xfrm>
-      </p:grpSpPr>
-      <p:sp>
-        <p:nvSpPr>
-          <p:cNvPr id="3" name="Subtitle 2">
-            <a:extLst>
-              <a:ext uri="{FF2B5EF4-FFF2-40B4-BE49-F238E27FC236}">
-                <a16:creationId xmlns:a16="http://schemas.microsoft.com/office/drawing/2014/main" id="{582DEE7C-AF0C-A94C-0089-53BA99335C72}"/>
-              </a:ext>
-            </a:extLst>
-          </p:cNvPr>
-          <p:cNvSpPr>
-            <a:spLocks noGrp="1"/>
-          </p:cNvSpPr>
-          <p:nvPr>
-            <p:ph type="subTitle" idx="1" hasCustomPrompt="1"/>
-          </p:nvPr>
-        </p:nvSpPr>
-        <p:spPr>
-          <a:xfrm>
-            <a:off x="156000" y="3243098"/>
-            <a:ext cx="11880000" cy="1538452"/>
-          </a:xfrm>
-        </p:spPr>
-        <p:txBody>
-          <a:bodyPr/>
-          <a:lstStyle>
-            <a:lvl1pPr marL="0" indent="0" algn="l">
-              <a:buNone/>
-              <a:defRPr sz="2400">
-                <a:solidFill>
-                  <a:srgbClr val="0E2D38"/>
-                </a:solidFill>
-              </a:defRPr>
-            </a:lvl1pPr>
-            <a:lvl2pPr marL="457200" indent="0" algn="ctr">
-              <a:buNone/>
-              <a:defRPr sz="2000"/>
-            </a:lvl2pPr>
-            <a:lvl3pPr marL="914400" indent="0" algn="ctr">
-              <a:buNone/>
-              <a:defRPr sz="1800"/>
-            </a:lvl3pPr>
-            <a:lvl4pPr marL="1371600" indent="0" algn="ctr">
-              <a:buNone/>
-              <a:defRPr sz="1600"/>
-            </a:lvl4pPr>
-            <a:lvl5pPr marL="1828800" indent="0" algn="ctr">
-              <a:buNone/>
-              <a:defRPr sz="1600"/>
-            </a:lvl5pPr>
-            <a:lvl6pPr marL="2286000" indent="0" algn="ctr">
-              <a:buNone/>
-              <a:defRPr sz="1600"/>
-            </a:lvl6pPr>
-            <a:lvl7pPr marL="2743200" indent="0" algn="ctr">
-              <a:buNone/>
-              <a:defRPr sz="1600"/>
-            </a:lvl7pPr>
-            <a:lvl8pPr marL="3200400" indent="0" algn="ctr">
-              <a:buNone/>
-              <a:defRPr sz="1600"/>
-            </a:lvl8pPr>
-            <a:lvl9pPr marL="3657600" indent="0" algn="ctr">
-              <a:buNone/>
-              <a:defRPr sz="1600"/>
-            </a:lvl9pPr>
-          </a:lstStyle>
-          <a:p>
-            <a:r>
-              <a:rPr lang="en-GB" dirty="0"/>
-              <a:t>[Full name, including title and/or post-name letters] [Full author list, if required] [Institution(s)]</a:t>
-            </a:r>
-          </a:p>
-          <a:p>
-            <a:endParaRPr lang="en-GB" dirty="0"/>
-          </a:p>
-        </p:txBody>
-      </p:sp>
-      <p:sp>
-        <p:nvSpPr>
-          <p:cNvPr id="12" name="Title 11">
-            <a:extLst>
-              <a:ext uri="{FF2B5EF4-FFF2-40B4-BE49-F238E27FC236}">
-                <a16:creationId xmlns:a16="http://schemas.microsoft.com/office/drawing/2014/main" id="{928B059B-334C-45D2-2325-10DA6A37B897}"/>
-              </a:ext>
-            </a:extLst>
-          </p:cNvPr>
-          <p:cNvSpPr>
-            <a:spLocks noGrp="1"/>
-          </p:cNvSpPr>
-          <p:nvPr>
-            <p:ph type="title"/>
-          </p:nvPr>
-        </p:nvSpPr>
-        <p:spPr>
-          <a:xfrm>
-            <a:off x="156000" y="1519073"/>
-            <a:ext cx="11880000" cy="1443202"/>
-          </a:xfrm>
-        </p:spPr>
-        <p:txBody>
-          <a:bodyPr anchor="b">
-            <a:normAutofit/>
-          </a:bodyPr>
-          <a:lstStyle>
-            <a:lvl1pPr>
-              <a:defRPr sz="3600">
-                <a:solidFill>
-                  <a:srgbClr val="0E2D38"/>
-                </a:solidFill>
-              </a:defRPr>
-            </a:lvl1pPr>
-          </a:lstStyle>
-          <a:p>
-            <a:r>
-              <a:rPr lang="en-GB" dirty="0"/>
-              <a:t>Click to edit Master title style</a:t>
-            </a:r>
-            <a:endParaRPr lang="en-DE" dirty="0"/>
-          </a:p>
-        </p:txBody>
-      </p:sp>
-      <p:sp>
-        <p:nvSpPr>
-          <p:cNvPr id="4" name="Content Placeholder 3">
-            <a:extLst>
-              <a:ext uri="{FF2B5EF4-FFF2-40B4-BE49-F238E27FC236}">
-                <a16:creationId xmlns:a16="http://schemas.microsoft.com/office/drawing/2014/main" id="{697BC65F-206A-0B48-AF56-FE3AA1676AEE}"/>
-              </a:ext>
-            </a:extLst>
-          </p:cNvPr>
-          <p:cNvSpPr>
-            <a:spLocks noGrp="1"/>
-          </p:cNvSpPr>
-          <p:nvPr>
-            <p:ph sz="quarter" idx="10" hasCustomPrompt="1"/>
-          </p:nvPr>
-        </p:nvSpPr>
-        <p:spPr>
-          <a:xfrm>
-            <a:off x="155574" y="4945063"/>
-            <a:ext cx="11879999" cy="1026367"/>
-          </a:xfrm>
-        </p:spPr>
-        <p:txBody>
-          <a:bodyPr>
-            <a:normAutofit/>
-          </a:bodyPr>
-          <a:lstStyle>
-            <a:lvl1pPr marL="0" indent="0">
-              <a:buNone/>
-              <a:defRPr sz="1800">
-                <a:solidFill>
-                  <a:schemeClr val="tx1">
-                    <a:lumMod val="65000"/>
-                    <a:lumOff val="35000"/>
-                  </a:schemeClr>
-                </a:solidFill>
-              </a:defRPr>
-            </a:lvl1pPr>
-          </a:lstStyle>
-          <a:p>
-            <a:pPr lvl="0"/>
-            <a:r>
-              <a:rPr lang="en-DE" dirty="0"/>
-              <a:t>[Event date], [Event name]</a:t>
-            </a:r>
-          </a:p>
-        </p:txBody>
-      </p:sp>
-    </p:spTree>
-    <p:extLst>
-      <p:ext uri="{BB962C8B-B14F-4D97-AF65-F5344CB8AC3E}">
-        <p14:creationId xmlns:p14="http://schemas.microsoft.com/office/powerpoint/2010/main" val="4061247862"/>
       </p:ext>
     </p:extLst>
   </p:cSld>
@@ -4173,11 +4169,19 @@
 </file>
 
 <file path=ppt/slideLayouts/slideLayout2.xml><?xml version="1.0" encoding="utf-8"?>
-<p:sldLayout xmlns:a="http://schemas.openxmlformats.org/drawingml/2006/main" xmlns:r="http://schemas.openxmlformats.org/officeDocument/2006/relationships" xmlns:p="http://schemas.openxmlformats.org/presentationml/2006/main" showMasterSp="0" matchingName="TITLE_2" preserve="1">
-  <p:cSld name="Section separator">
+<p:sldLayout xmlns:a="http://schemas.openxmlformats.org/drawingml/2006/main" xmlns:r="http://schemas.openxmlformats.org/officeDocument/2006/relationships" xmlns:p="http://schemas.openxmlformats.org/presentationml/2006/main" showMasterSp="0" matchingName="Title slide (Variant 2)" preserve="1" userDrawn="1">
+  <p:cSld name="fewiknfewkfw">
+    <p:bg>
+      <p:bgPr>
+        <a:solidFill>
+          <a:srgbClr val="FFFFFF"/>
+        </a:solidFill>
+        <a:effectLst/>
+      </p:bgPr>
+    </p:bg>
     <p:spTree>
       <p:nvGrpSpPr>
-        <p:cNvPr id="1" name="Shape 66"/>
+        <p:cNvPr id="1" name="Shape 21"/>
         <p:cNvGrpSpPr/>
         <p:nvPr/>
       </p:nvGrpSpPr>
@@ -4191,10 +4195,10 @@
       </p:grpSpPr>
       <p:pic>
         <p:nvPicPr>
-          <p:cNvPr id="5" name="Picture 4">
-            <a:extLst>
-              <a:ext uri="{FF2B5EF4-FFF2-40B4-BE49-F238E27FC236}">
-                <a16:creationId xmlns:a16="http://schemas.microsoft.com/office/drawing/2014/main" id="{79D1EB2D-02D0-0618-85D9-FE1D3382ABAA}"/>
+          <p:cNvPr id="9" name="Picture 8">
+            <a:extLst>
+              <a:ext uri="{FF2B5EF4-FFF2-40B4-BE49-F238E27FC236}">
+                <a16:creationId xmlns:a16="http://schemas.microsoft.com/office/drawing/2014/main" id="{36419E6D-792C-A294-2683-62B5DDD1906D}"/>
               </a:ext>
             </a:extLst>
           </p:cNvPr>
@@ -4225,383 +4229,26 @@
           </a:prstGeom>
         </p:spPr>
       </p:pic>
-      <p:sp>
-        <p:nvSpPr>
-          <p:cNvPr id="67" name="Google Shape;67;p11"/>
-          <p:cNvSpPr txBox="1">
-            <a:spLocks noGrp="1"/>
-          </p:cNvSpPr>
-          <p:nvPr>
-            <p:ph type="ctrTitle"/>
-          </p:nvPr>
-        </p:nvSpPr>
-        <p:spPr>
-          <a:xfrm>
-            <a:off x="415611" y="992767"/>
-            <a:ext cx="11360800" cy="2736800"/>
-          </a:xfrm>
-          <a:prstGeom prst="rect">
-            <a:avLst/>
-          </a:prstGeom>
-        </p:spPr>
-        <p:txBody>
-          <a:bodyPr spcFirstLastPara="1" wrap="square" lIns="91425" tIns="45700" rIns="91425" bIns="45700" anchor="b" anchorCtr="0">
-            <a:noAutofit/>
-          </a:bodyPr>
-          <a:lstStyle>
-            <a:lvl1pPr lvl="0" algn="ctr" rtl="0">
-              <a:spcBef>
-                <a:spcPts val="0"/>
-              </a:spcBef>
-              <a:spcAft>
-                <a:spcPts val="0"/>
-              </a:spcAft>
-              <a:buSzPts val="5200"/>
-              <a:buNone/>
-              <a:defRPr sz="6933">
-                <a:solidFill>
-                  <a:srgbClr val="0E2D38"/>
-                </a:solidFill>
-              </a:defRPr>
-            </a:lvl1pPr>
-            <a:lvl2pPr lvl="1" algn="ctr" rtl="0">
-              <a:spcBef>
-                <a:spcPts val="0"/>
-              </a:spcBef>
-              <a:spcAft>
-                <a:spcPts val="0"/>
-              </a:spcAft>
-              <a:buSzPts val="5200"/>
-              <a:buNone/>
-              <a:defRPr sz="6933"/>
-            </a:lvl2pPr>
-            <a:lvl3pPr lvl="2" algn="ctr" rtl="0">
-              <a:spcBef>
-                <a:spcPts val="0"/>
-              </a:spcBef>
-              <a:spcAft>
-                <a:spcPts val="0"/>
-              </a:spcAft>
-              <a:buSzPts val="5200"/>
-              <a:buNone/>
-              <a:defRPr sz="6933"/>
-            </a:lvl3pPr>
-            <a:lvl4pPr lvl="3" algn="ctr" rtl="0">
-              <a:spcBef>
-                <a:spcPts val="0"/>
-              </a:spcBef>
-              <a:spcAft>
-                <a:spcPts val="0"/>
-              </a:spcAft>
-              <a:buSzPts val="5200"/>
-              <a:buNone/>
-              <a:defRPr sz="6933"/>
-            </a:lvl4pPr>
-            <a:lvl5pPr lvl="4" algn="ctr" rtl="0">
-              <a:spcBef>
-                <a:spcPts val="0"/>
-              </a:spcBef>
-              <a:spcAft>
-                <a:spcPts val="0"/>
-              </a:spcAft>
-              <a:buSzPts val="5200"/>
-              <a:buNone/>
-              <a:defRPr sz="6933"/>
-            </a:lvl5pPr>
-            <a:lvl6pPr lvl="5" algn="ctr" rtl="0">
-              <a:spcBef>
-                <a:spcPts val="0"/>
-              </a:spcBef>
-              <a:spcAft>
-                <a:spcPts val="0"/>
-              </a:spcAft>
-              <a:buSzPts val="5200"/>
-              <a:buNone/>
-              <a:defRPr sz="6933"/>
-            </a:lvl6pPr>
-            <a:lvl7pPr lvl="6" algn="ctr" rtl="0">
-              <a:spcBef>
-                <a:spcPts val="0"/>
-              </a:spcBef>
-              <a:spcAft>
-                <a:spcPts val="0"/>
-              </a:spcAft>
-              <a:buSzPts val="5200"/>
-              <a:buNone/>
-              <a:defRPr sz="6933"/>
-            </a:lvl7pPr>
-            <a:lvl8pPr lvl="7" algn="ctr" rtl="0">
-              <a:spcBef>
-                <a:spcPts val="0"/>
-              </a:spcBef>
-              <a:spcAft>
-                <a:spcPts val="0"/>
-              </a:spcAft>
-              <a:buSzPts val="5200"/>
-              <a:buNone/>
-              <a:defRPr sz="6933"/>
-            </a:lvl8pPr>
-            <a:lvl9pPr lvl="8" algn="ctr" rtl="0">
-              <a:spcBef>
-                <a:spcPts val="0"/>
-              </a:spcBef>
-              <a:spcAft>
-                <a:spcPts val="0"/>
-              </a:spcAft>
-              <a:buSzPts val="5200"/>
-              <a:buNone/>
-              <a:defRPr sz="6933"/>
-            </a:lvl9pPr>
-          </a:lstStyle>
-          <a:p>
-            <a:endParaRPr dirty="0"/>
-          </a:p>
-        </p:txBody>
-      </p:sp>
-      <p:sp>
-        <p:nvSpPr>
-          <p:cNvPr id="68" name="Google Shape;68;p11"/>
-          <p:cNvSpPr txBox="1">
-            <a:spLocks noGrp="1"/>
-          </p:cNvSpPr>
-          <p:nvPr>
-            <p:ph type="subTitle" idx="1"/>
-          </p:nvPr>
-        </p:nvSpPr>
-        <p:spPr>
-          <a:xfrm>
-            <a:off x="415600" y="3778833"/>
-            <a:ext cx="11360800" cy="1056800"/>
-          </a:xfrm>
-          <a:prstGeom prst="rect">
-            <a:avLst/>
-          </a:prstGeom>
-        </p:spPr>
-        <p:txBody>
-          <a:bodyPr spcFirstLastPara="1" wrap="square" lIns="91425" tIns="45700" rIns="91425" bIns="45700" anchor="t" anchorCtr="0">
-            <a:normAutofit/>
-          </a:bodyPr>
-          <a:lstStyle>
-            <a:lvl1pPr lvl="0" algn="ctr" rtl="0">
-              <a:lnSpc>
-                <a:spcPct val="100000"/>
-              </a:lnSpc>
-              <a:spcBef>
-                <a:spcPts val="800"/>
-              </a:spcBef>
-              <a:spcAft>
-                <a:spcPts val="0"/>
-              </a:spcAft>
-              <a:buSzPts val="2800"/>
-              <a:buNone/>
-              <a:defRPr sz="3733">
-                <a:solidFill>
-                  <a:schemeClr val="bg1"/>
-                </a:solidFill>
-              </a:defRPr>
-            </a:lvl1pPr>
-            <a:lvl2pPr lvl="1" algn="ctr" rtl="0">
-              <a:lnSpc>
-                <a:spcPct val="100000"/>
-              </a:lnSpc>
-              <a:spcBef>
-                <a:spcPts val="400"/>
-              </a:spcBef>
-              <a:spcAft>
-                <a:spcPts val="0"/>
-              </a:spcAft>
-              <a:buSzPts val="2800"/>
-              <a:buNone/>
-              <a:defRPr sz="3733"/>
-            </a:lvl2pPr>
-            <a:lvl3pPr lvl="2" algn="ctr" rtl="0">
-              <a:lnSpc>
-                <a:spcPct val="100000"/>
-              </a:lnSpc>
-              <a:spcBef>
-                <a:spcPts val="400"/>
-              </a:spcBef>
-              <a:spcAft>
-                <a:spcPts val="0"/>
-              </a:spcAft>
-              <a:buSzPts val="2800"/>
-              <a:buNone/>
-              <a:defRPr sz="3733"/>
-            </a:lvl3pPr>
-            <a:lvl4pPr lvl="3" algn="ctr" rtl="0">
-              <a:lnSpc>
-                <a:spcPct val="100000"/>
-              </a:lnSpc>
-              <a:spcBef>
-                <a:spcPts val="400"/>
-              </a:spcBef>
-              <a:spcAft>
-                <a:spcPts val="0"/>
-              </a:spcAft>
-              <a:buSzPts val="2800"/>
-              <a:buNone/>
-              <a:defRPr sz="3733"/>
-            </a:lvl4pPr>
-            <a:lvl5pPr lvl="4" algn="ctr" rtl="0">
-              <a:lnSpc>
-                <a:spcPct val="100000"/>
-              </a:lnSpc>
-              <a:spcBef>
-                <a:spcPts val="667"/>
-              </a:spcBef>
-              <a:spcAft>
-                <a:spcPts val="0"/>
-              </a:spcAft>
-              <a:buSzPts val="2800"/>
-              <a:buNone/>
-              <a:defRPr sz="3733"/>
-            </a:lvl5pPr>
-            <a:lvl6pPr lvl="5" algn="ctr" rtl="0">
-              <a:lnSpc>
-                <a:spcPct val="100000"/>
-              </a:lnSpc>
-              <a:spcBef>
-                <a:spcPts val="667"/>
-              </a:spcBef>
-              <a:spcAft>
-                <a:spcPts val="0"/>
-              </a:spcAft>
-              <a:buSzPts val="2800"/>
-              <a:buNone/>
-              <a:defRPr sz="3733"/>
-            </a:lvl6pPr>
-            <a:lvl7pPr lvl="6" algn="ctr" rtl="0">
-              <a:lnSpc>
-                <a:spcPct val="100000"/>
-              </a:lnSpc>
-              <a:spcBef>
-                <a:spcPts val="667"/>
-              </a:spcBef>
-              <a:spcAft>
-                <a:spcPts val="0"/>
-              </a:spcAft>
-              <a:buSzPts val="2800"/>
-              <a:buNone/>
-              <a:defRPr sz="3733"/>
-            </a:lvl7pPr>
-            <a:lvl8pPr lvl="7" algn="ctr" rtl="0">
-              <a:lnSpc>
-                <a:spcPct val="100000"/>
-              </a:lnSpc>
-              <a:spcBef>
-                <a:spcPts val="667"/>
-              </a:spcBef>
-              <a:spcAft>
-                <a:spcPts val="0"/>
-              </a:spcAft>
-              <a:buSzPts val="2800"/>
-              <a:buNone/>
-              <a:defRPr sz="3733"/>
-            </a:lvl8pPr>
-            <a:lvl9pPr lvl="8" algn="ctr" rtl="0">
-              <a:lnSpc>
-                <a:spcPct val="100000"/>
-              </a:lnSpc>
-              <a:spcBef>
-                <a:spcPts val="667"/>
-              </a:spcBef>
-              <a:spcAft>
-                <a:spcPts val="0"/>
-              </a:spcAft>
-              <a:buSzPts val="2800"/>
-              <a:buNone/>
-              <a:defRPr sz="3733"/>
-            </a:lvl9pPr>
-          </a:lstStyle>
-          <a:p>
-            <a:endParaRPr dirty="0"/>
-          </a:p>
-        </p:txBody>
-      </p:sp>
-    </p:spTree>
-    <p:extLst>
-      <p:ext uri="{BB962C8B-B14F-4D97-AF65-F5344CB8AC3E}">
-        <p14:creationId xmlns:p14="http://schemas.microsoft.com/office/powerpoint/2010/main" val="3770519690"/>
-      </p:ext>
-    </p:extLst>
-  </p:cSld>
-  <p:clrMapOvr>
-    <a:masterClrMapping/>
-  </p:clrMapOvr>
-</p:sldLayout>
-</file>
-
-<file path=ppt/slideLayouts/slideLayout20.xml><?xml version="1.0" encoding="utf-8"?>
-<p:sldLayout xmlns:a="http://schemas.openxmlformats.org/drawingml/2006/main" xmlns:r="http://schemas.openxmlformats.org/officeDocument/2006/relationships" xmlns:p="http://schemas.openxmlformats.org/presentationml/2006/main" showMasterSp="0" matchingName="Dark References" preserve="1" userDrawn="1">
-  <p:cSld name="Dark References">
-    <p:spTree>
-      <p:nvGrpSpPr>
-        <p:cNvPr id="1" name="Shape 54"/>
-        <p:cNvGrpSpPr/>
-        <p:nvPr/>
-      </p:nvGrpSpPr>
-      <p:grpSpPr>
-        <a:xfrm>
-          <a:off x="0" y="0"/>
-          <a:ext cx="0" cy="0"/>
-          <a:chOff x="0" y="0"/>
-          <a:chExt cx="0" cy="0"/>
-        </a:xfrm>
-      </p:grpSpPr>
-      <p:pic>
-        <p:nvPicPr>
-          <p:cNvPr id="5" name="Picture 4">
-            <a:extLst>
-              <a:ext uri="{FF2B5EF4-FFF2-40B4-BE49-F238E27FC236}">
-                <a16:creationId xmlns:a16="http://schemas.microsoft.com/office/drawing/2014/main" id="{8243973C-9245-EAF0-AC58-A16A47890ED0}"/>
-              </a:ext>
-            </a:extLst>
-          </p:cNvPr>
-          <p:cNvPicPr>
-            <a:picLocks noChangeAspect="1"/>
-          </p:cNvPicPr>
-          <p:nvPr userDrawn="1"/>
-        </p:nvPicPr>
-        <p:blipFill>
-          <a:blip r:embed="rId2">
-            <a:alphaModFix amt="85000"/>
-            <a:extLst>
-              <a:ext uri="{28A0092B-C50C-407E-A947-70E740481C1C}">
-                <a14:useLocalDpi xmlns:a14="http://schemas.microsoft.com/office/drawing/2010/main" val="0"/>
-              </a:ext>
-            </a:extLst>
-          </a:blip>
-          <a:srcRect/>
-          <a:stretch/>
-        </p:blipFill>
-        <p:spPr>
-          <a:xfrm>
-            <a:off x="0" y="0"/>
-            <a:ext cx="12192000" cy="6858000"/>
-          </a:xfrm>
-          <a:prstGeom prst="rect">
-            <a:avLst/>
-          </a:prstGeom>
-        </p:spPr>
-      </p:pic>
       <p:cxnSp>
         <p:nvCxnSpPr>
-          <p:cNvPr id="57" name="Google Shape;57;p10"/>
-          <p:cNvCxnSpPr/>
+          <p:cNvPr id="24" name="Google Shape;24;p4"/>
+          <p:cNvCxnSpPr>
+            <a:cxnSpLocks/>
+          </p:cNvCxnSpPr>
           <p:nvPr/>
         </p:nvCxnSpPr>
         <p:spPr>
           <a:xfrm>
-            <a:off x="3716421" y="2608481"/>
-            <a:ext cx="0" cy="1600400"/>
+            <a:off x="3932481" y="1505165"/>
+            <a:ext cx="0" cy="3703899"/>
           </a:xfrm>
           <a:prstGeom prst="straightConnector1">
             <a:avLst/>
           </a:prstGeom>
           <a:noFill/>
-          <a:ln w="19050" cap="flat" cmpd="sng">
+          <a:ln w="38100" cap="flat" cmpd="sng">
             <a:solidFill>
-              <a:schemeClr val="lt1"/>
+              <a:schemeClr val="bg1"/>
             </a:solidFill>
             <a:prstDash val="solid"/>
             <a:miter lim="800000"/>
@@ -4612,363 +4259,10 @@
       </p:cxnSp>
       <p:pic>
         <p:nvPicPr>
-          <p:cNvPr id="62" name="Google Shape;62;p10"/>
-          <p:cNvPicPr preferRelativeResize="0"/>
-          <p:nvPr/>
-        </p:nvPicPr>
-        <p:blipFill>
-          <a:blip r:embed="rId3">
-            <a:extLst>
-              <a:ext uri="{28A0092B-C50C-407E-A947-70E740481C1C}">
-                <a14:useLocalDpi xmlns:a14="http://schemas.microsoft.com/office/drawing/2010/main" val="0"/>
-              </a:ext>
-              <a:ext uri="{96DAC541-7B7A-43D3-8B79-37D633B846F1}">
-                <asvg:svgBlip xmlns:asvg="http://schemas.microsoft.com/office/drawing/2016/SVG/main" r:embed="rId4"/>
-              </a:ext>
-            </a:extLst>
-          </a:blip>
-          <a:srcRect/>
-          <a:stretch/>
-        </p:blipFill>
-        <p:spPr>
-          <a:xfrm>
-            <a:off x="3071993" y="6285589"/>
-            <a:ext cx="414529" cy="408850"/>
-          </a:xfrm>
-          <a:prstGeom prst="rect">
-            <a:avLst/>
-          </a:prstGeom>
-          <a:noFill/>
-          <a:ln>
-            <a:noFill/>
-          </a:ln>
-        </p:spPr>
-      </p:pic>
-      <p:pic>
-        <p:nvPicPr>
-          <p:cNvPr id="64" name="Google Shape;64;p10"/>
-          <p:cNvPicPr preferRelativeResize="0"/>
-          <p:nvPr/>
-        </p:nvPicPr>
-        <p:blipFill>
-          <a:blip r:embed="rId5">
-            <a:extLst>
-              <a:ext uri="{28A0092B-C50C-407E-A947-70E740481C1C}">
-                <a14:useLocalDpi xmlns:a14="http://schemas.microsoft.com/office/drawing/2010/main" val="0"/>
-              </a:ext>
-              <a:ext uri="{96DAC541-7B7A-43D3-8B79-37D633B846F1}">
-                <asvg:svgBlip xmlns:asvg="http://schemas.microsoft.com/office/drawing/2016/SVG/main" r:embed="rId6"/>
-              </a:ext>
-            </a:extLst>
-          </a:blip>
-          <a:srcRect/>
-          <a:stretch/>
-        </p:blipFill>
-        <p:spPr>
-          <a:xfrm>
-            <a:off x="152659" y="6282751"/>
-            <a:ext cx="414528" cy="414528"/>
-          </a:xfrm>
-          <a:prstGeom prst="rect">
-            <a:avLst/>
-          </a:prstGeom>
-          <a:noFill/>
-          <a:ln>
-            <a:noFill/>
-          </a:ln>
-        </p:spPr>
-      </p:pic>
-      <p:pic>
-        <p:nvPicPr>
-          <p:cNvPr id="65" name="Google Shape;65;p10"/>
-          <p:cNvPicPr preferRelativeResize="0"/>
-          <p:nvPr/>
-        </p:nvPicPr>
-        <p:blipFill>
-          <a:blip r:embed="rId7">
-            <a:extLst>
-              <a:ext uri="{28A0092B-C50C-407E-A947-70E740481C1C}">
-                <a14:useLocalDpi xmlns:a14="http://schemas.microsoft.com/office/drawing/2010/main" val="0"/>
-              </a:ext>
-              <a:ext uri="{96DAC541-7B7A-43D3-8B79-37D633B846F1}">
-                <asvg:svgBlip xmlns:asvg="http://schemas.microsoft.com/office/drawing/2016/SVG/main" r:embed="rId8"/>
-              </a:ext>
-            </a:extLst>
-          </a:blip>
-          <a:srcRect/>
-          <a:stretch/>
-        </p:blipFill>
-        <p:spPr>
-          <a:xfrm>
-            <a:off x="5971585" y="6318997"/>
-            <a:ext cx="408600" cy="336106"/>
-          </a:xfrm>
-          <a:prstGeom prst="rect">
-            <a:avLst/>
-          </a:prstGeom>
-          <a:noFill/>
-          <a:ln>
-            <a:noFill/>
-          </a:ln>
-        </p:spPr>
-      </p:pic>
-      <p:sp>
-        <p:nvSpPr>
-          <p:cNvPr id="6" name="Picture Placeholder 5">
-            <a:extLst>
-              <a:ext uri="{FF2B5EF4-FFF2-40B4-BE49-F238E27FC236}">
-                <a16:creationId xmlns:a16="http://schemas.microsoft.com/office/drawing/2014/main" id="{2631C45D-A4AF-1223-E180-EB9E96FA2AE4}"/>
-              </a:ext>
-            </a:extLst>
-          </p:cNvPr>
-          <p:cNvSpPr>
-            <a:spLocks noGrp="1"/>
-          </p:cNvSpPr>
-          <p:nvPr>
-            <p:ph type="pic" sz="quarter" idx="13"/>
-          </p:nvPr>
-        </p:nvSpPr>
-        <p:spPr>
-          <a:xfrm>
-            <a:off x="277813" y="1289050"/>
-            <a:ext cx="3206750" cy="4024313"/>
-          </a:xfrm>
-        </p:spPr>
-        <p:txBody>
-          <a:bodyPr/>
-          <a:lstStyle>
-            <a:lvl1pPr marL="0" indent="0">
-              <a:buNone/>
-              <a:defRPr/>
-            </a:lvl1pPr>
-          </a:lstStyle>
-          <a:p>
-            <a:endParaRPr lang="en-DE" dirty="0"/>
-          </a:p>
-        </p:txBody>
-      </p:sp>
-      <p:sp>
-        <p:nvSpPr>
-          <p:cNvPr id="8" name="Text Placeholder 7">
-            <a:extLst>
-              <a:ext uri="{FF2B5EF4-FFF2-40B4-BE49-F238E27FC236}">
-                <a16:creationId xmlns:a16="http://schemas.microsoft.com/office/drawing/2014/main" id="{E469473F-31A1-DA1A-1446-8C54C99F5645}"/>
-              </a:ext>
-            </a:extLst>
-          </p:cNvPr>
-          <p:cNvSpPr>
-            <a:spLocks noGrp="1"/>
-          </p:cNvSpPr>
-          <p:nvPr>
-            <p:ph type="body" sz="quarter" idx="14"/>
-          </p:nvPr>
-        </p:nvSpPr>
-        <p:spPr>
-          <a:xfrm>
-            <a:off x="4382294" y="1289050"/>
-            <a:ext cx="6911975" cy="1828800"/>
-          </a:xfrm>
-        </p:spPr>
-        <p:txBody>
-          <a:bodyPr/>
-          <a:lstStyle>
-            <a:lvl1pPr marL="0" indent="0">
-              <a:buNone/>
-              <a:defRPr/>
-            </a:lvl1pPr>
-          </a:lstStyle>
-          <a:p>
-            <a:pPr lvl="0"/>
-            <a:endParaRPr lang="en-DE" dirty="0"/>
-          </a:p>
-        </p:txBody>
-      </p:sp>
-      <p:sp>
-        <p:nvSpPr>
-          <p:cNvPr id="12" name="Text Placeholder 11">
-            <a:extLst>
-              <a:ext uri="{FF2B5EF4-FFF2-40B4-BE49-F238E27FC236}">
-                <a16:creationId xmlns:a16="http://schemas.microsoft.com/office/drawing/2014/main" id="{AB34C56E-9BDB-F5E2-1AD6-4C9ACB81D802}"/>
-              </a:ext>
-            </a:extLst>
-          </p:cNvPr>
-          <p:cNvSpPr>
-            <a:spLocks noGrp="1"/>
-          </p:cNvSpPr>
-          <p:nvPr>
-            <p:ph type="body" sz="quarter" idx="16"/>
-          </p:nvPr>
-        </p:nvSpPr>
-        <p:spPr>
-          <a:xfrm>
-            <a:off x="700759" y="6295340"/>
-            <a:ext cx="2302323" cy="408600"/>
-          </a:xfrm>
-        </p:spPr>
-        <p:txBody>
-          <a:bodyPr anchor="ctr">
-            <a:normAutofit/>
-          </a:bodyPr>
-          <a:lstStyle>
-            <a:lvl1pPr marL="0" indent="0">
-              <a:buNone/>
-              <a:defRPr sz="2000"/>
-            </a:lvl1pPr>
-          </a:lstStyle>
-          <a:p>
-            <a:pPr lvl="0"/>
-            <a:endParaRPr lang="en-DE" dirty="0"/>
-          </a:p>
-        </p:txBody>
-      </p:sp>
-      <p:sp>
-        <p:nvSpPr>
-          <p:cNvPr id="13" name="Text Placeholder 11">
-            <a:extLst>
-              <a:ext uri="{FF2B5EF4-FFF2-40B4-BE49-F238E27FC236}">
-                <a16:creationId xmlns:a16="http://schemas.microsoft.com/office/drawing/2014/main" id="{210C2267-198C-B65E-1588-1D8ADC032B0D}"/>
-              </a:ext>
-            </a:extLst>
-          </p:cNvPr>
-          <p:cNvSpPr>
-            <a:spLocks noGrp="1"/>
-          </p:cNvSpPr>
-          <p:nvPr>
-            <p:ph type="body" sz="quarter" idx="17"/>
-          </p:nvPr>
-        </p:nvSpPr>
-        <p:spPr>
-          <a:xfrm>
-            <a:off x="3540472" y="6295340"/>
-            <a:ext cx="2302323" cy="408600"/>
-          </a:xfrm>
-        </p:spPr>
-        <p:txBody>
-          <a:bodyPr anchor="ctr">
-            <a:normAutofit/>
-          </a:bodyPr>
-          <a:lstStyle>
-            <a:lvl1pPr marL="0" indent="0">
-              <a:buNone/>
-              <a:defRPr sz="2000"/>
-            </a:lvl1pPr>
-          </a:lstStyle>
-          <a:p>
-            <a:pPr lvl="0"/>
-            <a:endParaRPr lang="en-DE" dirty="0"/>
-          </a:p>
-        </p:txBody>
-      </p:sp>
-      <p:sp>
-        <p:nvSpPr>
-          <p:cNvPr id="14" name="Text Placeholder 11">
-            <a:extLst>
-              <a:ext uri="{FF2B5EF4-FFF2-40B4-BE49-F238E27FC236}">
-                <a16:creationId xmlns:a16="http://schemas.microsoft.com/office/drawing/2014/main" id="{B755F42B-5D4D-06C9-BCF0-324CE2951DC3}"/>
-              </a:ext>
-            </a:extLst>
-          </p:cNvPr>
-          <p:cNvSpPr>
-            <a:spLocks noGrp="1"/>
-          </p:cNvSpPr>
-          <p:nvPr>
-            <p:ph type="body" sz="quarter" idx="18"/>
-          </p:nvPr>
-        </p:nvSpPr>
-        <p:spPr>
-          <a:xfrm>
-            <a:off x="6395146" y="6295340"/>
-            <a:ext cx="2302323" cy="408600"/>
-          </a:xfrm>
-        </p:spPr>
-        <p:txBody>
-          <a:bodyPr anchor="ctr">
-            <a:normAutofit/>
-          </a:bodyPr>
-          <a:lstStyle>
-            <a:lvl1pPr marL="0" indent="0">
-              <a:buNone/>
-              <a:defRPr sz="2000"/>
-            </a:lvl1pPr>
-          </a:lstStyle>
-          <a:p>
-            <a:pPr lvl="0"/>
-            <a:endParaRPr lang="en-DE" dirty="0"/>
-          </a:p>
-        </p:txBody>
-      </p:sp>
-      <p:sp>
-        <p:nvSpPr>
-          <p:cNvPr id="7" name="Text Placeholder 7">
-            <a:extLst>
-              <a:ext uri="{FF2B5EF4-FFF2-40B4-BE49-F238E27FC236}">
-                <a16:creationId xmlns:a16="http://schemas.microsoft.com/office/drawing/2014/main" id="{601629C1-0A84-0479-0506-5F80A7013C53}"/>
-              </a:ext>
-            </a:extLst>
-          </p:cNvPr>
-          <p:cNvSpPr>
-            <a:spLocks noGrp="1"/>
-          </p:cNvSpPr>
-          <p:nvPr>
-            <p:ph type="body" sz="quarter" idx="15"/>
-          </p:nvPr>
-        </p:nvSpPr>
-        <p:spPr>
-          <a:xfrm>
-            <a:off x="4382293" y="3310572"/>
-            <a:ext cx="6911975" cy="1828800"/>
-          </a:xfrm>
-        </p:spPr>
-        <p:txBody>
-          <a:bodyPr/>
-          <a:lstStyle>
-            <a:lvl1pPr marL="0" indent="0">
-              <a:buNone/>
-              <a:defRPr/>
-            </a:lvl1pPr>
-          </a:lstStyle>
-          <a:p>
-            <a:pPr lvl="0"/>
-            <a:endParaRPr lang="en-DE" dirty="0"/>
-          </a:p>
-        </p:txBody>
-      </p:sp>
-    </p:spTree>
-    <p:extLst>
-      <p:ext uri="{BB962C8B-B14F-4D97-AF65-F5344CB8AC3E}">
-        <p14:creationId xmlns:p14="http://schemas.microsoft.com/office/powerpoint/2010/main" val="749175935"/>
-      </p:ext>
-    </p:extLst>
-  </p:cSld>
-  <p:clrMapOvr>
-    <a:masterClrMapping/>
-  </p:clrMapOvr>
-</p:sldLayout>
-</file>
-
-<file path=ppt/slideLayouts/slideLayout21.xml><?xml version="1.0" encoding="utf-8"?>
-<p:sldLayout xmlns:a="http://schemas.openxmlformats.org/drawingml/2006/main" xmlns:r="http://schemas.openxmlformats.org/officeDocument/2006/relationships" xmlns:p="http://schemas.openxmlformats.org/presentationml/2006/main" showMasterSp="0" matchingName="Dark References" preserve="1" userDrawn="1">
-  <p:cSld name="1_Dark References">
-    <p:spTree>
-      <p:nvGrpSpPr>
-        <p:cNvPr id="1" name="Shape 54"/>
-        <p:cNvGrpSpPr/>
-        <p:nvPr/>
-      </p:nvGrpSpPr>
-      <p:grpSpPr>
-        <a:xfrm>
-          <a:off x="0" y="0"/>
-          <a:ext cx="0" cy="0"/>
-          <a:chOff x="0" y="0"/>
-          <a:chExt cx="0" cy="0"/>
-        </a:xfrm>
-      </p:grpSpPr>
-      <p:pic>
-        <p:nvPicPr>
-          <p:cNvPr id="5" name="Picture 4">
-            <a:extLst>
-              <a:ext uri="{FF2B5EF4-FFF2-40B4-BE49-F238E27FC236}">
-                <a16:creationId xmlns:a16="http://schemas.microsoft.com/office/drawing/2014/main" id="{571C9378-B3C2-3490-B694-78DF69383BE1}"/>
+          <p:cNvPr id="13" name="Picture Placeholder 38">
+            <a:extLst>
+              <a:ext uri="{FF2B5EF4-FFF2-40B4-BE49-F238E27FC236}">
+                <a16:creationId xmlns:a16="http://schemas.microsoft.com/office/drawing/2014/main" id="{79C63365-FF4F-9CE1-4D8D-35CF8A436F98}"/>
               </a:ext>
             </a:extLst>
           </p:cNvPr>
@@ -4977,606 +4271,33 @@
           </p:cNvPicPr>
           <p:nvPr userDrawn="1"/>
         </p:nvPicPr>
-        <p:blipFill>
-          <a:blip r:embed="rId2">
-            <a:alphaModFix amt="85000"/>
+        <p:blipFill rotWithShape="1">
+          <a:blip r:embed="rId3" cstate="print">
             <a:extLst>
               <a:ext uri="{28A0092B-C50C-407E-A947-70E740481C1C}">
                 <a14:useLocalDpi xmlns:a14="http://schemas.microsoft.com/office/drawing/2010/main" val="0"/>
               </a:ext>
             </a:extLst>
           </a:blip>
-          <a:srcRect/>
+          <a:srcRect l="21021" r="-224"/>
           <a:stretch/>
         </p:blipFill>
         <p:spPr>
           <a:xfrm>
-            <a:off x="0" y="0"/>
-            <a:ext cx="12192000" cy="6858000"/>
+            <a:off x="287847" y="3596690"/>
+            <a:ext cx="3428575" cy="862663"/>
           </a:xfrm>
           <a:prstGeom prst="rect">
             <a:avLst/>
           </a:prstGeom>
         </p:spPr>
       </p:pic>
-      <p:cxnSp>
-        <p:nvCxnSpPr>
-          <p:cNvPr id="57" name="Google Shape;57;p10"/>
-          <p:cNvCxnSpPr/>
-          <p:nvPr/>
-        </p:nvCxnSpPr>
-        <p:spPr>
-          <a:xfrm>
-            <a:off x="3716421" y="2608481"/>
-            <a:ext cx="0" cy="1600400"/>
-          </a:xfrm>
-          <a:prstGeom prst="straightConnector1">
-            <a:avLst/>
-          </a:prstGeom>
-          <a:noFill/>
-          <a:ln w="19050" cap="flat" cmpd="sng">
-            <a:solidFill>
-              <a:schemeClr val="lt1"/>
-            </a:solidFill>
-            <a:prstDash val="solid"/>
-            <a:miter lim="800000"/>
-            <a:headEnd type="none" w="sm" len="sm"/>
-            <a:tailEnd type="none" w="sm" len="sm"/>
-          </a:ln>
-        </p:spPr>
-      </p:cxnSp>
-      <p:pic>
-        <p:nvPicPr>
-          <p:cNvPr id="62" name="Google Shape;62;p10"/>
-          <p:cNvPicPr preferRelativeResize="0"/>
-          <p:nvPr/>
-        </p:nvPicPr>
-        <p:blipFill rotWithShape="1">
-          <a:blip r:embed="rId3">
-            <a:alphaModFix/>
-            <a:biLevel thresh="75000"/>
-          </a:blip>
-          <a:srcRect/>
-          <a:stretch/>
-        </p:blipFill>
-        <p:spPr>
-          <a:xfrm>
-            <a:off x="3071993" y="6282750"/>
-            <a:ext cx="414529" cy="414529"/>
-          </a:xfrm>
-          <a:prstGeom prst="rect">
-            <a:avLst/>
-          </a:prstGeom>
-          <a:noFill/>
-          <a:ln>
-            <a:noFill/>
-          </a:ln>
-        </p:spPr>
-      </p:pic>
-      <p:pic>
-        <p:nvPicPr>
-          <p:cNvPr id="64" name="Google Shape;64;p10"/>
-          <p:cNvPicPr preferRelativeResize="0"/>
-          <p:nvPr/>
-        </p:nvPicPr>
-        <p:blipFill>
-          <a:blip r:embed="rId4">
-            <a:extLst>
-              <a:ext uri="{28A0092B-C50C-407E-A947-70E740481C1C}">
-                <a14:useLocalDpi xmlns:a14="http://schemas.microsoft.com/office/drawing/2010/main" val="0"/>
-              </a:ext>
-              <a:ext uri="{96DAC541-7B7A-43D3-8B79-37D633B846F1}">
-                <asvg:svgBlip xmlns:asvg="http://schemas.microsoft.com/office/drawing/2016/SVG/main" r:embed="rId5"/>
-              </a:ext>
-            </a:extLst>
-          </a:blip>
-          <a:srcRect/>
-          <a:stretch/>
-        </p:blipFill>
-        <p:spPr>
-          <a:xfrm>
-            <a:off x="152659" y="6282751"/>
-            <a:ext cx="414528" cy="414528"/>
-          </a:xfrm>
-          <a:prstGeom prst="rect">
-            <a:avLst/>
-          </a:prstGeom>
-          <a:noFill/>
-          <a:ln>
-            <a:noFill/>
-          </a:ln>
-        </p:spPr>
-      </p:pic>
-      <p:sp>
-        <p:nvSpPr>
-          <p:cNvPr id="6" name="Picture Placeholder 5">
-            <a:extLst>
-              <a:ext uri="{FF2B5EF4-FFF2-40B4-BE49-F238E27FC236}">
-                <a16:creationId xmlns:a16="http://schemas.microsoft.com/office/drawing/2014/main" id="{2631C45D-A4AF-1223-E180-EB9E96FA2AE4}"/>
-              </a:ext>
-            </a:extLst>
-          </p:cNvPr>
-          <p:cNvSpPr>
-            <a:spLocks noGrp="1"/>
-          </p:cNvSpPr>
-          <p:nvPr>
-            <p:ph type="pic" sz="quarter" idx="13"/>
-          </p:nvPr>
-        </p:nvSpPr>
-        <p:spPr>
-          <a:xfrm>
-            <a:off x="277813" y="1289050"/>
-            <a:ext cx="3206750" cy="4024313"/>
-          </a:xfrm>
-        </p:spPr>
-        <p:txBody>
-          <a:bodyPr/>
-          <a:lstStyle>
-            <a:lvl1pPr marL="0" indent="0">
-              <a:buNone/>
-              <a:defRPr/>
-            </a:lvl1pPr>
-          </a:lstStyle>
-          <a:p>
-            <a:endParaRPr lang="en-DE" dirty="0"/>
-          </a:p>
-        </p:txBody>
-      </p:sp>
-      <p:sp>
-        <p:nvSpPr>
-          <p:cNvPr id="8" name="Text Placeholder 7">
-            <a:extLst>
-              <a:ext uri="{FF2B5EF4-FFF2-40B4-BE49-F238E27FC236}">
-                <a16:creationId xmlns:a16="http://schemas.microsoft.com/office/drawing/2014/main" id="{E469473F-31A1-DA1A-1446-8C54C99F5645}"/>
-              </a:ext>
-            </a:extLst>
-          </p:cNvPr>
-          <p:cNvSpPr>
-            <a:spLocks noGrp="1"/>
-          </p:cNvSpPr>
-          <p:nvPr>
-            <p:ph type="body" sz="quarter" idx="14"/>
-          </p:nvPr>
-        </p:nvSpPr>
-        <p:spPr>
-          <a:xfrm>
-            <a:off x="4382294" y="1289050"/>
-            <a:ext cx="6911975" cy="1828800"/>
-          </a:xfrm>
-        </p:spPr>
-        <p:txBody>
-          <a:bodyPr/>
-          <a:lstStyle>
-            <a:lvl1pPr marL="0" indent="0">
-              <a:buNone/>
-              <a:defRPr/>
-            </a:lvl1pPr>
-          </a:lstStyle>
-          <a:p>
-            <a:pPr lvl="0"/>
-            <a:endParaRPr lang="en-DE" dirty="0"/>
-          </a:p>
-        </p:txBody>
-      </p:sp>
-      <p:sp>
-        <p:nvSpPr>
-          <p:cNvPr id="12" name="Text Placeholder 11">
-            <a:extLst>
-              <a:ext uri="{FF2B5EF4-FFF2-40B4-BE49-F238E27FC236}">
-                <a16:creationId xmlns:a16="http://schemas.microsoft.com/office/drawing/2014/main" id="{AB34C56E-9BDB-F5E2-1AD6-4C9ACB81D802}"/>
-              </a:ext>
-            </a:extLst>
-          </p:cNvPr>
-          <p:cNvSpPr>
-            <a:spLocks noGrp="1"/>
-          </p:cNvSpPr>
-          <p:nvPr>
-            <p:ph type="body" sz="quarter" idx="16"/>
-          </p:nvPr>
-        </p:nvSpPr>
-        <p:spPr>
-          <a:xfrm>
-            <a:off x="700759" y="6295340"/>
-            <a:ext cx="2302323" cy="408600"/>
-          </a:xfrm>
-        </p:spPr>
-        <p:txBody>
-          <a:bodyPr anchor="ctr">
-            <a:normAutofit/>
-          </a:bodyPr>
-          <a:lstStyle>
-            <a:lvl1pPr marL="0" indent="0">
-              <a:buNone/>
-              <a:defRPr sz="2000"/>
-            </a:lvl1pPr>
-          </a:lstStyle>
-          <a:p>
-            <a:pPr lvl="0"/>
-            <a:endParaRPr lang="en-DE" dirty="0"/>
-          </a:p>
-        </p:txBody>
-      </p:sp>
-      <p:sp>
-        <p:nvSpPr>
-          <p:cNvPr id="13" name="Text Placeholder 11">
-            <a:extLst>
-              <a:ext uri="{FF2B5EF4-FFF2-40B4-BE49-F238E27FC236}">
-                <a16:creationId xmlns:a16="http://schemas.microsoft.com/office/drawing/2014/main" id="{210C2267-198C-B65E-1588-1D8ADC032B0D}"/>
-              </a:ext>
-            </a:extLst>
-          </p:cNvPr>
-          <p:cNvSpPr>
-            <a:spLocks noGrp="1"/>
-          </p:cNvSpPr>
-          <p:nvPr>
-            <p:ph type="body" sz="quarter" idx="17"/>
-          </p:nvPr>
-        </p:nvSpPr>
-        <p:spPr>
-          <a:xfrm>
-            <a:off x="3540472" y="6295340"/>
-            <a:ext cx="2302323" cy="408600"/>
-          </a:xfrm>
-        </p:spPr>
-        <p:txBody>
-          <a:bodyPr anchor="ctr">
-            <a:normAutofit/>
-          </a:bodyPr>
-          <a:lstStyle>
-            <a:lvl1pPr marL="0" indent="0">
-              <a:buNone/>
-              <a:defRPr sz="2000"/>
-            </a:lvl1pPr>
-          </a:lstStyle>
-          <a:p>
-            <a:pPr lvl="0"/>
-            <a:endParaRPr lang="en-DE" dirty="0"/>
-          </a:p>
-        </p:txBody>
-      </p:sp>
-      <p:sp>
-        <p:nvSpPr>
-          <p:cNvPr id="7" name="Text Placeholder 7">
-            <a:extLst>
-              <a:ext uri="{FF2B5EF4-FFF2-40B4-BE49-F238E27FC236}">
-                <a16:creationId xmlns:a16="http://schemas.microsoft.com/office/drawing/2014/main" id="{3BB4A897-33F0-001A-94D7-0DAB9D90E6F2}"/>
-              </a:ext>
-            </a:extLst>
-          </p:cNvPr>
-          <p:cNvSpPr>
-            <a:spLocks noGrp="1"/>
-          </p:cNvSpPr>
-          <p:nvPr>
-            <p:ph type="body" sz="quarter" idx="15"/>
-          </p:nvPr>
-        </p:nvSpPr>
-        <p:spPr>
-          <a:xfrm>
-            <a:off x="4382293" y="3310572"/>
-            <a:ext cx="6911975" cy="1828800"/>
-          </a:xfrm>
-        </p:spPr>
-        <p:txBody>
-          <a:bodyPr/>
-          <a:lstStyle>
-            <a:lvl1pPr marL="0" indent="0">
-              <a:buNone/>
-              <a:defRPr/>
-            </a:lvl1pPr>
-          </a:lstStyle>
-          <a:p>
-            <a:pPr lvl="0"/>
-            <a:endParaRPr lang="en-DE" dirty="0"/>
-          </a:p>
-        </p:txBody>
-      </p:sp>
-    </p:spTree>
-    <p:extLst>
-      <p:ext uri="{BB962C8B-B14F-4D97-AF65-F5344CB8AC3E}">
-        <p14:creationId xmlns:p14="http://schemas.microsoft.com/office/powerpoint/2010/main" val="4150270547"/>
-      </p:ext>
-    </p:extLst>
-  </p:cSld>
-  <p:clrMapOvr>
-    <a:masterClrMapping/>
-  </p:clrMapOvr>
-</p:sldLayout>
-</file>
-
-<file path=ppt/slideLayouts/slideLayout22.xml><?xml version="1.0" encoding="utf-8"?>
-<p:sldLayout xmlns:a="http://schemas.openxmlformats.org/drawingml/2006/main" xmlns:r="http://schemas.openxmlformats.org/officeDocument/2006/relationships" xmlns:p="http://schemas.openxmlformats.org/presentationml/2006/main" showMasterSp="0" matchingName="Dark References" preserve="1" userDrawn="1">
-  <p:cSld name="1_Dark References">
-    <p:spTree>
-      <p:nvGrpSpPr>
-        <p:cNvPr id="1" name="Shape 54"/>
-        <p:cNvGrpSpPr/>
-        <p:nvPr/>
-      </p:nvGrpSpPr>
-      <p:grpSpPr>
-        <a:xfrm>
-          <a:off x="0" y="0"/>
-          <a:ext cx="0" cy="0"/>
-          <a:chOff x="0" y="0"/>
-          <a:chExt cx="0" cy="0"/>
-        </a:xfrm>
-      </p:grpSpPr>
-      <p:pic>
-        <p:nvPicPr>
-          <p:cNvPr id="2" name="Picture 1">
-            <a:extLst>
-              <a:ext uri="{FF2B5EF4-FFF2-40B4-BE49-F238E27FC236}">
-                <a16:creationId xmlns:a16="http://schemas.microsoft.com/office/drawing/2014/main" id="{8B627619-3344-185B-7E1C-2B46F09DC6BD}"/>
-              </a:ext>
-            </a:extLst>
-          </p:cNvPr>
-          <p:cNvPicPr>
-            <a:picLocks noChangeAspect="1"/>
-          </p:cNvPicPr>
-          <p:nvPr userDrawn="1"/>
-        </p:nvPicPr>
-        <p:blipFill>
-          <a:blip r:embed="rId2">
-            <a:alphaModFix amt="85000"/>
-            <a:extLst>
-              <a:ext uri="{28A0092B-C50C-407E-A947-70E740481C1C}">
-                <a14:useLocalDpi xmlns:a14="http://schemas.microsoft.com/office/drawing/2010/main" val="0"/>
-              </a:ext>
-            </a:extLst>
-          </a:blip>
-          <a:srcRect/>
-          <a:stretch/>
-        </p:blipFill>
-        <p:spPr>
-          <a:xfrm>
-            <a:off x="0" y="0"/>
-            <a:ext cx="12192000" cy="6858000"/>
-          </a:xfrm>
-          <a:prstGeom prst="rect">
-            <a:avLst/>
-          </a:prstGeom>
-        </p:spPr>
-      </p:pic>
-      <p:cxnSp>
-        <p:nvCxnSpPr>
-          <p:cNvPr id="57" name="Google Shape;57;p10"/>
-          <p:cNvCxnSpPr/>
-          <p:nvPr/>
-        </p:nvCxnSpPr>
-        <p:spPr>
-          <a:xfrm>
-            <a:off x="3716421" y="2608481"/>
-            <a:ext cx="0" cy="1600400"/>
-          </a:xfrm>
-          <a:prstGeom prst="straightConnector1">
-            <a:avLst/>
-          </a:prstGeom>
-          <a:noFill/>
-          <a:ln w="19050" cap="flat" cmpd="sng">
-            <a:solidFill>
-              <a:schemeClr val="lt1"/>
-            </a:solidFill>
-            <a:prstDash val="solid"/>
-            <a:miter lim="800000"/>
-            <a:headEnd type="none" w="sm" len="sm"/>
-            <a:tailEnd type="none" w="sm" len="sm"/>
-          </a:ln>
-        </p:spPr>
-      </p:cxnSp>
-      <p:pic>
-        <p:nvPicPr>
-          <p:cNvPr id="64" name="Google Shape;64;p10"/>
-          <p:cNvPicPr preferRelativeResize="0"/>
-          <p:nvPr/>
-        </p:nvPicPr>
-        <p:blipFill>
-          <a:blip r:embed="rId3">
-            <a:extLst>
-              <a:ext uri="{28A0092B-C50C-407E-A947-70E740481C1C}">
-                <a14:useLocalDpi xmlns:a14="http://schemas.microsoft.com/office/drawing/2010/main" val="0"/>
-              </a:ext>
-              <a:ext uri="{96DAC541-7B7A-43D3-8B79-37D633B846F1}">
-                <asvg:svgBlip xmlns:asvg="http://schemas.microsoft.com/office/drawing/2016/SVG/main" r:embed="rId4"/>
-              </a:ext>
-            </a:extLst>
-          </a:blip>
-          <a:srcRect/>
-          <a:stretch/>
-        </p:blipFill>
-        <p:spPr>
-          <a:xfrm>
-            <a:off x="152659" y="6282751"/>
-            <a:ext cx="414528" cy="414528"/>
-          </a:xfrm>
-          <a:prstGeom prst="rect">
-            <a:avLst/>
-          </a:prstGeom>
-          <a:noFill/>
-          <a:ln>
-            <a:noFill/>
-          </a:ln>
-        </p:spPr>
-      </p:pic>
-      <p:sp>
-        <p:nvSpPr>
-          <p:cNvPr id="6" name="Picture Placeholder 5">
-            <a:extLst>
-              <a:ext uri="{FF2B5EF4-FFF2-40B4-BE49-F238E27FC236}">
-                <a16:creationId xmlns:a16="http://schemas.microsoft.com/office/drawing/2014/main" id="{2631C45D-A4AF-1223-E180-EB9E96FA2AE4}"/>
-              </a:ext>
-            </a:extLst>
-          </p:cNvPr>
-          <p:cNvSpPr>
-            <a:spLocks noGrp="1"/>
-          </p:cNvSpPr>
-          <p:nvPr>
-            <p:ph type="pic" sz="quarter" idx="13"/>
-          </p:nvPr>
-        </p:nvSpPr>
-        <p:spPr>
-          <a:xfrm>
-            <a:off x="277813" y="1289050"/>
-            <a:ext cx="3206750" cy="4024313"/>
-          </a:xfrm>
-        </p:spPr>
-        <p:txBody>
-          <a:bodyPr/>
-          <a:lstStyle>
-            <a:lvl1pPr marL="0" indent="0">
-              <a:buNone/>
-              <a:defRPr/>
-            </a:lvl1pPr>
-          </a:lstStyle>
-          <a:p>
-            <a:endParaRPr lang="en-DE" dirty="0"/>
-          </a:p>
-        </p:txBody>
-      </p:sp>
-      <p:sp>
-        <p:nvSpPr>
-          <p:cNvPr id="8" name="Text Placeholder 7">
-            <a:extLst>
-              <a:ext uri="{FF2B5EF4-FFF2-40B4-BE49-F238E27FC236}">
-                <a16:creationId xmlns:a16="http://schemas.microsoft.com/office/drawing/2014/main" id="{E469473F-31A1-DA1A-1446-8C54C99F5645}"/>
-              </a:ext>
-            </a:extLst>
-          </p:cNvPr>
-          <p:cNvSpPr>
-            <a:spLocks noGrp="1"/>
-          </p:cNvSpPr>
-          <p:nvPr>
-            <p:ph type="body" sz="quarter" idx="14"/>
-          </p:nvPr>
-        </p:nvSpPr>
-        <p:spPr>
-          <a:xfrm>
-            <a:off x="4382294" y="1289050"/>
-            <a:ext cx="6911975" cy="1828800"/>
-          </a:xfrm>
-        </p:spPr>
-        <p:txBody>
-          <a:bodyPr/>
-          <a:lstStyle>
-            <a:lvl1pPr marL="0" indent="0">
-              <a:buNone/>
-              <a:defRPr/>
-            </a:lvl1pPr>
-          </a:lstStyle>
-          <a:p>
-            <a:pPr lvl="0"/>
-            <a:endParaRPr lang="en-DE" dirty="0"/>
-          </a:p>
-        </p:txBody>
-      </p:sp>
-      <p:sp>
-        <p:nvSpPr>
-          <p:cNvPr id="12" name="Text Placeholder 11">
-            <a:extLst>
-              <a:ext uri="{FF2B5EF4-FFF2-40B4-BE49-F238E27FC236}">
-                <a16:creationId xmlns:a16="http://schemas.microsoft.com/office/drawing/2014/main" id="{AB34C56E-9BDB-F5E2-1AD6-4C9ACB81D802}"/>
-              </a:ext>
-            </a:extLst>
-          </p:cNvPr>
-          <p:cNvSpPr>
-            <a:spLocks noGrp="1"/>
-          </p:cNvSpPr>
-          <p:nvPr>
-            <p:ph type="body" sz="quarter" idx="16"/>
-          </p:nvPr>
-        </p:nvSpPr>
-        <p:spPr>
-          <a:xfrm>
-            <a:off x="700759" y="6295340"/>
-            <a:ext cx="2302323" cy="408600"/>
-          </a:xfrm>
-        </p:spPr>
-        <p:txBody>
-          <a:bodyPr anchor="ctr">
-            <a:normAutofit/>
-          </a:bodyPr>
-          <a:lstStyle>
-            <a:lvl1pPr marL="0" indent="0">
-              <a:buNone/>
-              <a:defRPr sz="2000"/>
-            </a:lvl1pPr>
-          </a:lstStyle>
-          <a:p>
-            <a:pPr lvl="0"/>
-            <a:endParaRPr lang="en-DE" dirty="0"/>
-          </a:p>
-        </p:txBody>
-      </p:sp>
-      <p:sp>
-        <p:nvSpPr>
-          <p:cNvPr id="4" name="Text Placeholder 7">
-            <a:extLst>
-              <a:ext uri="{FF2B5EF4-FFF2-40B4-BE49-F238E27FC236}">
-                <a16:creationId xmlns:a16="http://schemas.microsoft.com/office/drawing/2014/main" id="{D5540357-5332-D5D8-7379-56AD173E43EA}"/>
-              </a:ext>
-            </a:extLst>
-          </p:cNvPr>
-          <p:cNvSpPr>
-            <a:spLocks noGrp="1"/>
-          </p:cNvSpPr>
-          <p:nvPr>
-            <p:ph type="body" sz="quarter" idx="15"/>
-          </p:nvPr>
-        </p:nvSpPr>
-        <p:spPr>
-          <a:xfrm>
-            <a:off x="4382293" y="3310572"/>
-            <a:ext cx="6911975" cy="1828800"/>
-          </a:xfrm>
-        </p:spPr>
-        <p:txBody>
-          <a:bodyPr/>
-          <a:lstStyle>
-            <a:lvl1pPr marL="0" indent="0">
-              <a:buNone/>
-              <a:defRPr/>
-            </a:lvl1pPr>
-          </a:lstStyle>
-          <a:p>
-            <a:pPr lvl="0"/>
-            <a:endParaRPr lang="en-DE" dirty="0"/>
-          </a:p>
-        </p:txBody>
-      </p:sp>
-    </p:spTree>
-    <p:extLst>
-      <p:ext uri="{BB962C8B-B14F-4D97-AF65-F5344CB8AC3E}">
-        <p14:creationId xmlns:p14="http://schemas.microsoft.com/office/powerpoint/2010/main" val="127269235"/>
-      </p:ext>
-    </p:extLst>
-  </p:cSld>
-  <p:clrMapOvr>
-    <a:masterClrMapping/>
-  </p:clrMapOvr>
-</p:sldLayout>
-</file>
-
-<file path=ppt/slideLayouts/slideLayout3.xml><?xml version="1.0" encoding="utf-8"?>
-<p:sldLayout xmlns:a="http://schemas.openxmlformats.org/drawingml/2006/main" xmlns:r="http://schemas.openxmlformats.org/officeDocument/2006/relationships" xmlns:p="http://schemas.openxmlformats.org/presentationml/2006/main" preserve="1" userDrawn="1">
-  <p:cSld name="Title slide (Variant 1)">
-    <p:spTree>
-      <p:nvGrpSpPr>
-        <p:cNvPr id="1" name=""/>
-        <p:cNvGrpSpPr/>
-        <p:nvPr/>
-      </p:nvGrpSpPr>
-      <p:grpSpPr>
-        <a:xfrm>
-          <a:off x="0" y="0"/>
-          <a:ext cx="0" cy="0"/>
-          <a:chOff x="0" y="0"/>
-          <a:chExt cx="0" cy="0"/>
-        </a:xfrm>
-      </p:grpSpPr>
       <p:sp>
         <p:nvSpPr>
           <p:cNvPr id="3" name="Subtitle 2">
             <a:extLst>
               <a:ext uri="{FF2B5EF4-FFF2-40B4-BE49-F238E27FC236}">
-                <a16:creationId xmlns:a16="http://schemas.microsoft.com/office/drawing/2014/main" id="{582DEE7C-AF0C-A94C-0089-53BA99335C72}"/>
+                <a16:creationId xmlns:a16="http://schemas.microsoft.com/office/drawing/2014/main" id="{1F06C64B-0747-1E3C-2F6F-023166FCC9D7}"/>
               </a:ext>
             </a:extLst>
           </p:cNvPr>
@@ -5589,8 +4310,8 @@
         </p:nvSpPr>
         <p:spPr>
           <a:xfrm>
-            <a:off x="156000" y="3243098"/>
-            <a:ext cx="11880000" cy="1538452"/>
+            <a:off x="4003842" y="2772613"/>
+            <a:ext cx="8031731" cy="1374157"/>
           </a:xfrm>
         </p:spPr>
         <p:txBody>
@@ -5598,7 +4319,11 @@
           <a:lstStyle>
             <a:lvl1pPr marL="0" indent="0" algn="l">
               <a:buNone/>
-              <a:defRPr sz="2400"/>
+              <a:defRPr sz="2400">
+                <a:solidFill>
+                  <a:srgbClr val="0E2D38"/>
+                </a:solidFill>
+              </a:defRPr>
             </a:lvl1pPr>
             <a:lvl2pPr marL="457200" indent="0" algn="ctr">
               <a:buNone/>
@@ -5646,10 +4371,10 @@
       </p:sp>
       <p:sp>
         <p:nvSpPr>
-          <p:cNvPr id="12" name="Title 11">
-            <a:extLst>
-              <a:ext uri="{FF2B5EF4-FFF2-40B4-BE49-F238E27FC236}">
-                <a16:creationId xmlns:a16="http://schemas.microsoft.com/office/drawing/2014/main" id="{928B059B-334C-45D2-2325-10DA6A37B897}"/>
+          <p:cNvPr id="5" name="Title 11">
+            <a:extLst>
+              <a:ext uri="{FF2B5EF4-FFF2-40B4-BE49-F238E27FC236}">
+                <a16:creationId xmlns:a16="http://schemas.microsoft.com/office/drawing/2014/main" id="{C1C11967-B9EF-8DFC-1D07-D3C98B4BC9A6}"/>
               </a:ext>
             </a:extLst>
           </p:cNvPr>
@@ -5662,8 +4387,8 @@
         </p:nvSpPr>
         <p:spPr>
           <a:xfrm>
-            <a:off x="156000" y="1519073"/>
-            <a:ext cx="11880000" cy="1443202"/>
+            <a:off x="4004268" y="1519073"/>
+            <a:ext cx="8031731" cy="1108624"/>
           </a:xfrm>
         </p:spPr>
         <p:txBody>
@@ -5674,7 +4399,7 @@
             <a:lvl1pPr>
               <a:defRPr sz="3600">
                 <a:solidFill>
-                  <a:srgbClr val="0E2D38"/>
+                  <a:srgbClr val="FFFFFF"/>
                 </a:solidFill>
               </a:defRPr>
             </a:lvl1pPr>
@@ -5690,10 +4415,10 @@
       </p:sp>
       <p:sp>
         <p:nvSpPr>
-          <p:cNvPr id="4" name="Content Placeholder 3">
-            <a:extLst>
-              <a:ext uri="{FF2B5EF4-FFF2-40B4-BE49-F238E27FC236}">
-                <a16:creationId xmlns:a16="http://schemas.microsoft.com/office/drawing/2014/main" id="{697BC65F-206A-0B48-AF56-FE3AA1676AEE}"/>
+          <p:cNvPr id="7" name="Content Placeholder 3">
+            <a:extLst>
+              <a:ext uri="{FF2B5EF4-FFF2-40B4-BE49-F238E27FC236}">
+                <a16:creationId xmlns:a16="http://schemas.microsoft.com/office/drawing/2014/main" id="{87A97C8E-5DDF-1A84-41CE-EAEE753B7FF2}"/>
               </a:ext>
             </a:extLst>
           </p:cNvPr>
@@ -5706,8 +4431,8 @@
         </p:nvSpPr>
         <p:spPr>
           <a:xfrm>
-            <a:off x="155574" y="4945063"/>
-            <a:ext cx="11879999" cy="1026367"/>
+            <a:off x="4003843" y="4455981"/>
+            <a:ext cx="8031730" cy="753083"/>
           </a:xfrm>
         </p:spPr>
         <p:txBody>
@@ -5736,10 +4461,1543 @@
           </a:p>
         </p:txBody>
       </p:sp>
+      <p:pic>
+        <p:nvPicPr>
+          <p:cNvPr id="11" name="Picture 10">
+            <a:extLst>
+              <a:ext uri="{FF2B5EF4-FFF2-40B4-BE49-F238E27FC236}">
+                <a16:creationId xmlns:a16="http://schemas.microsoft.com/office/drawing/2014/main" id="{283C8477-FEFA-99DC-C8C9-EC963E0CA7B6}"/>
+              </a:ext>
+            </a:extLst>
+          </p:cNvPr>
+          <p:cNvPicPr>
+            <a:picLocks noChangeAspect="1"/>
+          </p:cNvPicPr>
+          <p:nvPr userDrawn="1"/>
+        </p:nvPicPr>
+        <p:blipFill>
+          <a:blip r:embed="rId4">
+            <a:extLst>
+              <a:ext uri="{28A0092B-C50C-407E-A947-70E740481C1C}">
+                <a14:useLocalDpi xmlns:a14="http://schemas.microsoft.com/office/drawing/2010/main" val="0"/>
+              </a:ext>
+            </a:extLst>
+          </a:blip>
+          <a:stretch>
+            <a:fillRect/>
+          </a:stretch>
+        </p:blipFill>
+        <p:spPr>
+          <a:xfrm>
+            <a:off x="1135087" y="1535824"/>
+            <a:ext cx="1734093" cy="1734093"/>
+          </a:xfrm>
+          <a:prstGeom prst="rect">
+            <a:avLst/>
+          </a:prstGeom>
+        </p:spPr>
+      </p:pic>
+      <p:pic>
+        <p:nvPicPr>
+          <p:cNvPr id="2" name="Graphic 1">
+            <a:extLst>
+              <a:ext uri="{FF2B5EF4-FFF2-40B4-BE49-F238E27FC236}">
+                <a16:creationId xmlns:a16="http://schemas.microsoft.com/office/drawing/2014/main" id="{3E0C42B3-B413-1928-D6C8-31E6ACDBB29E}"/>
+              </a:ext>
+            </a:extLst>
+          </p:cNvPr>
+          <p:cNvPicPr>
+            <a:picLocks noChangeAspect="1"/>
+          </p:cNvPicPr>
+          <p:nvPr userDrawn="1"/>
+        </p:nvPicPr>
+        <p:blipFill>
+          <a:blip r:embed="rId5" cstate="print">
+            <a:extLst>
+              <a:ext uri="{28A0092B-C50C-407E-A947-70E740481C1C}">
+                <a14:useLocalDpi xmlns:a14="http://schemas.microsoft.com/office/drawing/2010/main" val="0"/>
+              </a:ext>
+              <a:ext uri="{96DAC541-7B7A-43D3-8B79-37D633B846F1}">
+                <asvg:svgBlip xmlns:asvg="http://schemas.microsoft.com/office/drawing/2016/SVG/main" r:embed="rId6"/>
+              </a:ext>
+            </a:extLst>
+          </a:blip>
+          <a:stretch>
+            <a:fillRect/>
+          </a:stretch>
+        </p:blipFill>
+        <p:spPr>
+          <a:xfrm>
+            <a:off x="2812030" y="4661882"/>
+            <a:ext cx="844157" cy="529245"/>
+          </a:xfrm>
+          <a:prstGeom prst="rect">
+            <a:avLst/>
+          </a:prstGeom>
+        </p:spPr>
+      </p:pic>
+      <p:pic>
+        <p:nvPicPr>
+          <p:cNvPr id="4" name="Graphic 3">
+            <a:extLst>
+              <a:ext uri="{FF2B5EF4-FFF2-40B4-BE49-F238E27FC236}">
+                <a16:creationId xmlns:a16="http://schemas.microsoft.com/office/drawing/2014/main" id="{55638AA9-76D3-4551-92BC-4BF19C20FABE}"/>
+              </a:ext>
+            </a:extLst>
+          </p:cNvPr>
+          <p:cNvPicPr>
+            <a:picLocks noChangeAspect="1"/>
+          </p:cNvPicPr>
+          <p:nvPr userDrawn="1"/>
+        </p:nvPicPr>
+        <p:blipFill rotWithShape="1">
+          <a:blip r:embed="rId7">
+            <a:extLst>
+              <a:ext uri="{28A0092B-C50C-407E-A947-70E740481C1C}">
+                <a14:useLocalDpi xmlns:a14="http://schemas.microsoft.com/office/drawing/2010/main" val="0"/>
+              </a:ext>
+              <a:ext uri="{96DAC541-7B7A-43D3-8B79-37D633B846F1}">
+                <asvg:svgBlip xmlns:asvg="http://schemas.microsoft.com/office/drawing/2016/SVG/main" r:embed="rId8"/>
+              </a:ext>
+            </a:extLst>
+          </a:blip>
+          <a:srcRect t="-1" r="81934" b="-1"/>
+          <a:stretch/>
+        </p:blipFill>
+        <p:spPr>
+          <a:xfrm>
+            <a:off x="440438" y="4661882"/>
+            <a:ext cx="601738" cy="529245"/>
+          </a:xfrm>
+          <a:prstGeom prst="rect">
+            <a:avLst/>
+          </a:prstGeom>
+        </p:spPr>
+      </p:pic>
+      <p:pic>
+        <p:nvPicPr>
+          <p:cNvPr id="6" name="Graphic 5">
+            <a:extLst>
+              <a:ext uri="{FF2B5EF4-FFF2-40B4-BE49-F238E27FC236}">
+                <a16:creationId xmlns:a16="http://schemas.microsoft.com/office/drawing/2014/main" id="{8DE906CD-9AEB-E21D-75F9-4501493706B8}"/>
+              </a:ext>
+            </a:extLst>
+          </p:cNvPr>
+          <p:cNvPicPr>
+            <a:picLocks noChangeAspect="1"/>
+          </p:cNvPicPr>
+          <p:nvPr userDrawn="1"/>
+        </p:nvPicPr>
+        <p:blipFill rotWithShape="1">
+          <a:blip r:embed="rId7">
+            <a:extLst>
+              <a:ext uri="{28A0092B-C50C-407E-A947-70E740481C1C}">
+                <a14:useLocalDpi xmlns:a14="http://schemas.microsoft.com/office/drawing/2010/main" val="0"/>
+              </a:ext>
+              <a:ext uri="{96DAC541-7B7A-43D3-8B79-37D633B846F1}">
+                <asvg:svgBlip xmlns:asvg="http://schemas.microsoft.com/office/drawing/2016/SVG/main" r:embed="rId8"/>
+              </a:ext>
+            </a:extLst>
+          </a:blip>
+          <a:srcRect l="81992"/>
+          <a:stretch/>
+        </p:blipFill>
+        <p:spPr>
+          <a:xfrm>
+            <a:off x="1042176" y="4661883"/>
+            <a:ext cx="599795" cy="529244"/>
+          </a:xfrm>
+          <a:prstGeom prst="rect">
+            <a:avLst/>
+          </a:prstGeom>
+        </p:spPr>
+      </p:pic>
     </p:spTree>
     <p:extLst>
       <p:ext uri="{BB962C8B-B14F-4D97-AF65-F5344CB8AC3E}">
-        <p14:creationId xmlns:p14="http://schemas.microsoft.com/office/powerpoint/2010/main" val="2219985906"/>
+        <p14:creationId xmlns:p14="http://schemas.microsoft.com/office/powerpoint/2010/main" val="920521592"/>
+      </p:ext>
+    </p:extLst>
+  </p:cSld>
+  <p:clrMapOvr>
+    <a:masterClrMapping/>
+  </p:clrMapOvr>
+</p:sldLayout>
+</file>
+
+<file path=ppt/slideLayouts/slideLayout20.xml><?xml version="1.0" encoding="utf-8"?>
+<p:sldLayout xmlns:a="http://schemas.openxmlformats.org/drawingml/2006/main" xmlns:r="http://schemas.openxmlformats.org/officeDocument/2006/relationships" xmlns:p="http://schemas.openxmlformats.org/presentationml/2006/main" showMasterSp="0" matchingName="Acknowledgments (Email + GitHub + Twitter)" preserve="1" userDrawn="1">
+  <p:cSld name="Dark References">
+    <p:spTree>
+      <p:nvGrpSpPr>
+        <p:cNvPr id="1" name="Shape 54"/>
+        <p:cNvGrpSpPr/>
+        <p:nvPr/>
+      </p:nvGrpSpPr>
+      <p:grpSpPr>
+        <a:xfrm>
+          <a:off x="0" y="0"/>
+          <a:ext cx="0" cy="0"/>
+          <a:chOff x="0" y="0"/>
+          <a:chExt cx="0" cy="0"/>
+        </a:xfrm>
+      </p:grpSpPr>
+      <p:pic>
+        <p:nvPicPr>
+          <p:cNvPr id="5" name="Picture 4">
+            <a:extLst>
+              <a:ext uri="{FF2B5EF4-FFF2-40B4-BE49-F238E27FC236}">
+                <a16:creationId xmlns:a16="http://schemas.microsoft.com/office/drawing/2014/main" id="{8243973C-9245-EAF0-AC58-A16A47890ED0}"/>
+              </a:ext>
+            </a:extLst>
+          </p:cNvPr>
+          <p:cNvPicPr>
+            <a:picLocks noChangeAspect="1"/>
+          </p:cNvPicPr>
+          <p:nvPr userDrawn="1"/>
+        </p:nvPicPr>
+        <p:blipFill>
+          <a:blip r:embed="rId2">
+            <a:alphaModFix amt="85000"/>
+            <a:extLst>
+              <a:ext uri="{28A0092B-C50C-407E-A947-70E740481C1C}">
+                <a14:useLocalDpi xmlns:a14="http://schemas.microsoft.com/office/drawing/2010/main" val="0"/>
+              </a:ext>
+            </a:extLst>
+          </a:blip>
+          <a:srcRect/>
+          <a:stretch/>
+        </p:blipFill>
+        <p:spPr>
+          <a:xfrm>
+            <a:off x="0" y="0"/>
+            <a:ext cx="12192000" cy="6858000"/>
+          </a:xfrm>
+          <a:prstGeom prst="rect">
+            <a:avLst/>
+          </a:prstGeom>
+        </p:spPr>
+      </p:pic>
+      <p:cxnSp>
+        <p:nvCxnSpPr>
+          <p:cNvPr id="57" name="Google Shape;57;p10"/>
+          <p:cNvCxnSpPr/>
+          <p:nvPr/>
+        </p:nvCxnSpPr>
+        <p:spPr>
+          <a:xfrm>
+            <a:off x="3716421" y="2608481"/>
+            <a:ext cx="0" cy="1600400"/>
+          </a:xfrm>
+          <a:prstGeom prst="straightConnector1">
+            <a:avLst/>
+          </a:prstGeom>
+          <a:noFill/>
+          <a:ln w="19050" cap="flat" cmpd="sng">
+            <a:solidFill>
+              <a:schemeClr val="lt1"/>
+            </a:solidFill>
+            <a:prstDash val="solid"/>
+            <a:miter lim="800000"/>
+            <a:headEnd type="none" w="sm" len="sm"/>
+            <a:tailEnd type="none" w="sm" len="sm"/>
+          </a:ln>
+        </p:spPr>
+      </p:cxnSp>
+      <p:pic>
+        <p:nvPicPr>
+          <p:cNvPr id="62" name="Google Shape;62;p10"/>
+          <p:cNvPicPr preferRelativeResize="0"/>
+          <p:nvPr/>
+        </p:nvPicPr>
+        <p:blipFill>
+          <a:blip r:embed="rId3">
+            <a:extLst>
+              <a:ext uri="{28A0092B-C50C-407E-A947-70E740481C1C}">
+                <a14:useLocalDpi xmlns:a14="http://schemas.microsoft.com/office/drawing/2010/main" val="0"/>
+              </a:ext>
+              <a:ext uri="{96DAC541-7B7A-43D3-8B79-37D633B846F1}">
+                <asvg:svgBlip xmlns:asvg="http://schemas.microsoft.com/office/drawing/2016/SVG/main" r:embed="rId4"/>
+              </a:ext>
+            </a:extLst>
+          </a:blip>
+          <a:srcRect/>
+          <a:stretch/>
+        </p:blipFill>
+        <p:spPr>
+          <a:xfrm>
+            <a:off x="3071993" y="6285589"/>
+            <a:ext cx="414529" cy="408850"/>
+          </a:xfrm>
+          <a:prstGeom prst="rect">
+            <a:avLst/>
+          </a:prstGeom>
+          <a:noFill/>
+          <a:ln>
+            <a:noFill/>
+          </a:ln>
+        </p:spPr>
+      </p:pic>
+      <p:pic>
+        <p:nvPicPr>
+          <p:cNvPr id="64" name="Google Shape;64;p10"/>
+          <p:cNvPicPr preferRelativeResize="0"/>
+          <p:nvPr/>
+        </p:nvPicPr>
+        <p:blipFill>
+          <a:blip r:embed="rId5">
+            <a:extLst>
+              <a:ext uri="{28A0092B-C50C-407E-A947-70E740481C1C}">
+                <a14:useLocalDpi xmlns:a14="http://schemas.microsoft.com/office/drawing/2010/main" val="0"/>
+              </a:ext>
+              <a:ext uri="{96DAC541-7B7A-43D3-8B79-37D633B846F1}">
+                <asvg:svgBlip xmlns:asvg="http://schemas.microsoft.com/office/drawing/2016/SVG/main" r:embed="rId6"/>
+              </a:ext>
+            </a:extLst>
+          </a:blip>
+          <a:srcRect/>
+          <a:stretch/>
+        </p:blipFill>
+        <p:spPr>
+          <a:xfrm>
+            <a:off x="152659" y="6282751"/>
+            <a:ext cx="414528" cy="414528"/>
+          </a:xfrm>
+          <a:prstGeom prst="rect">
+            <a:avLst/>
+          </a:prstGeom>
+          <a:noFill/>
+          <a:ln>
+            <a:noFill/>
+          </a:ln>
+        </p:spPr>
+      </p:pic>
+      <p:pic>
+        <p:nvPicPr>
+          <p:cNvPr id="65" name="Google Shape;65;p10"/>
+          <p:cNvPicPr preferRelativeResize="0"/>
+          <p:nvPr/>
+        </p:nvPicPr>
+        <p:blipFill>
+          <a:blip r:embed="rId7">
+            <a:extLst>
+              <a:ext uri="{28A0092B-C50C-407E-A947-70E740481C1C}">
+                <a14:useLocalDpi xmlns:a14="http://schemas.microsoft.com/office/drawing/2010/main" val="0"/>
+              </a:ext>
+              <a:ext uri="{96DAC541-7B7A-43D3-8B79-37D633B846F1}">
+                <asvg:svgBlip xmlns:asvg="http://schemas.microsoft.com/office/drawing/2016/SVG/main" r:embed="rId8"/>
+              </a:ext>
+            </a:extLst>
+          </a:blip>
+          <a:srcRect/>
+          <a:stretch/>
+        </p:blipFill>
+        <p:spPr>
+          <a:xfrm>
+            <a:off x="5971585" y="6318997"/>
+            <a:ext cx="408600" cy="336106"/>
+          </a:xfrm>
+          <a:prstGeom prst="rect">
+            <a:avLst/>
+          </a:prstGeom>
+          <a:noFill/>
+          <a:ln>
+            <a:noFill/>
+          </a:ln>
+        </p:spPr>
+      </p:pic>
+      <p:sp>
+        <p:nvSpPr>
+          <p:cNvPr id="6" name="Picture Placeholder 5">
+            <a:extLst>
+              <a:ext uri="{FF2B5EF4-FFF2-40B4-BE49-F238E27FC236}">
+                <a16:creationId xmlns:a16="http://schemas.microsoft.com/office/drawing/2014/main" id="{2631C45D-A4AF-1223-E180-EB9E96FA2AE4}"/>
+              </a:ext>
+            </a:extLst>
+          </p:cNvPr>
+          <p:cNvSpPr>
+            <a:spLocks noGrp="1"/>
+          </p:cNvSpPr>
+          <p:nvPr>
+            <p:ph type="pic" sz="quarter" idx="13"/>
+          </p:nvPr>
+        </p:nvSpPr>
+        <p:spPr>
+          <a:xfrm>
+            <a:off x="277813" y="1289050"/>
+            <a:ext cx="3206750" cy="4024313"/>
+          </a:xfrm>
+        </p:spPr>
+        <p:txBody>
+          <a:bodyPr/>
+          <a:lstStyle>
+            <a:lvl1pPr marL="0" indent="0">
+              <a:buNone/>
+              <a:defRPr/>
+            </a:lvl1pPr>
+          </a:lstStyle>
+          <a:p>
+            <a:endParaRPr lang="en-DE" dirty="0"/>
+          </a:p>
+        </p:txBody>
+      </p:sp>
+      <p:sp>
+        <p:nvSpPr>
+          <p:cNvPr id="8" name="Text Placeholder 7">
+            <a:extLst>
+              <a:ext uri="{FF2B5EF4-FFF2-40B4-BE49-F238E27FC236}">
+                <a16:creationId xmlns:a16="http://schemas.microsoft.com/office/drawing/2014/main" id="{E469473F-31A1-DA1A-1446-8C54C99F5645}"/>
+              </a:ext>
+            </a:extLst>
+          </p:cNvPr>
+          <p:cNvSpPr>
+            <a:spLocks noGrp="1"/>
+          </p:cNvSpPr>
+          <p:nvPr>
+            <p:ph type="body" sz="quarter" idx="14"/>
+          </p:nvPr>
+        </p:nvSpPr>
+        <p:spPr>
+          <a:xfrm>
+            <a:off x="4382294" y="1289050"/>
+            <a:ext cx="6911975" cy="1828800"/>
+          </a:xfrm>
+        </p:spPr>
+        <p:txBody>
+          <a:bodyPr/>
+          <a:lstStyle>
+            <a:lvl1pPr marL="0" indent="0">
+              <a:buNone/>
+              <a:defRPr/>
+            </a:lvl1pPr>
+          </a:lstStyle>
+          <a:p>
+            <a:pPr lvl="0"/>
+            <a:endParaRPr lang="en-DE" dirty="0"/>
+          </a:p>
+        </p:txBody>
+      </p:sp>
+      <p:sp>
+        <p:nvSpPr>
+          <p:cNvPr id="12" name="Text Placeholder 11">
+            <a:extLst>
+              <a:ext uri="{FF2B5EF4-FFF2-40B4-BE49-F238E27FC236}">
+                <a16:creationId xmlns:a16="http://schemas.microsoft.com/office/drawing/2014/main" id="{AB34C56E-9BDB-F5E2-1AD6-4C9ACB81D802}"/>
+              </a:ext>
+            </a:extLst>
+          </p:cNvPr>
+          <p:cNvSpPr>
+            <a:spLocks noGrp="1"/>
+          </p:cNvSpPr>
+          <p:nvPr>
+            <p:ph type="body" sz="quarter" idx="16"/>
+          </p:nvPr>
+        </p:nvSpPr>
+        <p:spPr>
+          <a:xfrm>
+            <a:off x="700759" y="6295340"/>
+            <a:ext cx="2302323" cy="408600"/>
+          </a:xfrm>
+        </p:spPr>
+        <p:txBody>
+          <a:bodyPr anchor="ctr">
+            <a:normAutofit/>
+          </a:bodyPr>
+          <a:lstStyle>
+            <a:lvl1pPr marL="0" indent="0">
+              <a:buNone/>
+              <a:defRPr sz="2000"/>
+            </a:lvl1pPr>
+          </a:lstStyle>
+          <a:p>
+            <a:pPr lvl="0"/>
+            <a:endParaRPr lang="en-DE" dirty="0"/>
+          </a:p>
+        </p:txBody>
+      </p:sp>
+      <p:sp>
+        <p:nvSpPr>
+          <p:cNvPr id="13" name="Text Placeholder 11">
+            <a:extLst>
+              <a:ext uri="{FF2B5EF4-FFF2-40B4-BE49-F238E27FC236}">
+                <a16:creationId xmlns:a16="http://schemas.microsoft.com/office/drawing/2014/main" id="{210C2267-198C-B65E-1588-1D8ADC032B0D}"/>
+              </a:ext>
+            </a:extLst>
+          </p:cNvPr>
+          <p:cNvSpPr>
+            <a:spLocks noGrp="1"/>
+          </p:cNvSpPr>
+          <p:nvPr>
+            <p:ph type="body" sz="quarter" idx="17"/>
+          </p:nvPr>
+        </p:nvSpPr>
+        <p:spPr>
+          <a:xfrm>
+            <a:off x="3540472" y="6295340"/>
+            <a:ext cx="2302323" cy="408600"/>
+          </a:xfrm>
+        </p:spPr>
+        <p:txBody>
+          <a:bodyPr anchor="ctr">
+            <a:normAutofit/>
+          </a:bodyPr>
+          <a:lstStyle>
+            <a:lvl1pPr marL="0" indent="0">
+              <a:buNone/>
+              <a:defRPr sz="2000"/>
+            </a:lvl1pPr>
+          </a:lstStyle>
+          <a:p>
+            <a:pPr lvl="0"/>
+            <a:endParaRPr lang="en-DE" dirty="0"/>
+          </a:p>
+        </p:txBody>
+      </p:sp>
+      <p:sp>
+        <p:nvSpPr>
+          <p:cNvPr id="14" name="Text Placeholder 11">
+            <a:extLst>
+              <a:ext uri="{FF2B5EF4-FFF2-40B4-BE49-F238E27FC236}">
+                <a16:creationId xmlns:a16="http://schemas.microsoft.com/office/drawing/2014/main" id="{B755F42B-5D4D-06C9-BCF0-324CE2951DC3}"/>
+              </a:ext>
+            </a:extLst>
+          </p:cNvPr>
+          <p:cNvSpPr>
+            <a:spLocks noGrp="1"/>
+          </p:cNvSpPr>
+          <p:nvPr>
+            <p:ph type="body" sz="quarter" idx="18"/>
+          </p:nvPr>
+        </p:nvSpPr>
+        <p:spPr>
+          <a:xfrm>
+            <a:off x="6395146" y="6295340"/>
+            <a:ext cx="2302323" cy="408600"/>
+          </a:xfrm>
+        </p:spPr>
+        <p:txBody>
+          <a:bodyPr anchor="ctr">
+            <a:normAutofit/>
+          </a:bodyPr>
+          <a:lstStyle>
+            <a:lvl1pPr marL="0" indent="0">
+              <a:buNone/>
+              <a:defRPr sz="2000"/>
+            </a:lvl1pPr>
+          </a:lstStyle>
+          <a:p>
+            <a:pPr lvl="0"/>
+            <a:endParaRPr lang="en-DE" dirty="0"/>
+          </a:p>
+        </p:txBody>
+      </p:sp>
+      <p:sp>
+        <p:nvSpPr>
+          <p:cNvPr id="7" name="Text Placeholder 7">
+            <a:extLst>
+              <a:ext uri="{FF2B5EF4-FFF2-40B4-BE49-F238E27FC236}">
+                <a16:creationId xmlns:a16="http://schemas.microsoft.com/office/drawing/2014/main" id="{601629C1-0A84-0479-0506-5F80A7013C53}"/>
+              </a:ext>
+            </a:extLst>
+          </p:cNvPr>
+          <p:cNvSpPr>
+            <a:spLocks noGrp="1"/>
+          </p:cNvSpPr>
+          <p:nvPr>
+            <p:ph type="body" sz="quarter" idx="15"/>
+          </p:nvPr>
+        </p:nvSpPr>
+        <p:spPr>
+          <a:xfrm>
+            <a:off x="4382293" y="3310572"/>
+            <a:ext cx="6911975" cy="1828800"/>
+          </a:xfrm>
+        </p:spPr>
+        <p:txBody>
+          <a:bodyPr/>
+          <a:lstStyle>
+            <a:lvl1pPr marL="0" indent="0">
+              <a:buNone/>
+              <a:defRPr/>
+            </a:lvl1pPr>
+          </a:lstStyle>
+          <a:p>
+            <a:pPr lvl="0"/>
+            <a:endParaRPr lang="en-DE" dirty="0"/>
+          </a:p>
+        </p:txBody>
+      </p:sp>
+    </p:spTree>
+    <p:extLst>
+      <p:ext uri="{BB962C8B-B14F-4D97-AF65-F5344CB8AC3E}">
+        <p14:creationId xmlns:p14="http://schemas.microsoft.com/office/powerpoint/2010/main" val="749175935"/>
+      </p:ext>
+    </p:extLst>
+  </p:cSld>
+  <p:clrMapOvr>
+    <a:masterClrMapping/>
+  </p:clrMapOvr>
+</p:sldLayout>
+</file>
+
+<file path=ppt/slideLayouts/slideLayout21.xml><?xml version="1.0" encoding="utf-8"?>
+<p:sldLayout xmlns:a="http://schemas.openxmlformats.org/drawingml/2006/main" xmlns:r="http://schemas.openxmlformats.org/officeDocument/2006/relationships" xmlns:p="http://schemas.openxmlformats.org/presentationml/2006/main" showMasterSp="0" matchingName="Acknowledgments (Email + GitHub)" preserve="1" userDrawn="1">
+  <p:cSld name="1_Dark References">
+    <p:spTree>
+      <p:nvGrpSpPr>
+        <p:cNvPr id="1" name="Shape 54"/>
+        <p:cNvGrpSpPr/>
+        <p:nvPr/>
+      </p:nvGrpSpPr>
+      <p:grpSpPr>
+        <a:xfrm>
+          <a:off x="0" y="0"/>
+          <a:ext cx="0" cy="0"/>
+          <a:chOff x="0" y="0"/>
+          <a:chExt cx="0" cy="0"/>
+        </a:xfrm>
+      </p:grpSpPr>
+      <p:pic>
+        <p:nvPicPr>
+          <p:cNvPr id="5" name="Picture 4">
+            <a:extLst>
+              <a:ext uri="{FF2B5EF4-FFF2-40B4-BE49-F238E27FC236}">
+                <a16:creationId xmlns:a16="http://schemas.microsoft.com/office/drawing/2014/main" id="{571C9378-B3C2-3490-B694-78DF69383BE1}"/>
+              </a:ext>
+            </a:extLst>
+          </p:cNvPr>
+          <p:cNvPicPr>
+            <a:picLocks noChangeAspect="1"/>
+          </p:cNvPicPr>
+          <p:nvPr userDrawn="1"/>
+        </p:nvPicPr>
+        <p:blipFill>
+          <a:blip r:embed="rId2">
+            <a:alphaModFix amt="85000"/>
+            <a:extLst>
+              <a:ext uri="{28A0092B-C50C-407E-A947-70E740481C1C}">
+                <a14:useLocalDpi xmlns:a14="http://schemas.microsoft.com/office/drawing/2010/main" val="0"/>
+              </a:ext>
+            </a:extLst>
+          </a:blip>
+          <a:srcRect/>
+          <a:stretch/>
+        </p:blipFill>
+        <p:spPr>
+          <a:xfrm>
+            <a:off x="0" y="0"/>
+            <a:ext cx="12192000" cy="6858000"/>
+          </a:xfrm>
+          <a:prstGeom prst="rect">
+            <a:avLst/>
+          </a:prstGeom>
+        </p:spPr>
+      </p:pic>
+      <p:cxnSp>
+        <p:nvCxnSpPr>
+          <p:cNvPr id="57" name="Google Shape;57;p10"/>
+          <p:cNvCxnSpPr/>
+          <p:nvPr/>
+        </p:nvCxnSpPr>
+        <p:spPr>
+          <a:xfrm>
+            <a:off x="3716421" y="2608481"/>
+            <a:ext cx="0" cy="1600400"/>
+          </a:xfrm>
+          <a:prstGeom prst="straightConnector1">
+            <a:avLst/>
+          </a:prstGeom>
+          <a:noFill/>
+          <a:ln w="19050" cap="flat" cmpd="sng">
+            <a:solidFill>
+              <a:schemeClr val="lt1"/>
+            </a:solidFill>
+            <a:prstDash val="solid"/>
+            <a:miter lim="800000"/>
+            <a:headEnd type="none" w="sm" len="sm"/>
+            <a:tailEnd type="none" w="sm" len="sm"/>
+          </a:ln>
+        </p:spPr>
+      </p:cxnSp>
+      <p:pic>
+        <p:nvPicPr>
+          <p:cNvPr id="62" name="Google Shape;62;p10"/>
+          <p:cNvPicPr preferRelativeResize="0"/>
+          <p:nvPr/>
+        </p:nvPicPr>
+        <p:blipFill rotWithShape="1">
+          <a:blip r:embed="rId3">
+            <a:alphaModFix/>
+            <a:biLevel thresh="75000"/>
+          </a:blip>
+          <a:srcRect/>
+          <a:stretch/>
+        </p:blipFill>
+        <p:spPr>
+          <a:xfrm>
+            <a:off x="3071993" y="6282750"/>
+            <a:ext cx="414529" cy="414529"/>
+          </a:xfrm>
+          <a:prstGeom prst="rect">
+            <a:avLst/>
+          </a:prstGeom>
+          <a:noFill/>
+          <a:ln>
+            <a:noFill/>
+          </a:ln>
+        </p:spPr>
+      </p:pic>
+      <p:pic>
+        <p:nvPicPr>
+          <p:cNvPr id="64" name="Google Shape;64;p10"/>
+          <p:cNvPicPr preferRelativeResize="0"/>
+          <p:nvPr/>
+        </p:nvPicPr>
+        <p:blipFill>
+          <a:blip r:embed="rId4">
+            <a:extLst>
+              <a:ext uri="{28A0092B-C50C-407E-A947-70E740481C1C}">
+                <a14:useLocalDpi xmlns:a14="http://schemas.microsoft.com/office/drawing/2010/main" val="0"/>
+              </a:ext>
+              <a:ext uri="{96DAC541-7B7A-43D3-8B79-37D633B846F1}">
+                <asvg:svgBlip xmlns:asvg="http://schemas.microsoft.com/office/drawing/2016/SVG/main" r:embed="rId5"/>
+              </a:ext>
+            </a:extLst>
+          </a:blip>
+          <a:srcRect/>
+          <a:stretch/>
+        </p:blipFill>
+        <p:spPr>
+          <a:xfrm>
+            <a:off x="152659" y="6282751"/>
+            <a:ext cx="414528" cy="414528"/>
+          </a:xfrm>
+          <a:prstGeom prst="rect">
+            <a:avLst/>
+          </a:prstGeom>
+          <a:noFill/>
+          <a:ln>
+            <a:noFill/>
+          </a:ln>
+        </p:spPr>
+      </p:pic>
+      <p:sp>
+        <p:nvSpPr>
+          <p:cNvPr id="6" name="Picture Placeholder 5">
+            <a:extLst>
+              <a:ext uri="{FF2B5EF4-FFF2-40B4-BE49-F238E27FC236}">
+                <a16:creationId xmlns:a16="http://schemas.microsoft.com/office/drawing/2014/main" id="{2631C45D-A4AF-1223-E180-EB9E96FA2AE4}"/>
+              </a:ext>
+            </a:extLst>
+          </p:cNvPr>
+          <p:cNvSpPr>
+            <a:spLocks noGrp="1"/>
+          </p:cNvSpPr>
+          <p:nvPr>
+            <p:ph type="pic" sz="quarter" idx="13"/>
+          </p:nvPr>
+        </p:nvSpPr>
+        <p:spPr>
+          <a:xfrm>
+            <a:off x="277813" y="1289050"/>
+            <a:ext cx="3206750" cy="4024313"/>
+          </a:xfrm>
+        </p:spPr>
+        <p:txBody>
+          <a:bodyPr/>
+          <a:lstStyle>
+            <a:lvl1pPr marL="0" indent="0">
+              <a:buNone/>
+              <a:defRPr/>
+            </a:lvl1pPr>
+          </a:lstStyle>
+          <a:p>
+            <a:endParaRPr lang="en-DE" dirty="0"/>
+          </a:p>
+        </p:txBody>
+      </p:sp>
+      <p:sp>
+        <p:nvSpPr>
+          <p:cNvPr id="8" name="Text Placeholder 7">
+            <a:extLst>
+              <a:ext uri="{FF2B5EF4-FFF2-40B4-BE49-F238E27FC236}">
+                <a16:creationId xmlns:a16="http://schemas.microsoft.com/office/drawing/2014/main" id="{E469473F-31A1-DA1A-1446-8C54C99F5645}"/>
+              </a:ext>
+            </a:extLst>
+          </p:cNvPr>
+          <p:cNvSpPr>
+            <a:spLocks noGrp="1"/>
+          </p:cNvSpPr>
+          <p:nvPr>
+            <p:ph type="body" sz="quarter" idx="14"/>
+          </p:nvPr>
+        </p:nvSpPr>
+        <p:spPr>
+          <a:xfrm>
+            <a:off x="4382294" y="1289050"/>
+            <a:ext cx="6911975" cy="1828800"/>
+          </a:xfrm>
+        </p:spPr>
+        <p:txBody>
+          <a:bodyPr/>
+          <a:lstStyle>
+            <a:lvl1pPr marL="0" indent="0">
+              <a:buNone/>
+              <a:defRPr/>
+            </a:lvl1pPr>
+          </a:lstStyle>
+          <a:p>
+            <a:pPr lvl="0"/>
+            <a:endParaRPr lang="en-DE" dirty="0"/>
+          </a:p>
+        </p:txBody>
+      </p:sp>
+      <p:sp>
+        <p:nvSpPr>
+          <p:cNvPr id="12" name="Text Placeholder 11">
+            <a:extLst>
+              <a:ext uri="{FF2B5EF4-FFF2-40B4-BE49-F238E27FC236}">
+                <a16:creationId xmlns:a16="http://schemas.microsoft.com/office/drawing/2014/main" id="{AB34C56E-9BDB-F5E2-1AD6-4C9ACB81D802}"/>
+              </a:ext>
+            </a:extLst>
+          </p:cNvPr>
+          <p:cNvSpPr>
+            <a:spLocks noGrp="1"/>
+          </p:cNvSpPr>
+          <p:nvPr>
+            <p:ph type="body" sz="quarter" idx="16"/>
+          </p:nvPr>
+        </p:nvSpPr>
+        <p:spPr>
+          <a:xfrm>
+            <a:off x="700759" y="6295340"/>
+            <a:ext cx="2302323" cy="408600"/>
+          </a:xfrm>
+        </p:spPr>
+        <p:txBody>
+          <a:bodyPr anchor="ctr">
+            <a:normAutofit/>
+          </a:bodyPr>
+          <a:lstStyle>
+            <a:lvl1pPr marL="0" indent="0">
+              <a:buNone/>
+              <a:defRPr sz="2000"/>
+            </a:lvl1pPr>
+          </a:lstStyle>
+          <a:p>
+            <a:pPr lvl="0"/>
+            <a:endParaRPr lang="en-DE" dirty="0"/>
+          </a:p>
+        </p:txBody>
+      </p:sp>
+      <p:sp>
+        <p:nvSpPr>
+          <p:cNvPr id="13" name="Text Placeholder 11">
+            <a:extLst>
+              <a:ext uri="{FF2B5EF4-FFF2-40B4-BE49-F238E27FC236}">
+                <a16:creationId xmlns:a16="http://schemas.microsoft.com/office/drawing/2014/main" id="{210C2267-198C-B65E-1588-1D8ADC032B0D}"/>
+              </a:ext>
+            </a:extLst>
+          </p:cNvPr>
+          <p:cNvSpPr>
+            <a:spLocks noGrp="1"/>
+          </p:cNvSpPr>
+          <p:nvPr>
+            <p:ph type="body" sz="quarter" idx="17"/>
+          </p:nvPr>
+        </p:nvSpPr>
+        <p:spPr>
+          <a:xfrm>
+            <a:off x="3540472" y="6295340"/>
+            <a:ext cx="2302323" cy="408600"/>
+          </a:xfrm>
+        </p:spPr>
+        <p:txBody>
+          <a:bodyPr anchor="ctr">
+            <a:normAutofit/>
+          </a:bodyPr>
+          <a:lstStyle>
+            <a:lvl1pPr marL="0" indent="0">
+              <a:buNone/>
+              <a:defRPr sz="2000"/>
+            </a:lvl1pPr>
+          </a:lstStyle>
+          <a:p>
+            <a:pPr lvl="0"/>
+            <a:endParaRPr lang="en-DE" dirty="0"/>
+          </a:p>
+        </p:txBody>
+      </p:sp>
+      <p:sp>
+        <p:nvSpPr>
+          <p:cNvPr id="7" name="Text Placeholder 7">
+            <a:extLst>
+              <a:ext uri="{FF2B5EF4-FFF2-40B4-BE49-F238E27FC236}">
+                <a16:creationId xmlns:a16="http://schemas.microsoft.com/office/drawing/2014/main" id="{3BB4A897-33F0-001A-94D7-0DAB9D90E6F2}"/>
+              </a:ext>
+            </a:extLst>
+          </p:cNvPr>
+          <p:cNvSpPr>
+            <a:spLocks noGrp="1"/>
+          </p:cNvSpPr>
+          <p:nvPr>
+            <p:ph type="body" sz="quarter" idx="15"/>
+          </p:nvPr>
+        </p:nvSpPr>
+        <p:spPr>
+          <a:xfrm>
+            <a:off x="4382293" y="3310572"/>
+            <a:ext cx="6911975" cy="1828800"/>
+          </a:xfrm>
+        </p:spPr>
+        <p:txBody>
+          <a:bodyPr/>
+          <a:lstStyle>
+            <a:lvl1pPr marL="0" indent="0">
+              <a:buNone/>
+              <a:defRPr/>
+            </a:lvl1pPr>
+          </a:lstStyle>
+          <a:p>
+            <a:pPr lvl="0"/>
+            <a:endParaRPr lang="en-DE" dirty="0"/>
+          </a:p>
+        </p:txBody>
+      </p:sp>
+    </p:spTree>
+    <p:extLst>
+      <p:ext uri="{BB962C8B-B14F-4D97-AF65-F5344CB8AC3E}">
+        <p14:creationId xmlns:p14="http://schemas.microsoft.com/office/powerpoint/2010/main" val="4150270547"/>
+      </p:ext>
+    </p:extLst>
+  </p:cSld>
+  <p:clrMapOvr>
+    <a:masterClrMapping/>
+  </p:clrMapOvr>
+</p:sldLayout>
+</file>
+
+<file path=ppt/slideLayouts/slideLayout22.xml><?xml version="1.0" encoding="utf-8"?>
+<p:sldLayout xmlns:a="http://schemas.openxmlformats.org/drawingml/2006/main" xmlns:r="http://schemas.openxmlformats.org/officeDocument/2006/relationships" xmlns:p="http://schemas.openxmlformats.org/presentationml/2006/main" showMasterSp="0" matchingName="Acknowledgments (Email)" preserve="1" userDrawn="1">
+  <p:cSld name="1_Dark References">
+    <p:spTree>
+      <p:nvGrpSpPr>
+        <p:cNvPr id="1" name="Shape 54"/>
+        <p:cNvGrpSpPr/>
+        <p:nvPr/>
+      </p:nvGrpSpPr>
+      <p:grpSpPr>
+        <a:xfrm>
+          <a:off x="0" y="0"/>
+          <a:ext cx="0" cy="0"/>
+          <a:chOff x="0" y="0"/>
+          <a:chExt cx="0" cy="0"/>
+        </a:xfrm>
+      </p:grpSpPr>
+      <p:pic>
+        <p:nvPicPr>
+          <p:cNvPr id="2" name="Picture 1">
+            <a:extLst>
+              <a:ext uri="{FF2B5EF4-FFF2-40B4-BE49-F238E27FC236}">
+                <a16:creationId xmlns:a16="http://schemas.microsoft.com/office/drawing/2014/main" id="{8B627619-3344-185B-7E1C-2B46F09DC6BD}"/>
+              </a:ext>
+            </a:extLst>
+          </p:cNvPr>
+          <p:cNvPicPr>
+            <a:picLocks noChangeAspect="1"/>
+          </p:cNvPicPr>
+          <p:nvPr userDrawn="1"/>
+        </p:nvPicPr>
+        <p:blipFill>
+          <a:blip r:embed="rId2">
+            <a:alphaModFix amt="85000"/>
+            <a:extLst>
+              <a:ext uri="{28A0092B-C50C-407E-A947-70E740481C1C}">
+                <a14:useLocalDpi xmlns:a14="http://schemas.microsoft.com/office/drawing/2010/main" val="0"/>
+              </a:ext>
+            </a:extLst>
+          </a:blip>
+          <a:srcRect/>
+          <a:stretch/>
+        </p:blipFill>
+        <p:spPr>
+          <a:xfrm>
+            <a:off x="0" y="0"/>
+            <a:ext cx="12192000" cy="6858000"/>
+          </a:xfrm>
+          <a:prstGeom prst="rect">
+            <a:avLst/>
+          </a:prstGeom>
+        </p:spPr>
+      </p:pic>
+      <p:cxnSp>
+        <p:nvCxnSpPr>
+          <p:cNvPr id="57" name="Google Shape;57;p10"/>
+          <p:cNvCxnSpPr/>
+          <p:nvPr/>
+        </p:nvCxnSpPr>
+        <p:spPr>
+          <a:xfrm>
+            <a:off x="3716421" y="2608481"/>
+            <a:ext cx="0" cy="1600400"/>
+          </a:xfrm>
+          <a:prstGeom prst="straightConnector1">
+            <a:avLst/>
+          </a:prstGeom>
+          <a:noFill/>
+          <a:ln w="19050" cap="flat" cmpd="sng">
+            <a:solidFill>
+              <a:schemeClr val="lt1"/>
+            </a:solidFill>
+            <a:prstDash val="solid"/>
+            <a:miter lim="800000"/>
+            <a:headEnd type="none" w="sm" len="sm"/>
+            <a:tailEnd type="none" w="sm" len="sm"/>
+          </a:ln>
+        </p:spPr>
+      </p:cxnSp>
+      <p:pic>
+        <p:nvPicPr>
+          <p:cNvPr id="64" name="Google Shape;64;p10"/>
+          <p:cNvPicPr preferRelativeResize="0"/>
+          <p:nvPr/>
+        </p:nvPicPr>
+        <p:blipFill>
+          <a:blip r:embed="rId3">
+            <a:extLst>
+              <a:ext uri="{28A0092B-C50C-407E-A947-70E740481C1C}">
+                <a14:useLocalDpi xmlns:a14="http://schemas.microsoft.com/office/drawing/2010/main" val="0"/>
+              </a:ext>
+              <a:ext uri="{96DAC541-7B7A-43D3-8B79-37D633B846F1}">
+                <asvg:svgBlip xmlns:asvg="http://schemas.microsoft.com/office/drawing/2016/SVG/main" r:embed="rId4"/>
+              </a:ext>
+            </a:extLst>
+          </a:blip>
+          <a:srcRect/>
+          <a:stretch/>
+        </p:blipFill>
+        <p:spPr>
+          <a:xfrm>
+            <a:off x="152659" y="6282751"/>
+            <a:ext cx="414528" cy="414528"/>
+          </a:xfrm>
+          <a:prstGeom prst="rect">
+            <a:avLst/>
+          </a:prstGeom>
+          <a:noFill/>
+          <a:ln>
+            <a:noFill/>
+          </a:ln>
+        </p:spPr>
+      </p:pic>
+      <p:sp>
+        <p:nvSpPr>
+          <p:cNvPr id="6" name="Picture Placeholder 5">
+            <a:extLst>
+              <a:ext uri="{FF2B5EF4-FFF2-40B4-BE49-F238E27FC236}">
+                <a16:creationId xmlns:a16="http://schemas.microsoft.com/office/drawing/2014/main" id="{2631C45D-A4AF-1223-E180-EB9E96FA2AE4}"/>
+              </a:ext>
+            </a:extLst>
+          </p:cNvPr>
+          <p:cNvSpPr>
+            <a:spLocks noGrp="1"/>
+          </p:cNvSpPr>
+          <p:nvPr>
+            <p:ph type="pic" sz="quarter" idx="13"/>
+          </p:nvPr>
+        </p:nvSpPr>
+        <p:spPr>
+          <a:xfrm>
+            <a:off x="277813" y="1289050"/>
+            <a:ext cx="3206750" cy="4024313"/>
+          </a:xfrm>
+        </p:spPr>
+        <p:txBody>
+          <a:bodyPr/>
+          <a:lstStyle>
+            <a:lvl1pPr marL="0" indent="0">
+              <a:buNone/>
+              <a:defRPr/>
+            </a:lvl1pPr>
+          </a:lstStyle>
+          <a:p>
+            <a:endParaRPr lang="en-DE" dirty="0"/>
+          </a:p>
+        </p:txBody>
+      </p:sp>
+      <p:sp>
+        <p:nvSpPr>
+          <p:cNvPr id="8" name="Text Placeholder 7">
+            <a:extLst>
+              <a:ext uri="{FF2B5EF4-FFF2-40B4-BE49-F238E27FC236}">
+                <a16:creationId xmlns:a16="http://schemas.microsoft.com/office/drawing/2014/main" id="{E469473F-31A1-DA1A-1446-8C54C99F5645}"/>
+              </a:ext>
+            </a:extLst>
+          </p:cNvPr>
+          <p:cNvSpPr>
+            <a:spLocks noGrp="1"/>
+          </p:cNvSpPr>
+          <p:nvPr>
+            <p:ph type="body" sz="quarter" idx="14"/>
+          </p:nvPr>
+        </p:nvSpPr>
+        <p:spPr>
+          <a:xfrm>
+            <a:off x="4382294" y="1289050"/>
+            <a:ext cx="6911975" cy="1828800"/>
+          </a:xfrm>
+        </p:spPr>
+        <p:txBody>
+          <a:bodyPr/>
+          <a:lstStyle>
+            <a:lvl1pPr marL="0" indent="0">
+              <a:buNone/>
+              <a:defRPr/>
+            </a:lvl1pPr>
+          </a:lstStyle>
+          <a:p>
+            <a:pPr lvl="0"/>
+            <a:endParaRPr lang="en-DE" dirty="0"/>
+          </a:p>
+        </p:txBody>
+      </p:sp>
+      <p:sp>
+        <p:nvSpPr>
+          <p:cNvPr id="12" name="Text Placeholder 11">
+            <a:extLst>
+              <a:ext uri="{FF2B5EF4-FFF2-40B4-BE49-F238E27FC236}">
+                <a16:creationId xmlns:a16="http://schemas.microsoft.com/office/drawing/2014/main" id="{AB34C56E-9BDB-F5E2-1AD6-4C9ACB81D802}"/>
+              </a:ext>
+            </a:extLst>
+          </p:cNvPr>
+          <p:cNvSpPr>
+            <a:spLocks noGrp="1"/>
+          </p:cNvSpPr>
+          <p:nvPr>
+            <p:ph type="body" sz="quarter" idx="16"/>
+          </p:nvPr>
+        </p:nvSpPr>
+        <p:spPr>
+          <a:xfrm>
+            <a:off x="700759" y="6295340"/>
+            <a:ext cx="2302323" cy="408600"/>
+          </a:xfrm>
+        </p:spPr>
+        <p:txBody>
+          <a:bodyPr anchor="ctr">
+            <a:normAutofit/>
+          </a:bodyPr>
+          <a:lstStyle>
+            <a:lvl1pPr marL="0" indent="0">
+              <a:buNone/>
+              <a:defRPr sz="2000"/>
+            </a:lvl1pPr>
+          </a:lstStyle>
+          <a:p>
+            <a:pPr lvl="0"/>
+            <a:endParaRPr lang="en-DE" dirty="0"/>
+          </a:p>
+        </p:txBody>
+      </p:sp>
+      <p:sp>
+        <p:nvSpPr>
+          <p:cNvPr id="4" name="Text Placeholder 7">
+            <a:extLst>
+              <a:ext uri="{FF2B5EF4-FFF2-40B4-BE49-F238E27FC236}">
+                <a16:creationId xmlns:a16="http://schemas.microsoft.com/office/drawing/2014/main" id="{D5540357-5332-D5D8-7379-56AD173E43EA}"/>
+              </a:ext>
+            </a:extLst>
+          </p:cNvPr>
+          <p:cNvSpPr>
+            <a:spLocks noGrp="1"/>
+          </p:cNvSpPr>
+          <p:nvPr>
+            <p:ph type="body" sz="quarter" idx="15"/>
+          </p:nvPr>
+        </p:nvSpPr>
+        <p:spPr>
+          <a:xfrm>
+            <a:off x="4382293" y="3310572"/>
+            <a:ext cx="6911975" cy="1828800"/>
+          </a:xfrm>
+        </p:spPr>
+        <p:txBody>
+          <a:bodyPr/>
+          <a:lstStyle>
+            <a:lvl1pPr marL="0" indent="0">
+              <a:buNone/>
+              <a:defRPr/>
+            </a:lvl1pPr>
+          </a:lstStyle>
+          <a:p>
+            <a:pPr lvl="0"/>
+            <a:endParaRPr lang="en-DE" dirty="0"/>
+          </a:p>
+        </p:txBody>
+      </p:sp>
+    </p:spTree>
+    <p:extLst>
+      <p:ext uri="{BB962C8B-B14F-4D97-AF65-F5344CB8AC3E}">
+        <p14:creationId xmlns:p14="http://schemas.microsoft.com/office/powerpoint/2010/main" val="127269235"/>
+      </p:ext>
+    </p:extLst>
+  </p:cSld>
+  <p:clrMapOvr>
+    <a:masterClrMapping/>
+  </p:clrMapOvr>
+</p:sldLayout>
+</file>
+
+<file path=ppt/slideLayouts/slideLayout3.xml><?xml version="1.0" encoding="utf-8"?>
+<p:sldLayout xmlns:a="http://schemas.openxmlformats.org/drawingml/2006/main" xmlns:r="http://schemas.openxmlformats.org/officeDocument/2006/relationships" xmlns:p="http://schemas.openxmlformats.org/presentationml/2006/main" showMasterSp="0" matchingName="Section separator" preserve="1">
+  <p:cSld name="Section separator">
+    <p:spTree>
+      <p:nvGrpSpPr>
+        <p:cNvPr id="1" name="Shape 66"/>
+        <p:cNvGrpSpPr/>
+        <p:nvPr/>
+      </p:nvGrpSpPr>
+      <p:grpSpPr>
+        <a:xfrm>
+          <a:off x="0" y="0"/>
+          <a:ext cx="0" cy="0"/>
+          <a:chOff x="0" y="0"/>
+          <a:chExt cx="0" cy="0"/>
+        </a:xfrm>
+      </p:grpSpPr>
+      <p:pic>
+        <p:nvPicPr>
+          <p:cNvPr id="5" name="Picture 4">
+            <a:extLst>
+              <a:ext uri="{FF2B5EF4-FFF2-40B4-BE49-F238E27FC236}">
+                <a16:creationId xmlns:a16="http://schemas.microsoft.com/office/drawing/2014/main" id="{79D1EB2D-02D0-0618-85D9-FE1D3382ABAA}"/>
+              </a:ext>
+            </a:extLst>
+          </p:cNvPr>
+          <p:cNvPicPr>
+            <a:picLocks noChangeAspect="1"/>
+          </p:cNvPicPr>
+          <p:nvPr userDrawn="1"/>
+        </p:nvPicPr>
+        <p:blipFill>
+          <a:blip r:embed="rId2">
+            <a:extLst>
+              <a:ext uri="{28A0092B-C50C-407E-A947-70E740481C1C}">
+                <a14:useLocalDpi xmlns:a14="http://schemas.microsoft.com/office/drawing/2010/main" val="0"/>
+              </a:ext>
+            </a:extLst>
+          </a:blip>
+          <a:stretch>
+            <a:fillRect/>
+          </a:stretch>
+        </p:blipFill>
+        <p:spPr>
+          <a:xfrm>
+            <a:off x="0" y="0"/>
+            <a:ext cx="12192000" cy="6858000"/>
+          </a:xfrm>
+          <a:prstGeom prst="rect">
+            <a:avLst/>
+          </a:prstGeom>
+        </p:spPr>
+      </p:pic>
+      <p:sp>
+        <p:nvSpPr>
+          <p:cNvPr id="67" name="Google Shape;67;p11"/>
+          <p:cNvSpPr txBox="1">
+            <a:spLocks noGrp="1"/>
+          </p:cNvSpPr>
+          <p:nvPr>
+            <p:ph type="ctrTitle"/>
+          </p:nvPr>
+        </p:nvSpPr>
+        <p:spPr>
+          <a:xfrm>
+            <a:off x="415611" y="992767"/>
+            <a:ext cx="11360800" cy="2736800"/>
+          </a:xfrm>
+          <a:prstGeom prst="rect">
+            <a:avLst/>
+          </a:prstGeom>
+        </p:spPr>
+        <p:txBody>
+          <a:bodyPr spcFirstLastPara="1" wrap="square" lIns="91425" tIns="45700" rIns="91425" bIns="45700" anchor="b" anchorCtr="0">
+            <a:noAutofit/>
+          </a:bodyPr>
+          <a:lstStyle>
+            <a:lvl1pPr lvl="0" algn="ctr" rtl="0">
+              <a:spcBef>
+                <a:spcPts val="0"/>
+              </a:spcBef>
+              <a:spcAft>
+                <a:spcPts val="0"/>
+              </a:spcAft>
+              <a:buSzPts val="5200"/>
+              <a:buNone/>
+              <a:defRPr sz="6933">
+                <a:solidFill>
+                  <a:srgbClr val="0E2D38"/>
+                </a:solidFill>
+              </a:defRPr>
+            </a:lvl1pPr>
+            <a:lvl2pPr lvl="1" algn="ctr" rtl="0">
+              <a:spcBef>
+                <a:spcPts val="0"/>
+              </a:spcBef>
+              <a:spcAft>
+                <a:spcPts val="0"/>
+              </a:spcAft>
+              <a:buSzPts val="5200"/>
+              <a:buNone/>
+              <a:defRPr sz="6933"/>
+            </a:lvl2pPr>
+            <a:lvl3pPr lvl="2" algn="ctr" rtl="0">
+              <a:spcBef>
+                <a:spcPts val="0"/>
+              </a:spcBef>
+              <a:spcAft>
+                <a:spcPts val="0"/>
+              </a:spcAft>
+              <a:buSzPts val="5200"/>
+              <a:buNone/>
+              <a:defRPr sz="6933"/>
+            </a:lvl3pPr>
+            <a:lvl4pPr lvl="3" algn="ctr" rtl="0">
+              <a:spcBef>
+                <a:spcPts val="0"/>
+              </a:spcBef>
+              <a:spcAft>
+                <a:spcPts val="0"/>
+              </a:spcAft>
+              <a:buSzPts val="5200"/>
+              <a:buNone/>
+              <a:defRPr sz="6933"/>
+            </a:lvl4pPr>
+            <a:lvl5pPr lvl="4" algn="ctr" rtl="0">
+              <a:spcBef>
+                <a:spcPts val="0"/>
+              </a:spcBef>
+              <a:spcAft>
+                <a:spcPts val="0"/>
+              </a:spcAft>
+              <a:buSzPts val="5200"/>
+              <a:buNone/>
+              <a:defRPr sz="6933"/>
+            </a:lvl5pPr>
+            <a:lvl6pPr lvl="5" algn="ctr" rtl="0">
+              <a:spcBef>
+                <a:spcPts val="0"/>
+              </a:spcBef>
+              <a:spcAft>
+                <a:spcPts val="0"/>
+              </a:spcAft>
+              <a:buSzPts val="5200"/>
+              <a:buNone/>
+              <a:defRPr sz="6933"/>
+            </a:lvl6pPr>
+            <a:lvl7pPr lvl="6" algn="ctr" rtl="0">
+              <a:spcBef>
+                <a:spcPts val="0"/>
+              </a:spcBef>
+              <a:spcAft>
+                <a:spcPts val="0"/>
+              </a:spcAft>
+              <a:buSzPts val="5200"/>
+              <a:buNone/>
+              <a:defRPr sz="6933"/>
+            </a:lvl7pPr>
+            <a:lvl8pPr lvl="7" algn="ctr" rtl="0">
+              <a:spcBef>
+                <a:spcPts val="0"/>
+              </a:spcBef>
+              <a:spcAft>
+                <a:spcPts val="0"/>
+              </a:spcAft>
+              <a:buSzPts val="5200"/>
+              <a:buNone/>
+              <a:defRPr sz="6933"/>
+            </a:lvl8pPr>
+            <a:lvl9pPr lvl="8" algn="ctr" rtl="0">
+              <a:spcBef>
+                <a:spcPts val="0"/>
+              </a:spcBef>
+              <a:spcAft>
+                <a:spcPts val="0"/>
+              </a:spcAft>
+              <a:buSzPts val="5200"/>
+              <a:buNone/>
+              <a:defRPr sz="6933"/>
+            </a:lvl9pPr>
+          </a:lstStyle>
+          <a:p>
+            <a:endParaRPr dirty="0"/>
+          </a:p>
+        </p:txBody>
+      </p:sp>
+      <p:sp>
+        <p:nvSpPr>
+          <p:cNvPr id="68" name="Google Shape;68;p11"/>
+          <p:cNvSpPr txBox="1">
+            <a:spLocks noGrp="1"/>
+          </p:cNvSpPr>
+          <p:nvPr>
+            <p:ph type="subTitle" idx="1"/>
+          </p:nvPr>
+        </p:nvSpPr>
+        <p:spPr>
+          <a:xfrm>
+            <a:off x="415600" y="3778833"/>
+            <a:ext cx="11360800" cy="1056800"/>
+          </a:xfrm>
+          <a:prstGeom prst="rect">
+            <a:avLst/>
+          </a:prstGeom>
+        </p:spPr>
+        <p:txBody>
+          <a:bodyPr spcFirstLastPara="1" wrap="square" lIns="91425" tIns="45700" rIns="91425" bIns="45700" anchor="t" anchorCtr="0">
+            <a:normAutofit/>
+          </a:bodyPr>
+          <a:lstStyle>
+            <a:lvl1pPr lvl="0" algn="ctr" rtl="0">
+              <a:lnSpc>
+                <a:spcPct val="100000"/>
+              </a:lnSpc>
+              <a:spcBef>
+                <a:spcPts val="800"/>
+              </a:spcBef>
+              <a:spcAft>
+                <a:spcPts val="0"/>
+              </a:spcAft>
+              <a:buSzPts val="2800"/>
+              <a:buNone/>
+              <a:defRPr sz="3733">
+                <a:solidFill>
+                  <a:schemeClr val="bg1"/>
+                </a:solidFill>
+              </a:defRPr>
+            </a:lvl1pPr>
+            <a:lvl2pPr lvl="1" algn="ctr" rtl="0">
+              <a:lnSpc>
+                <a:spcPct val="100000"/>
+              </a:lnSpc>
+              <a:spcBef>
+                <a:spcPts val="400"/>
+              </a:spcBef>
+              <a:spcAft>
+                <a:spcPts val="0"/>
+              </a:spcAft>
+              <a:buSzPts val="2800"/>
+              <a:buNone/>
+              <a:defRPr sz="3733"/>
+            </a:lvl2pPr>
+            <a:lvl3pPr lvl="2" algn="ctr" rtl="0">
+              <a:lnSpc>
+                <a:spcPct val="100000"/>
+              </a:lnSpc>
+              <a:spcBef>
+                <a:spcPts val="400"/>
+              </a:spcBef>
+              <a:spcAft>
+                <a:spcPts val="0"/>
+              </a:spcAft>
+              <a:buSzPts val="2800"/>
+              <a:buNone/>
+              <a:defRPr sz="3733"/>
+            </a:lvl3pPr>
+            <a:lvl4pPr lvl="3" algn="ctr" rtl="0">
+              <a:lnSpc>
+                <a:spcPct val="100000"/>
+              </a:lnSpc>
+              <a:spcBef>
+                <a:spcPts val="400"/>
+              </a:spcBef>
+              <a:spcAft>
+                <a:spcPts val="0"/>
+              </a:spcAft>
+              <a:buSzPts val="2800"/>
+              <a:buNone/>
+              <a:defRPr sz="3733"/>
+            </a:lvl4pPr>
+            <a:lvl5pPr lvl="4" algn="ctr" rtl="0">
+              <a:lnSpc>
+                <a:spcPct val="100000"/>
+              </a:lnSpc>
+              <a:spcBef>
+                <a:spcPts val="667"/>
+              </a:spcBef>
+              <a:spcAft>
+                <a:spcPts val="0"/>
+              </a:spcAft>
+              <a:buSzPts val="2800"/>
+              <a:buNone/>
+              <a:defRPr sz="3733"/>
+            </a:lvl5pPr>
+            <a:lvl6pPr lvl="5" algn="ctr" rtl="0">
+              <a:lnSpc>
+                <a:spcPct val="100000"/>
+              </a:lnSpc>
+              <a:spcBef>
+                <a:spcPts val="667"/>
+              </a:spcBef>
+              <a:spcAft>
+                <a:spcPts val="0"/>
+              </a:spcAft>
+              <a:buSzPts val="2800"/>
+              <a:buNone/>
+              <a:defRPr sz="3733"/>
+            </a:lvl6pPr>
+            <a:lvl7pPr lvl="6" algn="ctr" rtl="0">
+              <a:lnSpc>
+                <a:spcPct val="100000"/>
+              </a:lnSpc>
+              <a:spcBef>
+                <a:spcPts val="667"/>
+              </a:spcBef>
+              <a:spcAft>
+                <a:spcPts val="0"/>
+              </a:spcAft>
+              <a:buSzPts val="2800"/>
+              <a:buNone/>
+              <a:defRPr sz="3733"/>
+            </a:lvl7pPr>
+            <a:lvl8pPr lvl="7" algn="ctr" rtl="0">
+              <a:lnSpc>
+                <a:spcPct val="100000"/>
+              </a:lnSpc>
+              <a:spcBef>
+                <a:spcPts val="667"/>
+              </a:spcBef>
+              <a:spcAft>
+                <a:spcPts val="0"/>
+              </a:spcAft>
+              <a:buSzPts val="2800"/>
+              <a:buNone/>
+              <a:defRPr sz="3733"/>
+            </a:lvl8pPr>
+            <a:lvl9pPr lvl="8" algn="ctr" rtl="0">
+              <a:lnSpc>
+                <a:spcPct val="100000"/>
+              </a:lnSpc>
+              <a:spcBef>
+                <a:spcPts val="667"/>
+              </a:spcBef>
+              <a:spcAft>
+                <a:spcPts val="0"/>
+              </a:spcAft>
+              <a:buSzPts val="2800"/>
+              <a:buNone/>
+              <a:defRPr sz="3733"/>
+            </a:lvl9pPr>
+          </a:lstStyle>
+          <a:p>
+            <a:endParaRPr dirty="0"/>
+          </a:p>
+        </p:txBody>
+      </p:sp>
+    </p:spTree>
+    <p:extLst>
+      <p:ext uri="{BB962C8B-B14F-4D97-AF65-F5344CB8AC3E}">
+        <p14:creationId xmlns:p14="http://schemas.microsoft.com/office/powerpoint/2010/main" val="3770519690"/>
       </p:ext>
     </p:extLst>
   </p:cSld>
@@ -6350,7 +6608,7 @@
 </file>
 
 <file path=ppt/slideLayouts/slideLayout9.xml><?xml version="1.0" encoding="utf-8"?>
-<p:sldLayout xmlns:a="http://schemas.openxmlformats.org/drawingml/2006/main" xmlns:r="http://schemas.openxmlformats.org/officeDocument/2006/relationships" xmlns:p="http://schemas.openxmlformats.org/presentationml/2006/main" showMasterSp="0" matchingName="Dark References" preserve="1" userDrawn="1">
+<p:sldLayout xmlns:a="http://schemas.openxmlformats.org/drawingml/2006/main" xmlns:r="http://schemas.openxmlformats.org/officeDocument/2006/relationships" xmlns:p="http://schemas.openxmlformats.org/presentationml/2006/main" showMasterSp="0" matchingName="Acknowledgments (Email + GitHub + Twitter)" preserve="1" userDrawn="1">
   <p:cSld name="Acknowledgments, Mail/GH/Tw">
     <p:spTree>
       <p:nvGrpSpPr>
@@ -7724,9 +7982,9 @@
   </p:cSld>
   <p:clrMap bg1="lt1" tx1="dk1" bg2="lt2" tx2="dk2" accent1="accent1" accent2="accent2" accent3="accent3" accent4="accent4" accent5="accent5" accent6="accent6" hlink="hlink" folHlink="folHlink"/>
   <p:sldLayoutIdLst>
-    <p:sldLayoutId id="2147483944" r:id="rId1"/>
-    <p:sldLayoutId id="2147483945" r:id="rId2"/>
-    <p:sldLayoutId id="2147483930" r:id="rId3"/>
+    <p:sldLayoutId id="2147483930" r:id="rId1"/>
+    <p:sldLayoutId id="2147483944" r:id="rId2"/>
+    <p:sldLayoutId id="2147483945" r:id="rId3"/>
     <p:sldLayoutId id="2147483931" r:id="rId4"/>
     <p:sldLayoutId id="2147483933" r:id="rId5"/>
     <p:sldLayoutId id="2147483934" r:id="rId6"/>
@@ -8442,9 +8700,9 @@
   </p:cSld>
   <p:clrMap bg1="lt1" tx1="dk1" bg2="lt2" tx2="dk2" accent1="accent1" accent2="accent2" accent3="accent3" accent4="accent4" accent5="accent5" accent6="accent6" hlink="hlink" folHlink="folHlink"/>
   <p:sldLayoutIdLst>
-    <p:sldLayoutId id="2147483949" r:id="rId1"/>
-    <p:sldLayoutId id="2147483950" r:id="rId2"/>
-    <p:sldLayoutId id="2147483938" r:id="rId3"/>
+    <p:sldLayoutId id="2147483938" r:id="rId1"/>
+    <p:sldLayoutId id="2147483949" r:id="rId2"/>
+    <p:sldLayoutId id="2147483950" r:id="rId3"/>
     <p:sldLayoutId id="2147483939" r:id="rId4"/>
     <p:sldLayoutId id="2147483940" r:id="rId5"/>
     <p:sldLayoutId id="2147483941" r:id="rId6"/>
@@ -8736,6 +8994,1582 @@
     </p:otherStyle>
   </p:txStyles>
 </p:sldMaster>
+</file>
+
+<file path=ppt/slides/slide1.xml><?xml version="1.0" encoding="utf-8"?>
+<p:sld xmlns:a="http://schemas.openxmlformats.org/drawingml/2006/main" xmlns:r="http://schemas.openxmlformats.org/officeDocument/2006/relationships" xmlns:p="http://schemas.openxmlformats.org/presentationml/2006/main">
+  <p:cSld>
+    <p:spTree>
+      <p:nvGrpSpPr>
+        <p:cNvPr id="1" name=""/>
+        <p:cNvGrpSpPr/>
+        <p:nvPr/>
+      </p:nvGrpSpPr>
+      <p:grpSpPr>
+        <a:xfrm>
+          <a:off x="0" y="0"/>
+          <a:ext cx="0" cy="0"/>
+          <a:chOff x="0" y="0"/>
+          <a:chExt cx="0" cy="0"/>
+        </a:xfrm>
+      </p:grpSpPr>
+      <p:sp>
+        <p:nvSpPr>
+          <p:cNvPr id="2" name="Subtitle 1">
+            <a:extLst>
+              <a:ext uri="{FF2B5EF4-FFF2-40B4-BE49-F238E27FC236}">
+                <a16:creationId xmlns:a16="http://schemas.microsoft.com/office/drawing/2014/main" id="{A5D7F5A3-7376-A50B-B725-4CC8C79B1C01}"/>
+              </a:ext>
+            </a:extLst>
+          </p:cNvPr>
+          <p:cNvSpPr>
+            <a:spLocks noGrp="1"/>
+          </p:cNvSpPr>
+          <p:nvPr>
+            <p:ph type="subTitle" idx="1"/>
+          </p:nvPr>
+        </p:nvSpPr>
+        <p:spPr/>
+        <p:txBody>
+          <a:bodyPr/>
+          <a:lstStyle/>
+          <a:p>
+            <a:endParaRPr lang="en-DE"/>
+          </a:p>
+        </p:txBody>
+      </p:sp>
+      <p:sp>
+        <p:nvSpPr>
+          <p:cNvPr id="3" name="Title 2">
+            <a:extLst>
+              <a:ext uri="{FF2B5EF4-FFF2-40B4-BE49-F238E27FC236}">
+                <a16:creationId xmlns:a16="http://schemas.microsoft.com/office/drawing/2014/main" id="{4AA5850E-4B33-CDD6-8F50-8DD66D5C4395}"/>
+              </a:ext>
+            </a:extLst>
+          </p:cNvPr>
+          <p:cNvSpPr>
+            <a:spLocks noGrp="1"/>
+          </p:cNvSpPr>
+          <p:nvPr>
+            <p:ph type="title"/>
+          </p:nvPr>
+        </p:nvSpPr>
+        <p:spPr/>
+        <p:txBody>
+          <a:bodyPr/>
+          <a:lstStyle/>
+          <a:p>
+            <a:endParaRPr lang="en-DE"/>
+          </a:p>
+        </p:txBody>
+      </p:sp>
+      <p:sp>
+        <p:nvSpPr>
+          <p:cNvPr id="4" name="Content Placeholder 3">
+            <a:extLst>
+              <a:ext uri="{FF2B5EF4-FFF2-40B4-BE49-F238E27FC236}">
+                <a16:creationId xmlns:a16="http://schemas.microsoft.com/office/drawing/2014/main" id="{218A9990-AB29-DB7D-5B92-C2B2F9A9DDC0}"/>
+              </a:ext>
+            </a:extLst>
+          </p:cNvPr>
+          <p:cNvSpPr>
+            <a:spLocks noGrp="1"/>
+          </p:cNvSpPr>
+          <p:nvPr>
+            <p:ph sz="quarter" idx="10"/>
+          </p:nvPr>
+        </p:nvSpPr>
+        <p:spPr/>
+        <p:txBody>
+          <a:bodyPr/>
+          <a:lstStyle/>
+          <a:p>
+            <a:endParaRPr lang="en-DE"/>
+          </a:p>
+        </p:txBody>
+      </p:sp>
+    </p:spTree>
+    <p:extLst>
+      <p:ext uri="{BB962C8B-B14F-4D97-AF65-F5344CB8AC3E}">
+        <p14:creationId xmlns:p14="http://schemas.microsoft.com/office/powerpoint/2010/main" val="661292457"/>
+      </p:ext>
+    </p:extLst>
+  </p:cSld>
+  <p:clrMapOvr>
+    <a:masterClrMapping/>
+  </p:clrMapOvr>
+</p:sld>
+</file>
+
+<file path=ppt/slides/slide10.xml><?xml version="1.0" encoding="utf-8"?>
+<p:sld xmlns:a="http://schemas.openxmlformats.org/drawingml/2006/main" xmlns:r="http://schemas.openxmlformats.org/officeDocument/2006/relationships" xmlns:p="http://schemas.openxmlformats.org/presentationml/2006/main">
+  <p:cSld>
+    <p:spTree>
+      <p:nvGrpSpPr>
+        <p:cNvPr id="1" name=""/>
+        <p:cNvGrpSpPr/>
+        <p:nvPr/>
+      </p:nvGrpSpPr>
+      <p:grpSpPr>
+        <a:xfrm>
+          <a:off x="0" y="0"/>
+          <a:ext cx="0" cy="0"/>
+          <a:chOff x="0" y="0"/>
+          <a:chExt cx="0" cy="0"/>
+        </a:xfrm>
+      </p:grpSpPr>
+      <p:sp>
+        <p:nvSpPr>
+          <p:cNvPr id="2" name="Content Placeholder 1">
+            <a:extLst>
+              <a:ext uri="{FF2B5EF4-FFF2-40B4-BE49-F238E27FC236}">
+                <a16:creationId xmlns:a16="http://schemas.microsoft.com/office/drawing/2014/main" id="{443D14CC-D387-6C0E-9B4E-45F8318A76B3}"/>
+              </a:ext>
+            </a:extLst>
+          </p:cNvPr>
+          <p:cNvSpPr>
+            <a:spLocks noGrp="1"/>
+          </p:cNvSpPr>
+          <p:nvPr>
+            <p:ph idx="1"/>
+          </p:nvPr>
+        </p:nvSpPr>
+        <p:spPr/>
+        <p:txBody>
+          <a:bodyPr/>
+          <a:lstStyle/>
+          <a:p>
+            <a:endParaRPr lang="en-DE"/>
+          </a:p>
+        </p:txBody>
+      </p:sp>
+      <p:sp>
+        <p:nvSpPr>
+          <p:cNvPr id="3" name="Title 2">
+            <a:extLst>
+              <a:ext uri="{FF2B5EF4-FFF2-40B4-BE49-F238E27FC236}">
+                <a16:creationId xmlns:a16="http://schemas.microsoft.com/office/drawing/2014/main" id="{0B69CC3C-6388-CE9F-F112-111F199296F4}"/>
+              </a:ext>
+            </a:extLst>
+          </p:cNvPr>
+          <p:cNvSpPr>
+            <a:spLocks noGrp="1"/>
+          </p:cNvSpPr>
+          <p:nvPr>
+            <p:ph type="title"/>
+          </p:nvPr>
+        </p:nvSpPr>
+        <p:spPr/>
+        <p:txBody>
+          <a:bodyPr/>
+          <a:lstStyle/>
+          <a:p>
+            <a:endParaRPr lang="en-DE"/>
+          </a:p>
+        </p:txBody>
+      </p:sp>
+      <p:sp>
+        <p:nvSpPr>
+          <p:cNvPr id="4" name="Text Placeholder 3">
+            <a:extLst>
+              <a:ext uri="{FF2B5EF4-FFF2-40B4-BE49-F238E27FC236}">
+                <a16:creationId xmlns:a16="http://schemas.microsoft.com/office/drawing/2014/main" id="{52B8436D-8632-95E1-0431-2C873F4B7179}"/>
+              </a:ext>
+            </a:extLst>
+          </p:cNvPr>
+          <p:cNvSpPr>
+            <a:spLocks noGrp="1"/>
+          </p:cNvSpPr>
+          <p:nvPr>
+            <p:ph type="body" sz="quarter" idx="11"/>
+          </p:nvPr>
+        </p:nvSpPr>
+        <p:spPr/>
+        <p:txBody>
+          <a:bodyPr/>
+          <a:lstStyle/>
+          <a:p>
+            <a:endParaRPr lang="en-DE"/>
+          </a:p>
+        </p:txBody>
+      </p:sp>
+      <p:sp>
+        <p:nvSpPr>
+          <p:cNvPr id="5" name="Slide Number Placeholder 4">
+            <a:extLst>
+              <a:ext uri="{FF2B5EF4-FFF2-40B4-BE49-F238E27FC236}">
+                <a16:creationId xmlns:a16="http://schemas.microsoft.com/office/drawing/2014/main" id="{26EEB9B2-98E2-C48A-7925-EFA5422F9B35}"/>
+              </a:ext>
+            </a:extLst>
+          </p:cNvPr>
+          <p:cNvSpPr>
+            <a:spLocks noGrp="1"/>
+          </p:cNvSpPr>
+          <p:nvPr>
+            <p:ph type="sldNum" sz="quarter" idx="12"/>
+          </p:nvPr>
+        </p:nvSpPr>
+        <p:spPr/>
+        <p:txBody>
+          <a:bodyPr/>
+          <a:lstStyle/>
+          <a:p>
+            <a:fld id="{2C0D6744-4E72-634D-83C3-20CC96599462}" type="slidenum">
+              <a:rPr lang="en-DE" smtClean="0"/>
+              <a:pPr/>
+              <a:t>10</a:t>
+            </a:fld>
+            <a:endParaRPr lang="en-DE" dirty="0"/>
+          </a:p>
+        </p:txBody>
+      </p:sp>
+    </p:spTree>
+    <p:extLst>
+      <p:ext uri="{BB962C8B-B14F-4D97-AF65-F5344CB8AC3E}">
+        <p14:creationId xmlns:p14="http://schemas.microsoft.com/office/powerpoint/2010/main" val="998724541"/>
+      </p:ext>
+    </p:extLst>
+  </p:cSld>
+  <p:clrMapOvr>
+    <a:masterClrMapping/>
+  </p:clrMapOvr>
+</p:sld>
+</file>
+
+<file path=ppt/slides/slide11.xml><?xml version="1.0" encoding="utf-8"?>
+<p:sld xmlns:a="http://schemas.openxmlformats.org/drawingml/2006/main" xmlns:r="http://schemas.openxmlformats.org/officeDocument/2006/relationships" xmlns:p="http://schemas.openxmlformats.org/presentationml/2006/main">
+  <p:cSld>
+    <p:spTree>
+      <p:nvGrpSpPr>
+        <p:cNvPr id="1" name=""/>
+        <p:cNvGrpSpPr/>
+        <p:nvPr/>
+      </p:nvGrpSpPr>
+      <p:grpSpPr>
+        <a:xfrm>
+          <a:off x="0" y="0"/>
+          <a:ext cx="0" cy="0"/>
+          <a:chOff x="0" y="0"/>
+          <a:chExt cx="0" cy="0"/>
+        </a:xfrm>
+      </p:grpSpPr>
+      <p:sp>
+        <p:nvSpPr>
+          <p:cNvPr id="2" name="Title 1">
+            <a:extLst>
+              <a:ext uri="{FF2B5EF4-FFF2-40B4-BE49-F238E27FC236}">
+                <a16:creationId xmlns:a16="http://schemas.microsoft.com/office/drawing/2014/main" id="{DC93095E-AC22-6E89-1879-378931B5611C}"/>
+              </a:ext>
+            </a:extLst>
+          </p:cNvPr>
+          <p:cNvSpPr>
+            <a:spLocks noGrp="1"/>
+          </p:cNvSpPr>
+          <p:nvPr>
+            <p:ph type="title"/>
+          </p:nvPr>
+        </p:nvSpPr>
+        <p:spPr/>
+        <p:txBody>
+          <a:bodyPr/>
+          <a:lstStyle/>
+          <a:p>
+            <a:endParaRPr lang="en-DE"/>
+          </a:p>
+        </p:txBody>
+      </p:sp>
+      <p:sp>
+        <p:nvSpPr>
+          <p:cNvPr id="3" name="Content Placeholder 2">
+            <a:extLst>
+              <a:ext uri="{FF2B5EF4-FFF2-40B4-BE49-F238E27FC236}">
+                <a16:creationId xmlns:a16="http://schemas.microsoft.com/office/drawing/2014/main" id="{F1FA897A-118A-8BDA-56A7-6D27AF69D236}"/>
+              </a:ext>
+            </a:extLst>
+          </p:cNvPr>
+          <p:cNvSpPr>
+            <a:spLocks noGrp="1"/>
+          </p:cNvSpPr>
+          <p:nvPr>
+            <p:ph sz="half" idx="1"/>
+          </p:nvPr>
+        </p:nvSpPr>
+        <p:spPr/>
+        <p:txBody>
+          <a:bodyPr/>
+          <a:lstStyle/>
+          <a:p>
+            <a:endParaRPr lang="en-DE"/>
+          </a:p>
+        </p:txBody>
+      </p:sp>
+      <p:sp>
+        <p:nvSpPr>
+          <p:cNvPr id="4" name="Content Placeholder 3">
+            <a:extLst>
+              <a:ext uri="{FF2B5EF4-FFF2-40B4-BE49-F238E27FC236}">
+                <a16:creationId xmlns:a16="http://schemas.microsoft.com/office/drawing/2014/main" id="{7888177B-A0EA-36DF-A93C-8BD84B969666}"/>
+              </a:ext>
+            </a:extLst>
+          </p:cNvPr>
+          <p:cNvSpPr>
+            <a:spLocks noGrp="1"/>
+          </p:cNvSpPr>
+          <p:nvPr>
+            <p:ph sz="half" idx="2"/>
+          </p:nvPr>
+        </p:nvSpPr>
+        <p:spPr/>
+        <p:txBody>
+          <a:bodyPr/>
+          <a:lstStyle/>
+          <a:p>
+            <a:endParaRPr lang="en-DE"/>
+          </a:p>
+        </p:txBody>
+      </p:sp>
+      <p:sp>
+        <p:nvSpPr>
+          <p:cNvPr id="5" name="Text Placeholder 4">
+            <a:extLst>
+              <a:ext uri="{FF2B5EF4-FFF2-40B4-BE49-F238E27FC236}">
+                <a16:creationId xmlns:a16="http://schemas.microsoft.com/office/drawing/2014/main" id="{6E6687BF-984D-E981-0E7C-0261DB7C5779}"/>
+              </a:ext>
+            </a:extLst>
+          </p:cNvPr>
+          <p:cNvSpPr>
+            <a:spLocks noGrp="1"/>
+          </p:cNvSpPr>
+          <p:nvPr>
+            <p:ph type="body" sz="quarter" idx="11"/>
+          </p:nvPr>
+        </p:nvSpPr>
+        <p:spPr/>
+        <p:txBody>
+          <a:bodyPr/>
+          <a:lstStyle/>
+          <a:p>
+            <a:endParaRPr lang="en-DE"/>
+          </a:p>
+        </p:txBody>
+      </p:sp>
+      <p:sp>
+        <p:nvSpPr>
+          <p:cNvPr id="6" name="Slide Number Placeholder 5">
+            <a:extLst>
+              <a:ext uri="{FF2B5EF4-FFF2-40B4-BE49-F238E27FC236}">
+                <a16:creationId xmlns:a16="http://schemas.microsoft.com/office/drawing/2014/main" id="{526325B3-7359-A30A-92D1-2721D6D7FAC2}"/>
+              </a:ext>
+            </a:extLst>
+          </p:cNvPr>
+          <p:cNvSpPr>
+            <a:spLocks noGrp="1"/>
+          </p:cNvSpPr>
+          <p:nvPr>
+            <p:ph type="sldNum" sz="quarter" idx="12"/>
+          </p:nvPr>
+        </p:nvSpPr>
+        <p:spPr/>
+        <p:txBody>
+          <a:bodyPr/>
+          <a:lstStyle/>
+          <a:p>
+            <a:fld id="{2C0D6744-4E72-634D-83C3-20CC96599462}" type="slidenum">
+              <a:rPr lang="en-DE" smtClean="0"/>
+              <a:pPr/>
+              <a:t>11</a:t>
+            </a:fld>
+            <a:endParaRPr lang="en-DE" dirty="0"/>
+          </a:p>
+        </p:txBody>
+      </p:sp>
+    </p:spTree>
+    <p:extLst>
+      <p:ext uri="{BB962C8B-B14F-4D97-AF65-F5344CB8AC3E}">
+        <p14:creationId xmlns:p14="http://schemas.microsoft.com/office/powerpoint/2010/main" val="17150661"/>
+      </p:ext>
+    </p:extLst>
+  </p:cSld>
+  <p:clrMapOvr>
+    <a:masterClrMapping/>
+  </p:clrMapOvr>
+</p:sld>
+</file>
+
+<file path=ppt/slides/slide12.xml><?xml version="1.0" encoding="utf-8"?>
+<p:sld xmlns:a="http://schemas.openxmlformats.org/drawingml/2006/main" xmlns:r="http://schemas.openxmlformats.org/officeDocument/2006/relationships" xmlns:p="http://schemas.openxmlformats.org/presentationml/2006/main">
+  <p:cSld>
+    <p:spTree>
+      <p:nvGrpSpPr>
+        <p:cNvPr id="1" name=""/>
+        <p:cNvGrpSpPr/>
+        <p:nvPr/>
+      </p:nvGrpSpPr>
+      <p:grpSpPr>
+        <a:xfrm>
+          <a:off x="0" y="0"/>
+          <a:ext cx="0" cy="0"/>
+          <a:chOff x="0" y="0"/>
+          <a:chExt cx="0" cy="0"/>
+        </a:xfrm>
+      </p:grpSpPr>
+      <p:sp>
+        <p:nvSpPr>
+          <p:cNvPr id="2" name="Picture Placeholder 1">
+            <a:extLst>
+              <a:ext uri="{FF2B5EF4-FFF2-40B4-BE49-F238E27FC236}">
+                <a16:creationId xmlns:a16="http://schemas.microsoft.com/office/drawing/2014/main" id="{E49DC07E-BFB6-B52D-0D6B-6AE907226462}"/>
+              </a:ext>
+            </a:extLst>
+          </p:cNvPr>
+          <p:cNvSpPr>
+            <a:spLocks noGrp="1"/>
+          </p:cNvSpPr>
+          <p:nvPr>
+            <p:ph type="pic" sz="quarter" idx="13"/>
+          </p:nvPr>
+        </p:nvSpPr>
+        <p:spPr/>
+      </p:sp>
+      <p:sp>
+        <p:nvSpPr>
+          <p:cNvPr id="3" name="Text Placeholder 2">
+            <a:extLst>
+              <a:ext uri="{FF2B5EF4-FFF2-40B4-BE49-F238E27FC236}">
+                <a16:creationId xmlns:a16="http://schemas.microsoft.com/office/drawing/2014/main" id="{136486D3-47FB-7981-0D66-E15B0F4D1F03}"/>
+              </a:ext>
+            </a:extLst>
+          </p:cNvPr>
+          <p:cNvSpPr>
+            <a:spLocks noGrp="1"/>
+          </p:cNvSpPr>
+          <p:nvPr>
+            <p:ph type="body" sz="quarter" idx="14"/>
+          </p:nvPr>
+        </p:nvSpPr>
+        <p:spPr/>
+        <p:txBody>
+          <a:bodyPr/>
+          <a:lstStyle/>
+          <a:p>
+            <a:endParaRPr lang="en-DE"/>
+          </a:p>
+        </p:txBody>
+      </p:sp>
+      <p:sp>
+        <p:nvSpPr>
+          <p:cNvPr id="4" name="Text Placeholder 3">
+            <a:extLst>
+              <a:ext uri="{FF2B5EF4-FFF2-40B4-BE49-F238E27FC236}">
+                <a16:creationId xmlns:a16="http://schemas.microsoft.com/office/drawing/2014/main" id="{9C6F1118-2B99-5FF0-DB1D-A122E10B94C2}"/>
+              </a:ext>
+            </a:extLst>
+          </p:cNvPr>
+          <p:cNvSpPr>
+            <a:spLocks noGrp="1"/>
+          </p:cNvSpPr>
+          <p:nvPr>
+            <p:ph type="body" sz="quarter" idx="16"/>
+          </p:nvPr>
+        </p:nvSpPr>
+        <p:spPr/>
+        <p:txBody>
+          <a:bodyPr/>
+          <a:lstStyle/>
+          <a:p>
+            <a:endParaRPr lang="en-DE"/>
+          </a:p>
+        </p:txBody>
+      </p:sp>
+      <p:sp>
+        <p:nvSpPr>
+          <p:cNvPr id="5" name="Text Placeholder 4">
+            <a:extLst>
+              <a:ext uri="{FF2B5EF4-FFF2-40B4-BE49-F238E27FC236}">
+                <a16:creationId xmlns:a16="http://schemas.microsoft.com/office/drawing/2014/main" id="{AA824298-5584-39B3-7E0C-CCF3A41F3527}"/>
+              </a:ext>
+            </a:extLst>
+          </p:cNvPr>
+          <p:cNvSpPr>
+            <a:spLocks noGrp="1"/>
+          </p:cNvSpPr>
+          <p:nvPr>
+            <p:ph type="body" sz="quarter" idx="17"/>
+          </p:nvPr>
+        </p:nvSpPr>
+        <p:spPr/>
+        <p:txBody>
+          <a:bodyPr/>
+          <a:lstStyle/>
+          <a:p>
+            <a:endParaRPr lang="en-DE"/>
+          </a:p>
+        </p:txBody>
+      </p:sp>
+      <p:sp>
+        <p:nvSpPr>
+          <p:cNvPr id="6" name="Text Placeholder 5">
+            <a:extLst>
+              <a:ext uri="{FF2B5EF4-FFF2-40B4-BE49-F238E27FC236}">
+                <a16:creationId xmlns:a16="http://schemas.microsoft.com/office/drawing/2014/main" id="{7DCA23A6-E1CC-2438-EDFB-4CA9DF997B5D}"/>
+              </a:ext>
+            </a:extLst>
+          </p:cNvPr>
+          <p:cNvSpPr>
+            <a:spLocks noGrp="1"/>
+          </p:cNvSpPr>
+          <p:nvPr>
+            <p:ph type="body" sz="quarter" idx="18"/>
+          </p:nvPr>
+        </p:nvSpPr>
+        <p:spPr/>
+        <p:txBody>
+          <a:bodyPr/>
+          <a:lstStyle/>
+          <a:p>
+            <a:endParaRPr lang="en-DE"/>
+          </a:p>
+        </p:txBody>
+      </p:sp>
+      <p:sp>
+        <p:nvSpPr>
+          <p:cNvPr id="7" name="Text Placeholder 6">
+            <a:extLst>
+              <a:ext uri="{FF2B5EF4-FFF2-40B4-BE49-F238E27FC236}">
+                <a16:creationId xmlns:a16="http://schemas.microsoft.com/office/drawing/2014/main" id="{EA487C87-50AB-8D69-0191-75AFF0CB10D1}"/>
+              </a:ext>
+            </a:extLst>
+          </p:cNvPr>
+          <p:cNvSpPr>
+            <a:spLocks noGrp="1"/>
+          </p:cNvSpPr>
+          <p:nvPr>
+            <p:ph type="body" sz="quarter" idx="15"/>
+          </p:nvPr>
+        </p:nvSpPr>
+        <p:spPr/>
+        <p:txBody>
+          <a:bodyPr/>
+          <a:lstStyle/>
+          <a:p>
+            <a:endParaRPr lang="en-DE"/>
+          </a:p>
+        </p:txBody>
+      </p:sp>
+    </p:spTree>
+    <p:extLst>
+      <p:ext uri="{BB962C8B-B14F-4D97-AF65-F5344CB8AC3E}">
+        <p14:creationId xmlns:p14="http://schemas.microsoft.com/office/powerpoint/2010/main" val="2623941236"/>
+      </p:ext>
+    </p:extLst>
+  </p:cSld>
+  <p:clrMapOvr>
+    <a:masterClrMapping/>
+  </p:clrMapOvr>
+</p:sld>
+</file>
+
+<file path=ppt/slides/slide2.xml><?xml version="1.0" encoding="utf-8"?>
+<p:sld xmlns:a="http://schemas.openxmlformats.org/drawingml/2006/main" xmlns:r="http://schemas.openxmlformats.org/officeDocument/2006/relationships" xmlns:p="http://schemas.openxmlformats.org/presentationml/2006/main">
+  <p:cSld>
+    <p:spTree>
+      <p:nvGrpSpPr>
+        <p:cNvPr id="1" name=""/>
+        <p:cNvGrpSpPr/>
+        <p:nvPr/>
+      </p:nvGrpSpPr>
+      <p:grpSpPr>
+        <a:xfrm>
+          <a:off x="0" y="0"/>
+          <a:ext cx="0" cy="0"/>
+          <a:chOff x="0" y="0"/>
+          <a:chExt cx="0" cy="0"/>
+        </a:xfrm>
+      </p:grpSpPr>
+      <p:sp>
+        <p:nvSpPr>
+          <p:cNvPr id="2" name="Subtitle 1">
+            <a:extLst>
+              <a:ext uri="{FF2B5EF4-FFF2-40B4-BE49-F238E27FC236}">
+                <a16:creationId xmlns:a16="http://schemas.microsoft.com/office/drawing/2014/main" id="{2052F20D-3418-1113-EF22-C59394D7A702}"/>
+              </a:ext>
+            </a:extLst>
+          </p:cNvPr>
+          <p:cNvSpPr>
+            <a:spLocks noGrp="1"/>
+          </p:cNvSpPr>
+          <p:nvPr>
+            <p:ph type="subTitle" idx="1"/>
+          </p:nvPr>
+        </p:nvSpPr>
+        <p:spPr/>
+        <p:txBody>
+          <a:bodyPr/>
+          <a:lstStyle/>
+          <a:p>
+            <a:endParaRPr lang="en-DE"/>
+          </a:p>
+        </p:txBody>
+      </p:sp>
+      <p:sp>
+        <p:nvSpPr>
+          <p:cNvPr id="3" name="Title 2">
+            <a:extLst>
+              <a:ext uri="{FF2B5EF4-FFF2-40B4-BE49-F238E27FC236}">
+                <a16:creationId xmlns:a16="http://schemas.microsoft.com/office/drawing/2014/main" id="{37C0C2A5-28D5-FC0C-D0BE-BEB58AB5F9CB}"/>
+              </a:ext>
+            </a:extLst>
+          </p:cNvPr>
+          <p:cNvSpPr>
+            <a:spLocks noGrp="1"/>
+          </p:cNvSpPr>
+          <p:nvPr>
+            <p:ph type="title"/>
+          </p:nvPr>
+        </p:nvSpPr>
+        <p:spPr/>
+        <p:txBody>
+          <a:bodyPr/>
+          <a:lstStyle/>
+          <a:p>
+            <a:endParaRPr lang="en-DE"/>
+          </a:p>
+        </p:txBody>
+      </p:sp>
+      <p:sp>
+        <p:nvSpPr>
+          <p:cNvPr id="4" name="Content Placeholder 3">
+            <a:extLst>
+              <a:ext uri="{FF2B5EF4-FFF2-40B4-BE49-F238E27FC236}">
+                <a16:creationId xmlns:a16="http://schemas.microsoft.com/office/drawing/2014/main" id="{6823DC08-D1D5-CEE0-39FF-AA82F354A025}"/>
+              </a:ext>
+            </a:extLst>
+          </p:cNvPr>
+          <p:cNvSpPr>
+            <a:spLocks noGrp="1"/>
+          </p:cNvSpPr>
+          <p:nvPr>
+            <p:ph sz="quarter" idx="10"/>
+          </p:nvPr>
+        </p:nvSpPr>
+        <p:spPr/>
+        <p:txBody>
+          <a:bodyPr/>
+          <a:lstStyle/>
+          <a:p>
+            <a:endParaRPr lang="en-DE"/>
+          </a:p>
+        </p:txBody>
+      </p:sp>
+    </p:spTree>
+    <p:extLst>
+      <p:ext uri="{BB962C8B-B14F-4D97-AF65-F5344CB8AC3E}">
+        <p14:creationId xmlns:p14="http://schemas.microsoft.com/office/powerpoint/2010/main" val="2583060024"/>
+      </p:ext>
+    </p:extLst>
+  </p:cSld>
+  <p:clrMapOvr>
+    <a:masterClrMapping/>
+  </p:clrMapOvr>
+</p:sld>
+</file>
+
+<file path=ppt/slides/slide3.xml><?xml version="1.0" encoding="utf-8"?>
+<p:sld xmlns:a="http://schemas.openxmlformats.org/drawingml/2006/main" xmlns:r="http://schemas.openxmlformats.org/officeDocument/2006/relationships" xmlns:p="http://schemas.openxmlformats.org/presentationml/2006/main">
+  <p:cSld>
+    <p:spTree>
+      <p:nvGrpSpPr>
+        <p:cNvPr id="1" name=""/>
+        <p:cNvGrpSpPr/>
+        <p:nvPr/>
+      </p:nvGrpSpPr>
+      <p:grpSpPr>
+        <a:xfrm>
+          <a:off x="0" y="0"/>
+          <a:ext cx="0" cy="0"/>
+          <a:chOff x="0" y="0"/>
+          <a:chExt cx="0" cy="0"/>
+        </a:xfrm>
+      </p:grpSpPr>
+      <p:sp>
+        <p:nvSpPr>
+          <p:cNvPr id="2" name="Title 1">
+            <a:extLst>
+              <a:ext uri="{FF2B5EF4-FFF2-40B4-BE49-F238E27FC236}">
+                <a16:creationId xmlns:a16="http://schemas.microsoft.com/office/drawing/2014/main" id="{7DB4FEA7-6DBD-C3A7-D771-71055686A444}"/>
+              </a:ext>
+            </a:extLst>
+          </p:cNvPr>
+          <p:cNvSpPr>
+            <a:spLocks noGrp="1"/>
+          </p:cNvSpPr>
+          <p:nvPr>
+            <p:ph type="ctrTitle"/>
+          </p:nvPr>
+        </p:nvSpPr>
+        <p:spPr/>
+        <p:txBody>
+          <a:bodyPr/>
+          <a:lstStyle/>
+          <a:p>
+            <a:endParaRPr lang="en-DE"/>
+          </a:p>
+        </p:txBody>
+      </p:sp>
+      <p:sp>
+        <p:nvSpPr>
+          <p:cNvPr id="3" name="Subtitle 2">
+            <a:extLst>
+              <a:ext uri="{FF2B5EF4-FFF2-40B4-BE49-F238E27FC236}">
+                <a16:creationId xmlns:a16="http://schemas.microsoft.com/office/drawing/2014/main" id="{99255F72-6E2C-554E-C295-22C9057D0D27}"/>
+              </a:ext>
+            </a:extLst>
+          </p:cNvPr>
+          <p:cNvSpPr>
+            <a:spLocks noGrp="1"/>
+          </p:cNvSpPr>
+          <p:nvPr>
+            <p:ph type="subTitle" idx="1"/>
+          </p:nvPr>
+        </p:nvSpPr>
+        <p:spPr/>
+        <p:txBody>
+          <a:bodyPr/>
+          <a:lstStyle/>
+          <a:p>
+            <a:endParaRPr lang="en-DE"/>
+          </a:p>
+        </p:txBody>
+      </p:sp>
+    </p:spTree>
+    <p:extLst>
+      <p:ext uri="{BB962C8B-B14F-4D97-AF65-F5344CB8AC3E}">
+        <p14:creationId xmlns:p14="http://schemas.microsoft.com/office/powerpoint/2010/main" val="1915425097"/>
+      </p:ext>
+    </p:extLst>
+  </p:cSld>
+  <p:clrMapOvr>
+    <a:masterClrMapping/>
+  </p:clrMapOvr>
+</p:sld>
+</file>
+
+<file path=ppt/slides/slide4.xml><?xml version="1.0" encoding="utf-8"?>
+<p:sld xmlns:a="http://schemas.openxmlformats.org/drawingml/2006/main" xmlns:r="http://schemas.openxmlformats.org/officeDocument/2006/relationships" xmlns:p="http://schemas.openxmlformats.org/presentationml/2006/main">
+  <p:cSld>
+    <p:spTree>
+      <p:nvGrpSpPr>
+        <p:cNvPr id="1" name=""/>
+        <p:cNvGrpSpPr/>
+        <p:nvPr/>
+      </p:nvGrpSpPr>
+      <p:grpSpPr>
+        <a:xfrm>
+          <a:off x="0" y="0"/>
+          <a:ext cx="0" cy="0"/>
+          <a:chOff x="0" y="0"/>
+          <a:chExt cx="0" cy="0"/>
+        </a:xfrm>
+      </p:grpSpPr>
+      <p:sp>
+        <p:nvSpPr>
+          <p:cNvPr id="2" name="Content Placeholder 1">
+            <a:extLst>
+              <a:ext uri="{FF2B5EF4-FFF2-40B4-BE49-F238E27FC236}">
+                <a16:creationId xmlns:a16="http://schemas.microsoft.com/office/drawing/2014/main" id="{938630B1-2C31-2121-4DE1-1878CFC0AD27}"/>
+              </a:ext>
+            </a:extLst>
+          </p:cNvPr>
+          <p:cNvSpPr>
+            <a:spLocks noGrp="1"/>
+          </p:cNvSpPr>
+          <p:nvPr>
+            <p:ph idx="1"/>
+          </p:nvPr>
+        </p:nvSpPr>
+        <p:spPr/>
+        <p:txBody>
+          <a:bodyPr/>
+          <a:lstStyle/>
+          <a:p>
+            <a:endParaRPr lang="en-DE"/>
+          </a:p>
+        </p:txBody>
+      </p:sp>
+      <p:sp>
+        <p:nvSpPr>
+          <p:cNvPr id="3" name="Title 2">
+            <a:extLst>
+              <a:ext uri="{FF2B5EF4-FFF2-40B4-BE49-F238E27FC236}">
+                <a16:creationId xmlns:a16="http://schemas.microsoft.com/office/drawing/2014/main" id="{966DDCD9-343A-7038-D740-8FBA064B7DBB}"/>
+              </a:ext>
+            </a:extLst>
+          </p:cNvPr>
+          <p:cNvSpPr>
+            <a:spLocks noGrp="1"/>
+          </p:cNvSpPr>
+          <p:nvPr>
+            <p:ph type="title"/>
+          </p:nvPr>
+        </p:nvSpPr>
+        <p:spPr/>
+        <p:txBody>
+          <a:bodyPr/>
+          <a:lstStyle/>
+          <a:p>
+            <a:endParaRPr lang="en-DE"/>
+          </a:p>
+        </p:txBody>
+      </p:sp>
+      <p:sp>
+        <p:nvSpPr>
+          <p:cNvPr id="4" name="Slide Number Placeholder 3">
+            <a:extLst>
+              <a:ext uri="{FF2B5EF4-FFF2-40B4-BE49-F238E27FC236}">
+                <a16:creationId xmlns:a16="http://schemas.microsoft.com/office/drawing/2014/main" id="{FFE78332-38BF-76A2-8FEA-955969B16A78}"/>
+              </a:ext>
+            </a:extLst>
+          </p:cNvPr>
+          <p:cNvSpPr>
+            <a:spLocks noGrp="1"/>
+          </p:cNvSpPr>
+          <p:nvPr>
+            <p:ph type="sldNum" sz="quarter" idx="10"/>
+          </p:nvPr>
+        </p:nvSpPr>
+        <p:spPr/>
+        <p:txBody>
+          <a:bodyPr/>
+          <a:lstStyle/>
+          <a:p>
+            <a:fld id="{498EEE73-6CBB-5A43-915D-6D3EC7AE1E7C}" type="slidenum">
+              <a:rPr lang="en-DE" smtClean="0"/>
+              <a:pPr/>
+              <a:t>4</a:t>
+            </a:fld>
+            <a:endParaRPr lang="en-DE" dirty="0"/>
+          </a:p>
+        </p:txBody>
+      </p:sp>
+      <p:sp>
+        <p:nvSpPr>
+          <p:cNvPr id="5" name="Text Placeholder 4">
+            <a:extLst>
+              <a:ext uri="{FF2B5EF4-FFF2-40B4-BE49-F238E27FC236}">
+                <a16:creationId xmlns:a16="http://schemas.microsoft.com/office/drawing/2014/main" id="{36886A2D-78F3-73B2-1386-CF432F539CCE}"/>
+              </a:ext>
+            </a:extLst>
+          </p:cNvPr>
+          <p:cNvSpPr>
+            <a:spLocks noGrp="1"/>
+          </p:cNvSpPr>
+          <p:nvPr>
+            <p:ph type="body" sz="quarter" idx="11"/>
+          </p:nvPr>
+        </p:nvSpPr>
+        <p:spPr/>
+        <p:txBody>
+          <a:bodyPr/>
+          <a:lstStyle/>
+          <a:p>
+            <a:endParaRPr lang="en-DE"/>
+          </a:p>
+        </p:txBody>
+      </p:sp>
+    </p:spTree>
+    <p:extLst>
+      <p:ext uri="{BB962C8B-B14F-4D97-AF65-F5344CB8AC3E}">
+        <p14:creationId xmlns:p14="http://schemas.microsoft.com/office/powerpoint/2010/main" val="1706155806"/>
+      </p:ext>
+    </p:extLst>
+  </p:cSld>
+  <p:clrMapOvr>
+    <a:masterClrMapping/>
+  </p:clrMapOvr>
+</p:sld>
+</file>
+
+<file path=ppt/slides/slide5.xml><?xml version="1.0" encoding="utf-8"?>
+<p:sld xmlns:a="http://schemas.openxmlformats.org/drawingml/2006/main" xmlns:r="http://schemas.openxmlformats.org/officeDocument/2006/relationships" xmlns:p="http://schemas.openxmlformats.org/presentationml/2006/main">
+  <p:cSld>
+    <p:spTree>
+      <p:nvGrpSpPr>
+        <p:cNvPr id="1" name=""/>
+        <p:cNvGrpSpPr/>
+        <p:nvPr/>
+      </p:nvGrpSpPr>
+      <p:grpSpPr>
+        <a:xfrm>
+          <a:off x="0" y="0"/>
+          <a:ext cx="0" cy="0"/>
+          <a:chOff x="0" y="0"/>
+          <a:chExt cx="0" cy="0"/>
+        </a:xfrm>
+      </p:grpSpPr>
+      <p:sp>
+        <p:nvSpPr>
+          <p:cNvPr id="2" name="Title 1">
+            <a:extLst>
+              <a:ext uri="{FF2B5EF4-FFF2-40B4-BE49-F238E27FC236}">
+                <a16:creationId xmlns:a16="http://schemas.microsoft.com/office/drawing/2014/main" id="{AE122A12-66EC-7C11-258C-7E3BA9DC9DE8}"/>
+              </a:ext>
+            </a:extLst>
+          </p:cNvPr>
+          <p:cNvSpPr>
+            <a:spLocks noGrp="1"/>
+          </p:cNvSpPr>
+          <p:nvPr>
+            <p:ph type="title"/>
+          </p:nvPr>
+        </p:nvSpPr>
+        <p:spPr/>
+        <p:txBody>
+          <a:bodyPr/>
+          <a:lstStyle/>
+          <a:p>
+            <a:endParaRPr lang="en-DE"/>
+          </a:p>
+        </p:txBody>
+      </p:sp>
+      <p:sp>
+        <p:nvSpPr>
+          <p:cNvPr id="3" name="Content Placeholder 2">
+            <a:extLst>
+              <a:ext uri="{FF2B5EF4-FFF2-40B4-BE49-F238E27FC236}">
+                <a16:creationId xmlns:a16="http://schemas.microsoft.com/office/drawing/2014/main" id="{1C85EFE9-D795-C91D-FA6E-1020C97D952F}"/>
+              </a:ext>
+            </a:extLst>
+          </p:cNvPr>
+          <p:cNvSpPr>
+            <a:spLocks noGrp="1"/>
+          </p:cNvSpPr>
+          <p:nvPr>
+            <p:ph sz="half" idx="1"/>
+          </p:nvPr>
+        </p:nvSpPr>
+        <p:spPr/>
+        <p:txBody>
+          <a:bodyPr/>
+          <a:lstStyle/>
+          <a:p>
+            <a:endParaRPr lang="en-DE"/>
+          </a:p>
+        </p:txBody>
+      </p:sp>
+      <p:sp>
+        <p:nvSpPr>
+          <p:cNvPr id="4" name="Content Placeholder 3">
+            <a:extLst>
+              <a:ext uri="{FF2B5EF4-FFF2-40B4-BE49-F238E27FC236}">
+                <a16:creationId xmlns:a16="http://schemas.microsoft.com/office/drawing/2014/main" id="{6705B433-CCDD-E7AD-2219-16210A2F10F3}"/>
+              </a:ext>
+            </a:extLst>
+          </p:cNvPr>
+          <p:cNvSpPr>
+            <a:spLocks noGrp="1"/>
+          </p:cNvSpPr>
+          <p:nvPr>
+            <p:ph sz="half" idx="2"/>
+          </p:nvPr>
+        </p:nvSpPr>
+        <p:spPr/>
+        <p:txBody>
+          <a:bodyPr/>
+          <a:lstStyle/>
+          <a:p>
+            <a:endParaRPr lang="en-DE"/>
+          </a:p>
+        </p:txBody>
+      </p:sp>
+      <p:sp>
+        <p:nvSpPr>
+          <p:cNvPr id="5" name="Slide Number Placeholder 4">
+            <a:extLst>
+              <a:ext uri="{FF2B5EF4-FFF2-40B4-BE49-F238E27FC236}">
+                <a16:creationId xmlns:a16="http://schemas.microsoft.com/office/drawing/2014/main" id="{90E6C093-E427-013F-9B9D-5A96B59B5629}"/>
+              </a:ext>
+            </a:extLst>
+          </p:cNvPr>
+          <p:cNvSpPr>
+            <a:spLocks noGrp="1"/>
+          </p:cNvSpPr>
+          <p:nvPr>
+            <p:ph type="sldNum" sz="quarter" idx="10"/>
+          </p:nvPr>
+        </p:nvSpPr>
+        <p:spPr/>
+        <p:txBody>
+          <a:bodyPr/>
+          <a:lstStyle/>
+          <a:p>
+            <a:fld id="{498EEE73-6CBB-5A43-915D-6D3EC7AE1E7C}" type="slidenum">
+              <a:rPr lang="en-DE" smtClean="0"/>
+              <a:pPr/>
+              <a:t>5</a:t>
+            </a:fld>
+            <a:endParaRPr lang="en-DE" dirty="0"/>
+          </a:p>
+        </p:txBody>
+      </p:sp>
+      <p:sp>
+        <p:nvSpPr>
+          <p:cNvPr id="6" name="Text Placeholder 5">
+            <a:extLst>
+              <a:ext uri="{FF2B5EF4-FFF2-40B4-BE49-F238E27FC236}">
+                <a16:creationId xmlns:a16="http://schemas.microsoft.com/office/drawing/2014/main" id="{36AF6AAC-0DC1-C48B-7ACE-C5CBCFFE1279}"/>
+              </a:ext>
+            </a:extLst>
+          </p:cNvPr>
+          <p:cNvSpPr>
+            <a:spLocks noGrp="1"/>
+          </p:cNvSpPr>
+          <p:nvPr>
+            <p:ph type="body" sz="quarter" idx="11"/>
+          </p:nvPr>
+        </p:nvSpPr>
+        <p:spPr/>
+        <p:txBody>
+          <a:bodyPr/>
+          <a:lstStyle/>
+          <a:p>
+            <a:endParaRPr lang="en-DE"/>
+          </a:p>
+        </p:txBody>
+      </p:sp>
+    </p:spTree>
+    <p:extLst>
+      <p:ext uri="{BB962C8B-B14F-4D97-AF65-F5344CB8AC3E}">
+        <p14:creationId xmlns:p14="http://schemas.microsoft.com/office/powerpoint/2010/main" val="3751482449"/>
+      </p:ext>
+    </p:extLst>
+  </p:cSld>
+  <p:clrMapOvr>
+    <a:masterClrMapping/>
+  </p:clrMapOvr>
+</p:sld>
+</file>
+
+<file path=ppt/slides/slide6.xml><?xml version="1.0" encoding="utf-8"?>
+<p:sld xmlns:a="http://schemas.openxmlformats.org/drawingml/2006/main" xmlns:r="http://schemas.openxmlformats.org/officeDocument/2006/relationships" xmlns:p="http://schemas.openxmlformats.org/presentationml/2006/main">
+  <p:cSld>
+    <p:spTree>
+      <p:nvGrpSpPr>
+        <p:cNvPr id="1" name=""/>
+        <p:cNvGrpSpPr/>
+        <p:nvPr/>
+      </p:nvGrpSpPr>
+      <p:grpSpPr>
+        <a:xfrm>
+          <a:off x="0" y="0"/>
+          <a:ext cx="0" cy="0"/>
+          <a:chOff x="0" y="0"/>
+          <a:chExt cx="0" cy="0"/>
+        </a:xfrm>
+      </p:grpSpPr>
+      <p:sp>
+        <p:nvSpPr>
+          <p:cNvPr id="2" name="Slide Number Placeholder 1">
+            <a:extLst>
+              <a:ext uri="{FF2B5EF4-FFF2-40B4-BE49-F238E27FC236}">
+                <a16:creationId xmlns:a16="http://schemas.microsoft.com/office/drawing/2014/main" id="{F15008AF-2648-DB85-7385-8B312A4C2B6A}"/>
+              </a:ext>
+            </a:extLst>
+          </p:cNvPr>
+          <p:cNvSpPr>
+            <a:spLocks noGrp="1"/>
+          </p:cNvSpPr>
+          <p:nvPr>
+            <p:ph type="sldNum" idx="12"/>
+          </p:nvPr>
+        </p:nvSpPr>
+        <p:spPr/>
+        <p:txBody>
+          <a:bodyPr/>
+          <a:lstStyle/>
+          <a:p>
+            <a:fld id="{3BF01AD4-1839-794E-BD90-91AB590172A7}" type="slidenum">
+              <a:rPr lang="en-DE" smtClean="0"/>
+              <a:pPr/>
+              <a:t>6</a:t>
+            </a:fld>
+            <a:endParaRPr lang="en"/>
+          </a:p>
+        </p:txBody>
+      </p:sp>
+      <p:sp>
+        <p:nvSpPr>
+          <p:cNvPr id="3" name="Slide Number Placeholder 2">
+            <a:extLst>
+              <a:ext uri="{FF2B5EF4-FFF2-40B4-BE49-F238E27FC236}">
+                <a16:creationId xmlns:a16="http://schemas.microsoft.com/office/drawing/2014/main" id="{5E86A856-1D96-F2C1-1BBA-66B78E451EDD}"/>
+              </a:ext>
+            </a:extLst>
+          </p:cNvPr>
+          <p:cNvSpPr>
+            <a:spLocks noGrp="1"/>
+          </p:cNvSpPr>
+          <p:nvPr>
+            <p:ph type="sldNum" idx="2"/>
+          </p:nvPr>
+        </p:nvSpPr>
+        <p:spPr/>
+        <p:txBody>
+          <a:bodyPr/>
+          <a:lstStyle/>
+          <a:p>
+            <a:fld id="{3BF01AD4-1839-794E-BD90-91AB590172A7}" type="slidenum">
+              <a:rPr lang="en-DE" smtClean="0"/>
+              <a:pPr/>
+              <a:t>6</a:t>
+            </a:fld>
+            <a:endParaRPr lang="en"/>
+          </a:p>
+        </p:txBody>
+      </p:sp>
+      <p:sp>
+        <p:nvSpPr>
+          <p:cNvPr id="4" name="Picture Placeholder 3">
+            <a:extLst>
+              <a:ext uri="{FF2B5EF4-FFF2-40B4-BE49-F238E27FC236}">
+                <a16:creationId xmlns:a16="http://schemas.microsoft.com/office/drawing/2014/main" id="{46800715-1182-3AF6-9EEF-5BE95CD33906}"/>
+              </a:ext>
+            </a:extLst>
+          </p:cNvPr>
+          <p:cNvSpPr>
+            <a:spLocks noGrp="1"/>
+          </p:cNvSpPr>
+          <p:nvPr>
+            <p:ph type="pic" sz="quarter" idx="13"/>
+          </p:nvPr>
+        </p:nvSpPr>
+        <p:spPr/>
+      </p:sp>
+      <p:sp>
+        <p:nvSpPr>
+          <p:cNvPr id="5" name="Text Placeholder 4">
+            <a:extLst>
+              <a:ext uri="{FF2B5EF4-FFF2-40B4-BE49-F238E27FC236}">
+                <a16:creationId xmlns:a16="http://schemas.microsoft.com/office/drawing/2014/main" id="{8B5C0097-1705-56C3-8184-96C9C7A8F32E}"/>
+              </a:ext>
+            </a:extLst>
+          </p:cNvPr>
+          <p:cNvSpPr>
+            <a:spLocks noGrp="1"/>
+          </p:cNvSpPr>
+          <p:nvPr>
+            <p:ph type="body" sz="quarter" idx="14"/>
+          </p:nvPr>
+        </p:nvSpPr>
+        <p:spPr/>
+        <p:txBody>
+          <a:bodyPr/>
+          <a:lstStyle/>
+          <a:p>
+            <a:endParaRPr lang="en-DE"/>
+          </a:p>
+        </p:txBody>
+      </p:sp>
+      <p:sp>
+        <p:nvSpPr>
+          <p:cNvPr id="6" name="Text Placeholder 5">
+            <a:extLst>
+              <a:ext uri="{FF2B5EF4-FFF2-40B4-BE49-F238E27FC236}">
+                <a16:creationId xmlns:a16="http://schemas.microsoft.com/office/drawing/2014/main" id="{F0ABEFC8-63CE-CB6E-BDF1-892EADC93928}"/>
+              </a:ext>
+            </a:extLst>
+          </p:cNvPr>
+          <p:cNvSpPr>
+            <a:spLocks noGrp="1"/>
+          </p:cNvSpPr>
+          <p:nvPr>
+            <p:ph type="body" sz="quarter" idx="15"/>
+          </p:nvPr>
+        </p:nvSpPr>
+        <p:spPr/>
+        <p:txBody>
+          <a:bodyPr/>
+          <a:lstStyle/>
+          <a:p>
+            <a:endParaRPr lang="en-DE"/>
+          </a:p>
+        </p:txBody>
+      </p:sp>
+      <p:sp>
+        <p:nvSpPr>
+          <p:cNvPr id="7" name="Text Placeholder 6">
+            <a:extLst>
+              <a:ext uri="{FF2B5EF4-FFF2-40B4-BE49-F238E27FC236}">
+                <a16:creationId xmlns:a16="http://schemas.microsoft.com/office/drawing/2014/main" id="{0DFB1AE1-2D35-9E48-14B8-BA7BE9D6466A}"/>
+              </a:ext>
+            </a:extLst>
+          </p:cNvPr>
+          <p:cNvSpPr>
+            <a:spLocks noGrp="1"/>
+          </p:cNvSpPr>
+          <p:nvPr>
+            <p:ph type="body" sz="quarter" idx="16"/>
+          </p:nvPr>
+        </p:nvSpPr>
+        <p:spPr/>
+        <p:txBody>
+          <a:bodyPr/>
+          <a:lstStyle/>
+          <a:p>
+            <a:endParaRPr lang="en-DE"/>
+          </a:p>
+        </p:txBody>
+      </p:sp>
+      <p:sp>
+        <p:nvSpPr>
+          <p:cNvPr id="8" name="Text Placeholder 7">
+            <a:extLst>
+              <a:ext uri="{FF2B5EF4-FFF2-40B4-BE49-F238E27FC236}">
+                <a16:creationId xmlns:a16="http://schemas.microsoft.com/office/drawing/2014/main" id="{CDD54F7A-FFB9-65AC-0DD3-605C1FFAF530}"/>
+              </a:ext>
+            </a:extLst>
+          </p:cNvPr>
+          <p:cNvSpPr>
+            <a:spLocks noGrp="1"/>
+          </p:cNvSpPr>
+          <p:nvPr>
+            <p:ph type="body" sz="quarter" idx="17"/>
+          </p:nvPr>
+        </p:nvSpPr>
+        <p:spPr/>
+        <p:txBody>
+          <a:bodyPr/>
+          <a:lstStyle/>
+          <a:p>
+            <a:endParaRPr lang="en-DE"/>
+          </a:p>
+        </p:txBody>
+      </p:sp>
+      <p:sp>
+        <p:nvSpPr>
+          <p:cNvPr id="9" name="Text Placeholder 8">
+            <a:extLst>
+              <a:ext uri="{FF2B5EF4-FFF2-40B4-BE49-F238E27FC236}">
+                <a16:creationId xmlns:a16="http://schemas.microsoft.com/office/drawing/2014/main" id="{E0BED262-1D9F-284E-A09E-9FD15966CC52}"/>
+              </a:ext>
+            </a:extLst>
+          </p:cNvPr>
+          <p:cNvSpPr>
+            <a:spLocks noGrp="1"/>
+          </p:cNvSpPr>
+          <p:nvPr>
+            <p:ph type="body" sz="quarter" idx="18"/>
+          </p:nvPr>
+        </p:nvSpPr>
+        <p:spPr/>
+        <p:txBody>
+          <a:bodyPr/>
+          <a:lstStyle/>
+          <a:p>
+            <a:endParaRPr lang="en-DE"/>
+          </a:p>
+        </p:txBody>
+      </p:sp>
+    </p:spTree>
+    <p:extLst>
+      <p:ext uri="{BB962C8B-B14F-4D97-AF65-F5344CB8AC3E}">
+        <p14:creationId xmlns:p14="http://schemas.microsoft.com/office/powerpoint/2010/main" val="4144318967"/>
+      </p:ext>
+    </p:extLst>
+  </p:cSld>
+  <p:clrMapOvr>
+    <a:masterClrMapping/>
+  </p:clrMapOvr>
+</p:sld>
+</file>
+
+<file path=ppt/slides/slide7.xml><?xml version="1.0" encoding="utf-8"?>
+<p:sld xmlns:a="http://schemas.openxmlformats.org/drawingml/2006/main" xmlns:r="http://schemas.openxmlformats.org/officeDocument/2006/relationships" xmlns:p="http://schemas.openxmlformats.org/presentationml/2006/main">
+  <p:cSld>
+    <p:spTree>
+      <p:nvGrpSpPr>
+        <p:cNvPr id="1" name=""/>
+        <p:cNvGrpSpPr/>
+        <p:nvPr/>
+      </p:nvGrpSpPr>
+      <p:grpSpPr>
+        <a:xfrm>
+          <a:off x="0" y="0"/>
+          <a:ext cx="0" cy="0"/>
+          <a:chOff x="0" y="0"/>
+          <a:chExt cx="0" cy="0"/>
+        </a:xfrm>
+      </p:grpSpPr>
+      <p:sp>
+        <p:nvSpPr>
+          <p:cNvPr id="2" name="Subtitle 1">
+            <a:extLst>
+              <a:ext uri="{FF2B5EF4-FFF2-40B4-BE49-F238E27FC236}">
+                <a16:creationId xmlns:a16="http://schemas.microsoft.com/office/drawing/2014/main" id="{392C0926-B2B0-2198-1884-2B2569D99F65}"/>
+              </a:ext>
+            </a:extLst>
+          </p:cNvPr>
+          <p:cNvSpPr>
+            <a:spLocks noGrp="1"/>
+          </p:cNvSpPr>
+          <p:nvPr>
+            <p:ph type="subTitle" idx="1"/>
+          </p:nvPr>
+        </p:nvSpPr>
+        <p:spPr/>
+        <p:txBody>
+          <a:bodyPr/>
+          <a:lstStyle/>
+          <a:p>
+            <a:endParaRPr lang="en-DE"/>
+          </a:p>
+        </p:txBody>
+      </p:sp>
+      <p:sp>
+        <p:nvSpPr>
+          <p:cNvPr id="3" name="Title 2">
+            <a:extLst>
+              <a:ext uri="{FF2B5EF4-FFF2-40B4-BE49-F238E27FC236}">
+                <a16:creationId xmlns:a16="http://schemas.microsoft.com/office/drawing/2014/main" id="{CCED9D4C-7219-E02C-150D-F29AA9A47D99}"/>
+              </a:ext>
+            </a:extLst>
+          </p:cNvPr>
+          <p:cNvSpPr>
+            <a:spLocks noGrp="1"/>
+          </p:cNvSpPr>
+          <p:nvPr>
+            <p:ph type="title"/>
+          </p:nvPr>
+        </p:nvSpPr>
+        <p:spPr/>
+        <p:txBody>
+          <a:bodyPr/>
+          <a:lstStyle/>
+          <a:p>
+            <a:endParaRPr lang="en-DE"/>
+          </a:p>
+        </p:txBody>
+      </p:sp>
+      <p:sp>
+        <p:nvSpPr>
+          <p:cNvPr id="4" name="Content Placeholder 3">
+            <a:extLst>
+              <a:ext uri="{FF2B5EF4-FFF2-40B4-BE49-F238E27FC236}">
+                <a16:creationId xmlns:a16="http://schemas.microsoft.com/office/drawing/2014/main" id="{9CCEC48D-71D3-DC4B-6B0E-C75EE6C597CA}"/>
+              </a:ext>
+            </a:extLst>
+          </p:cNvPr>
+          <p:cNvSpPr>
+            <a:spLocks noGrp="1"/>
+          </p:cNvSpPr>
+          <p:nvPr>
+            <p:ph sz="quarter" idx="10"/>
+          </p:nvPr>
+        </p:nvSpPr>
+        <p:spPr/>
+        <p:txBody>
+          <a:bodyPr/>
+          <a:lstStyle/>
+          <a:p>
+            <a:endParaRPr lang="en-DE"/>
+          </a:p>
+        </p:txBody>
+      </p:sp>
+    </p:spTree>
+    <p:extLst>
+      <p:ext uri="{BB962C8B-B14F-4D97-AF65-F5344CB8AC3E}">
+        <p14:creationId xmlns:p14="http://schemas.microsoft.com/office/powerpoint/2010/main" val="1733469930"/>
+      </p:ext>
+    </p:extLst>
+  </p:cSld>
+  <p:clrMapOvr>
+    <a:masterClrMapping/>
+  </p:clrMapOvr>
+</p:sld>
+</file>
+
+<file path=ppt/slides/slide8.xml><?xml version="1.0" encoding="utf-8"?>
+<p:sld xmlns:a="http://schemas.openxmlformats.org/drawingml/2006/main" xmlns:r="http://schemas.openxmlformats.org/officeDocument/2006/relationships" xmlns:p="http://schemas.openxmlformats.org/presentationml/2006/main">
+  <p:cSld>
+    <p:spTree>
+      <p:nvGrpSpPr>
+        <p:cNvPr id="1" name=""/>
+        <p:cNvGrpSpPr/>
+        <p:nvPr/>
+      </p:nvGrpSpPr>
+      <p:grpSpPr>
+        <a:xfrm>
+          <a:off x="0" y="0"/>
+          <a:ext cx="0" cy="0"/>
+          <a:chOff x="0" y="0"/>
+          <a:chExt cx="0" cy="0"/>
+        </a:xfrm>
+      </p:grpSpPr>
+      <p:sp>
+        <p:nvSpPr>
+          <p:cNvPr id="2" name="Subtitle 1">
+            <a:extLst>
+              <a:ext uri="{FF2B5EF4-FFF2-40B4-BE49-F238E27FC236}">
+                <a16:creationId xmlns:a16="http://schemas.microsoft.com/office/drawing/2014/main" id="{8F7C9AEA-676F-6279-5979-ECB15D04C2BA}"/>
+              </a:ext>
+            </a:extLst>
+          </p:cNvPr>
+          <p:cNvSpPr>
+            <a:spLocks noGrp="1"/>
+          </p:cNvSpPr>
+          <p:nvPr>
+            <p:ph type="subTitle" idx="1"/>
+          </p:nvPr>
+        </p:nvSpPr>
+        <p:spPr/>
+        <p:txBody>
+          <a:bodyPr/>
+          <a:lstStyle/>
+          <a:p>
+            <a:endParaRPr lang="en-DE"/>
+          </a:p>
+        </p:txBody>
+      </p:sp>
+      <p:sp>
+        <p:nvSpPr>
+          <p:cNvPr id="3" name="Title 2">
+            <a:extLst>
+              <a:ext uri="{FF2B5EF4-FFF2-40B4-BE49-F238E27FC236}">
+                <a16:creationId xmlns:a16="http://schemas.microsoft.com/office/drawing/2014/main" id="{1D6AA5F1-E5BF-2516-1BB1-BBC62576E54B}"/>
+              </a:ext>
+            </a:extLst>
+          </p:cNvPr>
+          <p:cNvSpPr>
+            <a:spLocks noGrp="1"/>
+          </p:cNvSpPr>
+          <p:nvPr>
+            <p:ph type="title"/>
+          </p:nvPr>
+        </p:nvSpPr>
+        <p:spPr/>
+        <p:txBody>
+          <a:bodyPr/>
+          <a:lstStyle/>
+          <a:p>
+            <a:endParaRPr lang="en-DE"/>
+          </a:p>
+        </p:txBody>
+      </p:sp>
+      <p:sp>
+        <p:nvSpPr>
+          <p:cNvPr id="4" name="Content Placeholder 3">
+            <a:extLst>
+              <a:ext uri="{FF2B5EF4-FFF2-40B4-BE49-F238E27FC236}">
+                <a16:creationId xmlns:a16="http://schemas.microsoft.com/office/drawing/2014/main" id="{87F42AB2-219C-2DB7-F7EA-269358018A22}"/>
+              </a:ext>
+            </a:extLst>
+          </p:cNvPr>
+          <p:cNvSpPr>
+            <a:spLocks noGrp="1"/>
+          </p:cNvSpPr>
+          <p:nvPr>
+            <p:ph sz="quarter" idx="10"/>
+          </p:nvPr>
+        </p:nvSpPr>
+        <p:spPr/>
+        <p:txBody>
+          <a:bodyPr/>
+          <a:lstStyle/>
+          <a:p>
+            <a:endParaRPr lang="en-DE"/>
+          </a:p>
+        </p:txBody>
+      </p:sp>
+    </p:spTree>
+    <p:extLst>
+      <p:ext uri="{BB962C8B-B14F-4D97-AF65-F5344CB8AC3E}">
+        <p14:creationId xmlns:p14="http://schemas.microsoft.com/office/powerpoint/2010/main" val="1473337217"/>
+      </p:ext>
+    </p:extLst>
+  </p:cSld>
+  <p:clrMapOvr>
+    <a:masterClrMapping/>
+  </p:clrMapOvr>
+</p:sld>
+</file>
+
+<file path=ppt/slides/slide9.xml><?xml version="1.0" encoding="utf-8"?>
+<p:sld xmlns:a="http://schemas.openxmlformats.org/drawingml/2006/main" xmlns:r="http://schemas.openxmlformats.org/officeDocument/2006/relationships" xmlns:p="http://schemas.openxmlformats.org/presentationml/2006/main">
+  <p:cSld>
+    <p:spTree>
+      <p:nvGrpSpPr>
+        <p:cNvPr id="1" name=""/>
+        <p:cNvGrpSpPr/>
+        <p:nvPr/>
+      </p:nvGrpSpPr>
+      <p:grpSpPr>
+        <a:xfrm>
+          <a:off x="0" y="0"/>
+          <a:ext cx="0" cy="0"/>
+          <a:chOff x="0" y="0"/>
+          <a:chExt cx="0" cy="0"/>
+        </a:xfrm>
+      </p:grpSpPr>
+      <p:sp>
+        <p:nvSpPr>
+          <p:cNvPr id="2" name="Title 1">
+            <a:extLst>
+              <a:ext uri="{FF2B5EF4-FFF2-40B4-BE49-F238E27FC236}">
+                <a16:creationId xmlns:a16="http://schemas.microsoft.com/office/drawing/2014/main" id="{E65B1D0E-F82B-848A-6374-8C9631A2CA60}"/>
+              </a:ext>
+            </a:extLst>
+          </p:cNvPr>
+          <p:cNvSpPr>
+            <a:spLocks noGrp="1"/>
+          </p:cNvSpPr>
+          <p:nvPr>
+            <p:ph type="ctrTitle"/>
+          </p:nvPr>
+        </p:nvSpPr>
+        <p:spPr/>
+        <p:txBody>
+          <a:bodyPr/>
+          <a:lstStyle/>
+          <a:p>
+            <a:endParaRPr lang="en-DE"/>
+          </a:p>
+        </p:txBody>
+      </p:sp>
+      <p:sp>
+        <p:nvSpPr>
+          <p:cNvPr id="3" name="Subtitle 2">
+            <a:extLst>
+              <a:ext uri="{FF2B5EF4-FFF2-40B4-BE49-F238E27FC236}">
+                <a16:creationId xmlns:a16="http://schemas.microsoft.com/office/drawing/2014/main" id="{D5DF960F-265C-A4BB-B681-D2F6DC8193DD}"/>
+              </a:ext>
+            </a:extLst>
+          </p:cNvPr>
+          <p:cNvSpPr>
+            <a:spLocks noGrp="1"/>
+          </p:cNvSpPr>
+          <p:nvPr>
+            <p:ph type="subTitle" idx="1"/>
+          </p:nvPr>
+        </p:nvSpPr>
+        <p:spPr/>
+        <p:txBody>
+          <a:bodyPr/>
+          <a:lstStyle/>
+          <a:p>
+            <a:endParaRPr lang="en-DE"/>
+          </a:p>
+        </p:txBody>
+      </p:sp>
+    </p:spTree>
+    <p:extLst>
+      <p:ext uri="{BB962C8B-B14F-4D97-AF65-F5344CB8AC3E}">
+        <p14:creationId xmlns:p14="http://schemas.microsoft.com/office/powerpoint/2010/main" val="1060310281"/>
+      </p:ext>
+    </p:extLst>
+  </p:cSld>
+  <p:clrMapOvr>
+    <a:masterClrMapping/>
+  </p:clrMapOvr>
+</p:sld>
 </file>
 
 <file path=ppt/theme/theme1.xml><?xml version="1.0" encoding="utf-8"?>

--- a/slides_pptx/2023.05.03_Slides.pptx
+++ b/slides_pptx/2023.05.03_Slides.pptx
@@ -251,7 +251,7 @@
               <a:rPr lang="en-US" smtClean="0">
                 <a:latin typeface="TUM Neue Helvetica 55 Regular" panose="020B0604020202020204" pitchFamily="34" charset="77"/>
               </a:rPr>
-              <a:t>5/4/23</a:t>
+              <a:t>5/5/23</a:t>
             </a:fld>
             <a:endParaRPr lang="en-US" dirty="0">
               <a:latin typeface="TUM Neue Helvetica 55 Regular" panose="020B0604020202020204" pitchFamily="34" charset="77"/>
@@ -429,7 +429,7 @@
             <a:fld id="{0DF9DF7B-F6DF-4040-BF00-4447D75AE71E}" type="datetimeFigureOut">
               <a:rPr lang="en-US" smtClean="0"/>
               <a:pPr/>
-              <a:t>5/4/23</a:t>
+              <a:t>5/5/23</a:t>
             </a:fld>
             <a:endParaRPr lang="en-US" dirty="0"/>
           </a:p>
@@ -2834,7 +2834,7 @@
         </p:blipFill>
         <p:spPr>
           <a:xfrm>
-            <a:off x="0" y="0"/>
+            <a:off x="0" y="167690"/>
             <a:ext cx="12192000" cy="6858000"/>
           </a:xfrm>
           <a:prstGeom prst="rect">
@@ -3108,10 +3108,10 @@
       </p:pic>
       <p:pic>
         <p:nvPicPr>
-          <p:cNvPr id="6" name="Graphic 5">
-            <a:extLst>
-              <a:ext uri="{FF2B5EF4-FFF2-40B4-BE49-F238E27FC236}">
-                <a16:creationId xmlns:a16="http://schemas.microsoft.com/office/drawing/2014/main" id="{F3716A89-99E9-3F8D-9BDA-D63B8E3307C9}"/>
+          <p:cNvPr id="11" name="Graphic 10">
+            <a:extLst>
+              <a:ext uri="{FF2B5EF4-FFF2-40B4-BE49-F238E27FC236}">
+                <a16:creationId xmlns:a16="http://schemas.microsoft.com/office/drawing/2014/main" id="{2B71DE36-93C2-EDB1-2730-01AD0D7B7541}"/>
               </a:ext>
             </a:extLst>
           </p:cNvPr>
@@ -3137,7 +3137,7 @@
         </p:blipFill>
         <p:spPr>
           <a:xfrm>
-            <a:off x="2812030" y="4679819"/>
+            <a:off x="2812030" y="4661882"/>
             <a:ext cx="844157" cy="529245"/>
           </a:xfrm>
           <a:prstGeom prst="rect">
@@ -3147,10 +3147,10 @@
       </p:pic>
       <p:pic>
         <p:nvPicPr>
-          <p:cNvPr id="8" name="Graphic 7">
-            <a:extLst>
-              <a:ext uri="{FF2B5EF4-FFF2-40B4-BE49-F238E27FC236}">
-                <a16:creationId xmlns:a16="http://schemas.microsoft.com/office/drawing/2014/main" id="{53228CB1-8845-B97B-C719-6A799A988884}"/>
+          <p:cNvPr id="12" name="Graphic 11">
+            <a:extLst>
+              <a:ext uri="{FF2B5EF4-FFF2-40B4-BE49-F238E27FC236}">
+                <a16:creationId xmlns:a16="http://schemas.microsoft.com/office/drawing/2014/main" id="{CB37C6A0-8A92-0418-6A5F-911DE162D6A4}"/>
               </a:ext>
             </a:extLst>
           </p:cNvPr>
@@ -3175,7 +3175,7 @@
         </p:blipFill>
         <p:spPr>
           <a:xfrm>
-            <a:off x="440438" y="4679819"/>
+            <a:off x="440438" y="4661882"/>
             <a:ext cx="601738" cy="529245"/>
           </a:xfrm>
           <a:prstGeom prst="rect">
@@ -3185,10 +3185,10 @@
       </p:pic>
       <p:pic>
         <p:nvPicPr>
-          <p:cNvPr id="10" name="Graphic 9">
-            <a:extLst>
-              <a:ext uri="{FF2B5EF4-FFF2-40B4-BE49-F238E27FC236}">
-                <a16:creationId xmlns:a16="http://schemas.microsoft.com/office/drawing/2014/main" id="{A2BA9D06-4207-9F10-BCD6-186501B43F0B}"/>
+          <p:cNvPr id="13" name="Graphic 12">
+            <a:extLst>
+              <a:ext uri="{FF2B5EF4-FFF2-40B4-BE49-F238E27FC236}">
+                <a16:creationId xmlns:a16="http://schemas.microsoft.com/office/drawing/2014/main" id="{8E1D06B6-A071-9056-85E4-BEB15BCFC4FE}"/>
               </a:ext>
             </a:extLst>
           </p:cNvPr>
@@ -3213,7 +3213,7 @@
         </p:blipFill>
         <p:spPr>
           <a:xfrm>
-            <a:off x="1042176" y="4679820"/>
+            <a:off x="979112" y="4661882"/>
             <a:ext cx="599795" cy="529244"/>
           </a:xfrm>
           <a:prstGeom prst="rect">
@@ -4604,7 +4604,7 @@
         </p:blipFill>
         <p:spPr>
           <a:xfrm>
-            <a:off x="1042176" y="4661883"/>
+            <a:off x="979112" y="4661882"/>
             <a:ext cx="599795" cy="529244"/>
           </a:xfrm>
           <a:prstGeom prst="rect">
